--- a/docs/pitch/Acheron_Pitch_Deck.pptx
+++ b/docs/pitch/Acheron_Pitch_Deck.pptx
@@ -17,9 +17,11 @@
     <p:sldId id="265" r:id="rId11"/>
     <p:sldId id="266" r:id="rId12"/>
     <p:sldId id="267" r:id="rId13"/>
+    <p:sldId id="268" r:id="rId14"/>
+    <p:sldId id="269" r:id="rId15"/>
   </p:sldIdLst>
   <p:notesMasterIdLst>
-    <p:notesMasterId r:id="rId14"/>
+    <p:notesMasterId r:id="rId16"/>
   </p:notesMasterIdLst>
   <p:sldSz cx="12192000" cy="6858000"/>
   <p:notesSz cx="6858000" cy="12192000"/>
@@ -1062,6 +1064,182 @@
             <a:fld id="{F7021451-1387-4CA6-816F-3879F97B5CBC}" type="slidenum">
               <a:rPr lang="en-US"/>
               <a:t>12</a:t>
+            </a:fld>
+            <a:endParaRPr lang="en-US"/>
+          </a:p>
+        </p:txBody>
+      </p:sp>
+    </p:spTree>
+    <p:extLst>
+      <p:ext uri="{BB962C8B-B14F-4D97-AF65-F5344CB8AC3E}">
+        <p14:creationId xmlns:p14="http://schemas.microsoft.com/office/powerpoint/2010/main" val="1024086991"/>
+      </p:ext>
+    </p:extLst>
+  </p:cSld>
+  <p:clrMapOvr>
+    <a:masterClrMapping/>
+  </p:clrMapOvr>
+</p:notes>
+</file>
+
+<file path=ppt/notesSlides/notesSlide13.xml><?xml version="1.0" encoding="utf-8"?>
+<p:notes xmlns:a="http://schemas.openxmlformats.org/drawingml/2006/main" xmlns:r="http://schemas.openxmlformats.org/officeDocument/2006/relationships" xmlns:p="http://schemas.openxmlformats.org/presentationml/2006/main">
+  <p:cSld>
+    <p:spTree>
+      <p:nvGrpSpPr>
+        <p:cNvPr id="1" name=""/>
+        <p:cNvGrpSpPr/>
+        <p:nvPr/>
+      </p:nvGrpSpPr>
+      <p:grpSpPr>
+        <a:xfrm>
+          <a:off x="0" y="0"/>
+          <a:ext cx="0" cy="0"/>
+          <a:chOff x="0" y="0"/>
+          <a:chExt cx="0" cy="0"/>
+        </a:xfrm>
+      </p:grpSpPr>
+      <p:sp>
+        <p:nvSpPr>
+          <p:cNvPr id="2" name="Slide Image Placeholder 1"/>
+          <p:cNvSpPr>
+            <a:spLocks noGrp="1" noRot="1" noChangeAspect="1"/>
+          </p:cNvSpPr>
+          <p:nvPr>
+            <p:ph type="sldImg"/>
+          </p:nvPr>
+        </p:nvSpPr>
+        <p:spPr/>
+      </p:sp>
+      <p:sp>
+        <p:nvSpPr>
+          <p:cNvPr id="3" name="Notes Placeholder 2"/>
+          <p:cNvSpPr>
+            <a:spLocks noGrp="1"/>
+          </p:cNvSpPr>
+          <p:nvPr>
+            <p:ph type="body" idx="1"/>
+          </p:nvPr>
+        </p:nvSpPr>
+        <p:spPr/>
+        <p:txBody>
+          <a:bodyPr/>
+          <a:lstStyle/>
+          <a:p>
+            <a:r>
+              <a:rPr lang="en-US" dirty="0"/>
+              <a:t/>
+            </a:r>
+            <a:endParaRPr lang="en-US" dirty="0"/>
+          </a:p>
+        </p:txBody>
+      </p:sp>
+      <p:sp>
+        <p:nvSpPr>
+          <p:cNvPr id="4" name="Slide Number Placeholder 3"/>
+          <p:cNvSpPr>
+            <a:spLocks noGrp="1"/>
+          </p:cNvSpPr>
+          <p:nvPr>
+            <p:ph type="sldNum" sz="quarter" idx="10"/>
+          </p:nvPr>
+        </p:nvSpPr>
+        <p:spPr/>
+        <p:txBody>
+          <a:bodyPr/>
+          <a:lstStyle/>
+          <a:p>
+            <a:fld id="{F7021451-1387-4CA6-816F-3879F97B5CBC}" type="slidenum">
+              <a:rPr lang="en-US"/>
+              <a:t>13</a:t>
+            </a:fld>
+            <a:endParaRPr lang="en-US"/>
+          </a:p>
+        </p:txBody>
+      </p:sp>
+    </p:spTree>
+    <p:extLst>
+      <p:ext uri="{BB962C8B-B14F-4D97-AF65-F5344CB8AC3E}">
+        <p14:creationId xmlns:p14="http://schemas.microsoft.com/office/powerpoint/2010/main" val="1024086991"/>
+      </p:ext>
+    </p:extLst>
+  </p:cSld>
+  <p:clrMapOvr>
+    <a:masterClrMapping/>
+  </p:clrMapOvr>
+</p:notes>
+</file>
+
+<file path=ppt/notesSlides/notesSlide14.xml><?xml version="1.0" encoding="utf-8"?>
+<p:notes xmlns:a="http://schemas.openxmlformats.org/drawingml/2006/main" xmlns:r="http://schemas.openxmlformats.org/officeDocument/2006/relationships" xmlns:p="http://schemas.openxmlformats.org/presentationml/2006/main">
+  <p:cSld>
+    <p:spTree>
+      <p:nvGrpSpPr>
+        <p:cNvPr id="1" name=""/>
+        <p:cNvGrpSpPr/>
+        <p:nvPr/>
+      </p:nvGrpSpPr>
+      <p:grpSpPr>
+        <a:xfrm>
+          <a:off x="0" y="0"/>
+          <a:ext cx="0" cy="0"/>
+          <a:chOff x="0" y="0"/>
+          <a:chExt cx="0" cy="0"/>
+        </a:xfrm>
+      </p:grpSpPr>
+      <p:sp>
+        <p:nvSpPr>
+          <p:cNvPr id="2" name="Slide Image Placeholder 1"/>
+          <p:cNvSpPr>
+            <a:spLocks noGrp="1" noRot="1" noChangeAspect="1"/>
+          </p:cNvSpPr>
+          <p:nvPr>
+            <p:ph type="sldImg"/>
+          </p:nvPr>
+        </p:nvSpPr>
+        <p:spPr/>
+      </p:sp>
+      <p:sp>
+        <p:nvSpPr>
+          <p:cNvPr id="3" name="Notes Placeholder 2"/>
+          <p:cNvSpPr>
+            <a:spLocks noGrp="1"/>
+          </p:cNvSpPr>
+          <p:nvPr>
+            <p:ph type="body" idx="1"/>
+          </p:nvPr>
+        </p:nvSpPr>
+        <p:spPr/>
+        <p:txBody>
+          <a:bodyPr/>
+          <a:lstStyle/>
+          <a:p>
+            <a:r>
+              <a:rPr lang="en-US" dirty="0"/>
+              <a:t/>
+            </a:r>
+            <a:endParaRPr lang="en-US" dirty="0"/>
+          </a:p>
+        </p:txBody>
+      </p:sp>
+      <p:sp>
+        <p:nvSpPr>
+          <p:cNvPr id="4" name="Slide Number Placeholder 3"/>
+          <p:cNvSpPr>
+            <a:spLocks noGrp="1"/>
+          </p:cNvSpPr>
+          <p:nvPr>
+            <p:ph type="sldNum" sz="quarter" idx="10"/>
+          </p:nvPr>
+        </p:nvSpPr>
+        <p:spPr/>
+        <p:txBody>
+          <a:bodyPr/>
+          <a:lstStyle/>
+          <a:p>
+            <a:fld id="{F7021451-1387-4CA6-816F-3879F97B5CBC}" type="slidenum">
+              <a:rPr lang="en-US"/>
+              <a:t>14</a:t>
             </a:fld>
             <a:endParaRPr lang="en-US"/>
           </a:p>
@@ -2413,7 +2591,7 @@
                 <a:ea typeface="Calibri" pitchFamily="34" charset="-122"/>
                 <a:cs typeface="Calibri" pitchFamily="34" charset="-120"/>
               </a:rPr>
-              <a:t>Founder: </a:t>
+              <a:t>Founder &amp; Lead Researcher: </a:t>
             </a:r>
             <a:pPr indent="0" marL="0">
               <a:buNone/>
@@ -2427,7 +2605,7 @@
                 <a:ea typeface="Calibri" pitchFamily="34" charset="-122"/>
                 <a:cs typeface="Calibri" pitchFamily="34" charset="-120"/>
               </a:rPr>
-              <a:t>[Founder Name]</a:t>
+              <a:t>Dayana Sanchez</a:t>
             </a:r>
             <a:endParaRPr lang="en-US" sz="1300" dirty="0"/>
           </a:p>
@@ -2589,6 +2767,677 @@
 <file path=ppt/slides/slide10.xml><?xml version="1.0" encoding="utf-8"?>
 <p:sld xmlns:a="http://schemas.openxmlformats.org/drawingml/2006/main" xmlns:r="http://schemas.openxmlformats.org/officeDocument/2006/relationships" xmlns:p="http://schemas.openxmlformats.org/presentationml/2006/main">
   <p:cSld name="Slide 10">
+    <p:bg>
+      <p:bgPr>
+        <a:solidFill>
+          <a:srgbClr val="F4F6F7"/>
+        </a:solidFill>
+      </p:bgPr>
+    </p:bg>
+    <p:spTree>
+      <p:nvGrpSpPr>
+        <p:cNvPr id="1" name=""/>
+        <p:cNvGrpSpPr/>
+        <p:nvPr/>
+      </p:nvGrpSpPr>
+      <p:grpSpPr>
+        <a:xfrm>
+          <a:off x="0" y="0"/>
+          <a:ext cx="0" cy="0"/>
+          <a:chOff x="0" y="0"/>
+          <a:chExt cx="0" cy="0"/>
+        </a:xfrm>
+      </p:grpSpPr>
+      <p:sp>
+        <p:nvSpPr>
+          <p:cNvPr id="2" name="Text 0"/>
+          <p:cNvSpPr txBox="1"/>
+          <p:nvPr/>
+        </p:nvSpPr>
+        <p:spPr>
+          <a:xfrm>
+            <a:off x="640080" y="457200"/>
+            <a:ext cx="5486400" cy="320040"/>
+          </a:xfrm>
+          <a:prstGeom prst="rect">
+            <a:avLst/>
+          </a:prstGeom>
+          <a:noFill/>
+          <a:ln/>
+        </p:spPr>
+        <p:txBody>
+          <a:bodyPr wrap="square" lIns="0" tIns="0" rIns="0" bIns="0" rtlCol="0" anchor="ctr"/>
+          <a:lstStyle/>
+          <a:p>
+            <a:pPr indent="0" marL="0">
+              <a:buNone/>
+            </a:pPr>
+            <a:r>
+              <a:rPr lang="en-US" sz="1200" b="1" spc="200" kern="0" dirty="0">
+                <a:solidFill>
+                  <a:srgbClr val="1C8F84"/>
+                </a:solidFill>
+                <a:latin typeface="Calibri" pitchFamily="34" charset="0"/>
+                <a:ea typeface="Calibri" pitchFamily="34" charset="-122"/>
+                <a:cs typeface="Calibri" pitchFamily="34" charset="-120"/>
+              </a:rPr>
+              <a:t>DIFFERENTIATION</a:t>
+            </a:r>
+            <a:endParaRPr lang="en-US" sz="1200" dirty="0"/>
+          </a:p>
+        </p:txBody>
+      </p:sp>
+      <p:sp>
+        <p:nvSpPr>
+          <p:cNvPr id="3" name="Text 1"/>
+          <p:cNvSpPr txBox="1"/>
+          <p:nvPr/>
+        </p:nvSpPr>
+        <p:spPr>
+          <a:xfrm>
+            <a:off x="640080" y="777240"/>
+            <a:ext cx="10881360" cy="868680"/>
+          </a:xfrm>
+          <a:prstGeom prst="rect">
+            <a:avLst/>
+          </a:prstGeom>
+          <a:noFill/>
+          <a:ln/>
+        </p:spPr>
+        <p:txBody>
+          <a:bodyPr wrap="square" lIns="0" tIns="0" rIns="0" bIns="0" rtlCol="0" anchor="ctr"/>
+          <a:lstStyle/>
+          <a:p>
+            <a:pPr indent="0" marL="0">
+              <a:buNone/>
+            </a:pPr>
+            <a:r>
+              <a:rPr lang="en-US" sz="2100" b="1" dirty="0">
+                <a:solidFill>
+                  <a:srgbClr val="16232F"/>
+                </a:solidFill>
+                <a:latin typeface="Cambria" pitchFamily="34" charset="0"/>
+                <a:ea typeface="Cambria" pitchFamily="34" charset="-122"/>
+                <a:cs typeface="Cambria" pitchFamily="34" charset="-120"/>
+              </a:rPr>
+              <a:t>“No one else is doing this” isn't the claim — here's the specific gap against each real competitor</a:t>
+            </a:r>
+            <a:endParaRPr lang="en-US" sz="2100" dirty="0"/>
+          </a:p>
+        </p:txBody>
+      </p:sp>
+      <p:sp>
+        <p:nvSpPr>
+          <p:cNvPr id="4" name="Shape 2"/>
+          <p:cNvSpPr/>
+          <p:nvPr/>
+        </p:nvSpPr>
+        <p:spPr>
+          <a:xfrm>
+            <a:off x="640080" y="1828800"/>
+            <a:ext cx="3566160" cy="4114800"/>
+          </a:xfrm>
+          <a:prstGeom prst="roundRect">
+            <a:avLst>
+              <a:gd name="adj" fmla="val 2051"/>
+            </a:avLst>
+          </a:prstGeom>
+          <a:solidFill>
+            <a:srgbClr val="FFFFFF"/>
+          </a:solidFill>
+          <a:ln w="12700">
+            <a:solidFill>
+              <a:srgbClr val="DCE3E6"/>
+            </a:solidFill>
+            <a:prstDash val="solid"/>
+          </a:ln>
+          <a:effectLst>
+            <a:outerShdw sx="100000" sy="100000" kx="0" ky="0" algn="bl" rotWithShape="0" blurRad="76200" dist="38100" dir="5400000">
+              <a:srgbClr val="1B2B33">
+                <a:alpha val="12000"/>
+              </a:srgbClr>
+            </a:outerShdw>
+          </a:effectLst>
+        </p:spPr>
+      </p:sp>
+      <p:sp>
+        <p:nvSpPr>
+          <p:cNvPr id="5" name="Shape 3"/>
+          <p:cNvSpPr/>
+          <p:nvPr/>
+        </p:nvSpPr>
+        <p:spPr>
+          <a:xfrm>
+            <a:off x="640080" y="1828800"/>
+            <a:ext cx="3566160" cy="82296"/>
+          </a:xfrm>
+          <a:prstGeom prst="rect">
+            <a:avLst/>
+          </a:prstGeom>
+          <a:solidFill>
+            <a:srgbClr val="2EC4B6"/>
+          </a:solidFill>
+          <a:ln/>
+        </p:spPr>
+      </p:sp>
+      <p:sp>
+        <p:nvSpPr>
+          <p:cNvPr id="6" name="Text 4"/>
+          <p:cNvSpPr txBox="1"/>
+          <p:nvPr/>
+        </p:nvSpPr>
+        <p:spPr>
+          <a:xfrm>
+            <a:off x="896112" y="2084832"/>
+            <a:ext cx="3054096" cy="594360"/>
+          </a:xfrm>
+          <a:prstGeom prst="rect">
+            <a:avLst/>
+          </a:prstGeom>
+          <a:noFill/>
+          <a:ln/>
+        </p:spPr>
+        <p:txBody>
+          <a:bodyPr wrap="square" lIns="0" tIns="0" rIns="0" bIns="0" rtlCol="0" anchor="ctr"/>
+          <a:lstStyle/>
+          <a:p>
+            <a:pPr indent="0" marL="0">
+              <a:buNone/>
+            </a:pPr>
+            <a:r>
+              <a:rPr lang="en-US" sz="1550" b="1" dirty="0">
+                <a:solidFill>
+                  <a:srgbClr val="16232F"/>
+                </a:solidFill>
+                <a:latin typeface="Cambria" pitchFamily="34" charset="0"/>
+                <a:ea typeface="Cambria" pitchFamily="34" charset="-122"/>
+                <a:cs typeface="Cambria" pitchFamily="34" charset="-120"/>
+              </a:rPr>
+              <a:t>Neuron-based biocomputers</a:t>
+            </a:r>
+            <a:endParaRPr lang="en-US" sz="1550" dirty="0"/>
+          </a:p>
+        </p:txBody>
+      </p:sp>
+      <p:sp>
+        <p:nvSpPr>
+          <p:cNvPr id="7" name="Text 5"/>
+          <p:cNvSpPr txBox="1"/>
+          <p:nvPr/>
+        </p:nvSpPr>
+        <p:spPr>
+          <a:xfrm>
+            <a:off x="896112" y="2651760"/>
+            <a:ext cx="3054096" cy="320040"/>
+          </a:xfrm>
+          <a:prstGeom prst="rect">
+            <a:avLst/>
+          </a:prstGeom>
+          <a:noFill/>
+          <a:ln/>
+        </p:spPr>
+        <p:txBody>
+          <a:bodyPr wrap="square" lIns="0" tIns="0" rIns="0" bIns="0" rtlCol="0" anchor="ctr"/>
+          <a:lstStyle/>
+          <a:p>
+            <a:pPr indent="0" marL="0">
+              <a:buNone/>
+            </a:pPr>
+            <a:r>
+              <a:rPr lang="en-US" sz="1050" i="1" dirty="0">
+                <a:solidFill>
+                  <a:srgbClr val="1C8F84"/>
+                </a:solidFill>
+                <a:latin typeface="Calibri" pitchFamily="34" charset="0"/>
+                <a:ea typeface="Calibri" pitchFamily="34" charset="-122"/>
+                <a:cs typeface="Calibri" pitchFamily="34" charset="-120"/>
+              </a:rPr>
+              <a:t>Cortical Labs, Koniku, FinalSpark</a:t>
+            </a:r>
+            <a:endParaRPr lang="en-US" sz="1050" dirty="0"/>
+          </a:p>
+        </p:txBody>
+      </p:sp>
+      <p:sp>
+        <p:nvSpPr>
+          <p:cNvPr id="8" name="Text 6"/>
+          <p:cNvSpPr txBox="1"/>
+          <p:nvPr/>
+        </p:nvSpPr>
+        <p:spPr>
+          <a:xfrm>
+            <a:off x="896112" y="3063240"/>
+            <a:ext cx="3054096" cy="2697480"/>
+          </a:xfrm>
+          <a:prstGeom prst="rect">
+            <a:avLst/>
+          </a:prstGeom>
+          <a:noFill/>
+          <a:ln/>
+        </p:spPr>
+        <p:txBody>
+          <a:bodyPr wrap="square" lIns="0" tIns="0" rIns="0" bIns="0" rtlCol="0" anchor="ctr"/>
+          <a:lstStyle/>
+          <a:p>
+            <a:pPr indent="0" marL="0">
+              <a:lnSpc>
+                <a:spcPct val="115000"/>
+              </a:lnSpc>
+              <a:buNone/>
+            </a:pPr>
+            <a:r>
+              <a:rPr lang="en-US" sz="1150" dirty="0">
+                <a:solidFill>
+                  <a:srgbClr val="5B6B77"/>
+                </a:solidFill>
+                <a:latin typeface="Calibri" pitchFamily="34" charset="0"/>
+                <a:ea typeface="Calibri" pitchFamily="34" charset="-122"/>
+                <a:cs typeface="Calibri" pitchFamily="34" charset="-120"/>
+              </a:rPr>
+              <a:t>Volatile by construction — need continuous power to hold any state, on a fixed degradation clock, zero regeneration. Acheron's bet: a substrate that (if validated) holds state with no power and physically repairs itself. A different failure mode, not an incremental gain.</a:t>
+            </a:r>
+            <a:endParaRPr lang="en-US" sz="1150" dirty="0"/>
+          </a:p>
+        </p:txBody>
+      </p:sp>
+      <p:sp>
+        <p:nvSpPr>
+          <p:cNvPr id="9" name="Shape 7"/>
+          <p:cNvSpPr/>
+          <p:nvPr/>
+        </p:nvSpPr>
+        <p:spPr>
+          <a:xfrm>
+            <a:off x="4434840" y="1828800"/>
+            <a:ext cx="3566160" cy="4114800"/>
+          </a:xfrm>
+          <a:prstGeom prst="roundRect">
+            <a:avLst>
+              <a:gd name="adj" fmla="val 2051"/>
+            </a:avLst>
+          </a:prstGeom>
+          <a:solidFill>
+            <a:srgbClr val="FFFFFF"/>
+          </a:solidFill>
+          <a:ln w="12700">
+            <a:solidFill>
+              <a:srgbClr val="DCE3E6"/>
+            </a:solidFill>
+            <a:prstDash val="solid"/>
+          </a:ln>
+          <a:effectLst>
+            <a:outerShdw sx="100000" sy="100000" kx="0" ky="0" algn="bl" rotWithShape="0" blurRad="76200" dist="38100" dir="5400000">
+              <a:srgbClr val="1B2B33">
+                <a:alpha val="12000"/>
+              </a:srgbClr>
+            </a:outerShdw>
+          </a:effectLst>
+        </p:spPr>
+      </p:sp>
+      <p:sp>
+        <p:nvSpPr>
+          <p:cNvPr id="10" name="Shape 8"/>
+          <p:cNvSpPr/>
+          <p:nvPr/>
+        </p:nvSpPr>
+        <p:spPr>
+          <a:xfrm>
+            <a:off x="4434840" y="1828800"/>
+            <a:ext cx="3566160" cy="82296"/>
+          </a:xfrm>
+          <a:prstGeom prst="rect">
+            <a:avLst/>
+          </a:prstGeom>
+          <a:solidFill>
+            <a:srgbClr val="2EC4B6"/>
+          </a:solidFill>
+          <a:ln/>
+        </p:spPr>
+      </p:sp>
+      <p:sp>
+        <p:nvSpPr>
+          <p:cNvPr id="11" name="Text 9"/>
+          <p:cNvSpPr txBox="1"/>
+          <p:nvPr/>
+        </p:nvSpPr>
+        <p:spPr>
+          <a:xfrm>
+            <a:off x="4690872" y="2084832"/>
+            <a:ext cx="3054096" cy="594360"/>
+          </a:xfrm>
+          <a:prstGeom prst="rect">
+            <a:avLst/>
+          </a:prstGeom>
+          <a:noFill/>
+          <a:ln/>
+        </p:spPr>
+        <p:txBody>
+          <a:bodyPr wrap="square" lIns="0" tIns="0" rIns="0" bIns="0" rtlCol="0" anchor="ctr"/>
+          <a:lstStyle/>
+          <a:p>
+            <a:pPr indent="0" marL="0">
+              <a:buNone/>
+            </a:pPr>
+            <a:r>
+              <a:rPr lang="en-US" sz="1550" b="1" dirty="0">
+                <a:solidFill>
+                  <a:srgbClr val="16232F"/>
+                </a:solidFill>
+                <a:latin typeface="Cambria" pitchFamily="34" charset="0"/>
+                <a:ea typeface="Cambria" pitchFamily="34" charset="-122"/>
+                <a:cs typeface="Cambria" pitchFamily="34" charset="-120"/>
+              </a:rPr>
+              <a:t>Mycelium memristor</a:t>
+            </a:r>
+            <a:endParaRPr lang="en-US" sz="1550" dirty="0"/>
+          </a:p>
+        </p:txBody>
+      </p:sp>
+      <p:sp>
+        <p:nvSpPr>
+          <p:cNvPr id="12" name="Text 10"/>
+          <p:cNvSpPr txBox="1"/>
+          <p:nvPr/>
+        </p:nvSpPr>
+        <p:spPr>
+          <a:xfrm>
+            <a:off x="4690872" y="2651760"/>
+            <a:ext cx="3054096" cy="320040"/>
+          </a:xfrm>
+          <a:prstGeom prst="rect">
+            <a:avLst/>
+          </a:prstGeom>
+          <a:noFill/>
+          <a:ln/>
+        </p:spPr>
+        <p:txBody>
+          <a:bodyPr wrap="square" lIns="0" tIns="0" rIns="0" bIns="0" rtlCol="0" anchor="ctr"/>
+          <a:lstStyle/>
+          <a:p>
+            <a:pPr indent="0" marL="0">
+              <a:buNone/>
+            </a:pPr>
+            <a:r>
+              <a:rPr lang="en-US" sz="1050" i="1" dirty="0">
+                <a:solidFill>
+                  <a:srgbClr val="1C8F84"/>
+                </a:solidFill>
+                <a:latin typeface="Calibri" pitchFamily="34" charset="0"/>
+                <a:ea typeface="Calibri" pitchFamily="34" charset="-122"/>
+                <a:cs typeface="Calibri" pitchFamily="34" charset="-120"/>
+              </a:rPr>
+              <a:t>LaRocco et al. 2025, PLOS ONE</a:t>
+            </a:r>
+            <a:endParaRPr lang="en-US" sz="1050" dirty="0"/>
+          </a:p>
+        </p:txBody>
+      </p:sp>
+      <p:sp>
+        <p:nvSpPr>
+          <p:cNvPr id="13" name="Text 11"/>
+          <p:cNvSpPr txBox="1"/>
+          <p:nvPr/>
+        </p:nvSpPr>
+        <p:spPr>
+          <a:xfrm>
+            <a:off x="4690872" y="3063240"/>
+            <a:ext cx="3054096" cy="2697480"/>
+          </a:xfrm>
+          <a:prstGeom prst="rect">
+            <a:avLst/>
+          </a:prstGeom>
+          <a:noFill/>
+          <a:ln/>
+        </p:spPr>
+        <p:txBody>
+          <a:bodyPr wrap="square" lIns="0" tIns="0" rIns="0" bIns="0" rtlCol="0" anchor="ctr"/>
+          <a:lstStyle/>
+          <a:p>
+            <a:pPr indent="0" marL="0">
+              <a:lnSpc>
+                <a:spcPct val="115000"/>
+              </a:lnSpc>
+              <a:buNone/>
+            </a:pPr>
+            <a:r>
+              <a:rPr lang="en-US" sz="1150" dirty="0">
+                <a:solidFill>
+                  <a:srgbClr val="5B6B77"/>
+                </a:solidFill>
+                <a:latin typeface="Calibri" pitchFamily="34" charset="0"/>
+                <a:ea typeface="Calibri" pitchFamily="34" charset="-122"/>
+                <a:cs typeface="Calibri" pitchFamily="34" charset="-120"/>
+              </a:rPr>
+              <a:t>Real, and genuinely impressive — 90±1% accuracy, survives dehydration. But it's an analog device: one continuous resistance value, no addressable write layer. 90% accuracy also fails as binary storage (wrong 1 time in 10 isn't usable). Acheron targets an addressable, individually read/writable bit, not a continuous signal.</a:t>
+            </a:r>
+            <a:endParaRPr lang="en-US" sz="1150" dirty="0"/>
+          </a:p>
+        </p:txBody>
+      </p:sp>
+      <p:sp>
+        <p:nvSpPr>
+          <p:cNvPr id="14" name="Shape 12"/>
+          <p:cNvSpPr/>
+          <p:nvPr/>
+        </p:nvSpPr>
+        <p:spPr>
+          <a:xfrm>
+            <a:off x="8229600" y="1828800"/>
+            <a:ext cx="3566160" cy="4114800"/>
+          </a:xfrm>
+          <a:prstGeom prst="roundRect">
+            <a:avLst>
+              <a:gd name="adj" fmla="val 2051"/>
+            </a:avLst>
+          </a:prstGeom>
+          <a:solidFill>
+            <a:srgbClr val="FFFFFF"/>
+          </a:solidFill>
+          <a:ln w="12700">
+            <a:solidFill>
+              <a:srgbClr val="DCE3E6"/>
+            </a:solidFill>
+            <a:prstDash val="solid"/>
+          </a:ln>
+          <a:effectLst>
+            <a:outerShdw sx="100000" sy="100000" kx="0" ky="0" algn="bl" rotWithShape="0" blurRad="76200" dist="38100" dir="5400000">
+              <a:srgbClr val="1B2B33">
+                <a:alpha val="12000"/>
+              </a:srgbClr>
+            </a:outerShdw>
+          </a:effectLst>
+        </p:spPr>
+      </p:sp>
+      <p:sp>
+        <p:nvSpPr>
+          <p:cNvPr id="15" name="Shape 13"/>
+          <p:cNvSpPr/>
+          <p:nvPr/>
+        </p:nvSpPr>
+        <p:spPr>
+          <a:xfrm>
+            <a:off x="8229600" y="1828800"/>
+            <a:ext cx="3566160" cy="82296"/>
+          </a:xfrm>
+          <a:prstGeom prst="rect">
+            <a:avLst/>
+          </a:prstGeom>
+          <a:solidFill>
+            <a:srgbClr val="2EC4B6"/>
+          </a:solidFill>
+          <a:ln/>
+        </p:spPr>
+      </p:sp>
+      <p:sp>
+        <p:nvSpPr>
+          <p:cNvPr id="16" name="Text 14"/>
+          <p:cNvSpPr txBox="1"/>
+          <p:nvPr/>
+        </p:nvSpPr>
+        <p:spPr>
+          <a:xfrm>
+            <a:off x="8485632" y="2084832"/>
+            <a:ext cx="3054096" cy="594360"/>
+          </a:xfrm>
+          <a:prstGeom prst="rect">
+            <a:avLst/>
+          </a:prstGeom>
+          <a:noFill/>
+          <a:ln/>
+        </p:spPr>
+        <p:txBody>
+          <a:bodyPr wrap="square" lIns="0" tIns="0" rIns="0" bIns="0" rtlCol="0" anchor="ctr"/>
+          <a:lstStyle/>
+          <a:p>
+            <a:pPr indent="0" marL="0">
+              <a:buNone/>
+            </a:pPr>
+            <a:r>
+              <a:rPr lang="en-US" sz="1550" b="1" dirty="0">
+                <a:solidFill>
+                  <a:srgbClr val="16232F"/>
+                </a:solidFill>
+                <a:latin typeface="Cambria" pitchFamily="34" charset="0"/>
+                <a:ea typeface="Cambria" pitchFamily="34" charset="-122"/>
+                <a:cs typeface="Cambria" pitchFamily="34" charset="-120"/>
+              </a:rPr>
+              <a:t>DNA-sequence storage</a:t>
+            </a:r>
+            <a:endParaRPr lang="en-US" sz="1550" dirty="0"/>
+          </a:p>
+        </p:txBody>
+      </p:sp>
+      <p:sp>
+        <p:nvSpPr>
+          <p:cNvPr id="17" name="Text 15"/>
+          <p:cNvSpPr txBox="1"/>
+          <p:nvPr/>
+        </p:nvSpPr>
+        <p:spPr>
+          <a:xfrm>
+            <a:off x="8485632" y="2651760"/>
+            <a:ext cx="3054096" cy="320040"/>
+          </a:xfrm>
+          <a:prstGeom prst="rect">
+            <a:avLst/>
+          </a:prstGeom>
+          <a:noFill/>
+          <a:ln/>
+        </p:spPr>
+        <p:txBody>
+          <a:bodyPr wrap="square" lIns="0" tIns="0" rIns="0" bIns="0" rtlCol="0" anchor="ctr"/>
+          <a:lstStyle/>
+          <a:p>
+            <a:pPr indent="0" marL="0">
+              <a:buNone/>
+            </a:pPr>
+            <a:r>
+              <a:rPr lang="en-US" sz="1050" i="1" dirty="0">
+                <a:solidFill>
+                  <a:srgbClr val="1C8F84"/>
+                </a:solidFill>
+                <a:latin typeface="Calibri" pitchFamily="34" charset="0"/>
+                <a:ea typeface="Calibri" pitchFamily="34" charset="-122"/>
+                <a:cs typeface="Calibri" pitchFamily="34" charset="-120"/>
+              </a:rPr>
+              <a:t>BioCompute Inc. / Yachie &amp; Tomita 2007</a:t>
+            </a:r>
+            <a:endParaRPr lang="en-US" sz="1050" dirty="0"/>
+          </a:p>
+        </p:txBody>
+      </p:sp>
+      <p:sp>
+        <p:nvSpPr>
+          <p:cNvPr id="18" name="Text 16"/>
+          <p:cNvSpPr txBox="1"/>
+          <p:nvPr/>
+        </p:nvSpPr>
+        <p:spPr>
+          <a:xfrm>
+            <a:off x="8485632" y="3063240"/>
+            <a:ext cx="3054096" cy="2697480"/>
+          </a:xfrm>
+          <a:prstGeom prst="rect">
+            <a:avLst/>
+          </a:prstGeom>
+          <a:noFill/>
+          <a:ln/>
+        </p:spPr>
+        <p:txBody>
+          <a:bodyPr wrap="square" lIns="0" tIns="0" rIns="0" bIns="0" rtlCol="0" anchor="ctr"/>
+          <a:lstStyle/>
+          <a:p>
+            <a:pPr indent="0" marL="0">
+              <a:lnSpc>
+                <a:spcPct val="115000"/>
+              </a:lnSpc>
+              <a:buNone/>
+            </a:pPr>
+            <a:r>
+              <a:rPr lang="en-US" sz="1150" dirty="0">
+                <a:solidFill>
+                  <a:srgbClr val="5B6B77"/>
+                </a:solidFill>
+                <a:latin typeface="Calibri" pitchFamily="34" charset="0"/>
+                <a:ea typeface="Calibri" pitchFamily="34" charset="-122"/>
+                <a:cs typeface="Calibri" pitchFamily="34" charset="-120"/>
+              </a:rPr>
+              <a:t>Real, funded, already storing arbitrary data in a genome. But it's archival: written once, read only by destroying the sample via sequencing. Acheron is solving a different problem on purpose — a dynamic, rewritable, non-destructively-readable state, not a write-once archive.</a:t>
+            </a:r>
+            <a:endParaRPr lang="en-US" sz="1150" dirty="0"/>
+          </a:p>
+        </p:txBody>
+      </p:sp>
+      <p:sp>
+        <p:nvSpPr>
+          <p:cNvPr id="19" name="Text 17"/>
+          <p:cNvSpPr txBox="1"/>
+          <p:nvPr/>
+        </p:nvSpPr>
+        <p:spPr>
+          <a:xfrm>
+            <a:off x="11365992" y="6400800"/>
+            <a:ext cx="548640" cy="274320"/>
+          </a:xfrm>
+          <a:prstGeom prst="rect">
+            <a:avLst/>
+          </a:prstGeom>
+          <a:noFill/>
+          <a:ln/>
+        </p:spPr>
+        <p:txBody>
+          <a:bodyPr wrap="square" lIns="0" tIns="0" rIns="0" bIns="0" rtlCol="0" anchor="ctr"/>
+          <a:lstStyle/>
+          <a:p>
+            <a:pPr algn="r" indent="0" marL="0">
+              <a:buNone/>
+            </a:pPr>
+            <a:r>
+              <a:rPr lang="en-US" sz="1000" dirty="0">
+                <a:solidFill>
+                  <a:srgbClr val="9AA7AF"/>
+                </a:solidFill>
+                <a:latin typeface="Calibri" pitchFamily="34" charset="0"/>
+                <a:ea typeface="Calibri" pitchFamily="34" charset="-122"/>
+                <a:cs typeface="Calibri" pitchFamily="34" charset="-120"/>
+              </a:rPr>
+              <a:t>10</a:t>
+            </a:r>
+            <a:endParaRPr lang="en-US" sz="1000" dirty="0"/>
+          </a:p>
+        </p:txBody>
+      </p:sp>
+    </p:spTree>
+  </p:cSld>
+  <p:clrMapOvr>
+    <a:masterClrMapping/>
+  </p:clrMapOvr>
+</p:sld>
+</file>
+
+<file path=ppt/slides/slide11.xml><?xml version="1.0" encoding="utf-8"?>
+<p:sld xmlns:a="http://schemas.openxmlformats.org/drawingml/2006/main" xmlns:r="http://schemas.openxmlformats.org/officeDocument/2006/relationships" xmlns:p="http://schemas.openxmlformats.org/presentationml/2006/main">
+  <p:cSld name="Slide 11">
     <p:bg>
       <p:bgPr>
         <a:solidFill>
@@ -2643,7 +3492,7 @@
                 <a:ea typeface="Calibri" pitchFamily="34" charset="-122"/>
                 <a:cs typeface="Calibri" pitchFamily="34" charset="-120"/>
               </a:rPr>
-              <a:t>ROADMAP</a:t>
+              <a:t>IF THE CORE MECHANISM VALIDATES</a:t>
             </a:r>
             <a:endParaRPr lang="en-US" sz="1200" dirty="0"/>
           </a:p>
@@ -2674,7 +3523,7 @@
               <a:buNone/>
             </a:pPr>
             <a:r>
-              <a:rPr lang="en-US" sz="2800" b="1" dirty="0">
+              <a:rPr lang="en-US" sz="2600" b="1" dirty="0">
                 <a:solidFill>
                   <a:srgbClr val="FFFFFF"/>
                 </a:solidFill>
@@ -2682,22 +3531,44 @@
                 <a:ea typeface="Cambria" pitchFamily="34" charset="-122"/>
                 <a:cs typeface="Cambria" pitchFamily="34" charset="-120"/>
               </a:rPr>
-              <a:t>The one experiment that changes everything</a:t>
-            </a:r>
-            <a:endParaRPr lang="en-US" sz="2800" dirty="0"/>
-          </a:p>
-        </p:txBody>
-      </p:sp>
-      <p:sp>
-        <p:nvSpPr>
-          <p:cNvPr id="4" name="Text 2"/>
-          <p:cNvSpPr txBox="1"/>
-          <p:nvPr/>
-        </p:nvSpPr>
-        <p:spPr>
-          <a:xfrm>
-            <a:off x="640080" y="1554480"/>
-            <a:ext cx="10515600" cy="548640"/>
+              <a:t>Two real, externally-verifiable numbers — not an invented forecast</a:t>
+            </a:r>
+            <a:endParaRPr lang="en-US" sz="2600" dirty="0"/>
+          </a:p>
+        </p:txBody>
+      </p:sp>
+      <p:sp>
+        <p:nvSpPr>
+          <p:cNvPr id="4" name="Shape 2"/>
+          <p:cNvSpPr/>
+          <p:nvPr/>
+        </p:nvSpPr>
+        <p:spPr>
+          <a:xfrm>
+            <a:off x="640080" y="1828800"/>
+            <a:ext cx="5257800" cy="4023360"/>
+          </a:xfrm>
+          <a:prstGeom prst="roundRect">
+            <a:avLst>
+              <a:gd name="adj" fmla="val 1818"/>
+            </a:avLst>
+          </a:prstGeom>
+          <a:solidFill>
+            <a:srgbClr val="132A4D"/>
+          </a:solidFill>
+          <a:ln/>
+        </p:spPr>
+      </p:sp>
+      <p:sp>
+        <p:nvSpPr>
+          <p:cNvPr id="5" name="Text 3"/>
+          <p:cNvSpPr txBox="1"/>
+          <p:nvPr/>
+        </p:nvSpPr>
+        <p:spPr>
+          <a:xfrm>
+            <a:off x="914400" y="2103120"/>
+            <a:ext cx="4754880" cy="822960"/>
           </a:xfrm>
           <a:prstGeom prst="rect">
             <a:avLst/>
@@ -2713,34 +3584,115 @@
               <a:buNone/>
             </a:pPr>
             <a:r>
-              <a:rPr lang="en-US" sz="1400" dirty="0">
-                <a:solidFill>
-                  <a:srgbClr val="AEC2C8"/>
+              <a:rPr lang="en-US" sz="3200" b="1" dirty="0">
+                <a:solidFill>
+                  <a:srgbClr val="2EC4B6"/>
+                </a:solidFill>
+                <a:latin typeface="Cambria" pitchFamily="34" charset="0"/>
+                <a:ea typeface="Cambria" pitchFamily="34" charset="-122"/>
+                <a:cs typeface="Cambria" pitchFamily="34" charset="-120"/>
+              </a:rPr>
+              <a:t>$350K / 5 yrs</a:t>
+            </a:r>
+            <a:endParaRPr lang="en-US" sz="3200" dirty="0"/>
+          </a:p>
+        </p:txBody>
+      </p:sp>
+      <p:sp>
+        <p:nvSpPr>
+          <p:cNvPr id="6" name="Text 4"/>
+          <p:cNvSpPr txBox="1"/>
+          <p:nvPr/>
+        </p:nvSpPr>
+        <p:spPr>
+          <a:xfrm>
+            <a:off x="914400" y="2880360"/>
+            <a:ext cx="4754880" cy="457200"/>
+          </a:xfrm>
+          <a:prstGeom prst="rect">
+            <a:avLst/>
+          </a:prstGeom>
+          <a:noFill/>
+          <a:ln/>
+        </p:spPr>
+        <p:txBody>
+          <a:bodyPr wrap="square" lIns="0" tIns="0" rIns="0" bIns="0" rtlCol="0" anchor="ctr"/>
+          <a:lstStyle/>
+          <a:p>
+            <a:pPr indent="0" marL="0">
+              <a:buNone/>
+            </a:pPr>
+            <a:r>
+              <a:rPr lang="en-US" sz="1300" b="1" dirty="0">
+                <a:solidFill>
+                  <a:srgbClr val="FFFFFF"/>
                 </a:solidFill>
                 <a:latin typeface="Calibri" pitchFamily="34" charset="0"/>
                 <a:ea typeface="Calibri" pitchFamily="34" charset="-122"/>
                 <a:cs typeface="Calibri" pitchFamily="34" charset="-120"/>
               </a:rPr>
-              <a:t>Build the matched-promoter toggle circuit in B. subtilis, write a bit, damage the colony, let it regrow, read the bit back non-destructively via EIS.</a:t>
-            </a:r>
-            <a:endParaRPr lang="en-US" sz="1400" dirty="0"/>
-          </a:p>
-        </p:txBody>
-      </p:sp>
-      <p:sp>
-        <p:nvSpPr>
-          <p:cNvPr id="5" name="Shape 3"/>
+              <a:t>What customers already pay for the closest existing alternative</a:t>
+            </a:r>
+            <a:endParaRPr lang="en-US" sz="1300" dirty="0"/>
+          </a:p>
+        </p:txBody>
+      </p:sp>
+      <p:sp>
+        <p:nvSpPr>
+          <p:cNvPr id="7" name="Text 5"/>
+          <p:cNvSpPr txBox="1"/>
+          <p:nvPr/>
+        </p:nvSpPr>
+        <p:spPr>
+          <a:xfrm>
+            <a:off x="914400" y="3383280"/>
+            <a:ext cx="4754880" cy="2286000"/>
+          </a:xfrm>
+          <a:prstGeom prst="rect">
+            <a:avLst/>
+          </a:prstGeom>
+          <a:noFill/>
+          <a:ln/>
+        </p:spPr>
+        <p:txBody>
+          <a:bodyPr wrap="square" lIns="0" tIns="0" rIns="0" bIns="0" rtlCol="0" anchor="ctr"/>
+          <a:lstStyle/>
+          <a:p>
+            <a:pPr indent="0" marL="0">
+              <a:lnSpc>
+                <a:spcPct val="120000"/>
+              </a:lnSpc>
+              <a:buNone/>
+            </a:pPr>
+            <a:r>
+              <a:rPr lang="en-US" sz="1250" dirty="0">
+                <a:solidFill>
+                  <a:srgbClr val="CFE0DD"/>
+                </a:solidFill>
+                <a:latin typeface="Calibri" pitchFamily="34" charset="0"/>
+                <a:ea typeface="Calibri" pitchFamily="34" charset="-122"/>
+                <a:cs typeface="Calibri" pitchFamily="34" charset="-120"/>
+              </a:rPr>
+              <a:t>Cortical Labs' CL-1 (neuron-based): $35,000/unit, replaced every 6 months, zero self-repair. A live, public data point for what this market already tolerates paying to avoid downtime — from a substrate that can't heal itself.</a:t>
+            </a:r>
+            <a:endParaRPr lang="en-US" sz="1250" dirty="0"/>
+          </a:p>
+        </p:txBody>
+      </p:sp>
+      <p:sp>
+        <p:nvSpPr>
+          <p:cNvPr id="8" name="Shape 6"/>
           <p:cNvSpPr/>
           <p:nvPr/>
         </p:nvSpPr>
         <p:spPr>
           <a:xfrm>
-            <a:off x="640080" y="2377440"/>
-            <a:ext cx="3566160" cy="2286000"/>
+            <a:off x="6172200" y="1828800"/>
+            <a:ext cx="5394960" cy="4023360"/>
           </a:xfrm>
           <a:prstGeom prst="roundRect">
             <a:avLst>
-              <a:gd name="adj" fmla="val 3200"/>
+              <a:gd name="adj" fmla="val 1818"/>
             </a:avLst>
           </a:prstGeom>
           <a:solidFill>
@@ -2751,14 +3703,14 @@
       </p:sp>
       <p:sp>
         <p:nvSpPr>
-          <p:cNvPr id="6" name="Text 4"/>
-          <p:cNvSpPr txBox="1"/>
-          <p:nvPr/>
-        </p:nvSpPr>
-        <p:spPr>
-          <a:xfrm>
-            <a:off x="914400" y="2606040"/>
-            <a:ext cx="3017520" cy="914400"/>
+          <p:cNvPr id="9" name="Text 7"/>
+          <p:cNvSpPr txBox="1"/>
+          <p:nvPr/>
+        </p:nvSpPr>
+        <p:spPr>
+          <a:xfrm>
+            <a:off x="6446520" y="2103120"/>
+            <a:ext cx="4846320" cy="822960"/>
           </a:xfrm>
           <a:prstGeom prst="rect">
             <a:avLst/>
@@ -2774,7 +3726,7 @@
               <a:buNone/>
             </a:pPr>
             <a:r>
-              <a:rPr lang="en-US" sz="3400" b="1" dirty="0">
+              <a:rPr lang="en-US" sz="3200" b="1" dirty="0">
                 <a:solidFill>
                   <a:srgbClr val="2EC4B6"/>
                 </a:solidFill>
@@ -2782,22 +3734,22 @@
                 <a:ea typeface="Cambria" pitchFamily="34" charset="-122"/>
                 <a:cs typeface="Cambria" pitchFamily="34" charset="-120"/>
               </a:rPr>
-              <a:t>$10K-$30K</a:t>
-            </a:r>
-            <a:endParaRPr lang="en-US" sz="3400" dirty="0"/>
-          </a:p>
-        </p:txBody>
-      </p:sp>
-      <p:sp>
-        <p:nvSpPr>
-          <p:cNvPr id="7" name="Text 5"/>
-          <p:cNvSpPr txBox="1"/>
-          <p:nvPr/>
-        </p:nvSpPr>
-        <p:spPr>
-          <a:xfrm>
-            <a:off x="914400" y="3429000"/>
-            <a:ext cx="3017520" cy="1097280"/>
+              <a:t>$1.2B–$2.0B</a:t>
+            </a:r>
+            <a:endParaRPr lang="en-US" sz="3200" dirty="0"/>
+          </a:p>
+        </p:txBody>
+      </p:sp>
+      <p:sp>
+        <p:nvSpPr>
+          <p:cNvPr id="10" name="Text 8"/>
+          <p:cNvSpPr txBox="1"/>
+          <p:nvPr/>
+        </p:nvSpPr>
+        <p:spPr>
+          <a:xfrm>
+            <a:off x="6446520" y="2880360"/>
+            <a:ext cx="4846320" cy="548640"/>
           </a:xfrm>
           <a:prstGeom prst="rect">
             <a:avLst/>
@@ -2810,97 +3762,33 @@
           <a:lstStyle/>
           <a:p>
             <a:pPr indent="0" marL="0">
-              <a:lnSpc>
-                <a:spcPct val="115000"/>
-              </a:lnSpc>
-              <a:buNone/>
-            </a:pPr>
-            <a:r>
-              <a:rPr lang="en-US" sz="1250" dirty="0">
-                <a:solidFill>
-                  <a:srgbClr val="CFE0DD"/>
+              <a:buNone/>
+            </a:pPr>
+            <a:r>
+              <a:rPr lang="en-US" sz="1300" b="1" dirty="0">
+                <a:solidFill>
+                  <a:srgbClr val="FFFFFF"/>
                 </a:solidFill>
                 <a:latin typeface="Calibri" pitchFamily="34" charset="0"/>
                 <a:ea typeface="Calibri" pitchFamily="34" charset="-122"/>
                 <a:cs typeface="Calibri" pitchFamily="34" charset="-120"/>
               </a:rPr>
-              <a:t>Cost — reagents, cloning, lab bench access</a:t>
-            </a:r>
-            <a:endParaRPr lang="en-US" sz="1250" dirty="0"/>
-          </a:p>
-        </p:txBody>
-      </p:sp>
-      <p:sp>
-        <p:nvSpPr>
-          <p:cNvPr id="8" name="Shape 6"/>
-          <p:cNvSpPr/>
-          <p:nvPr/>
-        </p:nvSpPr>
-        <p:spPr>
-          <a:xfrm>
-            <a:off x="4389120" y="2377440"/>
-            <a:ext cx="3566160" cy="2286000"/>
-          </a:xfrm>
-          <a:prstGeom prst="roundRect">
-            <a:avLst>
-              <a:gd name="adj" fmla="val 3200"/>
-            </a:avLst>
-          </a:prstGeom>
-          <a:solidFill>
-            <a:srgbClr val="132A4D"/>
-          </a:solidFill>
-          <a:ln/>
-        </p:spPr>
-      </p:sp>
-      <p:sp>
-        <p:nvSpPr>
-          <p:cNvPr id="9" name="Text 7"/>
-          <p:cNvSpPr txBox="1"/>
-          <p:nvPr/>
-        </p:nvSpPr>
-        <p:spPr>
-          <a:xfrm>
-            <a:off x="4663440" y="2606040"/>
-            <a:ext cx="3017520" cy="914400"/>
-          </a:xfrm>
-          <a:prstGeom prst="rect">
-            <a:avLst/>
-          </a:prstGeom>
-          <a:noFill/>
-          <a:ln/>
-        </p:spPr>
-        <p:txBody>
-          <a:bodyPr wrap="square" lIns="0" tIns="0" rIns="0" bIns="0" rtlCol="0" anchor="ctr"/>
-          <a:lstStyle/>
-          <a:p>
-            <a:pPr indent="0" marL="0">
-              <a:buNone/>
-            </a:pPr>
-            <a:r>
-              <a:rPr lang="en-US" sz="3400" b="1" dirty="0">
-                <a:solidFill>
-                  <a:srgbClr val="2EC4B6"/>
-                </a:solidFill>
-                <a:latin typeface="Cambria" pitchFamily="34" charset="0"/>
-                <a:ea typeface="Cambria" pitchFamily="34" charset="-122"/>
-                <a:cs typeface="Cambria" pitchFamily="34" charset="-120"/>
-              </a:rPr>
-              <a:t>6-12 mo</a:t>
-            </a:r>
-            <a:endParaRPr lang="en-US" sz="3400" dirty="0"/>
-          </a:p>
-        </p:txBody>
-      </p:sp>
-      <p:sp>
-        <p:nvSpPr>
-          <p:cNvPr id="10" name="Text 8"/>
-          <p:cNvSpPr txBox="1"/>
-          <p:nvPr/>
-        </p:nvSpPr>
-        <p:spPr>
-          <a:xfrm>
-            <a:off x="4663440" y="3429000"/>
-            <a:ext cx="3017520" cy="1097280"/>
+              <a:t>Radiation-hardened space electronics, 2026 (independent analyst range)</a:t>
+            </a:r>
+            <a:endParaRPr lang="en-US" sz="1300" dirty="0"/>
+          </a:p>
+        </p:txBody>
+      </p:sp>
+      <p:sp>
+        <p:nvSpPr>
+          <p:cNvPr id="11" name="Text 9"/>
+          <p:cNvSpPr txBox="1"/>
+          <p:nvPr/>
+        </p:nvSpPr>
+        <p:spPr>
+          <a:xfrm>
+            <a:off x="6446520" y="3474720"/>
+            <a:ext cx="4846320" cy="2286000"/>
           </a:xfrm>
           <a:prstGeom prst="rect">
             <a:avLst/>
@@ -2914,12 +3802,12 @@
           <a:p>
             <a:pPr indent="0" marL="0">
               <a:lnSpc>
-                <a:spcPct val="115000"/>
+                <a:spcPct val="120000"/>
               </a:lnSpc>
               <a:buNone/>
             </a:pPr>
             <a:r>
-              <a:rPr lang="en-US" sz="1250" dirty="0">
+              <a:rPr lang="en-US" sz="1200" dirty="0">
                 <a:solidFill>
                   <a:srgbClr val="CFE0DD"/>
                 </a:solidFill>
@@ -2927,33 +3815,11 @@
                 <a:ea typeface="Calibri" pitchFamily="34" charset="-122"/>
                 <a:cs typeface="Calibri" pitchFamily="34" charset="-120"/>
               </a:rPr>
-              <a:t>Timeline to a clear yes/no answer</a:t>
-            </a:r>
-            <a:endParaRPr lang="en-US" sz="1250" dirty="0"/>
-          </a:p>
-        </p:txBody>
-      </p:sp>
-      <p:sp>
-        <p:nvSpPr>
-          <p:cNvPr id="11" name="Shape 9"/>
-          <p:cNvSpPr/>
-          <p:nvPr/>
-        </p:nvSpPr>
-        <p:spPr>
-          <a:xfrm>
-            <a:off x="8138160" y="2377440"/>
-            <a:ext cx="3566160" cy="2286000"/>
-          </a:xfrm>
-          <a:prstGeom prst="roundRect">
-            <a:avLst>
-              <a:gd name="adj" fmla="val 3200"/>
-            </a:avLst>
-          </a:prstGeom>
-          <a:solidFill>
-            <a:srgbClr val="132A4D"/>
-          </a:solidFill>
-          <a:ln/>
-        </p:spPr>
+              <a:t>Growing ~4-5.6% CAGR into the early 2030s (Grand View Research, Fortune Business Insights, Research and Markets), driven by LEO satellite constellations (Starlink, Kuiper, OneWeb) needing more radiation-tolerant memory. We claim no specific share of this — it's evidence the underlying need is real and growing, not a number we made up.</a:t>
+            </a:r>
+            <a:endParaRPr lang="en-US" sz="1200" dirty="0"/>
+          </a:p>
+        </p:txBody>
       </p:sp>
       <p:sp>
         <p:nvSpPr>
@@ -2963,8 +3829,8 @@
         </p:nvSpPr>
         <p:spPr>
           <a:xfrm>
-            <a:off x="8412480" y="2606040"/>
-            <a:ext cx="3017520" cy="914400"/>
+            <a:off x="640080" y="6035040"/>
+            <a:ext cx="10972800" cy="548640"/>
           </a:xfrm>
           <a:prstGeom prst="rect">
             <a:avLst/>
@@ -2980,104 +3846,23 @@
               <a:buNone/>
             </a:pPr>
             <a:r>
-              <a:rPr lang="en-US" sz="3400" b="1" dirty="0">
-                <a:solidFill>
-                  <a:srgbClr val="2EC4B6"/>
-                </a:solidFill>
-                <a:latin typeface="Cambria" pitchFamily="34" charset="0"/>
-                <a:ea typeface="Cambria" pitchFamily="34" charset="-122"/>
-                <a:cs typeface="Cambria" pitchFamily="34" charset="-120"/>
-              </a:rPr>
-              <a:t>2</a:t>
-            </a:r>
-            <a:endParaRPr lang="en-US" sz="3400" dirty="0"/>
-          </a:p>
-        </p:txBody>
-      </p:sp>
-      <p:sp>
-        <p:nvSpPr>
-          <p:cNvPr id="13" name="Text 11"/>
-          <p:cNvSpPr txBox="1"/>
-          <p:nvPr/>
-        </p:nvSpPr>
-        <p:spPr>
-          <a:xfrm>
-            <a:off x="8412480" y="3429000"/>
-            <a:ext cx="3017520" cy="1097280"/>
-          </a:xfrm>
-          <a:prstGeom prst="rect">
-            <a:avLst/>
-          </a:prstGeom>
-          <a:noFill/>
-          <a:ln/>
-        </p:spPr>
-        <p:txBody>
-          <a:bodyPr wrap="square" lIns="0" tIns="0" rIns="0" bIns="0" rtlCol="0" anchor="ctr"/>
-          <a:lstStyle/>
-          <a:p>
-            <a:pPr indent="0" marL="0">
-              <a:lnSpc>
-                <a:spcPct val="115000"/>
-              </a:lnSpc>
-              <a:buNone/>
-            </a:pPr>
-            <a:r>
-              <a:rPr lang="en-US" sz="1250" dirty="0">
-                <a:solidFill>
-                  <a:srgbClr val="CFE0DD"/>
+              <a:rPr lang="en-US" sz="1350" i="1" dirty="0">
+                <a:solidFill>
+                  <a:srgbClr val="AEC2C8"/>
                 </a:solidFill>
                 <a:latin typeface="Calibri" pitchFamily="34" charset="0"/>
                 <a:ea typeface="Calibri" pitchFamily="34" charset="-122"/>
                 <a:cs typeface="Calibri" pitchFamily="34" charset="-120"/>
               </a:rPr>
-              <a:t>Outcomes only — validate the mechanism, or cleanly redirect to methylation, next by our own ranking</a:t>
-            </a:r>
-            <a:endParaRPr lang="en-US" sz="1250" dirty="0"/>
-          </a:p>
-        </p:txBody>
-      </p:sp>
-      <p:sp>
-        <p:nvSpPr>
-          <p:cNvPr id="14" name="Text 12"/>
-          <p:cNvSpPr txBox="1"/>
-          <p:nvPr/>
-        </p:nvSpPr>
-        <p:spPr>
-          <a:xfrm>
-            <a:off x="640080" y="4937760"/>
-            <a:ext cx="10515600" cy="457200"/>
-          </a:xfrm>
-          <a:prstGeom prst="rect">
-            <a:avLst/>
-          </a:prstGeom>
-          <a:noFill/>
-          <a:ln/>
-        </p:spPr>
-        <p:txBody>
-          <a:bodyPr wrap="square" lIns="0" tIns="0" rIns="0" bIns="0" rtlCol="0" anchor="ctr"/>
-          <a:lstStyle/>
-          <a:p>
-            <a:pPr indent="0" marL="0">
-              <a:buNone/>
-            </a:pPr>
-            <a:r>
-              <a:rPr lang="en-US" sz="1400" i="1" dirty="0">
-                <a:solidFill>
-                  <a:srgbClr val="8FA6AE"/>
-                </a:solidFill>
-                <a:latin typeface="Calibri" pitchFamily="34" charset="0"/>
-                <a:ea typeface="Calibri" pitchFamily="34" charset="-122"/>
-                <a:cs typeface="Calibri" pitchFamily="34" charset="-120"/>
-              </a:rPr>
-              <a:t>Deliberately the cheapest, fastest experiment that produces a real answer — not a moonshot ask.</a:t>
-            </a:r>
-            <a:endParaRPr lang="en-US" sz="1400" dirty="0"/>
-          </a:p>
-        </p:txBody>
-      </p:sp>
-      <p:sp>
-        <p:nvSpPr>
-          <p:cNvPr id="15" name="Text 13"/>
+              <a:t>This upside is entirely conditional on the roadmap experiment below succeeding. We're not asking anyone to price the risk in advance — we're asking for what it costs to find out.</a:t>
+            </a:r>
+            <a:endParaRPr lang="en-US" sz="1350" dirty="0"/>
+          </a:p>
+        </p:txBody>
+      </p:sp>
+      <p:sp>
+        <p:nvSpPr>
+          <p:cNvPr id="13" name="Text 11"/>
           <p:cNvSpPr txBox="1"/>
           <p:nvPr/>
         </p:nvSpPr>
@@ -3103,544 +3888,6 @@
               <a:rPr lang="en-US" sz="1000" dirty="0">
                 <a:solidFill>
                   <a:srgbClr val="6E7F91"/>
-                </a:solidFill>
-                <a:latin typeface="Calibri" pitchFamily="34" charset="0"/>
-                <a:ea typeface="Calibri" pitchFamily="34" charset="-122"/>
-                <a:cs typeface="Calibri" pitchFamily="34" charset="-120"/>
-              </a:rPr>
-              <a:t>10</a:t>
-            </a:r>
-            <a:endParaRPr lang="en-US" sz="1000" dirty="0"/>
-          </a:p>
-        </p:txBody>
-      </p:sp>
-    </p:spTree>
-  </p:cSld>
-  <p:clrMapOvr>
-    <a:masterClrMapping/>
-  </p:clrMapOvr>
-</p:sld>
-</file>
-
-<file path=ppt/slides/slide11.xml><?xml version="1.0" encoding="utf-8"?>
-<p:sld xmlns:a="http://schemas.openxmlformats.org/drawingml/2006/main" xmlns:r="http://schemas.openxmlformats.org/officeDocument/2006/relationships" xmlns:p="http://schemas.openxmlformats.org/presentationml/2006/main">
-  <p:cSld name="Slide 11">
-    <p:bg>
-      <p:bgPr>
-        <a:solidFill>
-          <a:srgbClr val="F4F6F7"/>
-        </a:solidFill>
-      </p:bgPr>
-    </p:bg>
-    <p:spTree>
-      <p:nvGrpSpPr>
-        <p:cNvPr id="1" name=""/>
-        <p:cNvGrpSpPr/>
-        <p:nvPr/>
-      </p:nvGrpSpPr>
-      <p:grpSpPr>
-        <a:xfrm>
-          <a:off x="0" y="0"/>
-          <a:ext cx="0" cy="0"/>
-          <a:chOff x="0" y="0"/>
-          <a:chExt cx="0" cy="0"/>
-        </a:xfrm>
-      </p:grpSpPr>
-      <p:sp>
-        <p:nvSpPr>
-          <p:cNvPr id="2" name="Text 0"/>
-          <p:cNvSpPr txBox="1"/>
-          <p:nvPr/>
-        </p:nvSpPr>
-        <p:spPr>
-          <a:xfrm>
-            <a:off x="640080" y="457200"/>
-            <a:ext cx="5486400" cy="320040"/>
-          </a:xfrm>
-          <a:prstGeom prst="rect">
-            <a:avLst/>
-          </a:prstGeom>
-          <a:noFill/>
-          <a:ln/>
-        </p:spPr>
-        <p:txBody>
-          <a:bodyPr wrap="square" lIns="0" tIns="0" rIns="0" bIns="0" rtlCol="0" anchor="ctr"/>
-          <a:lstStyle/>
-          <a:p>
-            <a:pPr indent="0" marL="0">
-              <a:buNone/>
-            </a:pPr>
-            <a:r>
-              <a:rPr lang="en-US" sz="1200" b="1" spc="200" kern="0" dirty="0">
-                <a:solidFill>
-                  <a:srgbClr val="1C8F84"/>
-                </a:solidFill>
-                <a:latin typeface="Calibri" pitchFamily="34" charset="0"/>
-                <a:ea typeface="Calibri" pitchFamily="34" charset="-122"/>
-                <a:cs typeface="Calibri" pitchFamily="34" charset="-120"/>
-              </a:rPr>
-              <a:t>WHAT WE'RE ASKING FOR</a:t>
-            </a:r>
-            <a:endParaRPr lang="en-US" sz="1200" dirty="0"/>
-          </a:p>
-        </p:txBody>
-      </p:sp>
-      <p:sp>
-        <p:nvSpPr>
-          <p:cNvPr id="3" name="Text 1"/>
-          <p:cNvSpPr txBox="1"/>
-          <p:nvPr/>
-        </p:nvSpPr>
-        <p:spPr>
-          <a:xfrm>
-            <a:off x="640080" y="777240"/>
-            <a:ext cx="10881360" cy="731520"/>
-          </a:xfrm>
-          <a:prstGeom prst="rect">
-            <a:avLst/>
-          </a:prstGeom>
-          <a:noFill/>
-          <a:ln/>
-        </p:spPr>
-        <p:txBody>
-          <a:bodyPr wrap="square" lIns="0" tIns="0" rIns="0" bIns="0" rtlCol="0" anchor="ctr"/>
-          <a:lstStyle/>
-          <a:p>
-            <a:pPr indent="0" marL="0">
-              <a:buNone/>
-            </a:pPr>
-            <a:r>
-              <a:rPr lang="en-US" sz="2500" b="1" dirty="0">
-                <a:solidFill>
-                  <a:srgbClr val="16232F"/>
-                </a:solidFill>
-                <a:latin typeface="Cambria" pitchFamily="34" charset="0"/>
-                <a:ea typeface="Cambria" pitchFamily="34" charset="-122"/>
-                <a:cs typeface="Cambria" pitchFamily="34" charset="-120"/>
-              </a:rPr>
-              <a:t>Program support sized to a real, scoped experiment</a:t>
-            </a:r>
-            <a:endParaRPr lang="en-US" sz="2500" dirty="0"/>
-          </a:p>
-        </p:txBody>
-      </p:sp>
-      <p:sp>
-        <p:nvSpPr>
-          <p:cNvPr id="4" name="Shape 2"/>
-          <p:cNvSpPr/>
-          <p:nvPr/>
-        </p:nvSpPr>
-        <p:spPr>
-          <a:xfrm>
-            <a:off x="640080" y="1783080"/>
-            <a:ext cx="411480" cy="411480"/>
-          </a:xfrm>
-          <a:prstGeom prst="ellipse">
-            <a:avLst/>
-          </a:prstGeom>
-          <a:solidFill>
-            <a:srgbClr val="2EC4B6"/>
-          </a:solidFill>
-          <a:ln/>
-        </p:spPr>
-      </p:sp>
-      <p:sp>
-        <p:nvSpPr>
-          <p:cNvPr id="5" name="Text 3"/>
-          <p:cNvSpPr txBox="1"/>
-          <p:nvPr/>
-        </p:nvSpPr>
-        <p:spPr>
-          <a:xfrm>
-            <a:off x="1280160" y="1719072"/>
-            <a:ext cx="9875520" cy="365760"/>
-          </a:xfrm>
-          <a:prstGeom prst="rect">
-            <a:avLst/>
-          </a:prstGeom>
-          <a:noFill/>
-          <a:ln/>
-        </p:spPr>
-        <p:txBody>
-          <a:bodyPr wrap="square" lIns="0" tIns="0" rIns="0" bIns="0" rtlCol="0" anchor="ctr"/>
-          <a:lstStyle/>
-          <a:p>
-            <a:pPr indent="0" marL="0">
-              <a:buNone/>
-            </a:pPr>
-            <a:r>
-              <a:rPr lang="en-US" sz="1600" b="1" dirty="0">
-                <a:solidFill>
-                  <a:srgbClr val="16232F"/>
-                </a:solidFill>
-                <a:latin typeface="Cambria" pitchFamily="34" charset="0"/>
-                <a:ea typeface="Cambria" pitchFamily="34" charset="-122"/>
-                <a:cs typeface="Cambria" pitchFamily="34" charset="-120"/>
-              </a:rPr>
-              <a:t>Lab access &amp; partnerships</a:t>
-            </a:r>
-            <a:endParaRPr lang="en-US" sz="1600" dirty="0"/>
-          </a:p>
-        </p:txBody>
-      </p:sp>
-      <p:sp>
-        <p:nvSpPr>
-          <p:cNvPr id="6" name="Text 4"/>
-          <p:cNvSpPr txBox="1"/>
-          <p:nvPr/>
-        </p:nvSpPr>
-        <p:spPr>
-          <a:xfrm>
-            <a:off x="1280160" y="2121408"/>
-            <a:ext cx="9875520" cy="640080"/>
-          </a:xfrm>
-          <a:prstGeom prst="rect">
-            <a:avLst/>
-          </a:prstGeom>
-          <a:noFill/>
-          <a:ln/>
-        </p:spPr>
-        <p:txBody>
-          <a:bodyPr wrap="square" lIns="0" tIns="0" rIns="0" bIns="0" rtlCol="0" anchor="ctr"/>
-          <a:lstStyle/>
-          <a:p>
-            <a:pPr indent="0" marL="0">
-              <a:lnSpc>
-                <a:spcPct val="115000"/>
-              </a:lnSpc>
-              <a:buNone/>
-            </a:pPr>
-            <a:r>
-              <a:rPr lang="en-US" sz="1300" dirty="0">
-                <a:solidFill>
-                  <a:srgbClr val="5B6B77"/>
-                </a:solidFill>
-                <a:latin typeface="Calibri" pitchFamily="34" charset="0"/>
-                <a:ea typeface="Calibri" pitchFamily="34" charset="-122"/>
-                <a:cs typeface="Calibri" pitchFamily="34" charset="-120"/>
-              </a:rPr>
-              <a:t>Bench access for standard bacterial transformation and plasmid cloning — B. subtilis is a workhorse organism, a far more common skill than planarian-specific culture.</a:t>
-            </a:r>
-            <a:endParaRPr lang="en-US" sz="1300" dirty="0"/>
-          </a:p>
-        </p:txBody>
-      </p:sp>
-      <p:sp>
-        <p:nvSpPr>
-          <p:cNvPr id="7" name="Shape 5"/>
-          <p:cNvSpPr/>
-          <p:nvPr/>
-        </p:nvSpPr>
-        <p:spPr>
-          <a:xfrm>
-            <a:off x="640080" y="2926080"/>
-            <a:ext cx="411480" cy="411480"/>
-          </a:xfrm>
-          <a:prstGeom prst="ellipse">
-            <a:avLst/>
-          </a:prstGeom>
-          <a:solidFill>
-            <a:srgbClr val="2EC4B6"/>
-          </a:solidFill>
-          <a:ln/>
-        </p:spPr>
-      </p:sp>
-      <p:sp>
-        <p:nvSpPr>
-          <p:cNvPr id="8" name="Text 6"/>
-          <p:cNvSpPr txBox="1"/>
-          <p:nvPr/>
-        </p:nvSpPr>
-        <p:spPr>
-          <a:xfrm>
-            <a:off x="1280160" y="2862072"/>
-            <a:ext cx="9875520" cy="365760"/>
-          </a:xfrm>
-          <a:prstGeom prst="rect">
-            <a:avLst/>
-          </a:prstGeom>
-          <a:noFill/>
-          <a:ln/>
-        </p:spPr>
-        <p:txBody>
-          <a:bodyPr wrap="square" lIns="0" tIns="0" rIns="0" bIns="0" rtlCol="0" anchor="ctr"/>
-          <a:lstStyle/>
-          <a:p>
-            <a:pPr indent="0" marL="0">
-              <a:buNone/>
-            </a:pPr>
-            <a:r>
-              <a:rPr lang="en-US" sz="1600" b="1" dirty="0">
-                <a:solidFill>
-                  <a:srgbClr val="16232F"/>
-                </a:solidFill>
-                <a:latin typeface="Cambria" pitchFamily="34" charset="0"/>
-                <a:ea typeface="Cambria" pitchFamily="34" charset="-122"/>
-                <a:cs typeface="Cambria" pitchFamily="34" charset="-120"/>
-              </a:rPr>
-              <a:t>Technical mentorship</a:t>
-            </a:r>
-            <a:endParaRPr lang="en-US" sz="1600" dirty="0"/>
-          </a:p>
-        </p:txBody>
-      </p:sp>
-      <p:sp>
-        <p:nvSpPr>
-          <p:cNvPr id="9" name="Text 7"/>
-          <p:cNvSpPr txBox="1"/>
-          <p:nvPr/>
-        </p:nvSpPr>
-        <p:spPr>
-          <a:xfrm>
-            <a:off x="1280160" y="3264408"/>
-            <a:ext cx="9875520" cy="640080"/>
-          </a:xfrm>
-          <a:prstGeom prst="rect">
-            <a:avLst/>
-          </a:prstGeom>
-          <a:noFill/>
-          <a:ln/>
-        </p:spPr>
-        <p:txBody>
-          <a:bodyPr wrap="square" lIns="0" tIns="0" rIns="0" bIns="0" rtlCol="0" anchor="ctr"/>
-          <a:lstStyle/>
-          <a:p>
-            <a:pPr indent="0" marL="0">
-              <a:lnSpc>
-                <a:spcPct val="115000"/>
-              </a:lnSpc>
-              <a:buNone/>
-            </a:pPr>
-            <a:r>
-              <a:rPr lang="en-US" sz="1300" dirty="0">
-                <a:solidFill>
-                  <a:srgbClr val="5B6B77"/>
-                </a:solidFill>
-                <a:latin typeface="Calibri" pitchFamily="34" charset="0"/>
-                <a:ea typeface="Calibri" pitchFamily="34" charset="-122"/>
-                <a:cs typeface="Calibri" pitchFamily="34" charset="-120"/>
-              </a:rPr>
-              <a:t>Synthetic-biology / genetic-circuit design review to pressure-test the toggle-circuit design before it's built.</a:t>
-            </a:r>
-            <a:endParaRPr lang="en-US" sz="1300" dirty="0"/>
-          </a:p>
-        </p:txBody>
-      </p:sp>
-      <p:sp>
-        <p:nvSpPr>
-          <p:cNvPr id="10" name="Shape 8"/>
-          <p:cNvSpPr/>
-          <p:nvPr/>
-        </p:nvSpPr>
-        <p:spPr>
-          <a:xfrm>
-            <a:off x="640080" y="4069080"/>
-            <a:ext cx="411480" cy="411480"/>
-          </a:xfrm>
-          <a:prstGeom prst="ellipse">
-            <a:avLst/>
-          </a:prstGeom>
-          <a:solidFill>
-            <a:srgbClr val="2EC4B6"/>
-          </a:solidFill>
-          <a:ln/>
-        </p:spPr>
-      </p:sp>
-      <p:sp>
-        <p:nvSpPr>
-          <p:cNvPr id="11" name="Text 9"/>
-          <p:cNvSpPr txBox="1"/>
-          <p:nvPr/>
-        </p:nvSpPr>
-        <p:spPr>
-          <a:xfrm>
-            <a:off x="1280160" y="4005072"/>
-            <a:ext cx="9875520" cy="365760"/>
-          </a:xfrm>
-          <a:prstGeom prst="rect">
-            <a:avLst/>
-          </a:prstGeom>
-          <a:noFill/>
-          <a:ln/>
-        </p:spPr>
-        <p:txBody>
-          <a:bodyPr wrap="square" lIns="0" tIns="0" rIns="0" bIns="0" rtlCol="0" anchor="ctr"/>
-          <a:lstStyle/>
-          <a:p>
-            <a:pPr indent="0" marL="0">
-              <a:buNone/>
-            </a:pPr>
-            <a:r>
-              <a:rPr lang="en-US" sz="1600" b="1" dirty="0">
-                <a:solidFill>
-                  <a:srgbClr val="16232F"/>
-                </a:solidFill>
-                <a:latin typeface="Cambria" pitchFamily="34" charset="0"/>
-                <a:ea typeface="Cambria" pitchFamily="34" charset="-122"/>
-                <a:cs typeface="Cambria" pitchFamily="34" charset="-120"/>
-              </a:rPr>
-              <a:t>Non-dilutive funding pathways</a:t>
-            </a:r>
-            <a:endParaRPr lang="en-US" sz="1600" dirty="0"/>
-          </a:p>
-        </p:txBody>
-      </p:sp>
-      <p:sp>
-        <p:nvSpPr>
-          <p:cNvPr id="12" name="Text 10"/>
-          <p:cNvSpPr txBox="1"/>
-          <p:nvPr/>
-        </p:nvSpPr>
-        <p:spPr>
-          <a:xfrm>
-            <a:off x="1280160" y="4407408"/>
-            <a:ext cx="9875520" cy="640080"/>
-          </a:xfrm>
-          <a:prstGeom prst="rect">
-            <a:avLst/>
-          </a:prstGeom>
-          <a:noFill/>
-          <a:ln/>
-        </p:spPr>
-        <p:txBody>
-          <a:bodyPr wrap="square" lIns="0" tIns="0" rIns="0" bIns="0" rtlCol="0" anchor="ctr"/>
-          <a:lstStyle/>
-          <a:p>
-            <a:pPr indent="0" marL="0">
-              <a:lnSpc>
-                <a:spcPct val="115000"/>
-              </a:lnSpc>
-              <a:buNone/>
-            </a:pPr>
-            <a:r>
-              <a:rPr lang="en-US" sz="1300" dirty="0">
-                <a:solidFill>
-                  <a:srgbClr val="5B6B77"/>
-                </a:solidFill>
-                <a:latin typeface="Calibri" pitchFamily="34" charset="0"/>
-                <a:ea typeface="Calibri" pitchFamily="34" charset="-122"/>
-                <a:cs typeface="Calibri" pitchFamily="34" charset="-120"/>
-              </a:rPr>
-              <a:t>Grants or prizes sized to the ~$10K-$30K experiment above — not a large speculative raise.</a:t>
-            </a:r>
-            <a:endParaRPr lang="en-US" sz="1300" dirty="0"/>
-          </a:p>
-        </p:txBody>
-      </p:sp>
-      <p:sp>
-        <p:nvSpPr>
-          <p:cNvPr id="13" name="Shape 11"/>
-          <p:cNvSpPr/>
-          <p:nvPr/>
-        </p:nvSpPr>
-        <p:spPr>
-          <a:xfrm>
-            <a:off x="640080" y="5257800"/>
-            <a:ext cx="10972800" cy="1051560"/>
-          </a:xfrm>
-          <a:prstGeom prst="roundRect">
-            <a:avLst>
-              <a:gd name="adj" fmla="val 6957"/>
-            </a:avLst>
-          </a:prstGeom>
-          <a:solidFill>
-            <a:srgbClr val="F4F6F7"/>
-          </a:solidFill>
-          <a:ln w="15875">
-            <a:solidFill>
-              <a:srgbClr val="E8A33D"/>
-            </a:solidFill>
-            <a:prstDash val="solid"/>
-          </a:ln>
-        </p:spPr>
-      </p:sp>
-      <p:sp>
-        <p:nvSpPr>
-          <p:cNvPr id="14" name="Text 12"/>
-          <p:cNvSpPr txBox="1"/>
-          <p:nvPr/>
-        </p:nvSpPr>
-        <p:spPr>
-          <a:xfrm>
-            <a:off x="868680" y="5257800"/>
-            <a:ext cx="10515600" cy="1051560"/>
-          </a:xfrm>
-          <a:prstGeom prst="rect">
-            <a:avLst/>
-          </a:prstGeom>
-          <a:noFill/>
-          <a:ln/>
-        </p:spPr>
-        <p:txBody>
-          <a:bodyPr wrap="square" lIns="0" tIns="0" rIns="0" bIns="0" rtlCol="0" anchor="ctr"/>
-          <a:lstStyle/>
-          <a:p>
-            <a:pPr indent="0" marL="0">
-              <a:lnSpc>
-                <a:spcPct val="115000"/>
-              </a:lnSpc>
-              <a:buNone/>
-            </a:pPr>
-            <a:r>
-              <a:rPr lang="en-US" sz="1250" b="1" dirty="0">
-                <a:solidFill>
-                  <a:srgbClr val="8A5A12"/>
-                </a:solidFill>
-                <a:latin typeface="Calibri" pitchFamily="34" charset="0"/>
-                <a:ea typeface="Calibri" pitchFamily="34" charset="-122"/>
-                <a:cs typeface="Calibri" pitchFamily="34" charset="-120"/>
-              </a:rPr>
-              <a:t>IP status, stated plainly:  </a:t>
-            </a:r>
-            <a:pPr indent="0" marL="0">
-              <a:lnSpc>
-                <a:spcPct val="115000"/>
-              </a:lnSpc>
-              <a:buNone/>
-            </a:pPr>
-            <a:r>
-              <a:rPr lang="en-US" sz="1250" dirty="0">
-                <a:solidFill>
-                  <a:srgbClr val="16232F"/>
-                </a:solidFill>
-                <a:latin typeface="Calibri" pitchFamily="34" charset="0"/>
-                <a:ea typeface="Calibri" pitchFamily="34" charset="-122"/>
-                <a:cs typeface="Calibri" pitchFamily="34" charset="-120"/>
-              </a:rPr>
-              <a:t>a patent strategy and drafts exist internally. No provisional or utility application has been confirmed filed with the USPTO as of this writing — we will not claim "patent pending" until that's true.</a:t>
-            </a:r>
-            <a:endParaRPr lang="en-US" sz="1250" dirty="0"/>
-          </a:p>
-        </p:txBody>
-      </p:sp>
-      <p:sp>
-        <p:nvSpPr>
-          <p:cNvPr id="15" name="Text 13"/>
-          <p:cNvSpPr txBox="1"/>
-          <p:nvPr/>
-        </p:nvSpPr>
-        <p:spPr>
-          <a:xfrm>
-            <a:off x="11365992" y="6400800"/>
-            <a:ext cx="548640" cy="274320"/>
-          </a:xfrm>
-          <a:prstGeom prst="rect">
-            <a:avLst/>
-          </a:prstGeom>
-          <a:noFill/>
-          <a:ln/>
-        </p:spPr>
-        <p:txBody>
-          <a:bodyPr wrap="square" lIns="0" tIns="0" rIns="0" bIns="0" rtlCol="0" anchor="ctr"/>
-          <a:lstStyle/>
-          <a:p>
-            <a:pPr algn="r" indent="0" marL="0">
-              <a:buNone/>
-            </a:pPr>
-            <a:r>
-              <a:rPr lang="en-US" sz="1000" dirty="0">
-                <a:solidFill>
-                  <a:srgbClr val="9AA7AF"/>
                 </a:solidFill>
                 <a:latin typeface="Calibri" pitchFamily="34" charset="0"/>
                 <a:ea typeface="Calibri" pitchFamily="34" charset="-122"/>
@@ -3686,6 +3933,1236 @@
       </p:grpSpPr>
       <p:sp>
         <p:nvSpPr>
+          <p:cNvPr id="2" name="Text 0"/>
+          <p:cNvSpPr txBox="1"/>
+          <p:nvPr/>
+        </p:nvSpPr>
+        <p:spPr>
+          <a:xfrm>
+            <a:off x="640080" y="457200"/>
+            <a:ext cx="5486400" cy="320040"/>
+          </a:xfrm>
+          <a:prstGeom prst="rect">
+            <a:avLst/>
+          </a:prstGeom>
+          <a:noFill/>
+          <a:ln/>
+        </p:spPr>
+        <p:txBody>
+          <a:bodyPr wrap="square" lIns="0" tIns="0" rIns="0" bIns="0" rtlCol="0" anchor="ctr"/>
+          <a:lstStyle/>
+          <a:p>
+            <a:pPr indent="0" marL="0">
+              <a:buNone/>
+            </a:pPr>
+            <a:r>
+              <a:rPr lang="en-US" sz="1200" b="1" spc="200" kern="0" dirty="0">
+                <a:solidFill>
+                  <a:srgbClr val="2EC4B6"/>
+                </a:solidFill>
+                <a:latin typeface="Calibri" pitchFamily="34" charset="0"/>
+                <a:ea typeface="Calibri" pitchFamily="34" charset="-122"/>
+                <a:cs typeface="Calibri" pitchFamily="34" charset="-120"/>
+              </a:rPr>
+              <a:t>ROADMAP</a:t>
+            </a:r>
+            <a:endParaRPr lang="en-US" sz="1200" dirty="0"/>
+          </a:p>
+        </p:txBody>
+      </p:sp>
+      <p:sp>
+        <p:nvSpPr>
+          <p:cNvPr id="3" name="Text 1"/>
+          <p:cNvSpPr txBox="1"/>
+          <p:nvPr/>
+        </p:nvSpPr>
+        <p:spPr>
+          <a:xfrm>
+            <a:off x="640080" y="822960"/>
+            <a:ext cx="10881360" cy="777240"/>
+          </a:xfrm>
+          <a:prstGeom prst="rect">
+            <a:avLst/>
+          </a:prstGeom>
+          <a:noFill/>
+          <a:ln/>
+        </p:spPr>
+        <p:txBody>
+          <a:bodyPr wrap="square" lIns="0" tIns="0" rIns="0" bIns="0" rtlCol="0" anchor="ctr"/>
+          <a:lstStyle/>
+          <a:p>
+            <a:pPr indent="0" marL="0">
+              <a:buNone/>
+            </a:pPr>
+            <a:r>
+              <a:rPr lang="en-US" sz="2800" b="1" dirty="0">
+                <a:solidFill>
+                  <a:srgbClr val="FFFFFF"/>
+                </a:solidFill>
+                <a:latin typeface="Cambria" pitchFamily="34" charset="0"/>
+                <a:ea typeface="Cambria" pitchFamily="34" charset="-122"/>
+                <a:cs typeface="Cambria" pitchFamily="34" charset="-120"/>
+              </a:rPr>
+              <a:t>The one experiment that changes everything</a:t>
+            </a:r>
+            <a:endParaRPr lang="en-US" sz="2800" dirty="0"/>
+          </a:p>
+        </p:txBody>
+      </p:sp>
+      <p:sp>
+        <p:nvSpPr>
+          <p:cNvPr id="4" name="Text 2"/>
+          <p:cNvSpPr txBox="1"/>
+          <p:nvPr/>
+        </p:nvSpPr>
+        <p:spPr>
+          <a:xfrm>
+            <a:off x="640080" y="1554480"/>
+            <a:ext cx="10515600" cy="548640"/>
+          </a:xfrm>
+          <a:prstGeom prst="rect">
+            <a:avLst/>
+          </a:prstGeom>
+          <a:noFill/>
+          <a:ln/>
+        </p:spPr>
+        <p:txBody>
+          <a:bodyPr wrap="square" lIns="0" tIns="0" rIns="0" bIns="0" rtlCol="0" anchor="ctr"/>
+          <a:lstStyle/>
+          <a:p>
+            <a:pPr indent="0" marL="0">
+              <a:buNone/>
+            </a:pPr>
+            <a:r>
+              <a:rPr lang="en-US" sz="1400" dirty="0">
+                <a:solidFill>
+                  <a:srgbClr val="AEC2C8"/>
+                </a:solidFill>
+                <a:latin typeface="Calibri" pitchFamily="34" charset="0"/>
+                <a:ea typeface="Calibri" pitchFamily="34" charset="-122"/>
+                <a:cs typeface="Calibri" pitchFamily="34" charset="-120"/>
+              </a:rPr>
+              <a:t>Build the matched-promoter toggle circuit in B. subtilis, write a bit, damage the colony, let it regrow, read the bit back non-destructively via EIS.</a:t>
+            </a:r>
+            <a:endParaRPr lang="en-US" sz="1400" dirty="0"/>
+          </a:p>
+        </p:txBody>
+      </p:sp>
+      <p:sp>
+        <p:nvSpPr>
+          <p:cNvPr id="5" name="Shape 3"/>
+          <p:cNvSpPr/>
+          <p:nvPr/>
+        </p:nvSpPr>
+        <p:spPr>
+          <a:xfrm>
+            <a:off x="640080" y="2377440"/>
+            <a:ext cx="3566160" cy="2286000"/>
+          </a:xfrm>
+          <a:prstGeom prst="roundRect">
+            <a:avLst>
+              <a:gd name="adj" fmla="val 3200"/>
+            </a:avLst>
+          </a:prstGeom>
+          <a:solidFill>
+            <a:srgbClr val="132A4D"/>
+          </a:solidFill>
+          <a:ln/>
+        </p:spPr>
+      </p:sp>
+      <p:sp>
+        <p:nvSpPr>
+          <p:cNvPr id="6" name="Text 4"/>
+          <p:cNvSpPr txBox="1"/>
+          <p:nvPr/>
+        </p:nvSpPr>
+        <p:spPr>
+          <a:xfrm>
+            <a:off x="914400" y="2606040"/>
+            <a:ext cx="3017520" cy="914400"/>
+          </a:xfrm>
+          <a:prstGeom prst="rect">
+            <a:avLst/>
+          </a:prstGeom>
+          <a:noFill/>
+          <a:ln/>
+        </p:spPr>
+        <p:txBody>
+          <a:bodyPr wrap="square" lIns="0" tIns="0" rIns="0" bIns="0" rtlCol="0" anchor="ctr"/>
+          <a:lstStyle/>
+          <a:p>
+            <a:pPr indent="0" marL="0">
+              <a:buNone/>
+            </a:pPr>
+            <a:r>
+              <a:rPr lang="en-US" sz="3400" b="1" dirty="0">
+                <a:solidFill>
+                  <a:srgbClr val="2EC4B6"/>
+                </a:solidFill>
+                <a:latin typeface="Cambria" pitchFamily="34" charset="0"/>
+                <a:ea typeface="Cambria" pitchFamily="34" charset="-122"/>
+                <a:cs typeface="Cambria" pitchFamily="34" charset="-120"/>
+              </a:rPr>
+              <a:t>$10K-$30K</a:t>
+            </a:r>
+            <a:endParaRPr lang="en-US" sz="3400" dirty="0"/>
+          </a:p>
+        </p:txBody>
+      </p:sp>
+      <p:sp>
+        <p:nvSpPr>
+          <p:cNvPr id="7" name="Text 5"/>
+          <p:cNvSpPr txBox="1"/>
+          <p:nvPr/>
+        </p:nvSpPr>
+        <p:spPr>
+          <a:xfrm>
+            <a:off x="914400" y="3429000"/>
+            <a:ext cx="3017520" cy="1097280"/>
+          </a:xfrm>
+          <a:prstGeom prst="rect">
+            <a:avLst/>
+          </a:prstGeom>
+          <a:noFill/>
+          <a:ln/>
+        </p:spPr>
+        <p:txBody>
+          <a:bodyPr wrap="square" lIns="0" tIns="0" rIns="0" bIns="0" rtlCol="0" anchor="ctr"/>
+          <a:lstStyle/>
+          <a:p>
+            <a:pPr indent="0" marL="0">
+              <a:lnSpc>
+                <a:spcPct val="115000"/>
+              </a:lnSpc>
+              <a:buNone/>
+            </a:pPr>
+            <a:r>
+              <a:rPr lang="en-US" sz="1250" dirty="0">
+                <a:solidFill>
+                  <a:srgbClr val="CFE0DD"/>
+                </a:solidFill>
+                <a:latin typeface="Calibri" pitchFamily="34" charset="0"/>
+                <a:ea typeface="Calibri" pitchFamily="34" charset="-122"/>
+                <a:cs typeface="Calibri" pitchFamily="34" charset="-120"/>
+              </a:rPr>
+              <a:t>Cost — reagents, cloning, lab bench access</a:t>
+            </a:r>
+            <a:endParaRPr lang="en-US" sz="1250" dirty="0"/>
+          </a:p>
+        </p:txBody>
+      </p:sp>
+      <p:sp>
+        <p:nvSpPr>
+          <p:cNvPr id="8" name="Shape 6"/>
+          <p:cNvSpPr/>
+          <p:nvPr/>
+        </p:nvSpPr>
+        <p:spPr>
+          <a:xfrm>
+            <a:off x="4389120" y="2377440"/>
+            <a:ext cx="3566160" cy="2286000"/>
+          </a:xfrm>
+          <a:prstGeom prst="roundRect">
+            <a:avLst>
+              <a:gd name="adj" fmla="val 3200"/>
+            </a:avLst>
+          </a:prstGeom>
+          <a:solidFill>
+            <a:srgbClr val="132A4D"/>
+          </a:solidFill>
+          <a:ln/>
+        </p:spPr>
+      </p:sp>
+      <p:sp>
+        <p:nvSpPr>
+          <p:cNvPr id="9" name="Text 7"/>
+          <p:cNvSpPr txBox="1"/>
+          <p:nvPr/>
+        </p:nvSpPr>
+        <p:spPr>
+          <a:xfrm>
+            <a:off x="4663440" y="2606040"/>
+            <a:ext cx="3017520" cy="914400"/>
+          </a:xfrm>
+          <a:prstGeom prst="rect">
+            <a:avLst/>
+          </a:prstGeom>
+          <a:noFill/>
+          <a:ln/>
+        </p:spPr>
+        <p:txBody>
+          <a:bodyPr wrap="square" lIns="0" tIns="0" rIns="0" bIns="0" rtlCol="0" anchor="ctr"/>
+          <a:lstStyle/>
+          <a:p>
+            <a:pPr indent="0" marL="0">
+              <a:buNone/>
+            </a:pPr>
+            <a:r>
+              <a:rPr lang="en-US" sz="3400" b="1" dirty="0">
+                <a:solidFill>
+                  <a:srgbClr val="2EC4B6"/>
+                </a:solidFill>
+                <a:latin typeface="Cambria" pitchFamily="34" charset="0"/>
+                <a:ea typeface="Cambria" pitchFamily="34" charset="-122"/>
+                <a:cs typeface="Cambria" pitchFamily="34" charset="-120"/>
+              </a:rPr>
+              <a:t>6-12 mo</a:t>
+            </a:r>
+            <a:endParaRPr lang="en-US" sz="3400" dirty="0"/>
+          </a:p>
+        </p:txBody>
+      </p:sp>
+      <p:sp>
+        <p:nvSpPr>
+          <p:cNvPr id="10" name="Text 8"/>
+          <p:cNvSpPr txBox="1"/>
+          <p:nvPr/>
+        </p:nvSpPr>
+        <p:spPr>
+          <a:xfrm>
+            <a:off x="4663440" y="3429000"/>
+            <a:ext cx="3017520" cy="1097280"/>
+          </a:xfrm>
+          <a:prstGeom prst="rect">
+            <a:avLst/>
+          </a:prstGeom>
+          <a:noFill/>
+          <a:ln/>
+        </p:spPr>
+        <p:txBody>
+          <a:bodyPr wrap="square" lIns="0" tIns="0" rIns="0" bIns="0" rtlCol="0" anchor="ctr"/>
+          <a:lstStyle/>
+          <a:p>
+            <a:pPr indent="0" marL="0">
+              <a:lnSpc>
+                <a:spcPct val="115000"/>
+              </a:lnSpc>
+              <a:buNone/>
+            </a:pPr>
+            <a:r>
+              <a:rPr lang="en-US" sz="1250" dirty="0">
+                <a:solidFill>
+                  <a:srgbClr val="CFE0DD"/>
+                </a:solidFill>
+                <a:latin typeface="Calibri" pitchFamily="34" charset="0"/>
+                <a:ea typeface="Calibri" pitchFamily="34" charset="-122"/>
+                <a:cs typeface="Calibri" pitchFamily="34" charset="-120"/>
+              </a:rPr>
+              <a:t>Timeline to a clear yes/no answer</a:t>
+            </a:r>
+            <a:endParaRPr lang="en-US" sz="1250" dirty="0"/>
+          </a:p>
+        </p:txBody>
+      </p:sp>
+      <p:sp>
+        <p:nvSpPr>
+          <p:cNvPr id="11" name="Shape 9"/>
+          <p:cNvSpPr/>
+          <p:nvPr/>
+        </p:nvSpPr>
+        <p:spPr>
+          <a:xfrm>
+            <a:off x="8138160" y="2377440"/>
+            <a:ext cx="3566160" cy="2286000"/>
+          </a:xfrm>
+          <a:prstGeom prst="roundRect">
+            <a:avLst>
+              <a:gd name="adj" fmla="val 3200"/>
+            </a:avLst>
+          </a:prstGeom>
+          <a:solidFill>
+            <a:srgbClr val="132A4D"/>
+          </a:solidFill>
+          <a:ln/>
+        </p:spPr>
+      </p:sp>
+      <p:sp>
+        <p:nvSpPr>
+          <p:cNvPr id="12" name="Text 10"/>
+          <p:cNvSpPr txBox="1"/>
+          <p:nvPr/>
+        </p:nvSpPr>
+        <p:spPr>
+          <a:xfrm>
+            <a:off x="8412480" y="2606040"/>
+            <a:ext cx="3017520" cy="914400"/>
+          </a:xfrm>
+          <a:prstGeom prst="rect">
+            <a:avLst/>
+          </a:prstGeom>
+          <a:noFill/>
+          <a:ln/>
+        </p:spPr>
+        <p:txBody>
+          <a:bodyPr wrap="square" lIns="0" tIns="0" rIns="0" bIns="0" rtlCol="0" anchor="ctr"/>
+          <a:lstStyle/>
+          <a:p>
+            <a:pPr indent="0" marL="0">
+              <a:buNone/>
+            </a:pPr>
+            <a:r>
+              <a:rPr lang="en-US" sz="3400" b="1" dirty="0">
+                <a:solidFill>
+                  <a:srgbClr val="2EC4B6"/>
+                </a:solidFill>
+                <a:latin typeface="Cambria" pitchFamily="34" charset="0"/>
+                <a:ea typeface="Cambria" pitchFamily="34" charset="-122"/>
+                <a:cs typeface="Cambria" pitchFamily="34" charset="-120"/>
+              </a:rPr>
+              <a:t>2</a:t>
+            </a:r>
+            <a:endParaRPr lang="en-US" sz="3400" dirty="0"/>
+          </a:p>
+        </p:txBody>
+      </p:sp>
+      <p:sp>
+        <p:nvSpPr>
+          <p:cNvPr id="13" name="Text 11"/>
+          <p:cNvSpPr txBox="1"/>
+          <p:nvPr/>
+        </p:nvSpPr>
+        <p:spPr>
+          <a:xfrm>
+            <a:off x="8412480" y="3429000"/>
+            <a:ext cx="3017520" cy="1097280"/>
+          </a:xfrm>
+          <a:prstGeom prst="rect">
+            <a:avLst/>
+          </a:prstGeom>
+          <a:noFill/>
+          <a:ln/>
+        </p:spPr>
+        <p:txBody>
+          <a:bodyPr wrap="square" lIns="0" tIns="0" rIns="0" bIns="0" rtlCol="0" anchor="ctr"/>
+          <a:lstStyle/>
+          <a:p>
+            <a:pPr indent="0" marL="0">
+              <a:lnSpc>
+                <a:spcPct val="115000"/>
+              </a:lnSpc>
+              <a:buNone/>
+            </a:pPr>
+            <a:r>
+              <a:rPr lang="en-US" sz="1250" dirty="0">
+                <a:solidFill>
+                  <a:srgbClr val="CFE0DD"/>
+                </a:solidFill>
+                <a:latin typeface="Calibri" pitchFamily="34" charset="0"/>
+                <a:ea typeface="Calibri" pitchFamily="34" charset="-122"/>
+                <a:cs typeface="Calibri" pitchFamily="34" charset="-120"/>
+              </a:rPr>
+              <a:t>Outcomes only — validate the mechanism, or cleanly redirect to methylation, next by our own ranking</a:t>
+            </a:r>
+            <a:endParaRPr lang="en-US" sz="1250" dirty="0"/>
+          </a:p>
+        </p:txBody>
+      </p:sp>
+      <p:sp>
+        <p:nvSpPr>
+          <p:cNvPr id="14" name="Text 12"/>
+          <p:cNvSpPr txBox="1"/>
+          <p:nvPr/>
+        </p:nvSpPr>
+        <p:spPr>
+          <a:xfrm>
+            <a:off x="640080" y="4937760"/>
+            <a:ext cx="10515600" cy="457200"/>
+          </a:xfrm>
+          <a:prstGeom prst="rect">
+            <a:avLst/>
+          </a:prstGeom>
+          <a:noFill/>
+          <a:ln/>
+        </p:spPr>
+        <p:txBody>
+          <a:bodyPr wrap="square" lIns="0" tIns="0" rIns="0" bIns="0" rtlCol="0" anchor="ctr"/>
+          <a:lstStyle/>
+          <a:p>
+            <a:pPr indent="0" marL="0">
+              <a:buNone/>
+            </a:pPr>
+            <a:r>
+              <a:rPr lang="en-US" sz="1400" i="1" dirty="0">
+                <a:solidFill>
+                  <a:srgbClr val="8FA6AE"/>
+                </a:solidFill>
+                <a:latin typeface="Calibri" pitchFamily="34" charset="0"/>
+                <a:ea typeface="Calibri" pitchFamily="34" charset="-122"/>
+                <a:cs typeface="Calibri" pitchFamily="34" charset="-120"/>
+              </a:rPr>
+              <a:t>Deliberately the cheapest, fastest experiment that produces a real answer — not a moonshot ask.</a:t>
+            </a:r>
+            <a:endParaRPr lang="en-US" sz="1400" dirty="0"/>
+          </a:p>
+        </p:txBody>
+      </p:sp>
+      <p:sp>
+        <p:nvSpPr>
+          <p:cNvPr id="15" name="Text 13"/>
+          <p:cNvSpPr txBox="1"/>
+          <p:nvPr/>
+        </p:nvSpPr>
+        <p:spPr>
+          <a:xfrm>
+            <a:off x="11365992" y="6400800"/>
+            <a:ext cx="548640" cy="274320"/>
+          </a:xfrm>
+          <a:prstGeom prst="rect">
+            <a:avLst/>
+          </a:prstGeom>
+          <a:noFill/>
+          <a:ln/>
+        </p:spPr>
+        <p:txBody>
+          <a:bodyPr wrap="square" lIns="0" tIns="0" rIns="0" bIns="0" rtlCol="0" anchor="ctr"/>
+          <a:lstStyle/>
+          <a:p>
+            <a:pPr algn="r" indent="0" marL="0">
+              <a:buNone/>
+            </a:pPr>
+            <a:r>
+              <a:rPr lang="en-US" sz="1000" dirty="0">
+                <a:solidFill>
+                  <a:srgbClr val="6E7F91"/>
+                </a:solidFill>
+                <a:latin typeface="Calibri" pitchFamily="34" charset="0"/>
+                <a:ea typeface="Calibri" pitchFamily="34" charset="-122"/>
+                <a:cs typeface="Calibri" pitchFamily="34" charset="-120"/>
+              </a:rPr>
+              <a:t>12</a:t>
+            </a:r>
+            <a:endParaRPr lang="en-US" sz="1000" dirty="0"/>
+          </a:p>
+        </p:txBody>
+      </p:sp>
+    </p:spTree>
+  </p:cSld>
+  <p:clrMapOvr>
+    <a:masterClrMapping/>
+  </p:clrMapOvr>
+</p:sld>
+</file>
+
+<file path=ppt/slides/slide13.xml><?xml version="1.0" encoding="utf-8"?>
+<p:sld xmlns:a="http://schemas.openxmlformats.org/drawingml/2006/main" xmlns:r="http://schemas.openxmlformats.org/officeDocument/2006/relationships" xmlns:p="http://schemas.openxmlformats.org/presentationml/2006/main">
+  <p:cSld name="Slide 13">
+    <p:bg>
+      <p:bgPr>
+        <a:solidFill>
+          <a:srgbClr val="F4F6F7"/>
+        </a:solidFill>
+      </p:bgPr>
+    </p:bg>
+    <p:spTree>
+      <p:nvGrpSpPr>
+        <p:cNvPr id="1" name=""/>
+        <p:cNvGrpSpPr/>
+        <p:nvPr/>
+      </p:nvGrpSpPr>
+      <p:grpSpPr>
+        <a:xfrm>
+          <a:off x="0" y="0"/>
+          <a:ext cx="0" cy="0"/>
+          <a:chOff x="0" y="0"/>
+          <a:chExt cx="0" cy="0"/>
+        </a:xfrm>
+      </p:grpSpPr>
+      <p:sp>
+        <p:nvSpPr>
+          <p:cNvPr id="2" name="Text 0"/>
+          <p:cNvSpPr txBox="1"/>
+          <p:nvPr/>
+        </p:nvSpPr>
+        <p:spPr>
+          <a:xfrm>
+            <a:off x="640080" y="457200"/>
+            <a:ext cx="5486400" cy="320040"/>
+          </a:xfrm>
+          <a:prstGeom prst="rect">
+            <a:avLst/>
+          </a:prstGeom>
+          <a:noFill/>
+          <a:ln/>
+        </p:spPr>
+        <p:txBody>
+          <a:bodyPr wrap="square" lIns="0" tIns="0" rIns="0" bIns="0" rtlCol="0" anchor="ctr"/>
+          <a:lstStyle/>
+          <a:p>
+            <a:pPr indent="0" marL="0">
+              <a:buNone/>
+            </a:pPr>
+            <a:r>
+              <a:rPr lang="en-US" sz="1200" b="1" spc="200" kern="0" dirty="0">
+                <a:solidFill>
+                  <a:srgbClr val="1C8F84"/>
+                </a:solidFill>
+                <a:latin typeface="Calibri" pitchFamily="34" charset="0"/>
+                <a:ea typeface="Calibri" pitchFamily="34" charset="-122"/>
+                <a:cs typeface="Calibri" pitchFamily="34" charset="-120"/>
+              </a:rPr>
+              <a:t>WHAT WE'RE ASKING FOR</a:t>
+            </a:r>
+            <a:endParaRPr lang="en-US" sz="1200" dirty="0"/>
+          </a:p>
+        </p:txBody>
+      </p:sp>
+      <p:sp>
+        <p:nvSpPr>
+          <p:cNvPr id="3" name="Text 1"/>
+          <p:cNvSpPr txBox="1"/>
+          <p:nvPr/>
+        </p:nvSpPr>
+        <p:spPr>
+          <a:xfrm>
+            <a:off x="640080" y="777240"/>
+            <a:ext cx="10881360" cy="731520"/>
+          </a:xfrm>
+          <a:prstGeom prst="rect">
+            <a:avLst/>
+          </a:prstGeom>
+          <a:noFill/>
+          <a:ln/>
+        </p:spPr>
+        <p:txBody>
+          <a:bodyPr wrap="square" lIns="0" tIns="0" rIns="0" bIns="0" rtlCol="0" anchor="ctr"/>
+          <a:lstStyle/>
+          <a:p>
+            <a:pPr indent="0" marL="0">
+              <a:buNone/>
+            </a:pPr>
+            <a:r>
+              <a:rPr lang="en-US" sz="2700" b="1" dirty="0">
+                <a:solidFill>
+                  <a:srgbClr val="16232F"/>
+                </a:solidFill>
+                <a:latin typeface="Cambria" pitchFamily="34" charset="0"/>
+                <a:ea typeface="Cambria" pitchFamily="34" charset="-122"/>
+                <a:cs typeface="Cambria" pitchFamily="34" charset="-120"/>
+              </a:rPr>
+              <a:t>Deliberately small — not a seed round</a:t>
+            </a:r>
+            <a:endParaRPr lang="en-US" sz="2700" dirty="0"/>
+          </a:p>
+        </p:txBody>
+      </p:sp>
+      <p:sp>
+        <p:nvSpPr>
+          <p:cNvPr id="4" name="Text 2"/>
+          <p:cNvSpPr txBox="1"/>
+          <p:nvPr/>
+        </p:nvSpPr>
+        <p:spPr>
+          <a:xfrm>
+            <a:off x="640080" y="1508760"/>
+            <a:ext cx="10515600" cy="457200"/>
+          </a:xfrm>
+          <a:prstGeom prst="rect">
+            <a:avLst/>
+          </a:prstGeom>
+          <a:noFill/>
+          <a:ln/>
+        </p:spPr>
+        <p:txBody>
+          <a:bodyPr wrap="square" lIns="0" tIns="0" rIns="0" bIns="0" rtlCol="0" anchor="ctr"/>
+          <a:lstStyle/>
+          <a:p>
+            <a:pPr indent="0" marL="0">
+              <a:buNone/>
+            </a:pPr>
+            <a:r>
+              <a:rPr lang="en-US" sz="1350" dirty="0">
+                <a:solidFill>
+                  <a:srgbClr val="5B6B77"/>
+                </a:solidFill>
+                <a:latin typeface="Calibri" pitchFamily="34" charset="0"/>
+                <a:ea typeface="Calibri" pitchFamily="34" charset="-122"/>
+                <a:cs typeface="Calibri" pitchFamily="34" charset="-120"/>
+              </a:rPr>
+              <a:t>We are not raising a general-purpose seed round right now. This stage needs something narrower and cheaper:</a:t>
+            </a:r>
+            <a:endParaRPr lang="en-US" sz="1350" dirty="0"/>
+          </a:p>
+        </p:txBody>
+      </p:sp>
+      <p:sp>
+        <p:nvSpPr>
+          <p:cNvPr id="5" name="Shape 3"/>
+          <p:cNvSpPr/>
+          <p:nvPr/>
+        </p:nvSpPr>
+        <p:spPr>
+          <a:xfrm>
+            <a:off x="640080" y="2103120"/>
+            <a:ext cx="457200" cy="457200"/>
+          </a:xfrm>
+          <a:prstGeom prst="ellipse">
+            <a:avLst/>
+          </a:prstGeom>
+          <a:solidFill>
+            <a:srgbClr val="2EC4B6"/>
+          </a:solidFill>
+          <a:ln/>
+        </p:spPr>
+      </p:sp>
+      <p:sp>
+        <p:nvSpPr>
+          <p:cNvPr id="6" name="Text 4"/>
+          <p:cNvSpPr txBox="1"/>
+          <p:nvPr/>
+        </p:nvSpPr>
+        <p:spPr>
+          <a:xfrm>
+            <a:off x="640080" y="2103120"/>
+            <a:ext cx="457200" cy="457200"/>
+          </a:xfrm>
+          <a:prstGeom prst="rect">
+            <a:avLst/>
+          </a:prstGeom>
+          <a:noFill/>
+          <a:ln/>
+        </p:spPr>
+        <p:txBody>
+          <a:bodyPr wrap="square" lIns="0" tIns="0" rIns="0" bIns="0" rtlCol="0" anchor="ctr"/>
+          <a:lstStyle/>
+          <a:p>
+            <a:pPr algn="ctr" indent="0" marL="0">
+              <a:buNone/>
+            </a:pPr>
+            <a:r>
+              <a:rPr lang="en-US" sz="1800" b="1" dirty="0">
+                <a:solidFill>
+                  <a:srgbClr val="FFFFFF"/>
+                </a:solidFill>
+                <a:latin typeface="Cambria" pitchFamily="34" charset="0"/>
+                <a:ea typeface="Cambria" pitchFamily="34" charset="-122"/>
+                <a:cs typeface="Cambria" pitchFamily="34" charset="-120"/>
+              </a:rPr>
+              <a:t>1</a:t>
+            </a:r>
+            <a:endParaRPr lang="en-US" sz="1800" dirty="0"/>
+          </a:p>
+        </p:txBody>
+      </p:sp>
+      <p:sp>
+        <p:nvSpPr>
+          <p:cNvPr id="7" name="Text 5"/>
+          <p:cNvSpPr txBox="1"/>
+          <p:nvPr/>
+        </p:nvSpPr>
+        <p:spPr>
+          <a:xfrm>
+            <a:off x="1325880" y="2057400"/>
+            <a:ext cx="9875520" cy="365760"/>
+          </a:xfrm>
+          <a:prstGeom prst="rect">
+            <a:avLst/>
+          </a:prstGeom>
+          <a:noFill/>
+          <a:ln/>
+        </p:spPr>
+        <p:txBody>
+          <a:bodyPr wrap="square" lIns="0" tIns="0" rIns="0" bIns="0" rtlCol="0" anchor="ctr"/>
+          <a:lstStyle/>
+          <a:p>
+            <a:pPr indent="0" marL="0">
+              <a:buNone/>
+            </a:pPr>
+            <a:r>
+              <a:rPr lang="en-US" sz="1600" b="1" dirty="0">
+                <a:solidFill>
+                  <a:srgbClr val="16232F"/>
+                </a:solidFill>
+                <a:latin typeface="Cambria" pitchFamily="34" charset="0"/>
+                <a:ea typeface="Cambria" pitchFamily="34" charset="-122"/>
+                <a:cs typeface="Cambria" pitchFamily="34" charset="-120"/>
+              </a:rPr>
+              <a:t>Funding for the wet-lab validation experiment</a:t>
+            </a:r>
+            <a:endParaRPr lang="en-US" sz="1600" dirty="0"/>
+          </a:p>
+        </p:txBody>
+      </p:sp>
+      <p:sp>
+        <p:nvSpPr>
+          <p:cNvPr id="8" name="Text 6"/>
+          <p:cNvSpPr txBox="1"/>
+          <p:nvPr/>
+        </p:nvSpPr>
+        <p:spPr>
+          <a:xfrm>
+            <a:off x="1325880" y="2468880"/>
+            <a:ext cx="9875520" cy="594360"/>
+          </a:xfrm>
+          <a:prstGeom prst="rect">
+            <a:avLst/>
+          </a:prstGeom>
+          <a:noFill/>
+          <a:ln/>
+        </p:spPr>
+        <p:txBody>
+          <a:bodyPr wrap="square" lIns="0" tIns="0" rIns="0" bIns="0" rtlCol="0" anchor="ctr"/>
+          <a:lstStyle/>
+          <a:p>
+            <a:pPr indent="0" marL="0">
+              <a:lnSpc>
+                <a:spcPct val="115000"/>
+              </a:lnSpc>
+              <a:buNone/>
+            </a:pPr>
+            <a:r>
+              <a:rPr lang="en-US" sz="1250" dirty="0">
+                <a:solidFill>
+                  <a:srgbClr val="5B6B77"/>
+                </a:solidFill>
+                <a:latin typeface="Calibri" pitchFamily="34" charset="0"/>
+                <a:ea typeface="Calibri" pitchFamily="34" charset="-122"/>
+                <a:cs typeface="Calibri" pitchFamily="34" charset="-120"/>
+              </a:rPr>
+              <a:t>The ~$10K-$30K described on the roadmap slide: reagents, plasmid synthesis/cloning, lab bench access.</a:t>
+            </a:r>
+            <a:endParaRPr lang="en-US" sz="1250" dirty="0"/>
+          </a:p>
+        </p:txBody>
+      </p:sp>
+      <p:sp>
+        <p:nvSpPr>
+          <p:cNvPr id="9" name="Shape 7"/>
+          <p:cNvSpPr/>
+          <p:nvPr/>
+        </p:nvSpPr>
+        <p:spPr>
+          <a:xfrm>
+            <a:off x="640080" y="3200400"/>
+            <a:ext cx="457200" cy="457200"/>
+          </a:xfrm>
+          <a:prstGeom prst="ellipse">
+            <a:avLst/>
+          </a:prstGeom>
+          <a:solidFill>
+            <a:srgbClr val="2EC4B6"/>
+          </a:solidFill>
+          <a:ln/>
+        </p:spPr>
+      </p:sp>
+      <p:sp>
+        <p:nvSpPr>
+          <p:cNvPr id="10" name="Text 8"/>
+          <p:cNvSpPr txBox="1"/>
+          <p:nvPr/>
+        </p:nvSpPr>
+        <p:spPr>
+          <a:xfrm>
+            <a:off x="640080" y="3200400"/>
+            <a:ext cx="457200" cy="457200"/>
+          </a:xfrm>
+          <a:prstGeom prst="rect">
+            <a:avLst/>
+          </a:prstGeom>
+          <a:noFill/>
+          <a:ln/>
+        </p:spPr>
+        <p:txBody>
+          <a:bodyPr wrap="square" lIns="0" tIns="0" rIns="0" bIns="0" rtlCol="0" anchor="ctr"/>
+          <a:lstStyle/>
+          <a:p>
+            <a:pPr algn="ctr" indent="0" marL="0">
+              <a:buNone/>
+            </a:pPr>
+            <a:r>
+              <a:rPr lang="en-US" sz="1800" b="1" dirty="0">
+                <a:solidFill>
+                  <a:srgbClr val="FFFFFF"/>
+                </a:solidFill>
+                <a:latin typeface="Cambria" pitchFamily="34" charset="0"/>
+                <a:ea typeface="Cambria" pitchFamily="34" charset="-122"/>
+                <a:cs typeface="Cambria" pitchFamily="34" charset="-120"/>
+              </a:rPr>
+              <a:t>2</a:t>
+            </a:r>
+            <a:endParaRPr lang="en-US" sz="1800" dirty="0"/>
+          </a:p>
+        </p:txBody>
+      </p:sp>
+      <p:sp>
+        <p:nvSpPr>
+          <p:cNvPr id="11" name="Text 9"/>
+          <p:cNvSpPr txBox="1"/>
+          <p:nvPr/>
+        </p:nvSpPr>
+        <p:spPr>
+          <a:xfrm>
+            <a:off x="1325880" y="3154680"/>
+            <a:ext cx="9875520" cy="365760"/>
+          </a:xfrm>
+          <a:prstGeom prst="rect">
+            <a:avLst/>
+          </a:prstGeom>
+          <a:noFill/>
+          <a:ln/>
+        </p:spPr>
+        <p:txBody>
+          <a:bodyPr wrap="square" lIns="0" tIns="0" rIns="0" bIns="0" rtlCol="0" anchor="ctr"/>
+          <a:lstStyle/>
+          <a:p>
+            <a:pPr indent="0" marL="0">
+              <a:buNone/>
+            </a:pPr>
+            <a:r>
+              <a:rPr lang="en-US" sz="1600" b="1" dirty="0">
+                <a:solidFill>
+                  <a:srgbClr val="16232F"/>
+                </a:solidFill>
+                <a:latin typeface="Cambria" pitchFamily="34" charset="0"/>
+                <a:ea typeface="Cambria" pitchFamily="34" charset="-122"/>
+                <a:cs typeface="Cambria" pitchFamily="34" charset="-120"/>
+              </a:rPr>
+              <a:t>Budget to hire a paid synthetic-biology consultant</a:t>
+            </a:r>
+            <a:endParaRPr lang="en-US" sz="1600" dirty="0"/>
+          </a:p>
+        </p:txBody>
+      </p:sp>
+      <p:sp>
+        <p:nvSpPr>
+          <p:cNvPr id="12" name="Text 10"/>
+          <p:cNvSpPr txBox="1"/>
+          <p:nvPr/>
+        </p:nvSpPr>
+        <p:spPr>
+          <a:xfrm>
+            <a:off x="1325880" y="3566160"/>
+            <a:ext cx="9875520" cy="594360"/>
+          </a:xfrm>
+          <a:prstGeom prst="rect">
+            <a:avLst/>
+          </a:prstGeom>
+          <a:noFill/>
+          <a:ln/>
+        </p:spPr>
+        <p:txBody>
+          <a:bodyPr wrap="square" lIns="0" tIns="0" rIns="0" bIns="0" rtlCol="0" anchor="ctr"/>
+          <a:lstStyle/>
+          <a:p>
+            <a:pPr indent="0" marL="0">
+              <a:lnSpc>
+                <a:spcPct val="115000"/>
+              </a:lnSpc>
+              <a:buNone/>
+            </a:pPr>
+            <a:r>
+              <a:rPr lang="en-US" sz="1250" dirty="0">
+                <a:solidFill>
+                  <a:srgbClr val="5B6B77"/>
+                </a:solidFill>
+                <a:latin typeface="Calibri" pitchFamily="34" charset="0"/>
+                <a:ea typeface="Calibri" pitchFamily="34" charset="-122"/>
+                <a:cs typeface="Calibri" pitchFamily="34" charset="-120"/>
+              </a:rPr>
+              <a:t>A real expert's time to review and help execute the toggle-circuit build — not just informal mentoring hours. We'd rather pay for a few weeks of real expertise than move forward on a design nobody with domain experience has pressure-tested.</a:t>
+            </a:r>
+            <a:endParaRPr lang="en-US" sz="1250" dirty="0"/>
+          </a:p>
+        </p:txBody>
+      </p:sp>
+      <p:sp>
+        <p:nvSpPr>
+          <p:cNvPr id="13" name="Shape 11"/>
+          <p:cNvSpPr/>
+          <p:nvPr/>
+        </p:nvSpPr>
+        <p:spPr>
+          <a:xfrm>
+            <a:off x="640080" y="4297680"/>
+            <a:ext cx="457200" cy="457200"/>
+          </a:xfrm>
+          <a:prstGeom prst="ellipse">
+            <a:avLst/>
+          </a:prstGeom>
+          <a:solidFill>
+            <a:srgbClr val="2EC4B6"/>
+          </a:solidFill>
+          <a:ln/>
+        </p:spPr>
+      </p:sp>
+      <p:sp>
+        <p:nvSpPr>
+          <p:cNvPr id="14" name="Text 12"/>
+          <p:cNvSpPr txBox="1"/>
+          <p:nvPr/>
+        </p:nvSpPr>
+        <p:spPr>
+          <a:xfrm>
+            <a:off x="640080" y="4297680"/>
+            <a:ext cx="457200" cy="457200"/>
+          </a:xfrm>
+          <a:prstGeom prst="rect">
+            <a:avLst/>
+          </a:prstGeom>
+          <a:noFill/>
+          <a:ln/>
+        </p:spPr>
+        <p:txBody>
+          <a:bodyPr wrap="square" lIns="0" tIns="0" rIns="0" bIns="0" rtlCol="0" anchor="ctr"/>
+          <a:lstStyle/>
+          <a:p>
+            <a:pPr algn="ctr" indent="0" marL="0">
+              <a:buNone/>
+            </a:pPr>
+            <a:r>
+              <a:rPr lang="en-US" sz="1800" b="1" dirty="0">
+                <a:solidFill>
+                  <a:srgbClr val="FFFFFF"/>
+                </a:solidFill>
+                <a:latin typeface="Cambria" pitchFamily="34" charset="0"/>
+                <a:ea typeface="Cambria" pitchFamily="34" charset="-122"/>
+                <a:cs typeface="Cambria" pitchFamily="34" charset="-120"/>
+              </a:rPr>
+              <a:t>3</a:t>
+            </a:r>
+            <a:endParaRPr lang="en-US" sz="1800" dirty="0"/>
+          </a:p>
+        </p:txBody>
+      </p:sp>
+      <p:sp>
+        <p:nvSpPr>
+          <p:cNvPr id="15" name="Text 13"/>
+          <p:cNvSpPr txBox="1"/>
+          <p:nvPr/>
+        </p:nvSpPr>
+        <p:spPr>
+          <a:xfrm>
+            <a:off x="1325880" y="4251960"/>
+            <a:ext cx="9875520" cy="365760"/>
+          </a:xfrm>
+          <a:prstGeom prst="rect">
+            <a:avLst/>
+          </a:prstGeom>
+          <a:noFill/>
+          <a:ln/>
+        </p:spPr>
+        <p:txBody>
+          <a:bodyPr wrap="square" lIns="0" tIns="0" rIns="0" bIns="0" rtlCol="0" anchor="ctr"/>
+          <a:lstStyle/>
+          <a:p>
+            <a:pPr indent="0" marL="0">
+              <a:buNone/>
+            </a:pPr>
+            <a:r>
+              <a:rPr lang="en-US" sz="1600" b="1" dirty="0">
+                <a:solidFill>
+                  <a:srgbClr val="16232F"/>
+                </a:solidFill>
+                <a:latin typeface="Cambria" pitchFamily="34" charset="0"/>
+                <a:ea typeface="Cambria" pitchFamily="34" charset="-122"/>
+                <a:cs typeface="Cambria" pitchFamily="34" charset="-120"/>
+              </a:rPr>
+              <a:t>Lab access &amp; partnership introductions</a:t>
+            </a:r>
+            <a:endParaRPr lang="en-US" sz="1600" dirty="0"/>
+          </a:p>
+        </p:txBody>
+      </p:sp>
+      <p:sp>
+        <p:nvSpPr>
+          <p:cNvPr id="16" name="Text 14"/>
+          <p:cNvSpPr txBox="1"/>
+          <p:nvPr/>
+        </p:nvSpPr>
+        <p:spPr>
+          <a:xfrm>
+            <a:off x="1325880" y="4663440"/>
+            <a:ext cx="9875520" cy="594360"/>
+          </a:xfrm>
+          <a:prstGeom prst="rect">
+            <a:avLst/>
+          </a:prstGeom>
+          <a:noFill/>
+          <a:ln/>
+        </p:spPr>
+        <p:txBody>
+          <a:bodyPr wrap="square" lIns="0" tIns="0" rIns="0" bIns="0" rtlCol="0" anchor="ctr"/>
+          <a:lstStyle/>
+          <a:p>
+            <a:pPr indent="0" marL="0">
+              <a:lnSpc>
+                <a:spcPct val="115000"/>
+              </a:lnSpc>
+              <a:buNone/>
+            </a:pPr>
+            <a:r>
+              <a:rPr lang="en-US" sz="1250" dirty="0">
+                <a:solidFill>
+                  <a:srgbClr val="5B6B77"/>
+                </a:solidFill>
+                <a:latin typeface="Calibri" pitchFamily="34" charset="0"/>
+                <a:ea typeface="Calibri" pitchFamily="34" charset="-122"/>
+                <a:cs typeface="Calibri" pitchFamily="34" charset="-120"/>
+              </a:rPr>
+              <a:t>Standard bacterial transformation and plasmid cloning — B. subtilis is a workhorse organism, a far more common skill than planarian-specific culture.</a:t>
+            </a:r>
+            <a:endParaRPr lang="en-US" sz="1250" dirty="0"/>
+          </a:p>
+        </p:txBody>
+      </p:sp>
+      <p:sp>
+        <p:nvSpPr>
+          <p:cNvPr id="17" name="Shape 15"/>
+          <p:cNvSpPr/>
+          <p:nvPr/>
+        </p:nvSpPr>
+        <p:spPr>
+          <a:xfrm>
+            <a:off x="640080" y="5532120"/>
+            <a:ext cx="10972800" cy="868680"/>
+          </a:xfrm>
+          <a:prstGeom prst="roundRect">
+            <a:avLst>
+              <a:gd name="adj" fmla="val 8421"/>
+            </a:avLst>
+          </a:prstGeom>
+          <a:solidFill>
+            <a:srgbClr val="EAF6F4"/>
+          </a:solidFill>
+          <a:ln w="15875">
+            <a:solidFill>
+              <a:srgbClr val="1C8F84"/>
+            </a:solidFill>
+            <a:prstDash val="solid"/>
+          </a:ln>
+        </p:spPr>
+      </p:sp>
+      <p:sp>
+        <p:nvSpPr>
+          <p:cNvPr id="18" name="Text 16"/>
+          <p:cNvSpPr txBox="1"/>
+          <p:nvPr/>
+        </p:nvSpPr>
+        <p:spPr>
+          <a:xfrm>
+            <a:off x="868680" y="5532120"/>
+            <a:ext cx="10515600" cy="868680"/>
+          </a:xfrm>
+          <a:prstGeom prst="rect">
+            <a:avLst/>
+          </a:prstGeom>
+          <a:noFill/>
+          <a:ln/>
+        </p:spPr>
+        <p:txBody>
+          <a:bodyPr wrap="square" lIns="0" tIns="0" rIns="0" bIns="0" rtlCol="0" anchor="ctr"/>
+          <a:lstStyle/>
+          <a:p>
+            <a:pPr indent="0" marL="0">
+              <a:lnSpc>
+                <a:spcPct val="110000"/>
+              </a:lnSpc>
+              <a:buNone/>
+            </a:pPr>
+            <a:r>
+              <a:rPr lang="en-US" sz="1250" b="1" dirty="0">
+                <a:solidFill>
+                  <a:srgbClr val="1C8F84"/>
+                </a:solidFill>
+                <a:latin typeface="Calibri" pitchFamily="34" charset="0"/>
+                <a:ea typeface="Calibri" pitchFamily="34" charset="-122"/>
+                <a:cs typeface="Calibri" pitchFamily="34" charset="-120"/>
+              </a:rPr>
+              <a:t>IP status:  </a:t>
+            </a:r>
+            <a:pPr indent="0" marL="0">
+              <a:lnSpc>
+                <a:spcPct val="110000"/>
+              </a:lnSpc>
+              <a:buNone/>
+            </a:pPr>
+            <a:r>
+              <a:rPr lang="en-US" sz="1250" dirty="0">
+                <a:solidFill>
+                  <a:srgbClr val="16232F"/>
+                </a:solidFill>
+                <a:latin typeface="Calibri" pitchFamily="34" charset="0"/>
+                <a:ea typeface="Calibri" pitchFamily="34" charset="-122"/>
+                <a:cs typeface="Calibri" pitchFamily="34" charset="-120"/>
+              </a:rPr>
+              <a:t>patent applications filed with the USPTO covering the Bio-RAID fault-tolerance architecture, self-healing recovery protocol, and environment-adaptive longevity system. Status: filed, pending examination.</a:t>
+            </a:r>
+            <a:endParaRPr lang="en-US" sz="1250" dirty="0"/>
+          </a:p>
+        </p:txBody>
+      </p:sp>
+      <p:sp>
+        <p:nvSpPr>
+          <p:cNvPr id="19" name="Text 17"/>
+          <p:cNvSpPr txBox="1"/>
+          <p:nvPr/>
+        </p:nvSpPr>
+        <p:spPr>
+          <a:xfrm>
+            <a:off x="11365992" y="6400800"/>
+            <a:ext cx="548640" cy="274320"/>
+          </a:xfrm>
+          <a:prstGeom prst="rect">
+            <a:avLst/>
+          </a:prstGeom>
+          <a:noFill/>
+          <a:ln/>
+        </p:spPr>
+        <p:txBody>
+          <a:bodyPr wrap="square" lIns="0" tIns="0" rIns="0" bIns="0" rtlCol="0" anchor="ctr"/>
+          <a:lstStyle/>
+          <a:p>
+            <a:pPr algn="r" indent="0" marL="0">
+              <a:buNone/>
+            </a:pPr>
+            <a:r>
+              <a:rPr lang="en-US" sz="1000" dirty="0">
+                <a:solidFill>
+                  <a:srgbClr val="9AA7AF"/>
+                </a:solidFill>
+                <a:latin typeface="Calibri" pitchFamily="34" charset="0"/>
+                <a:ea typeface="Calibri" pitchFamily="34" charset="-122"/>
+                <a:cs typeface="Calibri" pitchFamily="34" charset="-120"/>
+              </a:rPr>
+              <a:t>13</a:t>
+            </a:r>
+            <a:endParaRPr lang="en-US" sz="1000" dirty="0"/>
+          </a:p>
+        </p:txBody>
+      </p:sp>
+    </p:spTree>
+  </p:cSld>
+  <p:clrMapOvr>
+    <a:masterClrMapping/>
+  </p:clrMapOvr>
+</p:sld>
+</file>
+
+<file path=ppt/slides/slide14.xml><?xml version="1.0" encoding="utf-8"?>
+<p:sld xmlns:a="http://schemas.openxmlformats.org/drawingml/2006/main" xmlns:r="http://schemas.openxmlformats.org/officeDocument/2006/relationships" xmlns:p="http://schemas.openxmlformats.org/presentationml/2006/main">
+  <p:cSld name="Slide 14">
+    <p:bg>
+      <p:bgPr>
+        <a:solidFill>
+          <a:srgbClr val="0B1F3A"/>
+        </a:solidFill>
+      </p:bgPr>
+    </p:bg>
+    <p:spTree>
+      <p:nvGrpSpPr>
+        <p:cNvPr id="1" name=""/>
+        <p:cNvGrpSpPr/>
+        <p:nvPr/>
+      </p:nvGrpSpPr>
+      <p:grpSpPr>
+        <a:xfrm>
+          <a:off x="0" y="0"/>
+          <a:ext cx="0" cy="0"/>
+          <a:chOff x="0" y="0"/>
+          <a:chExt cx="0" cy="0"/>
+        </a:xfrm>
+      </p:grpSpPr>
+      <p:sp>
+        <p:nvSpPr>
           <p:cNvPr id="2" name="Shape 0"/>
           <p:cNvSpPr/>
           <p:nvPr/>
@@ -3714,7 +5191,7 @@
         </p:nvSpPr>
         <p:spPr>
           <a:xfrm>
-            <a:off x="640080" y="548640"/>
+            <a:off x="640080" y="502920"/>
             <a:ext cx="5486400" cy="320040"/>
           </a:xfrm>
           <a:prstGeom prst="rect">
@@ -3753,8 +5230,8 @@
         </p:nvSpPr>
         <p:spPr>
           <a:xfrm>
-            <a:off x="640080" y="914400"/>
-            <a:ext cx="7315200" cy="548640"/>
+            <a:off x="640080" y="822960"/>
+            <a:ext cx="5486400" cy="457200"/>
           </a:xfrm>
           <a:prstGeom prst="rect">
             <a:avLst/>
@@ -3770,7 +5247,7 @@
               <a:buNone/>
             </a:pPr>
             <a:r>
-              <a:rPr lang="en-US" sz="3000" b="1" dirty="0">
+              <a:rPr lang="en-US" sz="2300" b="1" dirty="0">
                 <a:solidFill>
                   <a:srgbClr val="FFFFFF"/>
                 </a:solidFill>
@@ -3778,9 +5255,9 @@
                 <a:ea typeface="Cambria" pitchFamily="34" charset="-122"/>
                 <a:cs typeface="Cambria" pitchFamily="34" charset="-120"/>
               </a:rPr>
-              <a:t>[Founder Name]</a:t>
-            </a:r>
-            <a:endParaRPr lang="en-US" sz="3000" dirty="0"/>
+              <a:t>Dayana Sanchez</a:t>
+            </a:r>
+            <a:endParaRPr lang="en-US" sz="2300" dirty="0"/>
           </a:p>
         </p:txBody>
       </p:sp>
@@ -3792,8 +5269,8 @@
         </p:nvSpPr>
         <p:spPr>
           <a:xfrm>
-            <a:off x="640080" y="1508760"/>
-            <a:ext cx="8229600" cy="365760"/>
+            <a:off x="640080" y="1261872"/>
+            <a:ext cx="5486400" cy="320040"/>
           </a:xfrm>
           <a:prstGeom prst="rect">
             <a:avLst/>
@@ -3809,7 +5286,7 @@
               <a:buNone/>
             </a:pPr>
             <a:r>
-              <a:rPr lang="en-US" sz="1400" dirty="0">
+              <a:rPr lang="en-US" sz="1250" dirty="0">
                 <a:solidFill>
                   <a:srgbClr val="2EC4B6"/>
                 </a:solidFill>
@@ -3817,9 +5294,9 @@
                 <a:ea typeface="Calibri" pitchFamily="34" charset="-122"/>
                 <a:cs typeface="Calibri" pitchFamily="34" charset="-120"/>
               </a:rPr>
-              <a:t>Background: cybersecurity, University of Central Florida</a:t>
-            </a:r>
-            <a:endParaRPr lang="en-US" sz="1400" dirty="0"/>
+              <a:t>Founder &amp; Lead Researcher</a:t>
+            </a:r>
+            <a:endParaRPr lang="en-US" sz="1250" dirty="0"/>
           </a:p>
         </p:txBody>
       </p:sp>
@@ -3831,8 +5308,8 @@
         </p:nvSpPr>
         <p:spPr>
           <a:xfrm>
-            <a:off x="640080" y="2011680"/>
-            <a:ext cx="7498080" cy="1463040"/>
+            <a:off x="640080" y="1627632"/>
+            <a:ext cx="5486400" cy="1828800"/>
           </a:xfrm>
           <a:prstGeom prst="rect">
             <a:avLst/>
@@ -3846,12 +5323,12 @@
           <a:p>
             <a:pPr indent="0" marL="0">
               <a:lnSpc>
-                <a:spcPct val="125000"/>
+                <a:spcPct val="120000"/>
               </a:lnSpc>
               <a:buNone/>
             </a:pPr>
             <a:r>
-              <a:rPr lang="en-US" sz="1400" dirty="0">
+              <a:rPr lang="en-US" sz="1150" dirty="0">
                 <a:solidFill>
                   <a:srgbClr val="CFE0DD"/>
                 </a:solidFill>
@@ -3859,39 +5336,142 @@
                 <a:ea typeface="Calibri" pitchFamily="34" charset="-122"/>
                 <a:cs typeface="Calibri" pitchFamily="34" charset="-120"/>
               </a:rPr>
-              <a:t>Brings computational modeling, error-correction and fault-tolerance system design, and the discipline of stress-testing your own claims before someone else does. </a:t>
-            </a:r>
+              <a:t>Originated the core concept; led all technical work to date — the simulation architecture, the encoder software, and the audit process that found and corrected this project's own central assumption before anyone outside the project did. Background: cybersecurity, UCF. Not a biologist by training, disclosed as fact, not hidden.</a:t>
+            </a:r>
+            <a:endParaRPr lang="en-US" sz="1150" dirty="0"/>
+          </a:p>
+        </p:txBody>
+      </p:sp>
+      <p:sp>
+        <p:nvSpPr>
+          <p:cNvPr id="7" name="Text 5"/>
+          <p:cNvSpPr txBox="1"/>
+          <p:nvPr/>
+        </p:nvSpPr>
+        <p:spPr>
+          <a:xfrm>
+            <a:off x="6355080" y="822960"/>
+            <a:ext cx="5212080" cy="457200"/>
+          </a:xfrm>
+          <a:prstGeom prst="rect">
+            <a:avLst/>
+          </a:prstGeom>
+          <a:noFill/>
+          <a:ln/>
+        </p:spPr>
+        <p:txBody>
+          <a:bodyPr wrap="square" lIns="0" tIns="0" rIns="0" bIns="0" rtlCol="0" anchor="ctr"/>
+          <a:lstStyle/>
+          <a:p>
             <a:pPr indent="0" marL="0">
-              <a:lnSpc>
-                <a:spcPct val="125000"/>
-              </a:lnSpc>
-              <a:buNone/>
-            </a:pPr>
-            <a:r>
-              <a:rPr lang="en-US" sz="1400" dirty="0">
-                <a:solidFill>
-                  <a:srgbClr val="CFE0DD"/>
+              <a:buNone/>
+            </a:pPr>
+            <a:r>
+              <a:rPr lang="en-US" sz="2300" b="1" dirty="0">
+                <a:solidFill>
+                  <a:srgbClr val="FFFFFF"/>
+                </a:solidFill>
+                <a:latin typeface="Cambria" pitchFamily="34" charset="0"/>
+                <a:ea typeface="Cambria" pitchFamily="34" charset="-122"/>
+                <a:cs typeface="Cambria" pitchFamily="34" charset="-120"/>
+              </a:rPr>
+              <a:t>Jacqueline Solano</a:t>
+            </a:r>
+            <a:endParaRPr lang="en-US" sz="2300" dirty="0"/>
+          </a:p>
+        </p:txBody>
+      </p:sp>
+      <p:sp>
+        <p:nvSpPr>
+          <p:cNvPr id="8" name="Text 6"/>
+          <p:cNvSpPr txBox="1"/>
+          <p:nvPr/>
+        </p:nvSpPr>
+        <p:spPr>
+          <a:xfrm>
+            <a:off x="6355080" y="1261872"/>
+            <a:ext cx="5212080" cy="320040"/>
+          </a:xfrm>
+          <a:prstGeom prst="rect">
+            <a:avLst/>
+          </a:prstGeom>
+          <a:noFill/>
+          <a:ln/>
+        </p:spPr>
+        <p:txBody>
+          <a:bodyPr wrap="square" lIns="0" tIns="0" rIns="0" bIns="0" rtlCol="0" anchor="ctr"/>
+          <a:lstStyle/>
+          <a:p>
+            <a:pPr indent="0" marL="0">
+              <a:buNone/>
+            </a:pPr>
+            <a:r>
+              <a:rPr lang="en-US" sz="1250" dirty="0">
+                <a:solidFill>
+                  <a:srgbClr val="2EC4B6"/>
                 </a:solidFill>
                 <a:latin typeface="Calibri" pitchFamily="34" charset="0"/>
                 <a:ea typeface="Calibri" pitchFamily="34" charset="-122"/>
                 <a:cs typeface="Calibri" pitchFamily="34" charset="-120"/>
               </a:rPr>
-              <a:t>Not a biologist by training — disclosed here as fact, not hidden. The lab partnerships and mentorship this program would unlock are exactly how that gap closes.</a:t>
-            </a:r>
-            <a:endParaRPr lang="en-US" sz="1400" dirty="0"/>
-          </a:p>
-        </p:txBody>
-      </p:sp>
-      <p:sp>
-        <p:nvSpPr>
-          <p:cNvPr id="7" name="Shape 5"/>
+              <a:t>Co-Founder</a:t>
+            </a:r>
+            <a:endParaRPr lang="en-US" sz="1250" dirty="0"/>
+          </a:p>
+        </p:txBody>
+      </p:sp>
+      <p:sp>
+        <p:nvSpPr>
+          <p:cNvPr id="9" name="Text 7"/>
+          <p:cNvSpPr txBox="1"/>
+          <p:nvPr/>
+        </p:nvSpPr>
+        <p:spPr>
+          <a:xfrm>
+            <a:off x="6355080" y="1627632"/>
+            <a:ext cx="5212080" cy="1280160"/>
+          </a:xfrm>
+          <a:prstGeom prst="rect">
+            <a:avLst/>
+          </a:prstGeom>
+          <a:noFill/>
+          <a:ln/>
+        </p:spPr>
+        <p:txBody>
+          <a:bodyPr wrap="square" lIns="0" tIns="0" rIns="0" bIns="0" rtlCol="0" anchor="ctr"/>
+          <a:lstStyle/>
+          <a:p>
+            <a:pPr indent="0" marL="0">
+              <a:lnSpc>
+                <a:spcPct val="120000"/>
+              </a:lnSpc>
+              <a:buNone/>
+            </a:pPr>
+            <a:r>
+              <a:rPr lang="en-US" sz="1150" dirty="0">
+                <a:solidFill>
+                  <a:srgbClr val="CFE0DD"/>
+                </a:solidFill>
+                <a:latin typeface="Calibri" pitchFamily="34" charset="0"/>
+                <a:ea typeface="Calibri" pitchFamily="34" charset="-122"/>
+                <a:cs typeface="Calibri" pitchFamily="34" charset="-120"/>
+              </a:rPr>
+              <a:t>Leads business operations, and satisfies the program requirement that at least one founder be a U.S. citizen.</a:t>
+            </a:r>
+            <a:endParaRPr lang="en-US" sz="1150" dirty="0"/>
+          </a:p>
+        </p:txBody>
+      </p:sp>
+      <p:sp>
+        <p:nvSpPr>
+          <p:cNvPr id="10" name="Shape 8"/>
           <p:cNvSpPr/>
           <p:nvPr/>
         </p:nvSpPr>
         <p:spPr>
           <a:xfrm>
             <a:off x="640080" y="3794760"/>
-            <a:ext cx="7498080" cy="0"/>
+            <a:ext cx="10927080" cy="0"/>
           </a:xfrm>
           <a:prstGeom prst="line">
             <a:avLst/>
@@ -3907,14 +5487,14 @@
       </p:sp>
       <p:sp>
         <p:nvSpPr>
-          <p:cNvPr id="8" name="Text 6"/>
+          <p:cNvPr id="11" name="Text 9"/>
           <p:cNvSpPr txBox="1"/>
           <p:nvPr/>
         </p:nvSpPr>
         <p:spPr>
           <a:xfrm>
             <a:off x="640080" y="3977640"/>
-            <a:ext cx="7498080" cy="365760"/>
+            <a:ext cx="10927080" cy="365760"/>
           </a:xfrm>
           <a:prstGeom prst="rect">
             <a:avLst/>
@@ -3946,14 +5526,14 @@
       </p:sp>
       <p:sp>
         <p:nvSpPr>
-          <p:cNvPr id="9" name="Text 7"/>
+          <p:cNvPr id="12" name="Text 10"/>
           <p:cNvSpPr txBox="1"/>
           <p:nvPr/>
         </p:nvSpPr>
         <p:spPr>
           <a:xfrm>
             <a:off x="640080" y="4389120"/>
-            <a:ext cx="7498080" cy="914400"/>
+            <a:ext cx="10927080" cy="731520"/>
           </a:xfrm>
           <a:prstGeom prst="rect">
             <a:avLst/>
@@ -3988,7 +5568,7 @@
       </p:sp>
       <p:sp>
         <p:nvSpPr>
-          <p:cNvPr id="10" name="Text 8"/>
+          <p:cNvPr id="13" name="Text 11"/>
           <p:cNvSpPr txBox="1"/>
           <p:nvPr/>
         </p:nvSpPr>
@@ -4047,7 +5627,7 @@
       </p:sp>
       <p:sp>
         <p:nvSpPr>
-          <p:cNvPr id="11" name="Text 9"/>
+          <p:cNvPr id="14" name="Text 12"/>
           <p:cNvSpPr txBox="1"/>
           <p:nvPr/>
         </p:nvSpPr>
@@ -4078,7 +5658,7 @@
                 <a:ea typeface="Calibri" pitchFamily="34" charset="-122"/>
                 <a:cs typeface="Calibri" pitchFamily="34" charset="-120"/>
               </a:rPr>
-              <a:t>12</a:t>
+              <a:t>14</a:t>
             </a:r>
             <a:endParaRPr lang="en-US" sz="1000" dirty="0"/>
           </a:p>

--- a/docs/pitch/Acheron_Pitch_Deck.pptx
+++ b/docs/pitch/Acheron_Pitch_Deck.pptx
@@ -4279,7 +4279,7 @@
                 <a:ea typeface="Calibri" pitchFamily="34" charset="-122"/>
                 <a:cs typeface="Calibri" pitchFamily="34" charset="-120"/>
               </a:rPr>
-              <a:t>COMPETITIVE LANDSCAPE</a:t>
+              <a:t>REAL STORAGE COMPETITORS</a:t>
             </a:r>
             <a:endParaRPr lang="en-US" sz="1200" dirty="0"/>
           </a:p>
@@ -4339,8 +4339,8 @@
           </p:nvPr>
         </p:nvGraphicFramePr>
         <p:xfrm>
-          <a:off x="640080" y="1783080"/>
-          <a:ext cx="10972800" cy="4206240"/>
+          <a:off x="640080" y="1737360"/>
+          <a:ext cx="10972800" cy="3246120"/>
         </p:xfrm>
         <a:graphic>
           <a:graphicData uri="http://schemas.openxmlformats.org/drawingml/2006/table">
@@ -4623,268 +4623,6 @@
                     <a:solidFill>
                       <a:srgbClr val="0B1F3A"/>
                     </a:solidFill>
-                  </a:tcPr>
-                </a:tc>
-              </a:tr>
-              <a:tr h="868680">
-                <a:tc>
-                  <a:txBody>
-                    <a:bodyPr/>
-                    <a:lstStyle/>
-                    <a:p>
-                      <a:pPr indent="0" marL="0">
-                        <a:buNone/>
-                      </a:pPr>
-                      <a:r>
-                        <a:rPr lang="en-US" sz="1200" dirty="0">
-                          <a:solidFill>
-                            <a:srgbClr val="16232F"/>
-                          </a:solidFill>
-                          <a:latin typeface="Calibri" pitchFamily="34" charset="0"/>
-                          <a:ea typeface="Calibri" pitchFamily="34" charset="-122"/>
-                          <a:cs typeface="Calibri" pitchFamily="34" charset="-120"/>
-                        </a:rPr>
-                        <a:t>Cortical Labs / Koniku / FinalSpark</a:t>
-                      </a:r>
-                      <a:endParaRPr lang="en-US" sz="1200" dirty="0">
-                        <a:latin typeface="Calibri" charset="0"/>
-                        <a:ea typeface="Calibri" charset="0"/>
-                        <a:cs typeface="Calibri" charset="0"/>
-                      </a:endParaRPr>
-                    </a:p>
-                  </a:txBody>
-                  <a:tcPr marL="91440" marR="91440" marT="45720" marB="45720" anchor="ctr">
-                    <a:lnL w="12700" cap="flat" cmpd="sng" algn="ctr">
-                      <a:solidFill>
-                        <a:srgbClr val="D8DEE1"/>
-                      </a:solidFill>
-                      <a:prstDash val="solid"/>
-                      <a:round/>
-                      <a:headEnd type="none" w="med" len="med"/>
-                      <a:tailEnd type="none" w="med" len="med"/>
-                    </a:lnL>
-                    <a:lnR w="12700" cap="flat" cmpd="sng" algn="ctr">
-                      <a:solidFill>
-                        <a:srgbClr val="D8DEE1"/>
-                      </a:solidFill>
-                      <a:prstDash val="solid"/>
-                      <a:round/>
-                      <a:headEnd type="none" w="med" len="med"/>
-                      <a:tailEnd type="none" w="med" len="med"/>
-                    </a:lnR>
-                    <a:lnT w="12700" cap="flat" cmpd="sng" algn="ctr">
-                      <a:solidFill>
-                        <a:srgbClr val="D8DEE1"/>
-                      </a:solidFill>
-                      <a:prstDash val="solid"/>
-                      <a:round/>
-                      <a:headEnd type="none" w="med" len="med"/>
-                      <a:tailEnd type="none" w="med" len="med"/>
-                    </a:lnT>
-                    <a:lnB w="12700" cap="flat" cmpd="sng" algn="ctr">
-                      <a:solidFill>
-                        <a:srgbClr val="D8DEE1"/>
-                      </a:solidFill>
-                      <a:prstDash val="solid"/>
-                      <a:round/>
-                      <a:headEnd type="none" w="med" len="med"/>
-                      <a:tailEnd type="none" w="med" len="med"/>
-                    </a:lnB>
-                  </a:tcPr>
-                </a:tc>
-                <a:tc>
-                  <a:txBody>
-                    <a:bodyPr/>
-                    <a:lstStyle/>
-                    <a:p>
-                      <a:pPr indent="0" marL="0">
-                        <a:buNone/>
-                      </a:pPr>
-                      <a:r>
-                        <a:rPr lang="en-US" sz="1200" dirty="0">
-                          <a:solidFill>
-                            <a:srgbClr val="16232F"/>
-                          </a:solidFill>
-                          <a:latin typeface="Calibri" pitchFamily="34" charset="0"/>
-                          <a:ea typeface="Calibri" pitchFamily="34" charset="-122"/>
-                          <a:cs typeface="Calibri" pitchFamily="34" charset="-120"/>
-                        </a:rPr>
-                        <a:t>Neural activity (volatile)</a:t>
-                      </a:r>
-                      <a:endParaRPr lang="en-US" sz="1200" dirty="0">
-                        <a:latin typeface="Calibri" charset="0"/>
-                        <a:ea typeface="Calibri" charset="0"/>
-                        <a:cs typeface="Calibri" charset="0"/>
-                      </a:endParaRPr>
-                    </a:p>
-                  </a:txBody>
-                  <a:tcPr marL="91440" marR="91440" marT="45720" marB="45720" anchor="ctr">
-                    <a:lnL w="12700" cap="flat" cmpd="sng" algn="ctr">
-                      <a:solidFill>
-                        <a:srgbClr val="D8DEE1"/>
-                      </a:solidFill>
-                      <a:prstDash val="solid"/>
-                      <a:round/>
-                      <a:headEnd type="none" w="med" len="med"/>
-                      <a:tailEnd type="none" w="med" len="med"/>
-                    </a:lnL>
-                    <a:lnR w="12700" cap="flat" cmpd="sng" algn="ctr">
-                      <a:solidFill>
-                        <a:srgbClr val="D8DEE1"/>
-                      </a:solidFill>
-                      <a:prstDash val="solid"/>
-                      <a:round/>
-                      <a:headEnd type="none" w="med" len="med"/>
-                      <a:tailEnd type="none" w="med" len="med"/>
-                    </a:lnR>
-                    <a:lnT w="12700" cap="flat" cmpd="sng" algn="ctr">
-                      <a:solidFill>
-                        <a:srgbClr val="D8DEE1"/>
-                      </a:solidFill>
-                      <a:prstDash val="solid"/>
-                      <a:round/>
-                      <a:headEnd type="none" w="med" len="med"/>
-                      <a:tailEnd type="none" w="med" len="med"/>
-                    </a:lnT>
-                    <a:lnB w="12700" cap="flat" cmpd="sng" algn="ctr">
-                      <a:solidFill>
-                        <a:srgbClr val="D8DEE1"/>
-                      </a:solidFill>
-                      <a:prstDash val="solid"/>
-                      <a:round/>
-                      <a:headEnd type="none" w="med" len="med"/>
-                      <a:tailEnd type="none" w="med" len="med"/>
-                    </a:lnB>
-                  </a:tcPr>
-                </a:tc>
-                <a:tc>
-                  <a:txBody>
-                    <a:bodyPr/>
-                    <a:lstStyle/>
-                    <a:p>
-                      <a:pPr indent="0" marL="0">
-                        <a:buNone/>
-                      </a:pPr>
-                      <a:r>
-                        <a:rPr lang="en-US" sz="1200" dirty="0">
-                          <a:solidFill>
-                            <a:srgbClr val="16232F"/>
-                          </a:solidFill>
-                          <a:latin typeface="Calibri" pitchFamily="34" charset="0"/>
-                          <a:ea typeface="Calibri" pitchFamily="34" charset="-122"/>
-                          <a:cs typeface="Calibri" pitchFamily="34" charset="-120"/>
-                        </a:rPr>
-                        <a:t>Electrode array</a:t>
-                      </a:r>
-                      <a:endParaRPr lang="en-US" sz="1200" dirty="0">
-                        <a:latin typeface="Calibri" charset="0"/>
-                        <a:ea typeface="Calibri" charset="0"/>
-                        <a:cs typeface="Calibri" charset="0"/>
-                      </a:endParaRPr>
-                    </a:p>
-                  </a:txBody>
-                  <a:tcPr marL="91440" marR="91440" marT="45720" marB="45720" anchor="ctr">
-                    <a:lnL w="12700" cap="flat" cmpd="sng" algn="ctr">
-                      <a:solidFill>
-                        <a:srgbClr val="D8DEE1"/>
-                      </a:solidFill>
-                      <a:prstDash val="solid"/>
-                      <a:round/>
-                      <a:headEnd type="none" w="med" len="med"/>
-                      <a:tailEnd type="none" w="med" len="med"/>
-                    </a:lnL>
-                    <a:lnR w="12700" cap="flat" cmpd="sng" algn="ctr">
-                      <a:solidFill>
-                        <a:srgbClr val="D8DEE1"/>
-                      </a:solidFill>
-                      <a:prstDash val="solid"/>
-                      <a:round/>
-                      <a:headEnd type="none" w="med" len="med"/>
-                      <a:tailEnd type="none" w="med" len="med"/>
-                    </a:lnR>
-                    <a:lnT w="12700" cap="flat" cmpd="sng" algn="ctr">
-                      <a:solidFill>
-                        <a:srgbClr val="D8DEE1"/>
-                      </a:solidFill>
-                      <a:prstDash val="solid"/>
-                      <a:round/>
-                      <a:headEnd type="none" w="med" len="med"/>
-                      <a:tailEnd type="none" w="med" len="med"/>
-                    </a:lnT>
-                    <a:lnB w="12700" cap="flat" cmpd="sng" algn="ctr">
-                      <a:solidFill>
-                        <a:srgbClr val="D8DEE1"/>
-                      </a:solidFill>
-                      <a:prstDash val="solid"/>
-                      <a:round/>
-                      <a:headEnd type="none" w="med" len="med"/>
-                      <a:tailEnd type="none" w="med" len="med"/>
-                    </a:lnB>
-                  </a:tcPr>
-                </a:tc>
-                <a:tc>
-                  <a:txBody>
-                    <a:bodyPr/>
-                    <a:lstStyle/>
-                    <a:p>
-                      <a:pPr indent="0" marL="0">
-                        <a:buNone/>
-                      </a:pPr>
-                      <a:r>
-                        <a:rPr lang="en-US" sz="1200" dirty="0">
-                          <a:solidFill>
-                            <a:srgbClr val="16232F"/>
-                          </a:solidFill>
-                          <a:latin typeface="Calibri" pitchFamily="34" charset="0"/>
-                          <a:ea typeface="Calibri" pitchFamily="34" charset="-122"/>
-                          <a:cs typeface="Calibri" pitchFamily="34" charset="-120"/>
-                        </a:rPr>
-                        <a:t>No persistence, no self-healing</a:t>
-                      </a:r>
-                      <a:endParaRPr lang="en-US" sz="1200" dirty="0">
-                        <a:latin typeface="Calibri" charset="0"/>
-                        <a:ea typeface="Calibri" charset="0"/>
-                        <a:cs typeface="Calibri" charset="0"/>
-                      </a:endParaRPr>
-                    </a:p>
-                  </a:txBody>
-                  <a:tcPr marL="91440" marR="91440" marT="45720" marB="45720" anchor="ctr">
-                    <a:lnL w="12700" cap="flat" cmpd="sng" algn="ctr">
-                      <a:solidFill>
-                        <a:srgbClr val="D8DEE1"/>
-                      </a:solidFill>
-                      <a:prstDash val="solid"/>
-                      <a:round/>
-                      <a:headEnd type="none" w="med" len="med"/>
-                      <a:tailEnd type="none" w="med" len="med"/>
-                    </a:lnL>
-                    <a:lnR w="12700" cap="flat" cmpd="sng" algn="ctr">
-                      <a:solidFill>
-                        <a:srgbClr val="D8DEE1"/>
-                      </a:solidFill>
-                      <a:prstDash val="solid"/>
-                      <a:round/>
-                      <a:headEnd type="none" w="med" len="med"/>
-                      <a:tailEnd type="none" w="med" len="med"/>
-                    </a:lnR>
-                    <a:lnT w="12700" cap="flat" cmpd="sng" algn="ctr">
-                      <a:solidFill>
-                        <a:srgbClr val="D8DEE1"/>
-                      </a:solidFill>
-                      <a:prstDash val="solid"/>
-                      <a:round/>
-                      <a:headEnd type="none" w="med" len="med"/>
-                      <a:tailEnd type="none" w="med" len="med"/>
-                    </a:lnT>
-                    <a:lnB w="12700" cap="flat" cmpd="sng" algn="ctr">
-                      <a:solidFill>
-                        <a:srgbClr val="D8DEE1"/>
-                      </a:solidFill>
-                      <a:prstDash val="solid"/>
-                      <a:round/>
-                      <a:headEnd type="none" w="med" len="med"/>
-                      <a:tailEnd type="none" w="med" len="med"/>
-                    </a:lnB>
                   </a:tcPr>
                 </a:tc>
               </a:tr>
@@ -5189,7 +4927,7 @@
                           <a:ea typeface="Calibri" pitchFamily="34" charset="-122"/>
                           <a:cs typeface="Calibri" pitchFamily="34" charset="-120"/>
                         </a:rPr>
-                        <a:t>BioCompute Inc. /</a:t>
+                        <a:t>BioCompute Inc. / Biomemory</a:t>
                       </a:r>
                       <a:endParaRPr lang="en-US" sz="1200" dirty="0">
                         <a:latin typeface="Calibri" charset="0"/>
@@ -5210,7 +4948,7 @@
                           <a:ea typeface="Calibri" pitchFamily="34" charset="-122"/>
                           <a:cs typeface="Calibri" pitchFamily="34" charset="-120"/>
                         </a:rPr>
-                        <a:t>Yachie &amp; Tomita 2007</a:t>
+                        <a:t>(w/ Yachie &amp; Tomita 2007 precedent)</a:t>
                       </a:r>
                       <a:endParaRPr lang="en-US" sz="1200" dirty="0">
                         <a:latin typeface="Calibri" charset="0"/>
@@ -5743,7 +5481,93 @@
       </p:graphicFrame>
       <p:sp>
         <p:nvSpPr>
-          <p:cNvPr id="5" name="Text 2"/>
+          <p:cNvPr id="5" name="Shape 2"/>
+          <p:cNvSpPr/>
+          <p:nvPr/>
+        </p:nvSpPr>
+        <p:spPr>
+          <a:xfrm>
+            <a:off x="640080" y="5166360"/>
+            <a:ext cx="10972800" cy="1234440"/>
+          </a:xfrm>
+          <a:prstGeom prst="roundRect">
+            <a:avLst>
+              <a:gd name="adj" fmla="val 5926"/>
+            </a:avLst>
+          </a:prstGeom>
+          <a:solidFill>
+            <a:srgbClr val="F4F6F7"/>
+          </a:solidFill>
+          <a:ln w="13970">
+            <a:solidFill>
+              <a:srgbClr val="DCE3E6"/>
+            </a:solidFill>
+            <a:prstDash val="solid"/>
+          </a:ln>
+        </p:spPr>
+      </p:sp>
+      <p:sp>
+        <p:nvSpPr>
+          <p:cNvPr id="6" name="Text 3"/>
+          <p:cNvSpPr txBox="1"/>
+          <p:nvPr/>
+        </p:nvSpPr>
+        <p:spPr>
+          <a:xfrm>
+            <a:off x="868680" y="5166360"/>
+            <a:ext cx="10515600" cy="1234440"/>
+          </a:xfrm>
+          <a:prstGeom prst="rect">
+            <a:avLst/>
+          </a:prstGeom>
+          <a:noFill/>
+          <a:ln/>
+        </p:spPr>
+        <p:txBody>
+          <a:bodyPr wrap="square" lIns="0" tIns="0" rIns="0" bIns="0" rtlCol="0" anchor="ctr"/>
+          <a:lstStyle/>
+          <a:p>
+            <a:pPr indent="0" marL="0">
+              <a:lnSpc>
+                <a:spcPct val="120000"/>
+              </a:lnSpc>
+              <a:buNone/>
+            </a:pPr>
+            <a:r>
+              <a:rPr lang="en-US" sz="1250" b="1" dirty="0">
+                <a:solidFill>
+                  <a:srgbClr val="1C8F84"/>
+                </a:solidFill>
+                <a:latin typeface="Calibri" pitchFamily="34" charset="0"/>
+                <a:ea typeface="Calibri" pitchFamily="34" charset="-122"/>
+                <a:cs typeface="Calibri" pitchFamily="34" charset="-120"/>
+              </a:rPr>
+              <a:t>Not included above, on purpose:  </a:t>
+            </a:r>
+            <a:pPr indent="0" marL="0">
+              <a:lnSpc>
+                <a:spcPct val="120000"/>
+              </a:lnSpc>
+              <a:buNone/>
+            </a:pPr>
+            <a:r>
+              <a:rPr lang="en-US" sz="1250" dirty="0">
+                <a:solidFill>
+                  <a:srgbClr val="16232F"/>
+                </a:solidFill>
+                <a:latin typeface="Calibri" pitchFamily="34" charset="0"/>
+                <a:ea typeface="Calibri" pitchFamily="34" charset="-122"/>
+                <a:cs typeface="Calibri" pitchFamily="34" charset="-120"/>
+              </a:rPr>
+              <a:t>Cortical Labs, Koniku, and FinalSpark all build neuron-based wetware for cognition and sensing (playing games, detecting explosives, training AI), a different product category, not a memory-storage competitor. Their hardware is still worth studying, see next slide.</a:t>
+            </a:r>
+            <a:endParaRPr lang="en-US" sz="1250" dirty="0"/>
+          </a:p>
+        </p:txBody>
+      </p:sp>
+      <p:sp>
+        <p:nvSpPr>
+          <p:cNvPr id="7" name="Text 4"/>
           <p:cNvSpPr txBox="1"/>
           <p:nvPr/>
         </p:nvSpPr>
@@ -5845,7 +5669,7 @@
                 <a:ea typeface="Calibri" pitchFamily="34" charset="-122"/>
                 <a:cs typeface="Calibri" pitchFamily="34" charset="-120"/>
               </a:rPr>
-              <a:t>DIFFERENTIATION</a:t>
+              <a:t>DIFFERENTIATION &amp; BORROWABLE RESEARCH</a:t>
             </a:r>
             <a:endParaRPr lang="en-US" sz="1200" dirty="0"/>
           </a:p>
@@ -5884,7 +5708,7 @@
                 <a:ea typeface="Cambria" pitchFamily="34" charset="-122"/>
                 <a:cs typeface="Cambria" pitchFamily="34" charset="-120"/>
               </a:rPr>
-              <a:t>“No one else is doing this” isn't the claim, here's the specific gap against each real competitor</a:t>
+              <a:t>Only two of these are competitors. The third is research worth stealing from anyway</a:t>
             </a:r>
             <a:endParaRPr lang="en-US" sz="2100" dirty="0"/>
           </a:p>
@@ -5977,7 +5801,7 @@
                 <a:ea typeface="Cambria" pitchFamily="34" charset="-122"/>
                 <a:cs typeface="Cambria" pitchFamily="34" charset="-120"/>
               </a:rPr>
-              <a:t>Neuron-based biocomputers</a:t>
+              <a:t>Adjacent research, not a competitor</a:t>
             </a:r>
             <a:endParaRPr lang="en-US" sz="1550" dirty="0"/>
           </a:p>
@@ -6016,7 +5840,7 @@
                 <a:ea typeface="Calibri" pitchFamily="34" charset="-122"/>
                 <a:cs typeface="Calibri" pitchFamily="34" charset="-120"/>
               </a:rPr>
-              <a:t>Cortical Labs, Koniku, FinalSpark</a:t>
+              <a:t>Cortical Labs (CL-1), Koniku</a:t>
             </a:r>
             <a:endParaRPr lang="en-US" sz="1050" dirty="0"/>
           </a:p>
@@ -6058,7 +5882,7 @@
                 <a:ea typeface="Calibri" pitchFamily="34" charset="-122"/>
                 <a:cs typeface="Calibri" pitchFamily="34" charset="-120"/>
               </a:rPr>
-              <a:t>Volatile by construction, need continuous power to hold any state, on a fixed degradation clock, zero regeneration. Acheron's bet: a substrate that (if validated) holds state with no power and physically repairs itself. A different failure mode, not an incremental gain.</a:t>
+              <a:t>Different product entirely, neuron-based cognition/sensing, not memory storage, so not a rival. Their hardware is still worth studying: CL-1 uses electrode arrays to write/read electrical signals into living tissue; Koniku holds a patent (JP6858769) for cleaner signal-to-noise electrode recording from noisy tissue, directly relevant to Acheron's own oscillation-interference problem.</a:t>
             </a:r>
             <a:endParaRPr lang="en-US" sz="1150" dirty="0"/>
           </a:p>
@@ -6364,7 +6188,7 @@
                 <a:ea typeface="Calibri" pitchFamily="34" charset="-122"/>
                 <a:cs typeface="Calibri" pitchFamily="34" charset="-120"/>
               </a:rPr>
-              <a:t>BioCompute Inc. / Yachie &amp; Tomita 2007</a:t>
+              <a:t>BioCompute Inc. / Biomemory (Yachie &amp; Tomita 2007 precedent)</a:t>
             </a:r>
             <a:endParaRPr lang="en-US" sz="1050" dirty="0"/>
           </a:p>
@@ -6406,7 +6230,7 @@
                 <a:ea typeface="Calibri" pitchFamily="34" charset="-122"/>
                 <a:cs typeface="Calibri" pitchFamily="34" charset="-120"/>
               </a:rPr>
-              <a:t>Real, funded, already storing arbitrary data in a genome. But it's archival: written once, read only by destroying the sample via sequencing. Acheron is solving a different problem on purpose, a dynamic, rewritable, non-destructively-readable state, not a write-once archive.</a:t>
+              <a:t>Real, funded, already storing arbitrary data in a genome, and gaining ground fast (Biomemory acquired Catalog Technologies in 2026, targeting commercial launch by year end). But it's archival: written once, read only by destroying the sample via sequencing. Acheron is solving a different problem on purpose, a dynamic, rewritable, non-destructively-readable state, not a write-once archive.</a:t>
             </a:r>
             <a:endParaRPr lang="en-US" sz="1150" dirty="0"/>
           </a:p>

--- a/docs/pitch/Acheron_Pitch_Deck.pptx
+++ b/docs/pitch/Acheron_Pitch_Deck.pptx
@@ -3531,7 +3531,7 @@
                           <a:ea typeface="Calibri" pitchFamily="34" charset="-122"/>
                           <a:cs typeface="Calibri" pitchFamily="34" charset="-120"/>
                         </a:rPr>
-                        <a:t>Apple = Food = Energy. A cell just holding a charge on its own = a coin balanced on its edge = it falls over almost immediately.</a:t>
+                        <a:t>A cell just holding a charge on its own is like a coin balanced on its edge, it falls over almost immediately.</a:t>
                       </a:r>
                       <a:endParaRPr lang="en-US" sz="1050" dirty="0">
                         <a:latin typeface="Calibri" charset="0"/>
@@ -3663,7 +3663,7 @@
                           <a:ea typeface="Calibri" pitchFamily="34" charset="-122"/>
                           <a:cs typeface="Calibri" pitchFamily="34" charset="-120"/>
                         </a:rPr>
-                        <a:t>Matched-strength promoter pair (Gardner topology + Bacillus BioBrick Box parts) holds state at 100% fidelity @ 24h; severe mismatch (0.1x) collapses to 50%, a monostable dead switch.</a:t>
+                        <a:t>Matched-strength promoter pair (Gardner topology + Bacillus BioBrick Box parts) holds state at 100% fidelity at 24 hours; severe mismatch (0.1x) collapses to 50%, a monostable dead switch.</a:t>
                       </a:r>
                       <a:endParaRPr lang="en-US" sz="1050" dirty="0">
                         <a:latin typeface="Calibri" charset="0"/>
@@ -3728,7 +3728,7 @@
                           <a:ea typeface="Calibri" pitchFamily="34" charset="-122"/>
                           <a:cs typeface="Calibri" pitchFamily="34" charset="-120"/>
                         </a:rPr>
-                        <a:t>Circuit = Light switch = Two matched springs holding it in place. Mismatched springs = the switch falls back to "off" no matter what you do.</a:t>
+                        <a:t>The circuit is like a light switch held by two matched springs. Mismatched springs and the switch falls back to "off" no matter what you do.</a:t>
                       </a:r>
                       <a:endParaRPr lang="en-US" sz="1050" dirty="0">
                         <a:latin typeface="Calibri" charset="0"/>
@@ -3925,7 +3925,7 @@
                           <a:ea typeface="Calibri" pitchFamily="34" charset="-122"/>
                           <a:cs typeface="Calibri" pitchFamily="34" charset="-120"/>
                         </a:rPr>
-                        <a:t>Apple = Food = Energy. Betting on the organism with a measured mechanism = betting on a scale you've calibrated, not one you're guessing the weight of.</a:t>
+                        <a:t>Betting on the organism with a measured mechanism is like betting on a scale you've calibrated, not one you're guessing the weight of.</a:t>
                       </a:r>
                       <a:endParaRPr lang="en-US" sz="1050" dirty="0">
                         <a:latin typeface="Calibri" charset="0"/>
@@ -5708,7 +5708,7 @@
                 <a:ea typeface="Cambria" pitchFamily="34" charset="-122"/>
                 <a:cs typeface="Cambria" pitchFamily="34" charset="-120"/>
               </a:rPr>
-              <a:t>Only two of these are competitors. The third is research worth stealing from anyway</a:t>
+              <a:t>Only two of these are competitors. The third is research worth borrowing from anyway</a:t>
             </a:r>
             <a:endParaRPr lang="en-US" sz="2100" dirty="0"/>
           </a:p>
@@ -8366,7 +8366,7 @@
                 <a:ea typeface="Cambria" pitchFamily="34" charset="-122"/>
                 <a:cs typeface="Cambria" pitchFamily="34" charset="-120"/>
               </a:rPr>
-              <a:t>Why this document leads with what we got wrong</a:t>
+              <a:t>What we're looking for in a program</a:t>
             </a:r>
             <a:endParaRPr lang="en-US" sz="1600" dirty="0"/>
           </a:p>
@@ -8408,7 +8408,7 @@
                 <a:ea typeface="Calibri" pitchFamily="34" charset="-122"/>
                 <a:cs typeface="Calibri" pitchFamily="34" charset="-120"/>
               </a:rPr>
-              <a:t>An earlier version of this pitch cited a persistence result later found to be a simulation artifact. That audit process, not a projection nobody could verify, is the actual asset here.</a:t>
+              <a:t>A team and a network that treats rigorous, honestly-reported science as a strength worth backing, not a liability to hide. That's the partner we're looking for.</a:t>
             </a:r>
             <a:endParaRPr lang="en-US" sz="1350" dirty="0"/>
           </a:p>
@@ -10862,7 +10862,7 @@
                 <a:ea typeface="Calibri" pitchFamily="34" charset="-122"/>
                 <a:cs typeface="Calibri" pitchFamily="34" charset="-120"/>
               </a:rPr>
-              <a:t>A bit is written into the cell's voltage state (the engineered circuit from the rest of this deck).</a:t>
+              <a:t>A bit is written into the cell's engineered voltage-holding circuit.</a:t>
             </a:r>
             <a:endParaRPr lang="en-US" sz="1200" dirty="0"/>
           </a:p>
@@ -11368,7 +11368,7 @@
                 <a:ea typeface="Calibri" pitchFamily="34" charset="-122"/>
                 <a:cs typeface="Calibri" pitchFamily="34" charset="-120"/>
               </a:rPr>
-              <a:t>This is genuinely hard to test without a wet lab, which is exactly why it's the goal after the roadmap experiment, not a claim we're making today. This deck says clearly what's already simulated and what still needs the lab.</a:t>
+              <a:t>This full cycle hasn't been tested in a wet lab yet. It's the goal the roadmap experiment works toward.</a:t>
             </a:r>
             <a:endParaRPr lang="en-US" sz="1150" dirty="0"/>
           </a:p>
@@ -12147,7 +12147,7 @@
                 <a:ea typeface="Cambria" pitchFamily="34" charset="-122"/>
                 <a:cs typeface="Cambria" pitchFamily="34" charset="-120"/>
               </a:rPr>
-              <a:t>24h</a:t>
+              <a:t>100%</a:t>
             </a:r>
             <a:endParaRPr lang="en-US" sz="4600" dirty="0"/>
           </a:p>
@@ -12186,7 +12186,7 @@
                 <a:ea typeface="Calibri" pitchFamily="34" charset="-122"/>
                 <a:cs typeface="Calibri" pitchFamily="34" charset="-120"/>
               </a:rPr>
-              <a:t>Claimed persistence, zero-noise simulation (original pitch)</a:t>
+              <a:t>Bit integrity in a zero-noise simulation</a:t>
             </a:r>
             <a:endParaRPr lang="en-US" sz="1250" dirty="0"/>
           </a:p>
@@ -12287,7 +12287,7 @@
                 <a:ea typeface="Calibri" pitchFamily="34" charset="-122"/>
                 <a:cs typeface="Calibri" pitchFamily="34" charset="-120"/>
               </a:rPr>
-              <a:t>Integrity under realistic biological noise, a coin flip</a:t>
+              <a:t>Bit integrity with realistic biological noise added, a coin flip</a:t>
             </a:r>
             <a:endParaRPr lang="en-US" sz="1250" dirty="0"/>
           </a:p>
@@ -12329,7 +12329,7 @@
                 <a:ea typeface="Calibri" pitchFamily="34" charset="-122"/>
                 <a:cs typeface="Calibri" pitchFamily="34" charset="-120"/>
               </a:rPr>
-              <a:t>Why we're leading with this, not hiding it:
+              <a:t>Why it fails:
 </a:t>
             </a:r>
             <a:endParaRPr lang="en-US" sz="1500" dirty="0"/>
@@ -12373,7 +12373,7 @@
                 <a:ea typeface="Calibri" pitchFamily="34" charset="-122"/>
                 <a:cs typeface="Calibri" pitchFamily="34" charset="-120"/>
               </a:rPr>
-              <a:t>This is our own finding, from our own code, published in our own repo's audit before any outside reviewer found it first.</a:t>
+              <a:t>We found this ourselves, by stress-testing our own model, before any outside reviewer did.</a:t>
             </a:r>
             <a:endParaRPr lang="en-US" sz="1500" dirty="0"/>
           </a:p>
@@ -12890,7 +12890,7 @@
                 <a:ea typeface="Calibri" pitchFamily="34" charset="-122"/>
                 <a:cs typeface="Calibri" pitchFamily="34" charset="-120"/>
               </a:rPr>
-              <a:t>The real finding isn't that a matched circuit works (it does, 100% fidelity at 24h), it's what happens at severe promoter mismatch: </a:t>
+              <a:t>The real finding isn't that a matched circuit works (it does, 100% fidelity at 24 hours), it's what happens at severe promoter mismatch: </a:t>
             </a:r>
             <a:pPr indent="0" marL="0">
               <a:lnSpc>
@@ -13007,7 +13007,7 @@
                 <a:ea typeface="Calibri" pitchFamily="34" charset="-122"/>
                 <a:cs typeface="Calibri" pitchFamily="34" charset="-120"/>
               </a:rPr>
-              <a:t>Fidelity @ 24h, matched promoters (BBB range 1.0x-10x)</a:t>
+              <a:t>Fidelity at 24 hours, matched promoters (BBB range 1.0x-10x)</a:t>
             </a:r>
             <a:endParaRPr lang="en-US" sz="1200" dirty="0"/>
           </a:p>
@@ -13107,7 +13107,7 @@
                 <a:ea typeface="Calibri" pitchFamily="34" charset="-122"/>
                 <a:cs typeface="Calibri" pitchFamily="34" charset="-120"/>
               </a:rPr>
-              <a:t>Fidelity @ severe mismatch (0.1x), a real, actionable design constraint this step surfaced before any wet-lab spend</a:t>
+              <a:t>Fidelity at severe promoter mismatch (0.1x), a design constraint found before any wet-lab spend</a:t>
             </a:r>
             <a:endParaRPr lang="en-US" sz="1150" dirty="0"/>
           </a:p>

--- a/docs/pitch/Acheron_Pitch_Deck.pptx
+++ b/docs/pitch/Acheron_Pitch_Deck.pptx
@@ -8184,7 +8184,7 @@
                 <a:ea typeface="Calibri" pitchFamily="34" charset="-122"/>
                 <a:cs typeface="Calibri" pitchFamily="34" charset="-120"/>
               </a:rPr>
-              <a:t>Originated the core concept; led all technical work to date, the simulation architecture, the encoder software, and the audit process that found and corrected this project's own central assumption before anyone outside the project did. Background: cybersecurity, UCF. Not a biologist by training, disclosed as fact, not hidden.</a:t>
+              <a:t>Originated the core concept; led all technical work to date, the simulation architecture, the encoder software, and the audit process that found and corrected this project's own central assumption before anyone outside the project did.</a:t>
             </a:r>
             <a:endParaRPr lang="en-US" sz="1150" dirty="0"/>
           </a:p>

--- a/docs/pitch/Acheron_Pitch_Deck.pptx
+++ b/docs/pitch/Acheron_Pitch_Deck.pptx
@@ -2875,7 +2875,7 @@
                 <a:ea typeface="Calibri" pitchFamily="34" charset="-122"/>
                 <a:cs typeface="Calibri" pitchFamily="34" charset="-120"/>
               </a:rPr>
-              <a:t>Co-Founder: </a:t>
+              <a:t>Co-Founder, Head of Business: </a:t>
             </a:r>
             <a:pPr indent="0" marL="0">
               <a:buNone/>
@@ -6677,24 +6677,27 @@
         </p:nvSpPr>
         <p:spPr>
           <a:xfrm>
-            <a:off x="640080" y="6035040"/>
-            <a:ext cx="10972800" cy="548640"/>
-          </a:xfrm>
-          <a:prstGeom prst="rect">
-            <a:avLst/>
-          </a:prstGeom>
-          <a:noFill/>
-          <a:ln/>
-        </p:spPr>
-        <p:txBody>
-          <a:bodyPr wrap="square" lIns="0" tIns="0" rIns="0" bIns="0" rtlCol="0" anchor="ctr"/>
-          <a:lstStyle/>
-          <a:p>
-            <a:pPr indent="0" marL="0">
-              <a:buNone/>
-            </a:pPr>
-            <a:r>
-              <a:rPr lang="en-US" sz="1350" i="1" dirty="0">
+            <a:off x="640080" y="5943600"/>
+            <a:ext cx="10972800" cy="685800"/>
+          </a:xfrm>
+          <a:prstGeom prst="rect">
+            <a:avLst/>
+          </a:prstGeom>
+          <a:noFill/>
+          <a:ln/>
+        </p:spPr>
+        <p:txBody>
+          <a:bodyPr wrap="square" lIns="0" tIns="0" rIns="0" bIns="0" rtlCol="0" anchor="ctr"/>
+          <a:lstStyle/>
+          <a:p>
+            <a:pPr indent="0" marL="0">
+              <a:lnSpc>
+                <a:spcPct val="115000"/>
+              </a:lnSpc>
+              <a:buNone/>
+            </a:pPr>
+            <a:r>
+              <a:rPr lang="en-US" sz="1250" i="1" dirty="0">
                 <a:solidFill>
                   <a:srgbClr val="AEC2C8"/>
                 </a:solidFill>
@@ -6702,9 +6705,9 @@
                 <a:ea typeface="Calibri" pitchFamily="34" charset="-122"/>
                 <a:cs typeface="Calibri" pitchFamily="34" charset="-120"/>
               </a:rPr>
-              <a:t>This upside is entirely conditional on the roadmap experiment below succeeding. We're not asking anyone to price the risk in advance, we're asking for what it costs to find out.</a:t>
-            </a:r>
-            <a:endParaRPr lang="en-US" sz="1350" dirty="0"/>
+              <a:t>The same underlying need, radiation-tolerant, low-maintenance memory with no technician access, recurs across extreme-environment computing broadly: spacecraft, deep-sea systems, remote infrastructure. This upside is entirely conditional on the roadmap experiment below succeeding. We're not asking anyone to price the risk in advance, we're asking for what it costs to find out.</a:t>
+            </a:r>
+            <a:endParaRPr lang="en-US" sz="1250" dirty="0"/>
           </a:p>
         </p:txBody>
       </p:sp>
@@ -8262,7 +8265,7 @@
                 <a:ea typeface="Calibri" pitchFamily="34" charset="-122"/>
                 <a:cs typeface="Calibri" pitchFamily="34" charset="-120"/>
               </a:rPr>
-              <a:t>Co-Founder</a:t>
+              <a:t>Co-Founder, Head of Business</a:t>
             </a:r>
             <a:endParaRPr lang="en-US" sz="1250" dirty="0"/>
           </a:p>
@@ -11946,6 +11949,65 @@
       <p:sp>
         <p:nvSpPr>
           <p:cNvPr id="16" name="Text 14"/>
+          <p:cNvSpPr txBox="1"/>
+          <p:nvPr/>
+        </p:nvSpPr>
+        <p:spPr>
+          <a:xfrm>
+            <a:off x="640080" y="5989320"/>
+            <a:ext cx="10972800" cy="548640"/>
+          </a:xfrm>
+          <a:prstGeom prst="rect">
+            <a:avLst/>
+          </a:prstGeom>
+          <a:noFill/>
+          <a:ln/>
+        </p:spPr>
+        <p:txBody>
+          <a:bodyPr wrap="square" lIns="0" tIns="0" rIns="0" bIns="0" rtlCol="0" anchor="ctr"/>
+          <a:lstStyle/>
+          <a:p>
+            <a:pPr indent="0" marL="0">
+              <a:lnSpc>
+                <a:spcPct val="115000"/>
+              </a:lnSpc>
+              <a:buNone/>
+            </a:pPr>
+            <a:r>
+              <a:rPr lang="en-US" sz="1100" b="1" i="1" dirty="0">
+                <a:solidFill>
+                  <a:srgbClr val="1C8F84"/>
+                </a:solidFill>
+                <a:latin typeface="Calibri" pitchFamily="34" charset="0"/>
+                <a:ea typeface="Calibri" pitchFamily="34" charset="-122"/>
+                <a:cs typeface="Calibri" pitchFamily="34" charset="-120"/>
+              </a:rPr>
+              <a:t>Modeling approach: </a:t>
+            </a:r>
+            <a:pPr indent="0" marL="0">
+              <a:lnSpc>
+                <a:spcPct val="115000"/>
+              </a:lnSpc>
+              <a:buNone/>
+            </a:pPr>
+            <a:r>
+              <a:rPr lang="en-US" sz="1100" i="1" dirty="0">
+                <a:solidFill>
+                  <a:srgbClr val="5B6B77"/>
+                </a:solidFill>
+                <a:latin typeface="Calibri" pitchFamily="34" charset="0"/>
+                <a:ea typeface="Calibri" pitchFamily="34" charset="-122"/>
+                <a:cs typeface="Calibri" pitchFamily="34" charset="-120"/>
+              </a:rPr>
+              <a:t>physics-based, BETSE-inspired simulation (gap-junction diffusion, ion-channel membrane dynamics), the same framework underlying the Levin Lab's own BETSE tool, cross-validated against tasmorpho (Blattner, 2026, bioRxiv), an independently published BETSE-based method whose reference values we reproduce to 6 decimal places.</a:t>
+            </a:r>
+            <a:endParaRPr lang="en-US" sz="1100" dirty="0"/>
+          </a:p>
+        </p:txBody>
+      </p:sp>
+      <p:sp>
+        <p:nvSpPr>
+          <p:cNvPr id="17" name="Text 15"/>
           <p:cNvSpPr txBox="1"/>
           <p:nvPr/>
         </p:nvSpPr>

--- a/docs/pitch/Acheron_Pitch_Deck.pptx
+++ b/docs/pitch/Acheron_Pitch_Deck.pptx
@@ -3598,7 +3598,7 @@
                           <a:ea typeface="Calibri" pitchFamily="34" charset="-122"/>
                           <a:cs typeface="Calibri" pitchFamily="34" charset="-120"/>
                         </a:rPr>
-                        <a:t>Engineered circuit works, with a catch</a:t>
+                        <a:t>Engineered circuit works across its whole practical design range</a:t>
                       </a:r>
                       <a:endParaRPr lang="en-US" sz="1050" dirty="0">
                         <a:latin typeface="Calibri" charset="0"/>
@@ -3663,7 +3663,7 @@
                           <a:ea typeface="Calibri" pitchFamily="34" charset="-122"/>
                           <a:cs typeface="Calibri" pitchFamily="34" charset="-120"/>
                         </a:rPr>
-                        <a:t>Matched-strength promoter pair (Gardner topology + Bacillus BioBrick Box parts) holds state at 100% fidelity at 24 hours; severe mismatch (0.1x) collapses to 50%, a monostable dead switch.</a:t>
+                        <a:t>Gardner topology + Bacillus BioBrick Box parts holds state at 100% fidelity at 24 hours for any promoter pair within the BBB's entire characterized 1.0x-10.0x strength range; only pushing far outside the catalog, to a severe 0.1x mismatch, collapses fidelity to 50%, a monostable dead switch.</a:t>
                       </a:r>
                       <a:endParaRPr lang="en-US" sz="1050" dirty="0">
                         <a:latin typeface="Calibri" charset="0"/>
@@ -3728,7 +3728,7 @@
                           <a:ea typeface="Calibri" pitchFamily="34" charset="-122"/>
                           <a:cs typeface="Calibri" pitchFamily="34" charset="-120"/>
                         </a:rPr>
-                        <a:t>The circuit is like a light switch held by two matched springs. Mismatched springs and the switch falls back to "off" no matter what you do.</a:t>
+                        <a:t>The circuit is a light switch held by two springs. Any pair of springs from the parts catalog, even fairly different strengths, holds the switch fine. Only deliberately grabbing two wildly mismatched springs, far outside what the catalog offers, gets the switch stuck at "off".</a:t>
                       </a:r>
                       <a:endParaRPr lang="en-US" sz="1050" dirty="0">
                         <a:latin typeface="Calibri" charset="0"/>
@@ -7935,7 +7935,7 @@
                 <a:ea typeface="Calibri" pitchFamily="34" charset="-122"/>
                 <a:cs typeface="Calibri" pitchFamily="34" charset="-120"/>
               </a:rPr>
-              <a:t>patent applications filed with the USPTO covering the Bio-RAID fault-tolerance architecture, self-healing recovery protocol, and environment-adaptive longevity system. Status: filed, pending examination.</a:t>
+              <a:t>patent applications filed with the USPTO covering the Bio-RAID fault-tolerance architecture, self-healing recovery protocol, and environment-adaptive longevity system.</a:t>
             </a:r>
             <a:endParaRPr lang="en-US" sz="1250" dirty="0"/>
           </a:p>
@@ -8307,7 +8307,7 @@
                 <a:ea typeface="Calibri" pitchFamily="34" charset="-122"/>
                 <a:cs typeface="Calibri" pitchFamily="34" charset="-120"/>
               </a:rPr>
-              <a:t>Leads business operations, and satisfies the program requirement that at least one founder be a U.S. citizen.</a:t>
+              <a:t>Leads business operations.</a:t>
             </a:r>
             <a:endParaRPr lang="en-US" sz="1150" dirty="0"/>
           </a:p>

--- a/docs/pitch/Acheron_Pitch_Deck.pptx
+++ b/docs/pitch/Acheron_Pitch_Deck.pptx
@@ -8425,24 +8425,27 @@
         </p:nvSpPr>
         <p:spPr>
           <a:xfrm>
-            <a:off x="640080" y="5623560"/>
-            <a:ext cx="7315200" cy="914400"/>
-          </a:xfrm>
-          <a:prstGeom prst="rect">
-            <a:avLst/>
-          </a:prstGeom>
-          <a:noFill/>
-          <a:ln/>
-        </p:spPr>
-        <p:txBody>
-          <a:bodyPr wrap="square" lIns="0" tIns="0" rIns="0" bIns="0" rtlCol="0" anchor="ctr"/>
-          <a:lstStyle/>
-          <a:p>
-            <a:pPr indent="0" marL="0">
-              <a:buNone/>
-            </a:pPr>
-            <a:r>
-              <a:rPr lang="en-US" sz="1400" b="1" dirty="0">
+            <a:off x="640080" y="5486400"/>
+            <a:ext cx="8686800" cy="1280160"/>
+          </a:xfrm>
+          <a:prstGeom prst="rect">
+            <a:avLst/>
+          </a:prstGeom>
+          <a:noFill/>
+          <a:ln/>
+        </p:spPr>
+        <p:txBody>
+          <a:bodyPr wrap="square" lIns="0" tIns="0" rIns="0" bIns="0" rtlCol="0" anchor="ctr"/>
+          <a:lstStyle/>
+          <a:p>
+            <a:pPr indent="0" marL="0">
+              <a:spcAft>
+                <a:spcPts val="400"/>
+              </a:spcAft>
+              <a:buNone/>
+            </a:pPr>
+            <a:r>
+              <a:rPr lang="en-US" sz="1300" b="1" dirty="0">
                 <a:solidFill>
                   <a:srgbClr val="FFFFFF"/>
                 </a:solidFill>
@@ -8450,37 +8453,66 @@
                 <a:ea typeface="Calibri" pitchFamily="34" charset="-122"/>
                 <a:cs typeface="Calibri" pitchFamily="34" charset="-120"/>
               </a:rPr>
-              <a:t>Dayana: sanchezleal1989@gmail.com</a:t>
-            </a:r>
-            <a:pPr indent="0" marL="0">
-              <a:buNone/>
-            </a:pPr>
-            <a:r>
-              <a:rPr lang="en-US" sz="1400" b="1" dirty="0">
-                <a:solidFill>
-                  <a:srgbClr val="FFFFFF"/>
+              <a:t>Dayana Sanchez: sanchezleal1989@gmail.com</a:t>
+            </a:r>
+            <a:endParaRPr lang="en-US" sz="1300" dirty="0"/>
+          </a:p>
+          <a:p>
+            <a:pPr indent="0" marL="0">
+              <a:spcAft>
+                <a:spcPts val="400"/>
+              </a:spcAft>
+              <a:buNone/>
+            </a:pPr>
+            <a:r>
+              <a:rPr lang="en-US" sz="1300" dirty="0">
+                <a:solidFill>
+                  <a:srgbClr val="AEC2C8"/>
                 </a:solidFill>
                 <a:latin typeface="Calibri" pitchFamily="34" charset="0"/>
                 <a:ea typeface="Calibri" pitchFamily="34" charset="-122"/>
                 <a:cs typeface="Calibri" pitchFamily="34" charset="-120"/>
               </a:rPr>
-              <a:t>Jacqueline: jackiea.solano@gmail.com</a:t>
-            </a:r>
-            <a:pPr indent="0" marL="0">
-              <a:buNone/>
-            </a:pPr>
-            <a:r>
-              <a:rPr lang="en-US" sz="1400" dirty="0">
-                <a:solidFill>
-                  <a:srgbClr val="AEC2C8"/>
+              <a:t>https://github.com/rewired89/Acheron.git</a:t>
+            </a:r>
+            <a:endParaRPr lang="en-US" sz="1300" dirty="0"/>
+          </a:p>
+          <a:p>
+            <a:pPr indent="0" marL="0">
+              <a:spcAft>
+                <a:spcPts val="400"/>
+              </a:spcAft>
+              <a:buNone/>
+            </a:pPr>
+            <a:r>
+              <a:rPr lang="en-US" sz="1300" dirty="0">
+                <a:solidFill>
+                  <a:srgbClr val="000000"/>
                 </a:solidFill>
                 <a:latin typeface="Calibri" pitchFamily="34" charset="0"/>
                 <a:ea typeface="Calibri" pitchFamily="34" charset="-122"/>
                 <a:cs typeface="Calibri" pitchFamily="34" charset="-120"/>
               </a:rPr>
-              <a:t>github.com/rewired89/Acheron</a:t>
-            </a:r>
-            <a:endParaRPr lang="en-US" sz="1400" dirty="0"/>
+              <a:t> </a:t>
+            </a:r>
+            <a:endParaRPr lang="en-US" sz="1300" dirty="0"/>
+          </a:p>
+          <a:p>
+            <a:pPr indent="0" marL="0">
+              <a:buNone/>
+            </a:pPr>
+            <a:r>
+              <a:rPr lang="en-US" sz="1300" b="1" dirty="0">
+                <a:solidFill>
+                  <a:srgbClr val="FFFFFF"/>
+                </a:solidFill>
+                <a:latin typeface="Calibri" pitchFamily="34" charset="0"/>
+                <a:ea typeface="Calibri" pitchFamily="34" charset="-122"/>
+                <a:cs typeface="Calibri" pitchFamily="34" charset="-120"/>
+              </a:rPr>
+              <a:t>Jacqueline Solano: jackiea.solano@gmail.com</a:t>
+            </a:r>
+            <a:endParaRPr lang="en-US" sz="1300" dirty="0"/>
           </a:p>
         </p:txBody>
       </p:sp>
@@ -11266,6 +11298,9 @@
               </a:rPr>
               <a:t> = photocopying the notebook.  </a:t>
             </a:r>
+            <a:endParaRPr lang="en-US" sz="1350" dirty="0"/>
+          </a:p>
+          <a:p>
             <a:pPr indent="0" marL="0">
               <a:lnSpc>
                 <a:spcPct val="130000"/>
@@ -12954,6 +12989,9 @@
               </a:rPr>
               <a:t>The real finding isn't that a matched circuit works (it does, 100% fidelity at 24 hours), it's what happens at severe promoter mismatch: </a:t>
             </a:r>
+            <a:endParaRPr lang="en-US" sz="1250" dirty="0"/>
+          </a:p>
+          <a:p>
             <a:pPr indent="0" marL="0">
               <a:lnSpc>
                 <a:spcPct val="120000"/>

--- a/docs/pitch/Acheron_Pitch_Deck.pptx
+++ b/docs/pitch/Acheron_Pitch_Deck.pptx
@@ -21,9 +21,12 @@
     <p:sldId id="269" r:id="rId15"/>
     <p:sldId id="270" r:id="rId16"/>
     <p:sldId id="271" r:id="rId17"/>
+    <p:sldId id="272" r:id="rId18"/>
+    <p:sldId id="273" r:id="rId19"/>
+    <p:sldId id="274" r:id="rId20"/>
   </p:sldIdLst>
   <p:notesMasterIdLst>
-    <p:notesMasterId r:id="rId18"/>
+    <p:notesMasterId r:id="rId21"/>
   </p:notesMasterIdLst>
   <p:sldSz cx="12192000" cy="6858000"/>
   <p:notesSz cx="6858000" cy="12192000"/>
@@ -120,267 +123,6 @@
     </a:lvl9pPr>
   </p:defaultTextStyle>
 </p:presentation>
-</file>
-
-<file path=ppt/charts/chart1.xml><?xml version="1.0" encoding="utf-8"?>
-<c:chartSpace xmlns:c="http://schemas.openxmlformats.org/drawingml/2006/chart" xmlns:a="http://schemas.openxmlformats.org/drawingml/2006/main" xmlns:r="http://schemas.openxmlformats.org/officeDocument/2006/relationships">
-  <c:date1904 val="0"/>
-  <c:roundedCorners val="1"/>
-  <c:chart>
-    <c:title>
-      <c:tx>
-        <c:rich>
-          <a:bodyPr/>
-          <a:lstStyle/>
-          <a:p>
-            <a:pPr>
-              <a:defRPr sz="1200" b="0" i="0" u="none" strike="noStrike">
-                <a:solidFill>
-                  <a:srgbClr val="5B6B77"/>
-                </a:solidFill>
-                <a:latin typeface="Arial"/>
-              </a:defRPr>
-            </a:pPr>
-            <a:r>
-              <a:rPr sz="1200" b="0" i="0" u="none" strike="noStrike">
-                <a:solidFill>
-                  <a:srgbClr val="5B6B77"/>
-                </a:solidFill>
-                <a:latin typeface="Arial"/>
-              </a:rPr>
-              <a:t>All three numerically tie at ~2% surviving, the number alone is misleading</a:t>
-            </a:r>
-          </a:p>
-        </c:rich>
-      </c:tx>
-      <c:layout/>
-      <c:overlay val="0"/>
-    </c:title>
-    <c:autoTitleDeleted val="0"/>
-    <c:plotArea>
-      <c:layout/>
-      <c:barChart>
-        <c:barDir val="col"/>
-        <c:grouping val="clustered"/>
-        <c:varyColors val="0"/>
-        <c:ser>
-          <c:idx val="0"/>
-          <c:order val="0"/>
-          <c:tx>
-            <c:strRef>
-              <c:f>Sheet1!$B$1</c:f>
-              <c:strCache>
-                <c:ptCount val="1"/>
-                <c:pt idx="0">
-                  <c:v>Recovery threshold (% surviving cells needed for ≥70% fidelity)</c:v>
-                </c:pt>
-              </c:strCache>
-            </c:strRef>
-          </c:tx>
-          <c:spPr>
-            <a:solidFill>
-              <a:srgbClr val="2EC4B6"/>
-            </a:solidFill>
-            <a:effectLst/>
-          </c:spPr>
-          <c:invertIfNegative val="0"/>
-          <c:dLbls>
-            <c:numFmt formatCode="#,##0" sourceLinked="0"/>
-            <c:txPr>
-              <a:bodyPr/>
-              <a:lstStyle/>
-              <a:p>
-                <a:pPr>
-                  <a:defRPr b="0" i="0" strike="noStrike" sz="1200" u="none">
-                    <a:solidFill>
-                      <a:srgbClr val="16232F"/>
-                    </a:solidFill>
-                    <a:latin typeface="Arial"/>
-                  </a:defRPr>
-                </a:pPr>
-              </a:p>
-            </c:txPr>
-            <c:showLegendKey val="0"/>
-            <c:showVal val="1"/>
-            <c:showCatName val="0"/>
-            <c:showSerName val="0"/>
-            <c:showPercent val="0"/>
-            <c:showBubbleSize val="0"/>
-            <c:showLeaderLines val="0"/>
-          </c:dLbls>
-          <c:cat>
-            <c:multiLvlStrRef>
-              <c:f>Sheet1!$A$2:$A$4</c:f>
-              <c:multiLvlStrCache>
-                <c:ptCount val="3"/>
-                <c:lvl>
-                  <c:pt idx="0">
-                    <c:v>B. subtilis,
-engineered circuit</c:v>
-                  </c:pt>
-                  <c:pt idx="1">
-                    <c:v>B. subtilis,
-methylation</c:v>
-                  </c:pt>
-                  <c:pt idx="2">
-                    <c:v>Planarian,
-bioelectric circuit</c:v>
-                  </c:pt>
-                </c:lvl>
-              </c:multiLvlStrCache>
-            </c:multiLvlStrRef>
-          </c:cat>
-          <c:val>
-            <c:numRef>
-              <c:f>Sheet1!$B$2:$B$4</c:f>
-              <c:numCache>
-                <c:formatCode>General</c:formatCode>
-                <c:ptCount val="3"/>
-                <c:pt idx="0">
-                  <c:v>2</c:v>
-                </c:pt>
-                <c:pt idx="1">
-                  <c:v>2</c:v>
-                </c:pt>
-                <c:pt idx="2">
-                  <c:v>2</c:v>
-                </c:pt>
-              </c:numCache>
-            </c:numRef>
-          </c:val>
-        </c:ser>
-        <c:dLbls>
-          <c:numFmt formatCode="#,##0" sourceLinked="0"/>
-          <c:txPr>
-            <a:bodyPr/>
-            <a:lstStyle/>
-            <a:p>
-              <a:pPr>
-                <a:defRPr b="0" i="0" strike="noStrike" sz="1200" u="none">
-                  <a:solidFill>
-                    <a:srgbClr val="16232F"/>
-                  </a:solidFill>
-                  <a:latin typeface="Arial"/>
-                </a:defRPr>
-              </a:pPr>
-            </a:p>
-          </c:txPr>
-          <c:showLegendKey val="0"/>
-          <c:showVal val="1"/>
-          <c:showCatName val="0"/>
-          <c:showSerName val="0"/>
-          <c:showPercent val="0"/>
-          <c:showBubbleSize val="0"/>
-          <c:showLeaderLines val="0"/>
-        </c:dLbls>
-        <c:gapWidth val="40"/>
-        <c:overlap val="0"/>
-        <c:axId val="2094734554"/>
-        <c:axId val="2094734552"/>
-        <c:axId val="2094734556"/>
-      </c:barChart>
-      <c:catAx>
-        <c:axId val="2094734554"/>
-        <c:scaling>
-          <c:orientation val="minMax"/>
-        </c:scaling>
-        <c:delete val="0"/>
-        <c:axPos val="b"/>
-        <c:numFmt formatCode="General" sourceLinked="1"/>
-        <c:majorTickMark val="out"/>
-        <c:minorTickMark val="none"/>
-        <c:tickLblPos val="low"/>
-        <c:spPr>
-          <a:ln w="12700" cap="flat">
-            <a:solidFill>
-              <a:srgbClr val="888888"/>
-            </a:solidFill>
-            <a:prstDash val="solid"/>
-            <a:round/>
-          </a:ln>
-        </c:spPr>
-        <c:txPr>
-          <a:bodyPr/>
-          <a:lstStyle/>
-          <a:p>
-            <a:pPr>
-              <a:defRPr sz="1050" b="0" i="0" u="none" strike="noStrike">
-                <a:solidFill>
-                  <a:srgbClr val="5B6B77"/>
-                </a:solidFill>
-                <a:latin typeface="Arial"/>
-              </a:defRPr>
-            </a:pPr>
-            <a:endParaRPr lang="en-US"/>
-          </a:p>
-        </c:txPr>
-        <c:crossAx val="2094734552"/>
-        <c:crosses val="autoZero"/>
-        <c:auto val="1"/>
-        <c:lblAlgn val="ctr"/>
-        <c:noMultiLvlLbl val="1"/>
-      </c:catAx>
-      <c:valAx>
-        <c:axId val="2094734552"/>
-        <c:scaling>
-          <c:orientation val="minMax"/>
-        </c:scaling>
-        <c:delete val="1"/>
-        <c:axPos val="l"/>
-        <c:numFmt formatCode="General" sourceLinked="0"/>
-        <c:majorTickMark val="out"/>
-        <c:minorTickMark val="none"/>
-        <c:tickLblPos val="nextTo"/>
-        <c:spPr>
-          <a:ln w="12700" cap="flat">
-            <a:solidFill>
-              <a:srgbClr val="888888"/>
-            </a:solidFill>
-            <a:prstDash val="solid"/>
-            <a:round/>
-          </a:ln>
-        </c:spPr>
-        <c:txPr>
-          <a:bodyPr/>
-          <a:lstStyle/>
-          <a:p>
-            <a:pPr>
-              <a:defRPr sz="1200" b="0" i="0" u="none" strike="noStrike">
-                <a:solidFill>
-                  <a:srgbClr val="5B6B77"/>
-                </a:solidFill>
-                <a:latin typeface="Arial"/>
-              </a:defRPr>
-            </a:pPr>
-            <a:endParaRPr lang="en-US"/>
-          </a:p>
-        </c:txPr>
-        <c:crossAx val="2094734554"/>
-        <c:crosses val="autoZero"/>
-        <c:crossBetween val="between"/>
-      </c:valAx>
-      <c:spPr>
-        <a:noFill/>
-        <a:ln>
-          <a:noFill/>
-        </a:ln>
-        <a:effectLst/>
-      </c:spPr>
-    </c:plotArea>
-    <c:plotVisOnly val="1"/>
-    <c:dispBlanksAs val="span"/>
-  </c:chart>
-  <c:spPr>
-    <a:noFill/>
-    <a:ln>
-      <a:noFill/>
-    </a:ln>
-    <a:effectLst/>
-  </c:spPr>
-  <c:externalData r:id="rId1">
-    <c:autoUpdate val="0"/>
-  </c:externalData>
-</c:chartSpace>
 </file>
 
 <file path=ppt/notesMasters/notesMaster1.xml><?xml version="1.0" encoding="utf-8"?>
@@ -1418,6 +1160,270 @@
             <a:fld id="{F7021451-1387-4CA6-816F-3879F97B5CBC}" type="slidenum">
               <a:rPr lang="en-US"/>
               <a:t>16</a:t>
+            </a:fld>
+            <a:endParaRPr lang="en-US"/>
+          </a:p>
+        </p:txBody>
+      </p:sp>
+    </p:spTree>
+    <p:extLst>
+      <p:ext uri="{BB962C8B-B14F-4D97-AF65-F5344CB8AC3E}">
+        <p14:creationId xmlns:p14="http://schemas.microsoft.com/office/powerpoint/2010/main" val="1024086991"/>
+      </p:ext>
+    </p:extLst>
+  </p:cSld>
+  <p:clrMapOvr>
+    <a:masterClrMapping/>
+  </p:clrMapOvr>
+</p:notes>
+</file>
+
+<file path=ppt/notesSlides/notesSlide17.xml><?xml version="1.0" encoding="utf-8"?>
+<p:notes xmlns:a="http://schemas.openxmlformats.org/drawingml/2006/main" xmlns:r="http://schemas.openxmlformats.org/officeDocument/2006/relationships" xmlns:p="http://schemas.openxmlformats.org/presentationml/2006/main">
+  <p:cSld>
+    <p:spTree>
+      <p:nvGrpSpPr>
+        <p:cNvPr id="1" name=""/>
+        <p:cNvGrpSpPr/>
+        <p:nvPr/>
+      </p:nvGrpSpPr>
+      <p:grpSpPr>
+        <a:xfrm>
+          <a:off x="0" y="0"/>
+          <a:ext cx="0" cy="0"/>
+          <a:chOff x="0" y="0"/>
+          <a:chExt cx="0" cy="0"/>
+        </a:xfrm>
+      </p:grpSpPr>
+      <p:sp>
+        <p:nvSpPr>
+          <p:cNvPr id="2" name="Slide Image Placeholder 1"/>
+          <p:cNvSpPr>
+            <a:spLocks noGrp="1" noRot="1" noChangeAspect="1"/>
+          </p:cNvSpPr>
+          <p:nvPr>
+            <p:ph type="sldImg"/>
+          </p:nvPr>
+        </p:nvSpPr>
+        <p:spPr/>
+      </p:sp>
+      <p:sp>
+        <p:nvSpPr>
+          <p:cNvPr id="3" name="Notes Placeholder 2"/>
+          <p:cNvSpPr>
+            <a:spLocks noGrp="1"/>
+          </p:cNvSpPr>
+          <p:nvPr>
+            <p:ph type="body" idx="1"/>
+          </p:nvPr>
+        </p:nvSpPr>
+        <p:spPr/>
+        <p:txBody>
+          <a:bodyPr/>
+          <a:lstStyle/>
+          <a:p>
+            <a:r>
+              <a:rPr lang="en-US" dirty="0"/>
+              <a:t/>
+            </a:r>
+            <a:endParaRPr lang="en-US" dirty="0"/>
+          </a:p>
+        </p:txBody>
+      </p:sp>
+      <p:sp>
+        <p:nvSpPr>
+          <p:cNvPr id="4" name="Slide Number Placeholder 3"/>
+          <p:cNvSpPr>
+            <a:spLocks noGrp="1"/>
+          </p:cNvSpPr>
+          <p:nvPr>
+            <p:ph type="sldNum" sz="quarter" idx="10"/>
+          </p:nvPr>
+        </p:nvSpPr>
+        <p:spPr/>
+        <p:txBody>
+          <a:bodyPr/>
+          <a:lstStyle/>
+          <a:p>
+            <a:fld id="{F7021451-1387-4CA6-816F-3879F97B5CBC}" type="slidenum">
+              <a:rPr lang="en-US"/>
+              <a:t>17</a:t>
+            </a:fld>
+            <a:endParaRPr lang="en-US"/>
+          </a:p>
+        </p:txBody>
+      </p:sp>
+    </p:spTree>
+    <p:extLst>
+      <p:ext uri="{BB962C8B-B14F-4D97-AF65-F5344CB8AC3E}">
+        <p14:creationId xmlns:p14="http://schemas.microsoft.com/office/powerpoint/2010/main" val="1024086991"/>
+      </p:ext>
+    </p:extLst>
+  </p:cSld>
+  <p:clrMapOvr>
+    <a:masterClrMapping/>
+  </p:clrMapOvr>
+</p:notes>
+</file>
+
+<file path=ppt/notesSlides/notesSlide18.xml><?xml version="1.0" encoding="utf-8"?>
+<p:notes xmlns:a="http://schemas.openxmlformats.org/drawingml/2006/main" xmlns:r="http://schemas.openxmlformats.org/officeDocument/2006/relationships" xmlns:p="http://schemas.openxmlformats.org/presentationml/2006/main">
+  <p:cSld>
+    <p:spTree>
+      <p:nvGrpSpPr>
+        <p:cNvPr id="1" name=""/>
+        <p:cNvGrpSpPr/>
+        <p:nvPr/>
+      </p:nvGrpSpPr>
+      <p:grpSpPr>
+        <a:xfrm>
+          <a:off x="0" y="0"/>
+          <a:ext cx="0" cy="0"/>
+          <a:chOff x="0" y="0"/>
+          <a:chExt cx="0" cy="0"/>
+        </a:xfrm>
+      </p:grpSpPr>
+      <p:sp>
+        <p:nvSpPr>
+          <p:cNvPr id="2" name="Slide Image Placeholder 1"/>
+          <p:cNvSpPr>
+            <a:spLocks noGrp="1" noRot="1" noChangeAspect="1"/>
+          </p:cNvSpPr>
+          <p:nvPr>
+            <p:ph type="sldImg"/>
+          </p:nvPr>
+        </p:nvSpPr>
+        <p:spPr/>
+      </p:sp>
+      <p:sp>
+        <p:nvSpPr>
+          <p:cNvPr id="3" name="Notes Placeholder 2"/>
+          <p:cNvSpPr>
+            <a:spLocks noGrp="1"/>
+          </p:cNvSpPr>
+          <p:nvPr>
+            <p:ph type="body" idx="1"/>
+          </p:nvPr>
+        </p:nvSpPr>
+        <p:spPr/>
+        <p:txBody>
+          <a:bodyPr/>
+          <a:lstStyle/>
+          <a:p>
+            <a:r>
+              <a:rPr lang="en-US" dirty="0"/>
+              <a:t/>
+            </a:r>
+            <a:endParaRPr lang="en-US" dirty="0"/>
+          </a:p>
+        </p:txBody>
+      </p:sp>
+      <p:sp>
+        <p:nvSpPr>
+          <p:cNvPr id="4" name="Slide Number Placeholder 3"/>
+          <p:cNvSpPr>
+            <a:spLocks noGrp="1"/>
+          </p:cNvSpPr>
+          <p:nvPr>
+            <p:ph type="sldNum" sz="quarter" idx="10"/>
+          </p:nvPr>
+        </p:nvSpPr>
+        <p:spPr/>
+        <p:txBody>
+          <a:bodyPr/>
+          <a:lstStyle/>
+          <a:p>
+            <a:fld id="{F7021451-1387-4CA6-816F-3879F97B5CBC}" type="slidenum">
+              <a:rPr lang="en-US"/>
+              <a:t>18</a:t>
+            </a:fld>
+            <a:endParaRPr lang="en-US"/>
+          </a:p>
+        </p:txBody>
+      </p:sp>
+    </p:spTree>
+    <p:extLst>
+      <p:ext uri="{BB962C8B-B14F-4D97-AF65-F5344CB8AC3E}">
+        <p14:creationId xmlns:p14="http://schemas.microsoft.com/office/powerpoint/2010/main" val="1024086991"/>
+      </p:ext>
+    </p:extLst>
+  </p:cSld>
+  <p:clrMapOvr>
+    <a:masterClrMapping/>
+  </p:clrMapOvr>
+</p:notes>
+</file>
+
+<file path=ppt/notesSlides/notesSlide19.xml><?xml version="1.0" encoding="utf-8"?>
+<p:notes xmlns:a="http://schemas.openxmlformats.org/drawingml/2006/main" xmlns:r="http://schemas.openxmlformats.org/officeDocument/2006/relationships" xmlns:p="http://schemas.openxmlformats.org/presentationml/2006/main">
+  <p:cSld>
+    <p:spTree>
+      <p:nvGrpSpPr>
+        <p:cNvPr id="1" name=""/>
+        <p:cNvGrpSpPr/>
+        <p:nvPr/>
+      </p:nvGrpSpPr>
+      <p:grpSpPr>
+        <a:xfrm>
+          <a:off x="0" y="0"/>
+          <a:ext cx="0" cy="0"/>
+          <a:chOff x="0" y="0"/>
+          <a:chExt cx="0" cy="0"/>
+        </a:xfrm>
+      </p:grpSpPr>
+      <p:sp>
+        <p:nvSpPr>
+          <p:cNvPr id="2" name="Slide Image Placeholder 1"/>
+          <p:cNvSpPr>
+            <a:spLocks noGrp="1" noRot="1" noChangeAspect="1"/>
+          </p:cNvSpPr>
+          <p:nvPr>
+            <p:ph type="sldImg"/>
+          </p:nvPr>
+        </p:nvSpPr>
+        <p:spPr/>
+      </p:sp>
+      <p:sp>
+        <p:nvSpPr>
+          <p:cNvPr id="3" name="Notes Placeholder 2"/>
+          <p:cNvSpPr>
+            <a:spLocks noGrp="1"/>
+          </p:cNvSpPr>
+          <p:nvPr>
+            <p:ph type="body" idx="1"/>
+          </p:nvPr>
+        </p:nvSpPr>
+        <p:spPr/>
+        <p:txBody>
+          <a:bodyPr/>
+          <a:lstStyle/>
+          <a:p>
+            <a:r>
+              <a:rPr lang="en-US" dirty="0"/>
+              <a:t/>
+            </a:r>
+            <a:endParaRPr lang="en-US" dirty="0"/>
+          </a:p>
+        </p:txBody>
+      </p:sp>
+      <p:sp>
+        <p:nvSpPr>
+          <p:cNvPr id="4" name="Slide Number Placeholder 3"/>
+          <p:cNvSpPr>
+            <a:spLocks noGrp="1"/>
+          </p:cNvSpPr>
+          <p:nvPr>
+            <p:ph type="sldNum" sz="quarter" idx="10"/>
+          </p:nvPr>
+        </p:nvSpPr>
+        <p:spPr/>
+        <p:txBody>
+          <a:bodyPr/>
+          <a:lstStyle/>
+          <a:p>
+            <a:fld id="{F7021451-1387-4CA6-816F-3879F97B5CBC}" type="slidenum">
+              <a:rPr lang="en-US"/>
+              <a:t>19</a:t>
             </a:fld>
             <a:endParaRPr lang="en-US"/>
           </a:p>
@@ -3080,7 +3086,7 @@
         </p:nvSpPr>
         <p:spPr>
           <a:xfrm>
-            <a:off x="640080" y="411480"/>
+            <a:off x="640080" y="457200"/>
             <a:ext cx="5486400" cy="320040"/>
           </a:xfrm>
           <a:prstGeom prst="rect">
@@ -3105,7 +3111,7 @@
                 <a:ea typeface="Calibri" pitchFamily="34" charset="-122"/>
                 <a:cs typeface="Calibri" pitchFamily="34" charset="-120"/>
               </a:rPr>
-              <a:t>WHAT WE ALREADY HAVE</a:t>
+              <a:t>HONEST RISK RANKING</a:t>
             </a:r>
             <a:endParaRPr lang="en-US" sz="1200" dirty="0"/>
           </a:p>
@@ -3119,24 +3125,24 @@
         </p:nvSpPr>
         <p:spPr>
           <a:xfrm>
-            <a:off x="640080" y="731520"/>
-            <a:ext cx="10881360" cy="640080"/>
-          </a:xfrm>
-          <a:prstGeom prst="rect">
-            <a:avLst/>
-          </a:prstGeom>
-          <a:noFill/>
-          <a:ln/>
-        </p:spPr>
-        <p:txBody>
-          <a:bodyPr wrap="square" lIns="0" tIns="0" rIns="0" bIns="0" rtlCol="0" anchor="ctr"/>
-          <a:lstStyle/>
-          <a:p>
-            <a:pPr indent="0" marL="0">
-              <a:buNone/>
-            </a:pPr>
-            <a:r>
-              <a:rPr lang="en-US" sz="2200" b="1" dirty="0">
+            <a:off x="640080" y="777240"/>
+            <a:ext cx="10881360" cy="777240"/>
+          </a:xfrm>
+          <a:prstGeom prst="rect">
+            <a:avLst/>
+          </a:prstGeom>
+          <a:noFill/>
+          <a:ln/>
+        </p:spPr>
+        <p:txBody>
+          <a:bodyPr wrap="square" lIns="0" tIns="0" rIns="0" bIns="0" rtlCol="0" anchor="ctr"/>
+          <a:lstStyle/>
+          <a:p>
+            <a:pPr indent="0" marL="0">
+              <a:buNone/>
+            </a:pPr>
+            <a:r>
+              <a:rPr lang="en-US" sz="2300" b="1" dirty="0">
                 <a:solidFill>
                   <a:srgbClr val="16232F"/>
                 </a:solidFill>
@@ -3144,15 +3150,1786 @@
                 <a:ea typeface="Cambria" pitchFamily="34" charset="-122"/>
                 <a:cs typeface="Cambria" pitchFamily="34" charset="-120"/>
               </a:rPr>
-              <a:t>Four computational results, explained for a scientist and for everyone else</a:t>
-            </a:r>
-            <a:endParaRPr lang="en-US" sz="2200" dirty="0"/>
+              <a:t>We ranked our own three candidate mechanisms by how much wet-lab risk each still hides</a:t>
+            </a:r>
+            <a:endParaRPr lang="en-US" sz="2300" dirty="0"/>
+          </a:p>
+        </p:txBody>
+      </p:sp>
+      <p:sp>
+        <p:nvSpPr>
+          <p:cNvPr id="4" name="Text 2"/>
+          <p:cNvSpPr txBox="1"/>
+          <p:nvPr/>
+        </p:nvSpPr>
+        <p:spPr>
+          <a:xfrm>
+            <a:off x="640080" y="1737360"/>
+            <a:ext cx="6126480" cy="320040"/>
+          </a:xfrm>
+          <a:prstGeom prst="rect">
+            <a:avLst/>
+          </a:prstGeom>
+          <a:noFill/>
+          <a:ln/>
+        </p:spPr>
+        <p:txBody>
+          <a:bodyPr wrap="square" lIns="0" tIns="0" rIns="0" bIns="0" rtlCol="0" anchor="ctr"/>
+          <a:lstStyle/>
+          <a:p>
+            <a:pPr indent="0" marL="0">
+              <a:buNone/>
+            </a:pPr>
+            <a:r>
+              <a:rPr lang="en-US" sz="1150" i="1" dirty="0">
+                <a:solidFill>
+                  <a:srgbClr val="5B6B77"/>
+                </a:solidFill>
+                <a:latin typeface="Calibri" pitchFamily="34" charset="0"/>
+                <a:ea typeface="Calibri" pitchFamily="34" charset="-122"/>
+                <a:cs typeface="Calibri" pitchFamily="34" charset="-120"/>
+              </a:rPr>
+              <a:t>Grounding confidence (qualitative, not a measured score)</a:t>
+            </a:r>
+            <a:endParaRPr lang="en-US" sz="1150" dirty="0"/>
+          </a:p>
+        </p:txBody>
+      </p:sp>
+      <p:sp>
+        <p:nvSpPr>
+          <p:cNvPr id="5" name="Text 3"/>
+          <p:cNvSpPr txBox="1"/>
+          <p:nvPr/>
+        </p:nvSpPr>
+        <p:spPr>
+          <a:xfrm>
+            <a:off x="640080" y="2148840"/>
+            <a:ext cx="6126480" cy="274320"/>
+          </a:xfrm>
+          <a:prstGeom prst="rect">
+            <a:avLst/>
+          </a:prstGeom>
+          <a:noFill/>
+          <a:ln/>
+        </p:spPr>
+        <p:txBody>
+          <a:bodyPr wrap="square" lIns="0" tIns="0" rIns="0" bIns="0" rtlCol="0" anchor="ctr"/>
+          <a:lstStyle/>
+          <a:p>
+            <a:pPr indent="0" marL="0">
+              <a:buNone/>
+            </a:pPr>
+            <a:r>
+              <a:rPr lang="en-US" sz="1250" b="1" dirty="0">
+                <a:solidFill>
+                  <a:srgbClr val="16232F"/>
+                </a:solidFill>
+                <a:latin typeface="Calibri" pitchFamily="34" charset="0"/>
+                <a:ea typeface="Calibri" pitchFamily="34" charset="-122"/>
+                <a:cs typeface="Calibri" pitchFamily="34" charset="-120"/>
+              </a:rPr>
+              <a:t>B. subtilis, engineered circuit</a:t>
+            </a:r>
+            <a:endParaRPr lang="en-US" sz="1250" dirty="0"/>
+          </a:p>
+        </p:txBody>
+      </p:sp>
+      <p:sp>
+        <p:nvSpPr>
+          <p:cNvPr id="6" name="Shape 4"/>
+          <p:cNvSpPr/>
+          <p:nvPr/>
+        </p:nvSpPr>
+        <p:spPr>
+          <a:xfrm>
+            <a:off x="640080" y="2468880"/>
+            <a:ext cx="5120640" cy="457200"/>
+          </a:xfrm>
+          <a:prstGeom prst="roundRect">
+            <a:avLst>
+              <a:gd name="adj" fmla="val 8000"/>
+            </a:avLst>
+          </a:prstGeom>
+          <a:solidFill>
+            <a:srgbClr val="E4E9EA"/>
+          </a:solidFill>
+          <a:ln/>
+        </p:spPr>
+      </p:sp>
+      <p:sp>
+        <p:nvSpPr>
+          <p:cNvPr id="7" name="Shape 5"/>
+          <p:cNvSpPr/>
+          <p:nvPr/>
+        </p:nvSpPr>
+        <p:spPr>
+          <a:xfrm>
+            <a:off x="640080" y="2468880"/>
+            <a:ext cx="5120640" cy="457200"/>
+          </a:xfrm>
+          <a:prstGeom prst="roundRect">
+            <a:avLst>
+              <a:gd name="adj" fmla="val 8000"/>
+            </a:avLst>
+          </a:prstGeom>
+          <a:solidFill>
+            <a:srgbClr val="2EC4B6"/>
+          </a:solidFill>
+          <a:ln/>
+        </p:spPr>
+      </p:sp>
+      <p:sp>
+        <p:nvSpPr>
+          <p:cNvPr id="8" name="Text 6"/>
+          <p:cNvSpPr txBox="1"/>
+          <p:nvPr/>
+        </p:nvSpPr>
+        <p:spPr>
+          <a:xfrm>
+            <a:off x="5852160" y="2441448"/>
+            <a:ext cx="914400" cy="502920"/>
+          </a:xfrm>
+          <a:prstGeom prst="rect">
+            <a:avLst/>
+          </a:prstGeom>
+          <a:noFill/>
+          <a:ln/>
+        </p:spPr>
+        <p:txBody>
+          <a:bodyPr wrap="square" lIns="0" tIns="0" rIns="0" bIns="0" rtlCol="0" anchor="ctr"/>
+          <a:lstStyle/>
+          <a:p>
+            <a:pPr indent="0" marL="0">
+              <a:buNone/>
+            </a:pPr>
+            <a:r>
+              <a:rPr lang="en-US" sz="1200" b="1" dirty="0">
+                <a:solidFill>
+                  <a:srgbClr val="16232F"/>
+                </a:solidFill>
+                <a:latin typeface="Calibri" pitchFamily="34" charset="0"/>
+                <a:ea typeface="Calibri" pitchFamily="34" charset="-122"/>
+                <a:cs typeface="Calibri" pitchFamily="34" charset="-120"/>
+              </a:rPr>
+              <a:t>Highest</a:t>
+            </a:r>
+            <a:endParaRPr lang="en-US" sz="1200" dirty="0"/>
+          </a:p>
+        </p:txBody>
+      </p:sp>
+      <p:sp>
+        <p:nvSpPr>
+          <p:cNvPr id="9" name="Text 7"/>
+          <p:cNvSpPr txBox="1"/>
+          <p:nvPr/>
+        </p:nvSpPr>
+        <p:spPr>
+          <a:xfrm>
+            <a:off x="640080" y="3154680"/>
+            <a:ext cx="6126480" cy="274320"/>
+          </a:xfrm>
+          <a:prstGeom prst="rect">
+            <a:avLst/>
+          </a:prstGeom>
+          <a:noFill/>
+          <a:ln/>
+        </p:spPr>
+        <p:txBody>
+          <a:bodyPr wrap="square" lIns="0" tIns="0" rIns="0" bIns="0" rtlCol="0" anchor="ctr"/>
+          <a:lstStyle/>
+          <a:p>
+            <a:pPr indent="0" marL="0">
+              <a:buNone/>
+            </a:pPr>
+            <a:r>
+              <a:rPr lang="en-US" sz="1250" b="1" dirty="0">
+                <a:solidFill>
+                  <a:srgbClr val="16232F"/>
+                </a:solidFill>
+                <a:latin typeface="Calibri" pitchFamily="34" charset="0"/>
+                <a:ea typeface="Calibri" pitchFamily="34" charset="-122"/>
+                <a:cs typeface="Calibri" pitchFamily="34" charset="-120"/>
+              </a:rPr>
+              <a:t>B. subtilis, methylation</a:t>
+            </a:r>
+            <a:endParaRPr lang="en-US" sz="1250" dirty="0"/>
+          </a:p>
+        </p:txBody>
+      </p:sp>
+      <p:sp>
+        <p:nvSpPr>
+          <p:cNvPr id="10" name="Shape 8"/>
+          <p:cNvSpPr/>
+          <p:nvPr/>
+        </p:nvSpPr>
+        <p:spPr>
+          <a:xfrm>
+            <a:off x="640080" y="3474720"/>
+            <a:ext cx="5120640" cy="457200"/>
+          </a:xfrm>
+          <a:prstGeom prst="roundRect">
+            <a:avLst>
+              <a:gd name="adj" fmla="val 8000"/>
+            </a:avLst>
+          </a:prstGeom>
+          <a:solidFill>
+            <a:srgbClr val="E4E9EA"/>
+          </a:solidFill>
+          <a:ln/>
+        </p:spPr>
+      </p:sp>
+      <p:sp>
+        <p:nvSpPr>
+          <p:cNvPr id="11" name="Shape 9"/>
+          <p:cNvSpPr/>
+          <p:nvPr/>
+        </p:nvSpPr>
+        <p:spPr>
+          <a:xfrm>
+            <a:off x="640080" y="3474720"/>
+            <a:ext cx="3072384" cy="457200"/>
+          </a:xfrm>
+          <a:prstGeom prst="roundRect">
+            <a:avLst>
+              <a:gd name="adj" fmla="val 8000"/>
+            </a:avLst>
+          </a:prstGeom>
+          <a:solidFill>
+            <a:srgbClr val="E8A33D"/>
+          </a:solidFill>
+          <a:ln/>
+        </p:spPr>
+      </p:sp>
+      <p:sp>
+        <p:nvSpPr>
+          <p:cNvPr id="12" name="Text 10"/>
+          <p:cNvSpPr txBox="1"/>
+          <p:nvPr/>
+        </p:nvSpPr>
+        <p:spPr>
+          <a:xfrm>
+            <a:off x="3803904" y="3447288"/>
+            <a:ext cx="914400" cy="502920"/>
+          </a:xfrm>
+          <a:prstGeom prst="rect">
+            <a:avLst/>
+          </a:prstGeom>
+          <a:noFill/>
+          <a:ln/>
+        </p:spPr>
+        <p:txBody>
+          <a:bodyPr wrap="square" lIns="0" tIns="0" rIns="0" bIns="0" rtlCol="0" anchor="ctr"/>
+          <a:lstStyle/>
+          <a:p>
+            <a:pPr indent="0" marL="0">
+              <a:buNone/>
+            </a:pPr>
+            <a:r>
+              <a:rPr lang="en-US" sz="1200" b="1" dirty="0">
+                <a:solidFill>
+                  <a:srgbClr val="16232F"/>
+                </a:solidFill>
+                <a:latin typeface="Calibri" pitchFamily="34" charset="0"/>
+                <a:ea typeface="Calibri" pitchFamily="34" charset="-122"/>
+                <a:cs typeface="Calibri" pitchFamily="34" charset="-120"/>
+              </a:rPr>
+              <a:t>Medium</a:t>
+            </a:r>
+            <a:endParaRPr lang="en-US" sz="1200" dirty="0"/>
+          </a:p>
+        </p:txBody>
+      </p:sp>
+      <p:sp>
+        <p:nvSpPr>
+          <p:cNvPr id="13" name="Text 11"/>
+          <p:cNvSpPr txBox="1"/>
+          <p:nvPr/>
+        </p:nvSpPr>
+        <p:spPr>
+          <a:xfrm>
+            <a:off x="640080" y="4160520"/>
+            <a:ext cx="6126480" cy="274320"/>
+          </a:xfrm>
+          <a:prstGeom prst="rect">
+            <a:avLst/>
+          </a:prstGeom>
+          <a:noFill/>
+          <a:ln/>
+        </p:spPr>
+        <p:txBody>
+          <a:bodyPr wrap="square" lIns="0" tIns="0" rIns="0" bIns="0" rtlCol="0" anchor="ctr"/>
+          <a:lstStyle/>
+          <a:p>
+            <a:pPr indent="0" marL="0">
+              <a:buNone/>
+            </a:pPr>
+            <a:r>
+              <a:rPr lang="en-US" sz="1250" b="1" dirty="0">
+                <a:solidFill>
+                  <a:srgbClr val="16232F"/>
+                </a:solidFill>
+                <a:latin typeface="Calibri" pitchFamily="34" charset="0"/>
+                <a:ea typeface="Calibri" pitchFamily="34" charset="-122"/>
+                <a:cs typeface="Calibri" pitchFamily="34" charset="-120"/>
+              </a:rPr>
+              <a:t>Planarian, bioelectric circuit</a:t>
+            </a:r>
+            <a:endParaRPr lang="en-US" sz="1250" dirty="0"/>
+          </a:p>
+        </p:txBody>
+      </p:sp>
+      <p:sp>
+        <p:nvSpPr>
+          <p:cNvPr id="14" name="Shape 12"/>
+          <p:cNvSpPr/>
+          <p:nvPr/>
+        </p:nvSpPr>
+        <p:spPr>
+          <a:xfrm>
+            <a:off x="640080" y="4480560"/>
+            <a:ext cx="5120640" cy="457200"/>
+          </a:xfrm>
+          <a:prstGeom prst="roundRect">
+            <a:avLst>
+              <a:gd name="adj" fmla="val 8000"/>
+            </a:avLst>
+          </a:prstGeom>
+          <a:solidFill>
+            <a:srgbClr val="E4E9EA"/>
+          </a:solidFill>
+          <a:ln/>
+        </p:spPr>
+      </p:sp>
+      <p:sp>
+        <p:nvSpPr>
+          <p:cNvPr id="15" name="Shape 13"/>
+          <p:cNvSpPr/>
+          <p:nvPr/>
+        </p:nvSpPr>
+        <p:spPr>
+          <a:xfrm>
+            <a:off x="640080" y="4480560"/>
+            <a:ext cx="1536192" cy="457200"/>
+          </a:xfrm>
+          <a:prstGeom prst="roundRect">
+            <a:avLst>
+              <a:gd name="adj" fmla="val 8000"/>
+            </a:avLst>
+          </a:prstGeom>
+          <a:solidFill>
+            <a:srgbClr val="E8604C"/>
+          </a:solidFill>
+          <a:ln/>
+        </p:spPr>
+      </p:sp>
+      <p:sp>
+        <p:nvSpPr>
+          <p:cNvPr id="16" name="Text 14"/>
+          <p:cNvSpPr txBox="1"/>
+          <p:nvPr/>
+        </p:nvSpPr>
+        <p:spPr>
+          <a:xfrm>
+            <a:off x="2267712" y="4453128"/>
+            <a:ext cx="914400" cy="502920"/>
+          </a:xfrm>
+          <a:prstGeom prst="rect">
+            <a:avLst/>
+          </a:prstGeom>
+          <a:noFill/>
+          <a:ln/>
+        </p:spPr>
+        <p:txBody>
+          <a:bodyPr wrap="square" lIns="0" tIns="0" rIns="0" bIns="0" rtlCol="0" anchor="ctr"/>
+          <a:lstStyle/>
+          <a:p>
+            <a:pPr indent="0" marL="0">
+              <a:buNone/>
+            </a:pPr>
+            <a:r>
+              <a:rPr lang="en-US" sz="1200" b="1" dirty="0">
+                <a:solidFill>
+                  <a:srgbClr val="16232F"/>
+                </a:solidFill>
+                <a:latin typeface="Calibri" pitchFamily="34" charset="0"/>
+                <a:ea typeface="Calibri" pitchFamily="34" charset="-122"/>
+                <a:cs typeface="Calibri" pitchFamily="34" charset="-120"/>
+              </a:rPr>
+              <a:t>Lowest</a:t>
+            </a:r>
+            <a:endParaRPr lang="en-US" sz="1200" dirty="0"/>
+          </a:p>
+        </p:txBody>
+      </p:sp>
+      <p:sp>
+        <p:nvSpPr>
+          <p:cNvPr id="17" name="Text 15"/>
+          <p:cNvSpPr txBox="1"/>
+          <p:nvPr/>
+        </p:nvSpPr>
+        <p:spPr>
+          <a:xfrm>
+            <a:off x="640080" y="5212080"/>
+            <a:ext cx="6126480" cy="594360"/>
+          </a:xfrm>
+          <a:prstGeom prst="rect">
+            <a:avLst/>
+          </a:prstGeom>
+          <a:noFill/>
+          <a:ln/>
+        </p:spPr>
+        <p:txBody>
+          <a:bodyPr wrap="square" lIns="0" tIns="0" rIns="0" bIns="0" rtlCol="0" anchor="ctr"/>
+          <a:lstStyle/>
+          <a:p>
+            <a:pPr indent="0" marL="0">
+              <a:lnSpc>
+                <a:spcPct val="115000"/>
+              </a:lnSpc>
+              <a:buNone/>
+            </a:pPr>
+            <a:r>
+              <a:rPr lang="en-US" sz="1100" i="1" dirty="0">
+                <a:solidFill>
+                  <a:srgbClr val="5B6B77"/>
+                </a:solidFill>
+                <a:latin typeface="Calibri" pitchFamily="34" charset="0"/>
+                <a:ea typeface="Calibri" pitchFamily="34" charset="-122"/>
+                <a:cs typeface="Calibri" pitchFamily="34" charset="-120"/>
+              </a:rPr>
+              <a:t>All three numerically tie at ~2% surviving-cell recovery threshold, that number alone doesn't rank them; grounding confidence, shown above, does.</a:t>
+            </a:r>
+            <a:endParaRPr lang="en-US" sz="1100" dirty="0"/>
           </a:p>
         </p:txBody>
       </p:sp>
       <p:graphicFrame>
         <p:nvGraphicFramePr>
           <p:cNvPr id="11" name="Table 0"/>
+          <p:cNvGraphicFramePr>
+            <a:graphicFrameLocks noGrp="1"/>
+          </p:cNvGraphicFramePr>
+          <p:nvPr>
+            <p:extLst>
+              <p:ext uri="{D42A27DB-BD31-4B8C-83A1-F6EECF244321}">
+                <p14:modId xmlns:p14="http://schemas.microsoft.com/office/powerpoint/2010/main" val="1579011935"/>
+              </p:ext>
+            </p:extLst>
+          </p:nvPr>
+        </p:nvGraphicFramePr>
+        <p:xfrm>
+          <a:off x="6995160" y="1783080"/>
+          <a:ext cx="4572000" cy="4114800"/>
+        </p:xfrm>
+        <a:graphic>
+          <a:graphicData uri="http://schemas.openxmlformats.org/drawingml/2006/table">
+            <a:tbl>
+              <a:tblPr/>
+              <a:tblGrid>
+                <a:gridCol w="2286000"/>
+                <a:gridCol w="2286000"/>
+              </a:tblGrid>
+              <a:tr h="548640">
+                <a:tc>
+                  <a:txBody>
+                    <a:bodyPr/>
+                    <a:lstStyle/>
+                    <a:p>
+                      <a:pPr indent="0" marL="0">
+                        <a:buNone/>
+                      </a:pPr>
+                      <a:r>
+                        <a:rPr lang="en-US" sz="1150" b="1" dirty="0">
+                          <a:solidFill>
+                            <a:srgbClr val="FFFFFF"/>
+                          </a:solidFill>
+                          <a:latin typeface="Calibri" pitchFamily="34" charset="0"/>
+                          <a:ea typeface="Calibri" pitchFamily="34" charset="-122"/>
+                          <a:cs typeface="Calibri" pitchFamily="34" charset="-120"/>
+                        </a:rPr>
+                        <a:t>Mechanism</a:t>
+                      </a:r>
+                      <a:endParaRPr lang="en-US" sz="1150" dirty="0">
+                        <a:latin typeface="Calibri" charset="0"/>
+                        <a:ea typeface="Calibri" charset="0"/>
+                        <a:cs typeface="Calibri" charset="0"/>
+                      </a:endParaRPr>
+                    </a:p>
+                  </a:txBody>
+                  <a:tcPr marL="91440" marR="91440" marT="45720" marB="45720" anchor="ctr">
+                    <a:lnL w="12700" cap="flat" cmpd="sng" algn="ctr">
+                      <a:solidFill>
+                        <a:srgbClr val="D8DEE1"/>
+                      </a:solidFill>
+                      <a:prstDash val="solid"/>
+                      <a:round/>
+                      <a:headEnd type="none" w="med" len="med"/>
+                      <a:tailEnd type="none" w="med" len="med"/>
+                    </a:lnL>
+                    <a:lnR w="12700" cap="flat" cmpd="sng" algn="ctr">
+                      <a:solidFill>
+                        <a:srgbClr val="D8DEE1"/>
+                      </a:solidFill>
+                      <a:prstDash val="solid"/>
+                      <a:round/>
+                      <a:headEnd type="none" w="med" len="med"/>
+                      <a:tailEnd type="none" w="med" len="med"/>
+                    </a:lnR>
+                    <a:lnT w="12700" cap="flat" cmpd="sng" algn="ctr">
+                      <a:solidFill>
+                        <a:srgbClr val="D8DEE1"/>
+                      </a:solidFill>
+                      <a:prstDash val="solid"/>
+                      <a:round/>
+                      <a:headEnd type="none" w="med" len="med"/>
+                      <a:tailEnd type="none" w="med" len="med"/>
+                    </a:lnT>
+                    <a:lnB w="12700" cap="flat" cmpd="sng" algn="ctr">
+                      <a:solidFill>
+                        <a:srgbClr val="D8DEE1"/>
+                      </a:solidFill>
+                      <a:prstDash val="solid"/>
+                      <a:round/>
+                      <a:headEnd type="none" w="med" len="med"/>
+                      <a:tailEnd type="none" w="med" len="med"/>
+                    </a:lnB>
+                    <a:solidFill>
+                      <a:srgbClr val="0B1F3A"/>
+                    </a:solidFill>
+                  </a:tcPr>
+                </a:tc>
+                <a:tc>
+                  <a:txBody>
+                    <a:bodyPr/>
+                    <a:lstStyle/>
+                    <a:p>
+                      <a:pPr indent="0" marL="0">
+                        <a:buNone/>
+                      </a:pPr>
+                      <a:r>
+                        <a:rPr lang="en-US" sz="1150" b="1" dirty="0">
+                          <a:solidFill>
+                            <a:srgbClr val="FFFFFF"/>
+                          </a:solidFill>
+                          <a:latin typeface="Calibri" pitchFamily="34" charset="0"/>
+                          <a:ea typeface="Calibri" pitchFamily="34" charset="-122"/>
+                          <a:cs typeface="Calibri" pitchFamily="34" charset="-120"/>
+                        </a:rPr>
+                        <a:t>Grounding confidence</a:t>
+                      </a:r>
+                      <a:endParaRPr lang="en-US" sz="1150" dirty="0">
+                        <a:latin typeface="Calibri" charset="0"/>
+                        <a:ea typeface="Calibri" charset="0"/>
+                        <a:cs typeface="Calibri" charset="0"/>
+                      </a:endParaRPr>
+                    </a:p>
+                  </a:txBody>
+                  <a:tcPr marL="91440" marR="91440" marT="45720" marB="45720" anchor="ctr">
+                    <a:lnL w="12700" cap="flat" cmpd="sng" algn="ctr">
+                      <a:solidFill>
+                        <a:srgbClr val="D8DEE1"/>
+                      </a:solidFill>
+                      <a:prstDash val="solid"/>
+                      <a:round/>
+                      <a:headEnd type="none" w="med" len="med"/>
+                      <a:tailEnd type="none" w="med" len="med"/>
+                    </a:lnL>
+                    <a:lnR w="12700" cap="flat" cmpd="sng" algn="ctr">
+                      <a:solidFill>
+                        <a:srgbClr val="D8DEE1"/>
+                      </a:solidFill>
+                      <a:prstDash val="solid"/>
+                      <a:round/>
+                      <a:headEnd type="none" w="med" len="med"/>
+                      <a:tailEnd type="none" w="med" len="med"/>
+                    </a:lnR>
+                    <a:lnT w="12700" cap="flat" cmpd="sng" algn="ctr">
+                      <a:solidFill>
+                        <a:srgbClr val="D8DEE1"/>
+                      </a:solidFill>
+                      <a:prstDash val="solid"/>
+                      <a:round/>
+                      <a:headEnd type="none" w="med" len="med"/>
+                      <a:tailEnd type="none" w="med" len="med"/>
+                    </a:lnT>
+                    <a:lnB w="12700" cap="flat" cmpd="sng" algn="ctr">
+                      <a:solidFill>
+                        <a:srgbClr val="D8DEE1"/>
+                      </a:solidFill>
+                      <a:prstDash val="solid"/>
+                      <a:round/>
+                      <a:headEnd type="none" w="med" len="med"/>
+                      <a:tailEnd type="none" w="med" len="med"/>
+                    </a:lnB>
+                    <a:solidFill>
+                      <a:srgbClr val="0B1F3A"/>
+                    </a:solidFill>
+                  </a:tcPr>
+                </a:tc>
+              </a:tr>
+              <a:tr h="1188720">
+                <a:tc>
+                  <a:txBody>
+                    <a:bodyPr/>
+                    <a:lstStyle/>
+                    <a:p>
+                      <a:pPr indent="0" marL="0">
+                        <a:buNone/>
+                      </a:pPr>
+                      <a:r>
+                        <a:rPr lang="en-US" sz="1150" dirty="0">
+                          <a:solidFill>
+                            <a:srgbClr val="16232F"/>
+                          </a:solidFill>
+                          <a:latin typeface="Calibri" pitchFamily="34" charset="0"/>
+                          <a:ea typeface="Calibri" pitchFamily="34" charset="-122"/>
+                          <a:cs typeface="Calibri" pitchFamily="34" charset="-120"/>
+                        </a:rPr>
+                        <a:t>B. subtilis, engineered circuit</a:t>
+                      </a:r>
+                      <a:endParaRPr lang="en-US" sz="1150" dirty="0">
+                        <a:latin typeface="Calibri" charset="0"/>
+                        <a:ea typeface="Calibri" charset="0"/>
+                        <a:cs typeface="Calibri" charset="0"/>
+                      </a:endParaRPr>
+                    </a:p>
+                  </a:txBody>
+                  <a:tcPr marL="91440" marR="91440" marT="45720" marB="45720" anchor="ctr">
+                    <a:lnL w="12700" cap="flat" cmpd="sng" algn="ctr">
+                      <a:solidFill>
+                        <a:srgbClr val="D8DEE1"/>
+                      </a:solidFill>
+                      <a:prstDash val="solid"/>
+                      <a:round/>
+                      <a:headEnd type="none" w="med" len="med"/>
+                      <a:tailEnd type="none" w="med" len="med"/>
+                    </a:lnL>
+                    <a:lnR w="12700" cap="flat" cmpd="sng" algn="ctr">
+                      <a:solidFill>
+                        <a:srgbClr val="D8DEE1"/>
+                      </a:solidFill>
+                      <a:prstDash val="solid"/>
+                      <a:round/>
+                      <a:headEnd type="none" w="med" len="med"/>
+                      <a:tailEnd type="none" w="med" len="med"/>
+                    </a:lnR>
+                    <a:lnT w="12700" cap="flat" cmpd="sng" algn="ctr">
+                      <a:solidFill>
+                        <a:srgbClr val="D8DEE1"/>
+                      </a:solidFill>
+                      <a:prstDash val="solid"/>
+                      <a:round/>
+                      <a:headEnd type="none" w="med" len="med"/>
+                      <a:tailEnd type="none" w="med" len="med"/>
+                    </a:lnT>
+                    <a:lnB w="12700" cap="flat" cmpd="sng" algn="ctr">
+                      <a:solidFill>
+                        <a:srgbClr val="D8DEE1"/>
+                      </a:solidFill>
+                      <a:prstDash val="solid"/>
+                      <a:round/>
+                      <a:headEnd type="none" w="med" len="med"/>
+                      <a:tailEnd type="none" w="med" len="med"/>
+                    </a:lnB>
+                  </a:tcPr>
+                </a:tc>
+                <a:tc>
+                  <a:txBody>
+                    <a:bodyPr/>
+                    <a:lstStyle/>
+                    <a:p>
+                      <a:pPr indent="0" marL="0">
+                        <a:buNone/>
+                      </a:pPr>
+                      <a:r>
+                        <a:rPr lang="en-US" sz="1150" dirty="0">
+                          <a:solidFill>
+                            <a:srgbClr val="16232F"/>
+                          </a:solidFill>
+                          <a:latin typeface="Calibri" pitchFamily="34" charset="0"/>
+                          <a:ea typeface="Calibri" pitchFamily="34" charset="-122"/>
+                          <a:cs typeface="Calibri" pitchFamily="34" charset="-120"/>
+                        </a:rPr>
+                        <a:t>Highest, inheritance is mechanistically forced (division copies existing protein)</a:t>
+                      </a:r>
+                      <a:endParaRPr lang="en-US" sz="1150" dirty="0">
+                        <a:latin typeface="Calibri" charset="0"/>
+                        <a:ea typeface="Calibri" charset="0"/>
+                        <a:cs typeface="Calibri" charset="0"/>
+                      </a:endParaRPr>
+                    </a:p>
+                  </a:txBody>
+                  <a:tcPr marL="91440" marR="91440" marT="45720" marB="45720" anchor="ctr">
+                    <a:lnL w="12700" cap="flat" cmpd="sng" algn="ctr">
+                      <a:solidFill>
+                        <a:srgbClr val="D8DEE1"/>
+                      </a:solidFill>
+                      <a:prstDash val="solid"/>
+                      <a:round/>
+                      <a:headEnd type="none" w="med" len="med"/>
+                      <a:tailEnd type="none" w="med" len="med"/>
+                    </a:lnL>
+                    <a:lnR w="12700" cap="flat" cmpd="sng" algn="ctr">
+                      <a:solidFill>
+                        <a:srgbClr val="D8DEE1"/>
+                      </a:solidFill>
+                      <a:prstDash val="solid"/>
+                      <a:round/>
+                      <a:headEnd type="none" w="med" len="med"/>
+                      <a:tailEnd type="none" w="med" len="med"/>
+                    </a:lnR>
+                    <a:lnT w="12700" cap="flat" cmpd="sng" algn="ctr">
+                      <a:solidFill>
+                        <a:srgbClr val="D8DEE1"/>
+                      </a:solidFill>
+                      <a:prstDash val="solid"/>
+                      <a:round/>
+                      <a:headEnd type="none" w="med" len="med"/>
+                      <a:tailEnd type="none" w="med" len="med"/>
+                    </a:lnT>
+                    <a:lnB w="12700" cap="flat" cmpd="sng" algn="ctr">
+                      <a:solidFill>
+                        <a:srgbClr val="D8DEE1"/>
+                      </a:solidFill>
+                      <a:prstDash val="solid"/>
+                      <a:round/>
+                      <a:headEnd type="none" w="med" len="med"/>
+                      <a:tailEnd type="none" w="med" len="med"/>
+                    </a:lnB>
+                  </a:tcPr>
+                </a:tc>
+              </a:tr>
+              <a:tr h="1188720">
+                <a:tc>
+                  <a:txBody>
+                    <a:bodyPr/>
+                    <a:lstStyle/>
+                    <a:p>
+                      <a:pPr indent="0" marL="0">
+                        <a:buNone/>
+                      </a:pPr>
+                      <a:r>
+                        <a:rPr lang="en-US" sz="1150" dirty="0">
+                          <a:solidFill>
+                            <a:srgbClr val="16232F"/>
+                          </a:solidFill>
+                          <a:latin typeface="Calibri" pitchFamily="34" charset="0"/>
+                          <a:ea typeface="Calibri" pitchFamily="34" charset="-122"/>
+                          <a:cs typeface="Calibri" pitchFamily="34" charset="-120"/>
+                        </a:rPr>
+                        <a:t>B. subtilis, methylation</a:t>
+                      </a:r>
+                      <a:endParaRPr lang="en-US" sz="1150" dirty="0">
+                        <a:latin typeface="Calibri" charset="0"/>
+                        <a:ea typeface="Calibri" charset="0"/>
+                        <a:cs typeface="Calibri" charset="0"/>
+                      </a:endParaRPr>
+                    </a:p>
+                  </a:txBody>
+                  <a:tcPr marL="91440" marR="91440" marT="45720" marB="45720" anchor="ctr">
+                    <a:lnL w="12700" cap="flat" cmpd="sng" algn="ctr">
+                      <a:solidFill>
+                        <a:srgbClr val="D8DEE1"/>
+                      </a:solidFill>
+                      <a:prstDash val="solid"/>
+                      <a:round/>
+                      <a:headEnd type="none" w="med" len="med"/>
+                      <a:tailEnd type="none" w="med" len="med"/>
+                    </a:lnL>
+                    <a:lnR w="12700" cap="flat" cmpd="sng" algn="ctr">
+                      <a:solidFill>
+                        <a:srgbClr val="D8DEE1"/>
+                      </a:solidFill>
+                      <a:prstDash val="solid"/>
+                      <a:round/>
+                      <a:headEnd type="none" w="med" len="med"/>
+                      <a:tailEnd type="none" w="med" len="med"/>
+                    </a:lnR>
+                    <a:lnT w="12700" cap="flat" cmpd="sng" algn="ctr">
+                      <a:solidFill>
+                        <a:srgbClr val="D8DEE1"/>
+                      </a:solidFill>
+                      <a:prstDash val="solid"/>
+                      <a:round/>
+                      <a:headEnd type="none" w="med" len="med"/>
+                      <a:tailEnd type="none" w="med" len="med"/>
+                    </a:lnT>
+                    <a:lnB w="12700" cap="flat" cmpd="sng" algn="ctr">
+                      <a:solidFill>
+                        <a:srgbClr val="D8DEE1"/>
+                      </a:solidFill>
+                      <a:prstDash val="solid"/>
+                      <a:round/>
+                      <a:headEnd type="none" w="med" len="med"/>
+                      <a:tailEnd type="none" w="med" len="med"/>
+                    </a:lnB>
+                  </a:tcPr>
+                </a:tc>
+                <a:tc>
+                  <a:txBody>
+                    <a:bodyPr/>
+                    <a:lstStyle/>
+                    <a:p>
+                      <a:pPr indent="0" marL="0">
+                        <a:buNone/>
+                      </a:pPr>
+                      <a:r>
+                        <a:rPr lang="en-US" sz="1150" dirty="0">
+                          <a:solidFill>
+                            <a:srgbClr val="16232F"/>
+                          </a:solidFill>
+                          <a:latin typeface="Calibri" pitchFamily="34" charset="0"/>
+                          <a:ea typeface="Calibri" pitchFamily="34" charset="-122"/>
+                          <a:cs typeface="Calibri" pitchFamily="34" charset="-120"/>
+                        </a:rPr>
+                        <a:t>Medium, real fidelity numbers exist, but from a different species</a:t>
+                      </a:r>
+                      <a:endParaRPr lang="en-US" sz="1150" dirty="0">
+                        <a:latin typeface="Calibri" charset="0"/>
+                        <a:ea typeface="Calibri" charset="0"/>
+                        <a:cs typeface="Calibri" charset="0"/>
+                      </a:endParaRPr>
+                    </a:p>
+                  </a:txBody>
+                  <a:tcPr marL="91440" marR="91440" marT="45720" marB="45720" anchor="ctr">
+                    <a:lnL w="12700" cap="flat" cmpd="sng" algn="ctr">
+                      <a:solidFill>
+                        <a:srgbClr val="D8DEE1"/>
+                      </a:solidFill>
+                      <a:prstDash val="solid"/>
+                      <a:round/>
+                      <a:headEnd type="none" w="med" len="med"/>
+                      <a:tailEnd type="none" w="med" len="med"/>
+                    </a:lnL>
+                    <a:lnR w="12700" cap="flat" cmpd="sng" algn="ctr">
+                      <a:solidFill>
+                        <a:srgbClr val="D8DEE1"/>
+                      </a:solidFill>
+                      <a:prstDash val="solid"/>
+                      <a:round/>
+                      <a:headEnd type="none" w="med" len="med"/>
+                      <a:tailEnd type="none" w="med" len="med"/>
+                    </a:lnR>
+                    <a:lnT w="12700" cap="flat" cmpd="sng" algn="ctr">
+                      <a:solidFill>
+                        <a:srgbClr val="D8DEE1"/>
+                      </a:solidFill>
+                      <a:prstDash val="solid"/>
+                      <a:round/>
+                      <a:headEnd type="none" w="med" len="med"/>
+                      <a:tailEnd type="none" w="med" len="med"/>
+                    </a:lnT>
+                    <a:lnB w="12700" cap="flat" cmpd="sng" algn="ctr">
+                      <a:solidFill>
+                        <a:srgbClr val="D8DEE1"/>
+                      </a:solidFill>
+                      <a:prstDash val="solid"/>
+                      <a:round/>
+                      <a:headEnd type="none" w="med" len="med"/>
+                      <a:tailEnd type="none" w="med" len="med"/>
+                    </a:lnB>
+                  </a:tcPr>
+                </a:tc>
+              </a:tr>
+              <a:tr h="1188720">
+                <a:tc>
+                  <a:txBody>
+                    <a:bodyPr/>
+                    <a:lstStyle/>
+                    <a:p>
+                      <a:pPr indent="0" marL="0">
+                        <a:buNone/>
+                      </a:pPr>
+                      <a:r>
+                        <a:rPr lang="en-US" sz="1150" dirty="0">
+                          <a:solidFill>
+                            <a:srgbClr val="16232F"/>
+                          </a:solidFill>
+                          <a:latin typeface="Calibri" pitchFamily="34" charset="0"/>
+                          <a:ea typeface="Calibri" pitchFamily="34" charset="-122"/>
+                          <a:cs typeface="Calibri" pitchFamily="34" charset="-120"/>
+                        </a:rPr>
+                        <a:t>Planarian, bioelectric circuit</a:t>
+                      </a:r>
+                      <a:endParaRPr lang="en-US" sz="1150" dirty="0">
+                        <a:latin typeface="Calibri" charset="0"/>
+                        <a:ea typeface="Calibri" charset="0"/>
+                        <a:cs typeface="Calibri" charset="0"/>
+                      </a:endParaRPr>
+                    </a:p>
+                  </a:txBody>
+                  <a:tcPr marL="91440" marR="91440" marT="45720" marB="45720" anchor="ctr">
+                    <a:lnL w="12700" cap="flat" cmpd="sng" algn="ctr">
+                      <a:solidFill>
+                        <a:srgbClr val="D8DEE1"/>
+                      </a:solidFill>
+                      <a:prstDash val="solid"/>
+                      <a:round/>
+                      <a:headEnd type="none" w="med" len="med"/>
+                      <a:tailEnd type="none" w="med" len="med"/>
+                    </a:lnL>
+                    <a:lnR w="12700" cap="flat" cmpd="sng" algn="ctr">
+                      <a:solidFill>
+                        <a:srgbClr val="D8DEE1"/>
+                      </a:solidFill>
+                      <a:prstDash val="solid"/>
+                      <a:round/>
+                      <a:headEnd type="none" w="med" len="med"/>
+                      <a:tailEnd type="none" w="med" len="med"/>
+                    </a:lnR>
+                    <a:lnT w="12700" cap="flat" cmpd="sng" algn="ctr">
+                      <a:solidFill>
+                        <a:srgbClr val="D8DEE1"/>
+                      </a:solidFill>
+                      <a:prstDash val="solid"/>
+                      <a:round/>
+                      <a:headEnd type="none" w="med" len="med"/>
+                      <a:tailEnd type="none" w="med" len="med"/>
+                    </a:lnT>
+                    <a:lnB w="12700" cap="flat" cmpd="sng" algn="ctr">
+                      <a:solidFill>
+                        <a:srgbClr val="D8DEE1"/>
+                      </a:solidFill>
+                      <a:prstDash val="solid"/>
+                      <a:round/>
+                      <a:headEnd type="none" w="med" len="med"/>
+                      <a:tailEnd type="none" w="med" len="med"/>
+                    </a:lnB>
+                  </a:tcPr>
+                </a:tc>
+                <a:tc>
+                  <a:txBody>
+                    <a:bodyPr/>
+                    <a:lstStyle/>
+                    <a:p>
+                      <a:pPr indent="0" marL="0">
+                        <a:buNone/>
+                      </a:pPr>
+                      <a:r>
+                        <a:rPr lang="en-US" sz="1150" dirty="0">
+                          <a:solidFill>
+                            <a:srgbClr val="16232F"/>
+                          </a:solidFill>
+                          <a:latin typeface="Calibri" pitchFamily="34" charset="0"/>
+                          <a:ea typeface="Calibri" pitchFamily="34" charset="-122"/>
+                          <a:cs typeface="Calibri" pitchFamily="34" charset="-120"/>
+                        </a:rPr>
+                        <a:t>Lowest, cell-coupling strength is a borrowed assumption, never measured</a:t>
+                      </a:r>
+                      <a:endParaRPr lang="en-US" sz="1150" dirty="0">
+                        <a:latin typeface="Calibri" charset="0"/>
+                        <a:ea typeface="Calibri" charset="0"/>
+                        <a:cs typeface="Calibri" charset="0"/>
+                      </a:endParaRPr>
+                    </a:p>
+                  </a:txBody>
+                  <a:tcPr marL="91440" marR="91440" marT="45720" marB="45720" anchor="ctr">
+                    <a:lnL w="12700" cap="flat" cmpd="sng" algn="ctr">
+                      <a:solidFill>
+                        <a:srgbClr val="D8DEE1"/>
+                      </a:solidFill>
+                      <a:prstDash val="solid"/>
+                      <a:round/>
+                      <a:headEnd type="none" w="med" len="med"/>
+                      <a:tailEnd type="none" w="med" len="med"/>
+                    </a:lnL>
+                    <a:lnR w="12700" cap="flat" cmpd="sng" algn="ctr">
+                      <a:solidFill>
+                        <a:srgbClr val="D8DEE1"/>
+                      </a:solidFill>
+                      <a:prstDash val="solid"/>
+                      <a:round/>
+                      <a:headEnd type="none" w="med" len="med"/>
+                      <a:tailEnd type="none" w="med" len="med"/>
+                    </a:lnR>
+                    <a:lnT w="12700" cap="flat" cmpd="sng" algn="ctr">
+                      <a:solidFill>
+                        <a:srgbClr val="D8DEE1"/>
+                      </a:solidFill>
+                      <a:prstDash val="solid"/>
+                      <a:round/>
+                      <a:headEnd type="none" w="med" len="med"/>
+                      <a:tailEnd type="none" w="med" len="med"/>
+                    </a:lnT>
+                    <a:lnB w="12700" cap="flat" cmpd="sng" algn="ctr">
+                      <a:solidFill>
+                        <a:srgbClr val="D8DEE1"/>
+                      </a:solidFill>
+                      <a:prstDash val="solid"/>
+                      <a:round/>
+                      <a:headEnd type="none" w="med" len="med"/>
+                      <a:tailEnd type="none" w="med" len="med"/>
+                    </a:lnB>
+                  </a:tcPr>
+                </a:tc>
+              </a:tr>
+            </a:tbl>
+          </a:graphicData>
+        </a:graphic>
+      </p:graphicFrame>
+      <p:sp>
+        <p:nvSpPr>
+          <p:cNvPr id="19" name="Text 16"/>
+          <p:cNvSpPr txBox="1"/>
+          <p:nvPr/>
+        </p:nvSpPr>
+        <p:spPr>
+          <a:xfrm>
+            <a:off x="640080" y="6035040"/>
+            <a:ext cx="10972800" cy="548640"/>
+          </a:xfrm>
+          <a:prstGeom prst="rect">
+            <a:avLst/>
+          </a:prstGeom>
+          <a:noFill/>
+          <a:ln/>
+        </p:spPr>
+        <p:txBody>
+          <a:bodyPr wrap="square" lIns="0" tIns="0" rIns="0" bIns="0" rtlCol="0" anchor="ctr"/>
+          <a:lstStyle/>
+          <a:p>
+            <a:pPr indent="0" marL="0">
+              <a:buNone/>
+            </a:pPr>
+            <a:r>
+              <a:rPr lang="en-US" sz="1300" i="1" dirty="0">
+                <a:solidFill>
+                  <a:srgbClr val="5B6B77"/>
+                </a:solidFill>
+                <a:latin typeface="Calibri" pitchFamily="34" charset="0"/>
+                <a:ea typeface="Calibri" pitchFamily="34" charset="-122"/>
+                <a:cs typeface="Calibri" pitchFamily="34" charset="-120"/>
+              </a:rPr>
+              <a:t>Our original organism choice (planarian) is currently our weakest-evidence option. We're reporting that now, before spending wet-lab money on it.</a:t>
+            </a:r>
+            <a:endParaRPr lang="en-US" sz="1300" dirty="0"/>
+          </a:p>
+        </p:txBody>
+      </p:sp>
+      <p:sp>
+        <p:nvSpPr>
+          <p:cNvPr id="20" name="Text 17"/>
+          <p:cNvSpPr txBox="1"/>
+          <p:nvPr/>
+        </p:nvSpPr>
+        <p:spPr>
+          <a:xfrm>
+            <a:off x="11365992" y="6400800"/>
+            <a:ext cx="548640" cy="274320"/>
+          </a:xfrm>
+          <a:prstGeom prst="rect">
+            <a:avLst/>
+          </a:prstGeom>
+          <a:noFill/>
+          <a:ln/>
+        </p:spPr>
+        <p:txBody>
+          <a:bodyPr wrap="square" lIns="0" tIns="0" rIns="0" bIns="0" rtlCol="0" anchor="ctr"/>
+          <a:lstStyle/>
+          <a:p>
+            <a:pPr algn="r" indent="0" marL="0">
+              <a:buNone/>
+            </a:pPr>
+            <a:r>
+              <a:rPr lang="en-US" sz="1000" dirty="0">
+                <a:solidFill>
+                  <a:srgbClr val="9AA7AF"/>
+                </a:solidFill>
+                <a:latin typeface="Calibri" pitchFamily="34" charset="0"/>
+                <a:ea typeface="Calibri" pitchFamily="34" charset="-122"/>
+                <a:cs typeface="Calibri" pitchFamily="34" charset="-120"/>
+              </a:rPr>
+              <a:t>10</a:t>
+            </a:r>
+            <a:endParaRPr lang="en-US" sz="1000" dirty="0"/>
+          </a:p>
+        </p:txBody>
+      </p:sp>
+    </p:spTree>
+  </p:cSld>
+  <p:clrMapOvr>
+    <a:masterClrMapping/>
+  </p:clrMapOvr>
+</p:sld>
+</file>
+
+<file path=ppt/slides/slide11.xml><?xml version="1.0" encoding="utf-8"?>
+<p:sld xmlns:a="http://schemas.openxmlformats.org/drawingml/2006/main" xmlns:r="http://schemas.openxmlformats.org/officeDocument/2006/relationships" xmlns:p="http://schemas.openxmlformats.org/presentationml/2006/main">
+  <p:cSld name="Slide 11">
+    <p:bg>
+      <p:bgPr>
+        <a:solidFill>
+          <a:srgbClr val="F4F6F7"/>
+        </a:solidFill>
+      </p:bgPr>
+    </p:bg>
+    <p:spTree>
+      <p:nvGrpSpPr>
+        <p:cNvPr id="1" name=""/>
+        <p:cNvGrpSpPr/>
+        <p:nvPr/>
+      </p:nvGrpSpPr>
+      <p:grpSpPr>
+        <a:xfrm>
+          <a:off x="0" y="0"/>
+          <a:ext cx="0" cy="0"/>
+          <a:chOff x="0" y="0"/>
+          <a:chExt cx="0" cy="0"/>
+        </a:xfrm>
+      </p:grpSpPr>
+      <p:sp>
+        <p:nvSpPr>
+          <p:cNvPr id="2" name="Text 0"/>
+          <p:cNvSpPr txBox="1"/>
+          <p:nvPr/>
+        </p:nvSpPr>
+        <p:spPr>
+          <a:xfrm>
+            <a:off x="640080" y="457200"/>
+            <a:ext cx="5486400" cy="320040"/>
+          </a:xfrm>
+          <a:prstGeom prst="rect">
+            <a:avLst/>
+          </a:prstGeom>
+          <a:noFill/>
+          <a:ln/>
+        </p:spPr>
+        <p:txBody>
+          <a:bodyPr wrap="square" lIns="0" tIns="0" rIns="0" bIns="0" rtlCol="0" anchor="ctr"/>
+          <a:lstStyle/>
+          <a:p>
+            <a:pPr indent="0" marL="0">
+              <a:buNone/>
+            </a:pPr>
+            <a:r>
+              <a:rPr lang="en-US" sz="1200" b="1" spc="200" kern="0" dirty="0">
+                <a:solidFill>
+                  <a:srgbClr val="1C8F84"/>
+                </a:solidFill>
+                <a:latin typeface="Calibri" pitchFamily="34" charset="0"/>
+                <a:ea typeface="Calibri" pitchFamily="34" charset="-122"/>
+                <a:cs typeface="Calibri" pitchFamily="34" charset="-120"/>
+              </a:rPr>
+              <a:t>STRESS-TESTING OUR OWN DESIGN</a:t>
+            </a:r>
+            <a:endParaRPr lang="en-US" sz="1200" dirty="0"/>
+          </a:p>
+        </p:txBody>
+      </p:sp>
+      <p:sp>
+        <p:nvSpPr>
+          <p:cNvPr id="3" name="Text 1"/>
+          <p:cNvSpPr txBox="1"/>
+          <p:nvPr/>
+        </p:nvSpPr>
+        <p:spPr>
+          <a:xfrm>
+            <a:off x="640080" y="777240"/>
+            <a:ext cx="10881360" cy="868680"/>
+          </a:xfrm>
+          <a:prstGeom prst="rect">
+            <a:avLst/>
+          </a:prstGeom>
+          <a:noFill/>
+          <a:ln/>
+        </p:spPr>
+        <p:txBody>
+          <a:bodyPr wrap="square" lIns="0" tIns="0" rIns="0" bIns="0" rtlCol="0" anchor="ctr"/>
+          <a:lstStyle/>
+          <a:p>
+            <a:pPr indent="0" marL="0">
+              <a:buNone/>
+            </a:pPr>
+            <a:r>
+              <a:rPr lang="en-US" sz="2200" b="1" dirty="0">
+                <a:solidFill>
+                  <a:srgbClr val="16232F"/>
+                </a:solidFill>
+                <a:latin typeface="Cambria" pitchFamily="34" charset="0"/>
+                <a:ea typeface="Cambria" pitchFamily="34" charset="-122"/>
+                <a:cs typeface="Cambria" pitchFamily="34" charset="-120"/>
+              </a:rPr>
+              <a:t>A risk nobody asked about: the colony's own biology can scramble the read, even when the data is fine</a:t>
+            </a:r>
+            <a:endParaRPr lang="en-US" sz="2200" dirty="0"/>
+          </a:p>
+        </p:txBody>
+      </p:sp>
+      <p:sp>
+        <p:nvSpPr>
+          <p:cNvPr id="4" name="Shape 2"/>
+          <p:cNvSpPr/>
+          <p:nvPr/>
+        </p:nvSpPr>
+        <p:spPr>
+          <a:xfrm>
+            <a:off x="640080" y="1874520"/>
+            <a:ext cx="3566160" cy="3931920"/>
+          </a:xfrm>
+          <a:prstGeom prst="roundRect">
+            <a:avLst>
+              <a:gd name="adj" fmla="val 2051"/>
+            </a:avLst>
+          </a:prstGeom>
+          <a:solidFill>
+            <a:srgbClr val="FFFFFF"/>
+          </a:solidFill>
+          <a:ln w="12700">
+            <a:solidFill>
+              <a:srgbClr val="DCE3E6"/>
+            </a:solidFill>
+            <a:prstDash val="solid"/>
+          </a:ln>
+        </p:spPr>
+      </p:sp>
+      <p:sp>
+        <p:nvSpPr>
+          <p:cNvPr id="5" name="Shape 3"/>
+          <p:cNvSpPr/>
+          <p:nvPr/>
+        </p:nvSpPr>
+        <p:spPr>
+          <a:xfrm>
+            <a:off x="640080" y="1874520"/>
+            <a:ext cx="3566160" cy="82296"/>
+          </a:xfrm>
+          <a:prstGeom prst="rect">
+            <a:avLst/>
+          </a:prstGeom>
+          <a:solidFill>
+            <a:srgbClr val="1C8F84"/>
+          </a:solidFill>
+          <a:ln/>
+        </p:spPr>
+      </p:sp>
+      <p:sp>
+        <p:nvSpPr>
+          <p:cNvPr id="6" name="Text 4"/>
+          <p:cNvSpPr txBox="1"/>
+          <p:nvPr/>
+        </p:nvSpPr>
+        <p:spPr>
+          <a:xfrm>
+            <a:off x="896112" y="2148840"/>
+            <a:ext cx="3054096" cy="548640"/>
+          </a:xfrm>
+          <a:prstGeom prst="rect">
+            <a:avLst/>
+          </a:prstGeom>
+          <a:noFill/>
+          <a:ln/>
+        </p:spPr>
+        <p:txBody>
+          <a:bodyPr wrap="square" lIns="0" tIns="0" rIns="0" bIns="0" rtlCol="0" anchor="ctr"/>
+          <a:lstStyle/>
+          <a:p>
+            <a:pPr indent="0" marL="0">
+              <a:buNone/>
+            </a:pPr>
+            <a:r>
+              <a:rPr lang="en-US" sz="1550" b="1" dirty="0">
+                <a:solidFill>
+                  <a:srgbClr val="16232F"/>
+                </a:solidFill>
+                <a:latin typeface="Cambria" pitchFamily="34" charset="0"/>
+                <a:ea typeface="Cambria" pitchFamily="34" charset="-122"/>
+                <a:cs typeface="Cambria" pitchFamily="34" charset="-120"/>
+              </a:rPr>
+              <a:t>The natural signal</a:t>
+            </a:r>
+            <a:endParaRPr lang="en-US" sz="1550" dirty="0"/>
+          </a:p>
+        </p:txBody>
+      </p:sp>
+      <p:sp>
+        <p:nvSpPr>
+          <p:cNvPr id="7" name="Text 5"/>
+          <p:cNvSpPr txBox="1"/>
+          <p:nvPr/>
+        </p:nvSpPr>
+        <p:spPr>
+          <a:xfrm>
+            <a:off x="896112" y="2743200"/>
+            <a:ext cx="3054096" cy="2834640"/>
+          </a:xfrm>
+          <a:prstGeom prst="rect">
+            <a:avLst/>
+          </a:prstGeom>
+          <a:noFill/>
+          <a:ln/>
+        </p:spPr>
+        <p:txBody>
+          <a:bodyPr wrap="square" lIns="0" tIns="0" rIns="0" bIns="0" rtlCol="0" anchor="ctr"/>
+          <a:lstStyle/>
+          <a:p>
+            <a:pPr indent="0" marL="0">
+              <a:lnSpc>
+                <a:spcPct val="120000"/>
+              </a:lnSpc>
+              <a:buNone/>
+            </a:pPr>
+            <a:r>
+              <a:rPr lang="en-US" sz="1250" dirty="0">
+                <a:solidFill>
+                  <a:srgbClr val="5B6B77"/>
+                </a:solidFill>
+                <a:latin typeface="Calibri" pitchFamily="34" charset="0"/>
+                <a:ea typeface="Calibri" pitchFamily="34" charset="-122"/>
+                <a:cs typeface="Calibri" pitchFamily="34" charset="-120"/>
+              </a:rPr>
+              <a:t>B. subtilis biofilms run a continuous potassium-wave electrical signal of their own (Prindle lab, 2015), independent of anything Acheron builds.</a:t>
+            </a:r>
+            <a:endParaRPr lang="en-US" sz="1250" dirty="0"/>
+          </a:p>
+        </p:txBody>
+      </p:sp>
+      <p:sp>
+        <p:nvSpPr>
+          <p:cNvPr id="8" name="Shape 6"/>
+          <p:cNvSpPr/>
+          <p:nvPr/>
+        </p:nvSpPr>
+        <p:spPr>
+          <a:xfrm>
+            <a:off x="4425696" y="1874520"/>
+            <a:ext cx="3566160" cy="3931920"/>
+          </a:xfrm>
+          <a:prstGeom prst="roundRect">
+            <a:avLst>
+              <a:gd name="adj" fmla="val 2051"/>
+            </a:avLst>
+          </a:prstGeom>
+          <a:solidFill>
+            <a:srgbClr val="FFFFFF"/>
+          </a:solidFill>
+          <a:ln w="12700">
+            <a:solidFill>
+              <a:srgbClr val="DCE3E6"/>
+            </a:solidFill>
+            <a:prstDash val="solid"/>
+          </a:ln>
+        </p:spPr>
+      </p:sp>
+      <p:sp>
+        <p:nvSpPr>
+          <p:cNvPr id="9" name="Shape 7"/>
+          <p:cNvSpPr/>
+          <p:nvPr/>
+        </p:nvSpPr>
+        <p:spPr>
+          <a:xfrm>
+            <a:off x="4425696" y="1874520"/>
+            <a:ext cx="3566160" cy="82296"/>
+          </a:xfrm>
+          <a:prstGeom prst="rect">
+            <a:avLst/>
+          </a:prstGeom>
+          <a:solidFill>
+            <a:srgbClr val="E8604C"/>
+          </a:solidFill>
+          <a:ln/>
+        </p:spPr>
+      </p:sp>
+      <p:sp>
+        <p:nvSpPr>
+          <p:cNvPr id="10" name="Text 8"/>
+          <p:cNvSpPr txBox="1"/>
+          <p:nvPr/>
+        </p:nvSpPr>
+        <p:spPr>
+          <a:xfrm>
+            <a:off x="4681728" y="2148840"/>
+            <a:ext cx="3054096" cy="548640"/>
+          </a:xfrm>
+          <a:prstGeom prst="rect">
+            <a:avLst/>
+          </a:prstGeom>
+          <a:noFill/>
+          <a:ln/>
+        </p:spPr>
+        <p:txBody>
+          <a:bodyPr wrap="square" lIns="0" tIns="0" rIns="0" bIns="0" rtlCol="0" anchor="ctr"/>
+          <a:lstStyle/>
+          <a:p>
+            <a:pPr indent="0" marL="0">
+              <a:buNone/>
+            </a:pPr>
+            <a:r>
+              <a:rPr lang="en-US" sz="1550" b="1" dirty="0">
+                <a:solidFill>
+                  <a:srgbClr val="16232F"/>
+                </a:solidFill>
+                <a:latin typeface="Cambria" pitchFamily="34" charset="0"/>
+                <a:ea typeface="Cambria" pitchFamily="34" charset="-122"/>
+                <a:cs typeface="Cambria" pitchFamily="34" charset="-120"/>
+              </a:rPr>
+              <a:t>What we found</a:t>
+            </a:r>
+            <a:endParaRPr lang="en-US" sz="1550" dirty="0"/>
+          </a:p>
+        </p:txBody>
+      </p:sp>
+      <p:sp>
+        <p:nvSpPr>
+          <p:cNvPr id="11" name="Text 9"/>
+          <p:cNvSpPr txBox="1"/>
+          <p:nvPr/>
+        </p:nvSpPr>
+        <p:spPr>
+          <a:xfrm>
+            <a:off x="4681728" y="2743200"/>
+            <a:ext cx="3054096" cy="2834640"/>
+          </a:xfrm>
+          <a:prstGeom prst="rect">
+            <a:avLst/>
+          </a:prstGeom>
+          <a:noFill/>
+          <a:ln/>
+        </p:spPr>
+        <p:txBody>
+          <a:bodyPr wrap="square" lIns="0" tIns="0" rIns="0" bIns="0" rtlCol="0" anchor="ctr"/>
+          <a:lstStyle/>
+          <a:p>
+            <a:pPr indent="0" marL="0">
+              <a:lnSpc>
+                <a:spcPct val="120000"/>
+              </a:lnSpc>
+              <a:buNone/>
+            </a:pPr>
+            <a:r>
+              <a:rPr lang="en-US" sz="1250" dirty="0">
+                <a:solidFill>
+                  <a:srgbClr val="5B6B77"/>
+                </a:solidFill>
+                <a:latin typeface="Calibri" pitchFamily="34" charset="0"/>
+                <a:ea typeface="Calibri" pitchFamily="34" charset="-122"/>
+                <a:cs typeface="Calibri" pitchFamily="34" charset="-120"/>
+              </a:rPr>
+              <a:t>In simulation, this natural oscillation can corrupt an instantaneous voltage reading even when the underlying engineered circuit's data is 100% intact.</a:t>
+            </a:r>
+            <a:endParaRPr lang="en-US" sz="1250" dirty="0"/>
+          </a:p>
+        </p:txBody>
+      </p:sp>
+      <p:sp>
+        <p:nvSpPr>
+          <p:cNvPr id="12" name="Shape 10"/>
+          <p:cNvSpPr/>
+          <p:nvPr/>
+        </p:nvSpPr>
+        <p:spPr>
+          <a:xfrm>
+            <a:off x="8211312" y="1874520"/>
+            <a:ext cx="3566160" cy="3931920"/>
+          </a:xfrm>
+          <a:prstGeom prst="roundRect">
+            <a:avLst>
+              <a:gd name="adj" fmla="val 2051"/>
+            </a:avLst>
+          </a:prstGeom>
+          <a:solidFill>
+            <a:srgbClr val="FFFFFF"/>
+          </a:solidFill>
+          <a:ln w="12700">
+            <a:solidFill>
+              <a:srgbClr val="DCE3E6"/>
+            </a:solidFill>
+            <a:prstDash val="solid"/>
+          </a:ln>
+        </p:spPr>
+      </p:sp>
+      <p:sp>
+        <p:nvSpPr>
+          <p:cNvPr id="13" name="Shape 11"/>
+          <p:cNvSpPr/>
+          <p:nvPr/>
+        </p:nvSpPr>
+        <p:spPr>
+          <a:xfrm>
+            <a:off x="8211312" y="1874520"/>
+            <a:ext cx="3566160" cy="82296"/>
+          </a:xfrm>
+          <a:prstGeom prst="rect">
+            <a:avLst/>
+          </a:prstGeom>
+          <a:solidFill>
+            <a:srgbClr val="1C8F84"/>
+          </a:solidFill>
+          <a:ln/>
+        </p:spPr>
+      </p:sp>
+      <p:sp>
+        <p:nvSpPr>
+          <p:cNvPr id="14" name="Text 12"/>
+          <p:cNvSpPr txBox="1"/>
+          <p:nvPr/>
+        </p:nvSpPr>
+        <p:spPr>
+          <a:xfrm>
+            <a:off x="8467344" y="2148840"/>
+            <a:ext cx="3054096" cy="548640"/>
+          </a:xfrm>
+          <a:prstGeom prst="rect">
+            <a:avLst/>
+          </a:prstGeom>
+          <a:noFill/>
+          <a:ln/>
+        </p:spPr>
+        <p:txBody>
+          <a:bodyPr wrap="square" lIns="0" tIns="0" rIns="0" bIns="0" rtlCol="0" anchor="ctr"/>
+          <a:lstStyle/>
+          <a:p>
+            <a:pPr indent="0" marL="0">
+              <a:buNone/>
+            </a:pPr>
+            <a:r>
+              <a:rPr lang="en-US" sz="1550" b="1" dirty="0">
+                <a:solidFill>
+                  <a:srgbClr val="16232F"/>
+                </a:solidFill>
+                <a:latin typeface="Cambria" pitchFamily="34" charset="0"/>
+                <a:ea typeface="Cambria" pitchFamily="34" charset="-122"/>
+                <a:cs typeface="Cambria" pitchFamily="34" charset="-120"/>
+              </a:rPr>
+              <a:t>The fix, and its limit</a:t>
+            </a:r>
+            <a:endParaRPr lang="en-US" sz="1550" dirty="0"/>
+          </a:p>
+        </p:txBody>
+      </p:sp>
+      <p:sp>
+        <p:nvSpPr>
+          <p:cNvPr id="15" name="Text 13"/>
+          <p:cNvSpPr txBox="1"/>
+          <p:nvPr/>
+        </p:nvSpPr>
+        <p:spPr>
+          <a:xfrm>
+            <a:off x="8467344" y="2743200"/>
+            <a:ext cx="3054096" cy="2834640"/>
+          </a:xfrm>
+          <a:prstGeom prst="rect">
+            <a:avLst/>
+          </a:prstGeom>
+          <a:noFill/>
+          <a:ln/>
+        </p:spPr>
+        <p:txBody>
+          <a:bodyPr wrap="square" lIns="0" tIns="0" rIns="0" bIns="0" rtlCol="0" anchor="ctr"/>
+          <a:lstStyle/>
+          <a:p>
+            <a:pPr indent="0" marL="0">
+              <a:lnSpc>
+                <a:spcPct val="120000"/>
+              </a:lnSpc>
+              <a:buNone/>
+            </a:pPr>
+            <a:r>
+              <a:rPr lang="en-US" sz="1250" dirty="0">
+                <a:solidFill>
+                  <a:srgbClr val="5B6B77"/>
+                </a:solidFill>
+                <a:latin typeface="Calibri" pitchFamily="34" charset="0"/>
+                <a:ea typeface="Calibri" pitchFamily="34" charset="-122"/>
+                <a:cs typeface="Calibri" pitchFamily="34" charset="-120"/>
+              </a:rPr>
+              <a:t>Reading via impedance (EIS) instead of raw voltage helps, but a single fast EIS sweep isn't immune either, it needs to integrate across a full oscillation cycle (~3h) to recover accuracy.</a:t>
+            </a:r>
+            <a:endParaRPr lang="en-US" sz="1250" dirty="0"/>
+          </a:p>
+        </p:txBody>
+      </p:sp>
+      <p:sp>
+        <p:nvSpPr>
+          <p:cNvPr id="16" name="Text 14"/>
+          <p:cNvSpPr txBox="1"/>
+          <p:nvPr/>
+        </p:nvSpPr>
+        <p:spPr>
+          <a:xfrm>
+            <a:off x="640080" y="5989320"/>
+            <a:ext cx="10972800" cy="640080"/>
+          </a:xfrm>
+          <a:prstGeom prst="rect">
+            <a:avLst/>
+          </a:prstGeom>
+          <a:noFill/>
+          <a:ln/>
+        </p:spPr>
+        <p:txBody>
+          <a:bodyPr wrap="square" lIns="0" tIns="0" rIns="0" bIns="0" rtlCol="0" anchor="ctr"/>
+          <a:lstStyle/>
+          <a:p>
+            <a:pPr indent="0" marL="0">
+              <a:buNone/>
+            </a:pPr>
+            <a:r>
+              <a:rPr lang="en-US" sz="1250" i="1" dirty="0">
+                <a:solidFill>
+                  <a:srgbClr val="5B6B77"/>
+                </a:solidFill>
+                <a:latin typeface="Calibri" pitchFamily="34" charset="0"/>
+                <a:ea typeface="Calibri" pitchFamily="34" charset="-122"/>
+                <a:cs typeface="Calibri" pitchFamily="34" charset="-120"/>
+              </a:rPr>
+              <a:t>Fidelity at 10-20mV of ambient oscillation (well below the circuit's own 70mV signal range) collapsed to 50-59% for single-snapshot voltage reads, this is a solvable engineering problem, not a fatal one, but a real, previously-unflagged design requirement.</a:t>
+            </a:r>
+            <a:endParaRPr lang="en-US" sz="1250" dirty="0"/>
+          </a:p>
+        </p:txBody>
+      </p:sp>
+      <p:sp>
+        <p:nvSpPr>
+          <p:cNvPr id="17" name="Text 15"/>
+          <p:cNvSpPr txBox="1"/>
+          <p:nvPr/>
+        </p:nvSpPr>
+        <p:spPr>
+          <a:xfrm>
+            <a:off x="11365992" y="6400800"/>
+            <a:ext cx="548640" cy="274320"/>
+          </a:xfrm>
+          <a:prstGeom prst="rect">
+            <a:avLst/>
+          </a:prstGeom>
+          <a:noFill/>
+          <a:ln/>
+        </p:spPr>
+        <p:txBody>
+          <a:bodyPr wrap="square" lIns="0" tIns="0" rIns="0" bIns="0" rtlCol="0" anchor="ctr"/>
+          <a:lstStyle/>
+          <a:p>
+            <a:pPr algn="r" indent="0" marL="0">
+              <a:buNone/>
+            </a:pPr>
+            <a:r>
+              <a:rPr lang="en-US" sz="1000" dirty="0">
+                <a:solidFill>
+                  <a:srgbClr val="9AA7AF"/>
+                </a:solidFill>
+                <a:latin typeface="Calibri" pitchFamily="34" charset="0"/>
+                <a:ea typeface="Calibri" pitchFamily="34" charset="-122"/>
+                <a:cs typeface="Calibri" pitchFamily="34" charset="-120"/>
+              </a:rPr>
+              <a:t>11</a:t>
+            </a:r>
+            <a:endParaRPr lang="en-US" sz="1000" dirty="0"/>
+          </a:p>
+        </p:txBody>
+      </p:sp>
+    </p:spTree>
+  </p:cSld>
+  <p:clrMapOvr>
+    <a:masterClrMapping/>
+  </p:clrMapOvr>
+</p:sld>
+</file>
+
+<file path=ppt/slides/slide12.xml><?xml version="1.0" encoding="utf-8"?>
+<p:sld xmlns:a="http://schemas.openxmlformats.org/drawingml/2006/main" xmlns:r="http://schemas.openxmlformats.org/officeDocument/2006/relationships" xmlns:p="http://schemas.openxmlformats.org/presentationml/2006/main">
+  <p:cSld name="Slide 12">
+    <p:bg>
+      <p:bgPr>
+        <a:solidFill>
+          <a:srgbClr val="F4F6F7"/>
+        </a:solidFill>
+      </p:bgPr>
+    </p:bg>
+    <p:spTree>
+      <p:nvGrpSpPr>
+        <p:cNvPr id="1" name=""/>
+        <p:cNvGrpSpPr/>
+        <p:nvPr/>
+      </p:nvGrpSpPr>
+      <p:grpSpPr>
+        <a:xfrm>
+          <a:off x="0" y="0"/>
+          <a:ext cx="0" cy="0"/>
+          <a:chOff x="0" y="0"/>
+          <a:chExt cx="0" cy="0"/>
+        </a:xfrm>
+      </p:grpSpPr>
+      <p:sp>
+        <p:nvSpPr>
+          <p:cNvPr id="2" name="Text 0"/>
+          <p:cNvSpPr txBox="1"/>
+          <p:nvPr/>
+        </p:nvSpPr>
+        <p:spPr>
+          <a:xfrm>
+            <a:off x="640080" y="411480"/>
+            <a:ext cx="5486400" cy="320040"/>
+          </a:xfrm>
+          <a:prstGeom prst="rect">
+            <a:avLst/>
+          </a:prstGeom>
+          <a:noFill/>
+          <a:ln/>
+        </p:spPr>
+        <p:txBody>
+          <a:bodyPr wrap="square" lIns="0" tIns="0" rIns="0" bIns="0" rtlCol="0" anchor="ctr"/>
+          <a:lstStyle/>
+          <a:p>
+            <a:pPr indent="0" marL="0">
+              <a:buNone/>
+            </a:pPr>
+            <a:r>
+              <a:rPr lang="en-US" sz="1200" b="1" spc="200" kern="0" dirty="0">
+                <a:solidFill>
+                  <a:srgbClr val="1C8F84"/>
+                </a:solidFill>
+                <a:latin typeface="Calibri" pitchFamily="34" charset="0"/>
+                <a:ea typeface="Calibri" pitchFamily="34" charset="-122"/>
+                <a:cs typeface="Calibri" pitchFamily="34" charset="-120"/>
+              </a:rPr>
+              <a:t>WHAT WE ALREADY HAVE</a:t>
+            </a:r>
+            <a:endParaRPr lang="en-US" sz="1200" dirty="0"/>
+          </a:p>
+        </p:txBody>
+      </p:sp>
+      <p:sp>
+        <p:nvSpPr>
+          <p:cNvPr id="3" name="Text 1"/>
+          <p:cNvSpPr txBox="1"/>
+          <p:nvPr/>
+        </p:nvSpPr>
+        <p:spPr>
+          <a:xfrm>
+            <a:off x="640080" y="731520"/>
+            <a:ext cx="10881360" cy="640080"/>
+          </a:xfrm>
+          <a:prstGeom prst="rect">
+            <a:avLst/>
+          </a:prstGeom>
+          <a:noFill/>
+          <a:ln/>
+        </p:spPr>
+        <p:txBody>
+          <a:bodyPr wrap="square" lIns="0" tIns="0" rIns="0" bIns="0" rtlCol="0" anchor="ctr"/>
+          <a:lstStyle/>
+          <a:p>
+            <a:pPr indent="0" marL="0">
+              <a:buNone/>
+            </a:pPr>
+            <a:r>
+              <a:rPr lang="en-US" sz="2200" b="1" dirty="0">
+                <a:solidFill>
+                  <a:srgbClr val="16232F"/>
+                </a:solidFill>
+                <a:latin typeface="Cambria" pitchFamily="34" charset="0"/>
+                <a:ea typeface="Cambria" pitchFamily="34" charset="-122"/>
+                <a:cs typeface="Cambria" pitchFamily="34" charset="-120"/>
+              </a:rPr>
+              <a:t>Four computational results, explained for a scientist and for everyone else</a:t>
+            </a:r>
+            <a:endParaRPr lang="en-US" sz="2200" dirty="0"/>
+          </a:p>
+        </p:txBody>
+      </p:sp>
+      <p:graphicFrame>
+        <p:nvGraphicFramePr>
+          <p:cNvPr id="13" name="Table 0"/>
           <p:cNvGraphicFramePr>
             <a:graphicFrameLocks noGrp="1"/>
           </p:cNvGraphicFramePr>
@@ -4208,7 +5985,7 @@
                 <a:ea typeface="Calibri" pitchFamily="34" charset="-122"/>
                 <a:cs typeface="Calibri" pitchFamily="34" charset="-120"/>
               </a:rPr>
-              <a:t>10</a:t>
+              <a:t>12</a:t>
             </a:r>
             <a:endParaRPr lang="en-US" sz="1000" dirty="0"/>
           </a:p>
@@ -4222,9 +5999,9 @@
 </p:sld>
 </file>
 
-<file path=ppt/slides/slide11.xml><?xml version="1.0" encoding="utf-8"?>
+<file path=ppt/slides/slide13.xml><?xml version="1.0" encoding="utf-8"?>
 <p:sld xmlns:a="http://schemas.openxmlformats.org/drawingml/2006/main" xmlns:r="http://schemas.openxmlformats.org/officeDocument/2006/relationships" xmlns:p="http://schemas.openxmlformats.org/presentationml/2006/main">
-  <p:cSld name="Slide 11">
+  <p:cSld name="Slide 13">
     <p:bg>
       <p:bgPr>
         <a:solidFill>
@@ -4326,7 +6103,7 @@
       </p:sp>
       <p:graphicFrame>
         <p:nvGraphicFramePr>
-          <p:cNvPr id="12" name="Table 0"/>
+          <p:cNvPr id="14" name="Table 0"/>
           <p:cNvGraphicFramePr>
             <a:graphicFrameLocks noGrp="1"/>
           </p:cNvGraphicFramePr>
@@ -5598,7 +7375,7 @@
                 <a:ea typeface="Calibri" pitchFamily="34" charset="-122"/>
                 <a:cs typeface="Calibri" pitchFamily="34" charset="-120"/>
               </a:rPr>
-              <a:t>11</a:t>
+              <a:t>13</a:t>
             </a:r>
             <a:endParaRPr lang="en-US" sz="1000" dirty="0"/>
           </a:p>
@@ -5612,9 +7389,9 @@
 </p:sld>
 </file>
 
-<file path=ppt/slides/slide12.xml><?xml version="1.0" encoding="utf-8"?>
+<file path=ppt/slides/slide14.xml><?xml version="1.0" encoding="utf-8"?>
 <p:sld xmlns:a="http://schemas.openxmlformats.org/drawingml/2006/main" xmlns:r="http://schemas.openxmlformats.org/officeDocument/2006/relationships" xmlns:p="http://schemas.openxmlformats.org/presentationml/2006/main">
-  <p:cSld name="Slide 12">
+  <p:cSld name="Slide 14">
     <p:bg>
       <p:bgPr>
         <a:solidFill>
@@ -6269,7 +8046,7 @@
                 <a:ea typeface="Calibri" pitchFamily="34" charset="-122"/>
                 <a:cs typeface="Calibri" pitchFamily="34" charset="-120"/>
               </a:rPr>
-              <a:t>12</a:t>
+              <a:t>14</a:t>
             </a:r>
             <a:endParaRPr lang="en-US" sz="1000" dirty="0"/>
           </a:p>
@@ -6283,9 +8060,9 @@
 </p:sld>
 </file>
 
-<file path=ppt/slides/slide13.xml><?xml version="1.0" encoding="utf-8"?>
+<file path=ppt/slides/slide15.xml><?xml version="1.0" encoding="utf-8"?>
 <p:sld xmlns:a="http://schemas.openxmlformats.org/drawingml/2006/main" xmlns:r="http://schemas.openxmlformats.org/officeDocument/2006/relationships" xmlns:p="http://schemas.openxmlformats.org/presentationml/2006/main">
-  <p:cSld name="Slide 13">
+  <p:cSld name="Slide 15">
     <p:bg>
       <p:bgPr>
         <a:solidFill>
@@ -6340,7 +8117,7 @@
                 <a:ea typeface="Calibri" pitchFamily="34" charset="-122"/>
                 <a:cs typeface="Calibri" pitchFamily="34" charset="-120"/>
               </a:rPr>
-              <a:t>IF THE CORE MECHANISM VALIDATES</a:t>
+              <a:t>EVIDENCE THE NEED IS REAL, NOT A MARKET-SIZE CLAIM</a:t>
             </a:r>
             <a:endParaRPr lang="en-US" sz="1200" dirty="0"/>
           </a:p>
@@ -6355,23 +8132,23 @@
         <p:spPr>
           <a:xfrm>
             <a:off x="640080" y="822960"/>
-            <a:ext cx="10881360" cy="777240"/>
-          </a:xfrm>
-          <a:prstGeom prst="rect">
-            <a:avLst/>
-          </a:prstGeom>
-          <a:noFill/>
-          <a:ln/>
-        </p:spPr>
-        <p:txBody>
-          <a:bodyPr wrap="square" lIns="0" tIns="0" rIns="0" bIns="0" rtlCol="0" anchor="ctr"/>
-          <a:lstStyle/>
-          <a:p>
-            <a:pPr indent="0" marL="0">
-              <a:buNone/>
-            </a:pPr>
-            <a:r>
-              <a:rPr lang="en-US" sz="2600" b="1" dirty="0">
+            <a:ext cx="10881360" cy="822960"/>
+          </a:xfrm>
+          <a:prstGeom prst="rect">
+            <a:avLst/>
+          </a:prstGeom>
+          <a:noFill/>
+          <a:ln/>
+        </p:spPr>
+        <p:txBody>
+          <a:bodyPr wrap="square" lIns="0" tIns="0" rIns="0" bIns="0" rtlCol="0" anchor="ctr"/>
+          <a:lstStyle/>
+          <a:p>
+            <a:pPr indent="0" marL="0">
+              <a:buNone/>
+            </a:pPr>
+            <a:r>
+              <a:rPr lang="en-US" sz="2200" b="1" dirty="0">
                 <a:solidFill>
                   <a:srgbClr val="FFFFFF"/>
                 </a:solidFill>
@@ -6379,9 +8156,9 @@
                 <a:ea typeface="Cambria" pitchFamily="34" charset="-122"/>
                 <a:cs typeface="Cambria" pitchFamily="34" charset="-120"/>
               </a:rPr>
-              <a:t>Two real, externally-verifiable numbers, not an invented forecast</a:t>
-            </a:r>
-            <a:endParaRPr lang="en-US" sz="2600" dirty="0"/>
+              <a:t>We are not sizing a market yet. Here are two real, externally-verifiable numbers showing the underlying need</a:t>
+            </a:r>
+            <a:endParaRPr lang="en-US" sz="2200" dirty="0"/>
           </a:p>
         </p:txBody>
       </p:sp>
@@ -6479,7 +8256,7 @@
                 <a:ea typeface="Calibri" pitchFamily="34" charset="-122"/>
                 <a:cs typeface="Calibri" pitchFamily="34" charset="-120"/>
               </a:rPr>
-              <a:t>What customers already pay for the closest existing alternative</a:t>
+              <a:t>What one customer already pays to avoid downtime, on a different product</a:t>
             </a:r>
             <a:endParaRPr lang="en-US" sz="1300" dirty="0"/>
           </a:p>
@@ -6521,7 +8298,7 @@
                 <a:ea typeface="Calibri" pitchFamily="34" charset="-122"/>
                 <a:cs typeface="Calibri" pitchFamily="34" charset="-120"/>
               </a:rPr>
-              <a:t>Cortical Labs' CL-1 (neuron-based): $35,000/unit, replaced every 6 months, zero self-repair. A live, public data point for what this market already tolerates paying to avoid downtime, from a substrate that can't heal itself.</a:t>
+              <a:t>Cortical Labs' CL-1 (neuron-based cognition, not memory storage): $35,000/unit, replaced every 6 months, zero self-repair. Not a price for storage, a data point that this market already tolerates paying real money to avoid unplanned downtime, from a substrate that can't heal itself.</a:t>
             </a:r>
             <a:endParaRPr lang="en-US" sz="1250" dirty="0"/>
           </a:p>
@@ -6621,7 +8398,7 @@
                 <a:ea typeface="Calibri" pitchFamily="34" charset="-122"/>
                 <a:cs typeface="Calibri" pitchFamily="34" charset="-120"/>
               </a:rPr>
-              <a:t>Radiation-hardened space electronics, 2026 (independent analyst range)</a:t>
+              <a:t>The whole radiation-hardened electronics market, not a memory-specific figure</a:t>
             </a:r>
             <a:endParaRPr lang="en-US" sz="1300" dirty="0"/>
           </a:p>
@@ -6663,7 +8440,7 @@
                 <a:ea typeface="Calibri" pitchFamily="34" charset="-122"/>
                 <a:cs typeface="Calibri" pitchFamily="34" charset="-120"/>
               </a:rPr>
-              <a:t>Growing ~4-5.6% CAGR into the early 2030s (Grand View Research, Fortune Business Insights, Research and Markets), driven by LEO satellite constellations (Starlink, Kuiper, OneWeb) needing more radiation-tolerant memory. We claim no specific share of this, it's evidence the underlying need is real and growing, not a number we made up.</a:t>
+              <a:t>Growing ~4-5.6% CAGR into the early 2030s (Grand View Research, Fortune Business Insights, Research and Markets), driven by LEO satellite constellations (Starlink, Kuiper, OneWeb) needing more radiation-tolerant memory. Memory is only a slice of this figure, and we are not estimating that slice. We're citing it as evidence the demand driver is real and growing, nothing more.</a:t>
             </a:r>
             <a:endParaRPr lang="en-US" sz="1200" dirty="0"/>
           </a:p>
@@ -6705,7 +8482,7 @@
                 <a:ea typeface="Calibri" pitchFamily="34" charset="-122"/>
                 <a:cs typeface="Calibri" pitchFamily="34" charset="-120"/>
               </a:rPr>
-              <a:t>The same underlying need, radiation-tolerant, low-maintenance memory with no technician access, recurs across extreme-environment computing broadly: spacecraft, deep-sea systems, remote infrastructure. This upside is entirely conditional on the roadmap experiment below succeeding. We're not asking anyone to price the risk in advance, we're asking for what it costs to find out.</a:t>
+              <a:t>Neither number is a forecast for Acheron. This upside is entirely conditional on the roadmap experiment below succeeding, and we haven't tried to price it in advance. We're asking for what it costs to find out.</a:t>
             </a:r>
             <a:endParaRPr lang="en-US" sz="1250" dirty="0"/>
           </a:p>
@@ -6739,1236 +8516,6 @@
               <a:rPr lang="en-US" sz="1000" dirty="0">
                 <a:solidFill>
                   <a:srgbClr val="6E7F91"/>
-                </a:solidFill>
-                <a:latin typeface="Calibri" pitchFamily="34" charset="0"/>
-                <a:ea typeface="Calibri" pitchFamily="34" charset="-122"/>
-                <a:cs typeface="Calibri" pitchFamily="34" charset="-120"/>
-              </a:rPr>
-              <a:t>13</a:t>
-            </a:r>
-            <a:endParaRPr lang="en-US" sz="1000" dirty="0"/>
-          </a:p>
-        </p:txBody>
-      </p:sp>
-    </p:spTree>
-  </p:cSld>
-  <p:clrMapOvr>
-    <a:masterClrMapping/>
-  </p:clrMapOvr>
-</p:sld>
-</file>
-
-<file path=ppt/slides/slide14.xml><?xml version="1.0" encoding="utf-8"?>
-<p:sld xmlns:a="http://schemas.openxmlformats.org/drawingml/2006/main" xmlns:r="http://schemas.openxmlformats.org/officeDocument/2006/relationships" xmlns:p="http://schemas.openxmlformats.org/presentationml/2006/main">
-  <p:cSld name="Slide 14">
-    <p:bg>
-      <p:bgPr>
-        <a:solidFill>
-          <a:srgbClr val="0B1F3A"/>
-        </a:solidFill>
-      </p:bgPr>
-    </p:bg>
-    <p:spTree>
-      <p:nvGrpSpPr>
-        <p:cNvPr id="1" name=""/>
-        <p:cNvGrpSpPr/>
-        <p:nvPr/>
-      </p:nvGrpSpPr>
-      <p:grpSpPr>
-        <a:xfrm>
-          <a:off x="0" y="0"/>
-          <a:ext cx="0" cy="0"/>
-          <a:chOff x="0" y="0"/>
-          <a:chExt cx="0" cy="0"/>
-        </a:xfrm>
-      </p:grpSpPr>
-      <p:sp>
-        <p:nvSpPr>
-          <p:cNvPr id="2" name="Text 0"/>
-          <p:cNvSpPr txBox="1"/>
-          <p:nvPr/>
-        </p:nvSpPr>
-        <p:spPr>
-          <a:xfrm>
-            <a:off x="640080" y="457200"/>
-            <a:ext cx="5486400" cy="320040"/>
-          </a:xfrm>
-          <a:prstGeom prst="rect">
-            <a:avLst/>
-          </a:prstGeom>
-          <a:noFill/>
-          <a:ln/>
-        </p:spPr>
-        <p:txBody>
-          <a:bodyPr wrap="square" lIns="0" tIns="0" rIns="0" bIns="0" rtlCol="0" anchor="ctr"/>
-          <a:lstStyle/>
-          <a:p>
-            <a:pPr indent="0" marL="0">
-              <a:buNone/>
-            </a:pPr>
-            <a:r>
-              <a:rPr lang="en-US" sz="1200" b="1" spc="200" kern="0" dirty="0">
-                <a:solidFill>
-                  <a:srgbClr val="2EC4B6"/>
-                </a:solidFill>
-                <a:latin typeface="Calibri" pitchFamily="34" charset="0"/>
-                <a:ea typeface="Calibri" pitchFamily="34" charset="-122"/>
-                <a:cs typeface="Calibri" pitchFamily="34" charset="-120"/>
-              </a:rPr>
-              <a:t>ROADMAP</a:t>
-            </a:r>
-            <a:endParaRPr lang="en-US" sz="1200" dirty="0"/>
-          </a:p>
-        </p:txBody>
-      </p:sp>
-      <p:sp>
-        <p:nvSpPr>
-          <p:cNvPr id="3" name="Text 1"/>
-          <p:cNvSpPr txBox="1"/>
-          <p:nvPr/>
-        </p:nvSpPr>
-        <p:spPr>
-          <a:xfrm>
-            <a:off x="640080" y="822960"/>
-            <a:ext cx="10881360" cy="777240"/>
-          </a:xfrm>
-          <a:prstGeom prst="rect">
-            <a:avLst/>
-          </a:prstGeom>
-          <a:noFill/>
-          <a:ln/>
-        </p:spPr>
-        <p:txBody>
-          <a:bodyPr wrap="square" lIns="0" tIns="0" rIns="0" bIns="0" rtlCol="0" anchor="ctr"/>
-          <a:lstStyle/>
-          <a:p>
-            <a:pPr indent="0" marL="0">
-              <a:buNone/>
-            </a:pPr>
-            <a:r>
-              <a:rPr lang="en-US" sz="2800" b="1" dirty="0">
-                <a:solidFill>
-                  <a:srgbClr val="FFFFFF"/>
-                </a:solidFill>
-                <a:latin typeface="Cambria" pitchFamily="34" charset="0"/>
-                <a:ea typeface="Cambria" pitchFamily="34" charset="-122"/>
-                <a:cs typeface="Cambria" pitchFamily="34" charset="-120"/>
-              </a:rPr>
-              <a:t>The one experiment that changes everything</a:t>
-            </a:r>
-            <a:endParaRPr lang="en-US" sz="2800" dirty="0"/>
-          </a:p>
-        </p:txBody>
-      </p:sp>
-      <p:sp>
-        <p:nvSpPr>
-          <p:cNvPr id="4" name="Text 2"/>
-          <p:cNvSpPr txBox="1"/>
-          <p:nvPr/>
-        </p:nvSpPr>
-        <p:spPr>
-          <a:xfrm>
-            <a:off x="640080" y="1554480"/>
-            <a:ext cx="10515600" cy="548640"/>
-          </a:xfrm>
-          <a:prstGeom prst="rect">
-            <a:avLst/>
-          </a:prstGeom>
-          <a:noFill/>
-          <a:ln/>
-        </p:spPr>
-        <p:txBody>
-          <a:bodyPr wrap="square" lIns="0" tIns="0" rIns="0" bIns="0" rtlCol="0" anchor="ctr"/>
-          <a:lstStyle/>
-          <a:p>
-            <a:pPr indent="0" marL="0">
-              <a:buNone/>
-            </a:pPr>
-            <a:r>
-              <a:rPr lang="en-US" sz="1400" dirty="0">
-                <a:solidFill>
-                  <a:srgbClr val="AEC2C8"/>
-                </a:solidFill>
-                <a:latin typeface="Calibri" pitchFamily="34" charset="0"/>
-                <a:ea typeface="Calibri" pitchFamily="34" charset="-122"/>
-                <a:cs typeface="Calibri" pitchFamily="34" charset="-120"/>
-              </a:rPr>
-              <a:t>Build the matched-promoter toggle circuit in B. subtilis, write a bit, damage the colony, let it regrow, read the bit back non-destructively via EIS.</a:t>
-            </a:r>
-            <a:endParaRPr lang="en-US" sz="1400" dirty="0"/>
-          </a:p>
-        </p:txBody>
-      </p:sp>
-      <p:sp>
-        <p:nvSpPr>
-          <p:cNvPr id="5" name="Shape 3"/>
-          <p:cNvSpPr/>
-          <p:nvPr/>
-        </p:nvSpPr>
-        <p:spPr>
-          <a:xfrm>
-            <a:off x="640080" y="2377440"/>
-            <a:ext cx="3566160" cy="2286000"/>
-          </a:xfrm>
-          <a:prstGeom prst="roundRect">
-            <a:avLst>
-              <a:gd name="adj" fmla="val 3200"/>
-            </a:avLst>
-          </a:prstGeom>
-          <a:solidFill>
-            <a:srgbClr val="132A4D"/>
-          </a:solidFill>
-          <a:ln/>
-        </p:spPr>
-      </p:sp>
-      <p:sp>
-        <p:nvSpPr>
-          <p:cNvPr id="6" name="Text 4"/>
-          <p:cNvSpPr txBox="1"/>
-          <p:nvPr/>
-        </p:nvSpPr>
-        <p:spPr>
-          <a:xfrm>
-            <a:off x="914400" y="2606040"/>
-            <a:ext cx="3017520" cy="914400"/>
-          </a:xfrm>
-          <a:prstGeom prst="rect">
-            <a:avLst/>
-          </a:prstGeom>
-          <a:noFill/>
-          <a:ln/>
-        </p:spPr>
-        <p:txBody>
-          <a:bodyPr wrap="square" lIns="0" tIns="0" rIns="0" bIns="0" rtlCol="0" anchor="ctr"/>
-          <a:lstStyle/>
-          <a:p>
-            <a:pPr indent="0" marL="0">
-              <a:buNone/>
-            </a:pPr>
-            <a:r>
-              <a:rPr lang="en-US" sz="3400" b="1" dirty="0">
-                <a:solidFill>
-                  <a:srgbClr val="2EC4B6"/>
-                </a:solidFill>
-                <a:latin typeface="Cambria" pitchFamily="34" charset="0"/>
-                <a:ea typeface="Cambria" pitchFamily="34" charset="-122"/>
-                <a:cs typeface="Cambria" pitchFamily="34" charset="-120"/>
-              </a:rPr>
-              <a:t>$10K-$30K</a:t>
-            </a:r>
-            <a:endParaRPr lang="en-US" sz="3400" dirty="0"/>
-          </a:p>
-        </p:txBody>
-      </p:sp>
-      <p:sp>
-        <p:nvSpPr>
-          <p:cNvPr id="7" name="Text 5"/>
-          <p:cNvSpPr txBox="1"/>
-          <p:nvPr/>
-        </p:nvSpPr>
-        <p:spPr>
-          <a:xfrm>
-            <a:off x="914400" y="3429000"/>
-            <a:ext cx="3017520" cy="1097280"/>
-          </a:xfrm>
-          <a:prstGeom prst="rect">
-            <a:avLst/>
-          </a:prstGeom>
-          <a:noFill/>
-          <a:ln/>
-        </p:spPr>
-        <p:txBody>
-          <a:bodyPr wrap="square" lIns="0" tIns="0" rIns="0" bIns="0" rtlCol="0" anchor="ctr"/>
-          <a:lstStyle/>
-          <a:p>
-            <a:pPr indent="0" marL="0">
-              <a:lnSpc>
-                <a:spcPct val="115000"/>
-              </a:lnSpc>
-              <a:buNone/>
-            </a:pPr>
-            <a:r>
-              <a:rPr lang="en-US" sz="1250" dirty="0">
-                <a:solidFill>
-                  <a:srgbClr val="CFE0DD"/>
-                </a:solidFill>
-                <a:latin typeface="Calibri" pitchFamily="34" charset="0"/>
-                <a:ea typeface="Calibri" pitchFamily="34" charset="-122"/>
-                <a:cs typeface="Calibri" pitchFamily="34" charset="-120"/>
-              </a:rPr>
-              <a:t>Cost, reagents, cloning, lab bench access</a:t>
-            </a:r>
-            <a:endParaRPr lang="en-US" sz="1250" dirty="0"/>
-          </a:p>
-        </p:txBody>
-      </p:sp>
-      <p:sp>
-        <p:nvSpPr>
-          <p:cNvPr id="8" name="Shape 6"/>
-          <p:cNvSpPr/>
-          <p:nvPr/>
-        </p:nvSpPr>
-        <p:spPr>
-          <a:xfrm>
-            <a:off x="4389120" y="2377440"/>
-            <a:ext cx="3566160" cy="2286000"/>
-          </a:xfrm>
-          <a:prstGeom prst="roundRect">
-            <a:avLst>
-              <a:gd name="adj" fmla="val 3200"/>
-            </a:avLst>
-          </a:prstGeom>
-          <a:solidFill>
-            <a:srgbClr val="132A4D"/>
-          </a:solidFill>
-          <a:ln/>
-        </p:spPr>
-      </p:sp>
-      <p:sp>
-        <p:nvSpPr>
-          <p:cNvPr id="9" name="Text 7"/>
-          <p:cNvSpPr txBox="1"/>
-          <p:nvPr/>
-        </p:nvSpPr>
-        <p:spPr>
-          <a:xfrm>
-            <a:off x="4663440" y="2606040"/>
-            <a:ext cx="3017520" cy="914400"/>
-          </a:xfrm>
-          <a:prstGeom prst="rect">
-            <a:avLst/>
-          </a:prstGeom>
-          <a:noFill/>
-          <a:ln/>
-        </p:spPr>
-        <p:txBody>
-          <a:bodyPr wrap="square" lIns="0" tIns="0" rIns="0" bIns="0" rtlCol="0" anchor="ctr"/>
-          <a:lstStyle/>
-          <a:p>
-            <a:pPr indent="0" marL="0">
-              <a:buNone/>
-            </a:pPr>
-            <a:r>
-              <a:rPr lang="en-US" sz="3400" b="1" dirty="0">
-                <a:solidFill>
-                  <a:srgbClr val="2EC4B6"/>
-                </a:solidFill>
-                <a:latin typeface="Cambria" pitchFamily="34" charset="0"/>
-                <a:ea typeface="Cambria" pitchFamily="34" charset="-122"/>
-                <a:cs typeface="Cambria" pitchFamily="34" charset="-120"/>
-              </a:rPr>
-              <a:t>6-12 mo</a:t>
-            </a:r>
-            <a:endParaRPr lang="en-US" sz="3400" dirty="0"/>
-          </a:p>
-        </p:txBody>
-      </p:sp>
-      <p:sp>
-        <p:nvSpPr>
-          <p:cNvPr id="10" name="Text 8"/>
-          <p:cNvSpPr txBox="1"/>
-          <p:nvPr/>
-        </p:nvSpPr>
-        <p:spPr>
-          <a:xfrm>
-            <a:off x="4663440" y="3429000"/>
-            <a:ext cx="3017520" cy="1097280"/>
-          </a:xfrm>
-          <a:prstGeom prst="rect">
-            <a:avLst/>
-          </a:prstGeom>
-          <a:noFill/>
-          <a:ln/>
-        </p:spPr>
-        <p:txBody>
-          <a:bodyPr wrap="square" lIns="0" tIns="0" rIns="0" bIns="0" rtlCol="0" anchor="ctr"/>
-          <a:lstStyle/>
-          <a:p>
-            <a:pPr indent="0" marL="0">
-              <a:lnSpc>
-                <a:spcPct val="115000"/>
-              </a:lnSpc>
-              <a:buNone/>
-            </a:pPr>
-            <a:r>
-              <a:rPr lang="en-US" sz="1250" dirty="0">
-                <a:solidFill>
-                  <a:srgbClr val="CFE0DD"/>
-                </a:solidFill>
-                <a:latin typeface="Calibri" pitchFamily="34" charset="0"/>
-                <a:ea typeface="Calibri" pitchFamily="34" charset="-122"/>
-                <a:cs typeface="Calibri" pitchFamily="34" charset="-120"/>
-              </a:rPr>
-              <a:t>Timeline to a clear yes/no answer</a:t>
-            </a:r>
-            <a:endParaRPr lang="en-US" sz="1250" dirty="0"/>
-          </a:p>
-        </p:txBody>
-      </p:sp>
-      <p:sp>
-        <p:nvSpPr>
-          <p:cNvPr id="11" name="Shape 9"/>
-          <p:cNvSpPr/>
-          <p:nvPr/>
-        </p:nvSpPr>
-        <p:spPr>
-          <a:xfrm>
-            <a:off x="8138160" y="2377440"/>
-            <a:ext cx="3566160" cy="2286000"/>
-          </a:xfrm>
-          <a:prstGeom prst="roundRect">
-            <a:avLst>
-              <a:gd name="adj" fmla="val 3200"/>
-            </a:avLst>
-          </a:prstGeom>
-          <a:solidFill>
-            <a:srgbClr val="132A4D"/>
-          </a:solidFill>
-          <a:ln/>
-        </p:spPr>
-      </p:sp>
-      <p:sp>
-        <p:nvSpPr>
-          <p:cNvPr id="12" name="Text 10"/>
-          <p:cNvSpPr txBox="1"/>
-          <p:nvPr/>
-        </p:nvSpPr>
-        <p:spPr>
-          <a:xfrm>
-            <a:off x="8412480" y="2606040"/>
-            <a:ext cx="3017520" cy="914400"/>
-          </a:xfrm>
-          <a:prstGeom prst="rect">
-            <a:avLst/>
-          </a:prstGeom>
-          <a:noFill/>
-          <a:ln/>
-        </p:spPr>
-        <p:txBody>
-          <a:bodyPr wrap="square" lIns="0" tIns="0" rIns="0" bIns="0" rtlCol="0" anchor="ctr"/>
-          <a:lstStyle/>
-          <a:p>
-            <a:pPr indent="0" marL="0">
-              <a:buNone/>
-            </a:pPr>
-            <a:r>
-              <a:rPr lang="en-US" sz="3400" b="1" dirty="0">
-                <a:solidFill>
-                  <a:srgbClr val="2EC4B6"/>
-                </a:solidFill>
-                <a:latin typeface="Cambria" pitchFamily="34" charset="0"/>
-                <a:ea typeface="Cambria" pitchFamily="34" charset="-122"/>
-                <a:cs typeface="Cambria" pitchFamily="34" charset="-120"/>
-              </a:rPr>
-              <a:t>2</a:t>
-            </a:r>
-            <a:endParaRPr lang="en-US" sz="3400" dirty="0"/>
-          </a:p>
-        </p:txBody>
-      </p:sp>
-      <p:sp>
-        <p:nvSpPr>
-          <p:cNvPr id="13" name="Text 11"/>
-          <p:cNvSpPr txBox="1"/>
-          <p:nvPr/>
-        </p:nvSpPr>
-        <p:spPr>
-          <a:xfrm>
-            <a:off x="8412480" y="3429000"/>
-            <a:ext cx="3017520" cy="1097280"/>
-          </a:xfrm>
-          <a:prstGeom prst="rect">
-            <a:avLst/>
-          </a:prstGeom>
-          <a:noFill/>
-          <a:ln/>
-        </p:spPr>
-        <p:txBody>
-          <a:bodyPr wrap="square" lIns="0" tIns="0" rIns="0" bIns="0" rtlCol="0" anchor="ctr"/>
-          <a:lstStyle/>
-          <a:p>
-            <a:pPr indent="0" marL="0">
-              <a:lnSpc>
-                <a:spcPct val="115000"/>
-              </a:lnSpc>
-              <a:buNone/>
-            </a:pPr>
-            <a:r>
-              <a:rPr lang="en-US" sz="1250" dirty="0">
-                <a:solidFill>
-                  <a:srgbClr val="CFE0DD"/>
-                </a:solidFill>
-                <a:latin typeface="Calibri" pitchFamily="34" charset="0"/>
-                <a:ea typeface="Calibri" pitchFamily="34" charset="-122"/>
-                <a:cs typeface="Calibri" pitchFamily="34" charset="-120"/>
-              </a:rPr>
-              <a:t>Outcomes only, validate the mechanism, or cleanly redirect to methylation, next by our own ranking</a:t>
-            </a:r>
-            <a:endParaRPr lang="en-US" sz="1250" dirty="0"/>
-          </a:p>
-        </p:txBody>
-      </p:sp>
-      <p:sp>
-        <p:nvSpPr>
-          <p:cNvPr id="14" name="Text 12"/>
-          <p:cNvSpPr txBox="1"/>
-          <p:nvPr/>
-        </p:nvSpPr>
-        <p:spPr>
-          <a:xfrm>
-            <a:off x="640080" y="4937760"/>
-            <a:ext cx="10515600" cy="457200"/>
-          </a:xfrm>
-          <a:prstGeom prst="rect">
-            <a:avLst/>
-          </a:prstGeom>
-          <a:noFill/>
-          <a:ln/>
-        </p:spPr>
-        <p:txBody>
-          <a:bodyPr wrap="square" lIns="0" tIns="0" rIns="0" bIns="0" rtlCol="0" anchor="ctr"/>
-          <a:lstStyle/>
-          <a:p>
-            <a:pPr indent="0" marL="0">
-              <a:buNone/>
-            </a:pPr>
-            <a:r>
-              <a:rPr lang="en-US" sz="1400" i="1" dirty="0">
-                <a:solidFill>
-                  <a:srgbClr val="8FA6AE"/>
-                </a:solidFill>
-                <a:latin typeface="Calibri" pitchFamily="34" charset="0"/>
-                <a:ea typeface="Calibri" pitchFamily="34" charset="-122"/>
-                <a:cs typeface="Calibri" pitchFamily="34" charset="-120"/>
-              </a:rPr>
-              <a:t>Deliberately the cheapest, fastest experiment that produces a real answer, not a moonshot ask.</a:t>
-            </a:r>
-            <a:endParaRPr lang="en-US" sz="1400" dirty="0"/>
-          </a:p>
-        </p:txBody>
-      </p:sp>
-      <p:sp>
-        <p:nvSpPr>
-          <p:cNvPr id="15" name="Text 13"/>
-          <p:cNvSpPr txBox="1"/>
-          <p:nvPr/>
-        </p:nvSpPr>
-        <p:spPr>
-          <a:xfrm>
-            <a:off x="11365992" y="6400800"/>
-            <a:ext cx="548640" cy="274320"/>
-          </a:xfrm>
-          <a:prstGeom prst="rect">
-            <a:avLst/>
-          </a:prstGeom>
-          <a:noFill/>
-          <a:ln/>
-        </p:spPr>
-        <p:txBody>
-          <a:bodyPr wrap="square" lIns="0" tIns="0" rIns="0" bIns="0" rtlCol="0" anchor="ctr"/>
-          <a:lstStyle/>
-          <a:p>
-            <a:pPr algn="r" indent="0" marL="0">
-              <a:buNone/>
-            </a:pPr>
-            <a:r>
-              <a:rPr lang="en-US" sz="1000" dirty="0">
-                <a:solidFill>
-                  <a:srgbClr val="6E7F91"/>
-                </a:solidFill>
-                <a:latin typeface="Calibri" pitchFamily="34" charset="0"/>
-                <a:ea typeface="Calibri" pitchFamily="34" charset="-122"/>
-                <a:cs typeface="Calibri" pitchFamily="34" charset="-120"/>
-              </a:rPr>
-              <a:t>14</a:t>
-            </a:r>
-            <a:endParaRPr lang="en-US" sz="1000" dirty="0"/>
-          </a:p>
-        </p:txBody>
-      </p:sp>
-    </p:spTree>
-  </p:cSld>
-  <p:clrMapOvr>
-    <a:masterClrMapping/>
-  </p:clrMapOvr>
-</p:sld>
-</file>
-
-<file path=ppt/slides/slide15.xml><?xml version="1.0" encoding="utf-8"?>
-<p:sld xmlns:a="http://schemas.openxmlformats.org/drawingml/2006/main" xmlns:r="http://schemas.openxmlformats.org/officeDocument/2006/relationships" xmlns:p="http://schemas.openxmlformats.org/presentationml/2006/main">
-  <p:cSld name="Slide 15">
-    <p:bg>
-      <p:bgPr>
-        <a:solidFill>
-          <a:srgbClr val="F4F6F7"/>
-        </a:solidFill>
-      </p:bgPr>
-    </p:bg>
-    <p:spTree>
-      <p:nvGrpSpPr>
-        <p:cNvPr id="1" name=""/>
-        <p:cNvGrpSpPr/>
-        <p:nvPr/>
-      </p:nvGrpSpPr>
-      <p:grpSpPr>
-        <a:xfrm>
-          <a:off x="0" y="0"/>
-          <a:ext cx="0" cy="0"/>
-          <a:chOff x="0" y="0"/>
-          <a:chExt cx="0" cy="0"/>
-        </a:xfrm>
-      </p:grpSpPr>
-      <p:sp>
-        <p:nvSpPr>
-          <p:cNvPr id="2" name="Text 0"/>
-          <p:cNvSpPr txBox="1"/>
-          <p:nvPr/>
-        </p:nvSpPr>
-        <p:spPr>
-          <a:xfrm>
-            <a:off x="640080" y="457200"/>
-            <a:ext cx="5486400" cy="320040"/>
-          </a:xfrm>
-          <a:prstGeom prst="rect">
-            <a:avLst/>
-          </a:prstGeom>
-          <a:noFill/>
-          <a:ln/>
-        </p:spPr>
-        <p:txBody>
-          <a:bodyPr wrap="square" lIns="0" tIns="0" rIns="0" bIns="0" rtlCol="0" anchor="ctr"/>
-          <a:lstStyle/>
-          <a:p>
-            <a:pPr indent="0" marL="0">
-              <a:buNone/>
-            </a:pPr>
-            <a:r>
-              <a:rPr lang="en-US" sz="1200" b="1" spc="200" kern="0" dirty="0">
-                <a:solidFill>
-                  <a:srgbClr val="1C8F84"/>
-                </a:solidFill>
-                <a:latin typeface="Calibri" pitchFamily="34" charset="0"/>
-                <a:ea typeface="Calibri" pitchFamily="34" charset="-122"/>
-                <a:cs typeface="Calibri" pitchFamily="34" charset="-120"/>
-              </a:rPr>
-              <a:t>WHAT WE'RE ASKING FOR</a:t>
-            </a:r>
-            <a:endParaRPr lang="en-US" sz="1200" dirty="0"/>
-          </a:p>
-        </p:txBody>
-      </p:sp>
-      <p:sp>
-        <p:nvSpPr>
-          <p:cNvPr id="3" name="Text 1"/>
-          <p:cNvSpPr txBox="1"/>
-          <p:nvPr/>
-        </p:nvSpPr>
-        <p:spPr>
-          <a:xfrm>
-            <a:off x="640080" y="777240"/>
-            <a:ext cx="10881360" cy="731520"/>
-          </a:xfrm>
-          <a:prstGeom prst="rect">
-            <a:avLst/>
-          </a:prstGeom>
-          <a:noFill/>
-          <a:ln/>
-        </p:spPr>
-        <p:txBody>
-          <a:bodyPr wrap="square" lIns="0" tIns="0" rIns="0" bIns="0" rtlCol="0" anchor="ctr"/>
-          <a:lstStyle/>
-          <a:p>
-            <a:pPr indent="0" marL="0">
-              <a:buNone/>
-            </a:pPr>
-            <a:r>
-              <a:rPr lang="en-US" sz="2700" b="1" dirty="0">
-                <a:solidFill>
-                  <a:srgbClr val="16232F"/>
-                </a:solidFill>
-                <a:latin typeface="Cambria" pitchFamily="34" charset="0"/>
-                <a:ea typeface="Cambria" pitchFamily="34" charset="-122"/>
-                <a:cs typeface="Cambria" pitchFamily="34" charset="-120"/>
-              </a:rPr>
-              <a:t>Deliberately small, not a seed round</a:t>
-            </a:r>
-            <a:endParaRPr lang="en-US" sz="2700" dirty="0"/>
-          </a:p>
-        </p:txBody>
-      </p:sp>
-      <p:sp>
-        <p:nvSpPr>
-          <p:cNvPr id="4" name="Text 2"/>
-          <p:cNvSpPr txBox="1"/>
-          <p:nvPr/>
-        </p:nvSpPr>
-        <p:spPr>
-          <a:xfrm>
-            <a:off x="640080" y="1508760"/>
-            <a:ext cx="10515600" cy="457200"/>
-          </a:xfrm>
-          <a:prstGeom prst="rect">
-            <a:avLst/>
-          </a:prstGeom>
-          <a:noFill/>
-          <a:ln/>
-        </p:spPr>
-        <p:txBody>
-          <a:bodyPr wrap="square" lIns="0" tIns="0" rIns="0" bIns="0" rtlCol="0" anchor="ctr"/>
-          <a:lstStyle/>
-          <a:p>
-            <a:pPr indent="0" marL="0">
-              <a:buNone/>
-            </a:pPr>
-            <a:r>
-              <a:rPr lang="en-US" sz="1350" dirty="0">
-                <a:solidFill>
-                  <a:srgbClr val="5B6B77"/>
-                </a:solidFill>
-                <a:latin typeface="Calibri" pitchFamily="34" charset="0"/>
-                <a:ea typeface="Calibri" pitchFamily="34" charset="-122"/>
-                <a:cs typeface="Calibri" pitchFamily="34" charset="-120"/>
-              </a:rPr>
-              <a:t>We are not raising a general-purpose seed round right now. This stage needs something narrower and cheaper:</a:t>
-            </a:r>
-            <a:endParaRPr lang="en-US" sz="1350" dirty="0"/>
-          </a:p>
-        </p:txBody>
-      </p:sp>
-      <p:sp>
-        <p:nvSpPr>
-          <p:cNvPr id="5" name="Shape 3"/>
-          <p:cNvSpPr/>
-          <p:nvPr/>
-        </p:nvSpPr>
-        <p:spPr>
-          <a:xfrm>
-            <a:off x="640080" y="2103120"/>
-            <a:ext cx="457200" cy="457200"/>
-          </a:xfrm>
-          <a:prstGeom prst="ellipse">
-            <a:avLst/>
-          </a:prstGeom>
-          <a:solidFill>
-            <a:srgbClr val="2EC4B6"/>
-          </a:solidFill>
-          <a:ln/>
-        </p:spPr>
-      </p:sp>
-      <p:sp>
-        <p:nvSpPr>
-          <p:cNvPr id="6" name="Text 4"/>
-          <p:cNvSpPr txBox="1"/>
-          <p:nvPr/>
-        </p:nvSpPr>
-        <p:spPr>
-          <a:xfrm>
-            <a:off x="640080" y="2103120"/>
-            <a:ext cx="457200" cy="457200"/>
-          </a:xfrm>
-          <a:prstGeom prst="rect">
-            <a:avLst/>
-          </a:prstGeom>
-          <a:noFill/>
-          <a:ln/>
-        </p:spPr>
-        <p:txBody>
-          <a:bodyPr wrap="square" lIns="0" tIns="0" rIns="0" bIns="0" rtlCol="0" anchor="ctr"/>
-          <a:lstStyle/>
-          <a:p>
-            <a:pPr algn="ctr" indent="0" marL="0">
-              <a:buNone/>
-            </a:pPr>
-            <a:r>
-              <a:rPr lang="en-US" sz="1800" b="1" dirty="0">
-                <a:solidFill>
-                  <a:srgbClr val="FFFFFF"/>
-                </a:solidFill>
-                <a:latin typeface="Cambria" pitchFamily="34" charset="0"/>
-                <a:ea typeface="Cambria" pitchFamily="34" charset="-122"/>
-                <a:cs typeface="Cambria" pitchFamily="34" charset="-120"/>
-              </a:rPr>
-              <a:t>1</a:t>
-            </a:r>
-            <a:endParaRPr lang="en-US" sz="1800" dirty="0"/>
-          </a:p>
-        </p:txBody>
-      </p:sp>
-      <p:sp>
-        <p:nvSpPr>
-          <p:cNvPr id="7" name="Text 5"/>
-          <p:cNvSpPr txBox="1"/>
-          <p:nvPr/>
-        </p:nvSpPr>
-        <p:spPr>
-          <a:xfrm>
-            <a:off x="1325880" y="2057400"/>
-            <a:ext cx="9875520" cy="365760"/>
-          </a:xfrm>
-          <a:prstGeom prst="rect">
-            <a:avLst/>
-          </a:prstGeom>
-          <a:noFill/>
-          <a:ln/>
-        </p:spPr>
-        <p:txBody>
-          <a:bodyPr wrap="square" lIns="0" tIns="0" rIns="0" bIns="0" rtlCol="0" anchor="ctr"/>
-          <a:lstStyle/>
-          <a:p>
-            <a:pPr indent="0" marL="0">
-              <a:buNone/>
-            </a:pPr>
-            <a:r>
-              <a:rPr lang="en-US" sz="1600" b="1" dirty="0">
-                <a:solidFill>
-                  <a:srgbClr val="16232F"/>
-                </a:solidFill>
-                <a:latin typeface="Cambria" pitchFamily="34" charset="0"/>
-                <a:ea typeface="Cambria" pitchFamily="34" charset="-122"/>
-                <a:cs typeface="Cambria" pitchFamily="34" charset="-120"/>
-              </a:rPr>
-              <a:t>Funding for the wet-lab validation experiment</a:t>
-            </a:r>
-            <a:endParaRPr lang="en-US" sz="1600" dirty="0"/>
-          </a:p>
-        </p:txBody>
-      </p:sp>
-      <p:sp>
-        <p:nvSpPr>
-          <p:cNvPr id="8" name="Text 6"/>
-          <p:cNvSpPr txBox="1"/>
-          <p:nvPr/>
-        </p:nvSpPr>
-        <p:spPr>
-          <a:xfrm>
-            <a:off x="1325880" y="2468880"/>
-            <a:ext cx="9875520" cy="594360"/>
-          </a:xfrm>
-          <a:prstGeom prst="rect">
-            <a:avLst/>
-          </a:prstGeom>
-          <a:noFill/>
-          <a:ln/>
-        </p:spPr>
-        <p:txBody>
-          <a:bodyPr wrap="square" lIns="0" tIns="0" rIns="0" bIns="0" rtlCol="0" anchor="ctr"/>
-          <a:lstStyle/>
-          <a:p>
-            <a:pPr indent="0" marL="0">
-              <a:lnSpc>
-                <a:spcPct val="115000"/>
-              </a:lnSpc>
-              <a:buNone/>
-            </a:pPr>
-            <a:r>
-              <a:rPr lang="en-US" sz="1250" dirty="0">
-                <a:solidFill>
-                  <a:srgbClr val="5B6B77"/>
-                </a:solidFill>
-                <a:latin typeface="Calibri" pitchFamily="34" charset="0"/>
-                <a:ea typeface="Calibri" pitchFamily="34" charset="-122"/>
-                <a:cs typeface="Calibri" pitchFamily="34" charset="-120"/>
-              </a:rPr>
-              <a:t>The ~$10K-$30K described on the roadmap slide: reagents, plasmid synthesis/cloning, lab bench access.</a:t>
-            </a:r>
-            <a:endParaRPr lang="en-US" sz="1250" dirty="0"/>
-          </a:p>
-        </p:txBody>
-      </p:sp>
-      <p:sp>
-        <p:nvSpPr>
-          <p:cNvPr id="9" name="Shape 7"/>
-          <p:cNvSpPr/>
-          <p:nvPr/>
-        </p:nvSpPr>
-        <p:spPr>
-          <a:xfrm>
-            <a:off x="640080" y="3200400"/>
-            <a:ext cx="457200" cy="457200"/>
-          </a:xfrm>
-          <a:prstGeom prst="ellipse">
-            <a:avLst/>
-          </a:prstGeom>
-          <a:solidFill>
-            <a:srgbClr val="2EC4B6"/>
-          </a:solidFill>
-          <a:ln/>
-        </p:spPr>
-      </p:sp>
-      <p:sp>
-        <p:nvSpPr>
-          <p:cNvPr id="10" name="Text 8"/>
-          <p:cNvSpPr txBox="1"/>
-          <p:nvPr/>
-        </p:nvSpPr>
-        <p:spPr>
-          <a:xfrm>
-            <a:off x="640080" y="3200400"/>
-            <a:ext cx="457200" cy="457200"/>
-          </a:xfrm>
-          <a:prstGeom prst="rect">
-            <a:avLst/>
-          </a:prstGeom>
-          <a:noFill/>
-          <a:ln/>
-        </p:spPr>
-        <p:txBody>
-          <a:bodyPr wrap="square" lIns="0" tIns="0" rIns="0" bIns="0" rtlCol="0" anchor="ctr"/>
-          <a:lstStyle/>
-          <a:p>
-            <a:pPr algn="ctr" indent="0" marL="0">
-              <a:buNone/>
-            </a:pPr>
-            <a:r>
-              <a:rPr lang="en-US" sz="1800" b="1" dirty="0">
-                <a:solidFill>
-                  <a:srgbClr val="FFFFFF"/>
-                </a:solidFill>
-                <a:latin typeface="Cambria" pitchFamily="34" charset="0"/>
-                <a:ea typeface="Cambria" pitchFamily="34" charset="-122"/>
-                <a:cs typeface="Cambria" pitchFamily="34" charset="-120"/>
-              </a:rPr>
-              <a:t>2</a:t>
-            </a:r>
-            <a:endParaRPr lang="en-US" sz="1800" dirty="0"/>
-          </a:p>
-        </p:txBody>
-      </p:sp>
-      <p:sp>
-        <p:nvSpPr>
-          <p:cNvPr id="11" name="Text 9"/>
-          <p:cNvSpPr txBox="1"/>
-          <p:nvPr/>
-        </p:nvSpPr>
-        <p:spPr>
-          <a:xfrm>
-            <a:off x="1325880" y="3154680"/>
-            <a:ext cx="9875520" cy="365760"/>
-          </a:xfrm>
-          <a:prstGeom prst="rect">
-            <a:avLst/>
-          </a:prstGeom>
-          <a:noFill/>
-          <a:ln/>
-        </p:spPr>
-        <p:txBody>
-          <a:bodyPr wrap="square" lIns="0" tIns="0" rIns="0" bIns="0" rtlCol="0" anchor="ctr"/>
-          <a:lstStyle/>
-          <a:p>
-            <a:pPr indent="0" marL="0">
-              <a:buNone/>
-            </a:pPr>
-            <a:r>
-              <a:rPr lang="en-US" sz="1600" b="1" dirty="0">
-                <a:solidFill>
-                  <a:srgbClr val="16232F"/>
-                </a:solidFill>
-                <a:latin typeface="Cambria" pitchFamily="34" charset="0"/>
-                <a:ea typeface="Cambria" pitchFamily="34" charset="-122"/>
-                <a:cs typeface="Cambria" pitchFamily="34" charset="-120"/>
-              </a:rPr>
-              <a:t>Budget to hire a paid synthetic-biology consultant</a:t>
-            </a:r>
-            <a:endParaRPr lang="en-US" sz="1600" dirty="0"/>
-          </a:p>
-        </p:txBody>
-      </p:sp>
-      <p:sp>
-        <p:nvSpPr>
-          <p:cNvPr id="12" name="Text 10"/>
-          <p:cNvSpPr txBox="1"/>
-          <p:nvPr/>
-        </p:nvSpPr>
-        <p:spPr>
-          <a:xfrm>
-            <a:off x="1325880" y="3566160"/>
-            <a:ext cx="9875520" cy="594360"/>
-          </a:xfrm>
-          <a:prstGeom prst="rect">
-            <a:avLst/>
-          </a:prstGeom>
-          <a:noFill/>
-          <a:ln/>
-        </p:spPr>
-        <p:txBody>
-          <a:bodyPr wrap="square" lIns="0" tIns="0" rIns="0" bIns="0" rtlCol="0" anchor="ctr"/>
-          <a:lstStyle/>
-          <a:p>
-            <a:pPr indent="0" marL="0">
-              <a:lnSpc>
-                <a:spcPct val="115000"/>
-              </a:lnSpc>
-              <a:buNone/>
-            </a:pPr>
-            <a:r>
-              <a:rPr lang="en-US" sz="1250" dirty="0">
-                <a:solidFill>
-                  <a:srgbClr val="5B6B77"/>
-                </a:solidFill>
-                <a:latin typeface="Calibri" pitchFamily="34" charset="0"/>
-                <a:ea typeface="Calibri" pitchFamily="34" charset="-122"/>
-                <a:cs typeface="Calibri" pitchFamily="34" charset="-120"/>
-              </a:rPr>
-              <a:t>A real expert's time to review and help execute the toggle-circuit build, not just informal mentoring hours. We'd rather pay for a few weeks of real expertise than move forward on a design nobody with domain experience has pressure-tested.</a:t>
-            </a:r>
-            <a:endParaRPr lang="en-US" sz="1250" dirty="0"/>
-          </a:p>
-        </p:txBody>
-      </p:sp>
-      <p:sp>
-        <p:nvSpPr>
-          <p:cNvPr id="13" name="Shape 11"/>
-          <p:cNvSpPr/>
-          <p:nvPr/>
-        </p:nvSpPr>
-        <p:spPr>
-          <a:xfrm>
-            <a:off x="640080" y="4297680"/>
-            <a:ext cx="457200" cy="457200"/>
-          </a:xfrm>
-          <a:prstGeom prst="ellipse">
-            <a:avLst/>
-          </a:prstGeom>
-          <a:solidFill>
-            <a:srgbClr val="2EC4B6"/>
-          </a:solidFill>
-          <a:ln/>
-        </p:spPr>
-      </p:sp>
-      <p:sp>
-        <p:nvSpPr>
-          <p:cNvPr id="14" name="Text 12"/>
-          <p:cNvSpPr txBox="1"/>
-          <p:nvPr/>
-        </p:nvSpPr>
-        <p:spPr>
-          <a:xfrm>
-            <a:off x="640080" y="4297680"/>
-            <a:ext cx="457200" cy="457200"/>
-          </a:xfrm>
-          <a:prstGeom prst="rect">
-            <a:avLst/>
-          </a:prstGeom>
-          <a:noFill/>
-          <a:ln/>
-        </p:spPr>
-        <p:txBody>
-          <a:bodyPr wrap="square" lIns="0" tIns="0" rIns="0" bIns="0" rtlCol="0" anchor="ctr"/>
-          <a:lstStyle/>
-          <a:p>
-            <a:pPr algn="ctr" indent="0" marL="0">
-              <a:buNone/>
-            </a:pPr>
-            <a:r>
-              <a:rPr lang="en-US" sz="1800" b="1" dirty="0">
-                <a:solidFill>
-                  <a:srgbClr val="FFFFFF"/>
-                </a:solidFill>
-                <a:latin typeface="Cambria" pitchFamily="34" charset="0"/>
-                <a:ea typeface="Cambria" pitchFamily="34" charset="-122"/>
-                <a:cs typeface="Cambria" pitchFamily="34" charset="-120"/>
-              </a:rPr>
-              <a:t>3</a:t>
-            </a:r>
-            <a:endParaRPr lang="en-US" sz="1800" dirty="0"/>
-          </a:p>
-        </p:txBody>
-      </p:sp>
-      <p:sp>
-        <p:nvSpPr>
-          <p:cNvPr id="15" name="Text 13"/>
-          <p:cNvSpPr txBox="1"/>
-          <p:nvPr/>
-        </p:nvSpPr>
-        <p:spPr>
-          <a:xfrm>
-            <a:off x="1325880" y="4251960"/>
-            <a:ext cx="9875520" cy="365760"/>
-          </a:xfrm>
-          <a:prstGeom prst="rect">
-            <a:avLst/>
-          </a:prstGeom>
-          <a:noFill/>
-          <a:ln/>
-        </p:spPr>
-        <p:txBody>
-          <a:bodyPr wrap="square" lIns="0" tIns="0" rIns="0" bIns="0" rtlCol="0" anchor="ctr"/>
-          <a:lstStyle/>
-          <a:p>
-            <a:pPr indent="0" marL="0">
-              <a:buNone/>
-            </a:pPr>
-            <a:r>
-              <a:rPr lang="en-US" sz="1600" b="1" dirty="0">
-                <a:solidFill>
-                  <a:srgbClr val="16232F"/>
-                </a:solidFill>
-                <a:latin typeface="Cambria" pitchFamily="34" charset="0"/>
-                <a:ea typeface="Cambria" pitchFamily="34" charset="-122"/>
-                <a:cs typeface="Cambria" pitchFamily="34" charset="-120"/>
-              </a:rPr>
-              <a:t>Lab access &amp; partnership introductions</a:t>
-            </a:r>
-            <a:endParaRPr lang="en-US" sz="1600" dirty="0"/>
-          </a:p>
-        </p:txBody>
-      </p:sp>
-      <p:sp>
-        <p:nvSpPr>
-          <p:cNvPr id="16" name="Text 14"/>
-          <p:cNvSpPr txBox="1"/>
-          <p:nvPr/>
-        </p:nvSpPr>
-        <p:spPr>
-          <a:xfrm>
-            <a:off x="1325880" y="4663440"/>
-            <a:ext cx="9875520" cy="594360"/>
-          </a:xfrm>
-          <a:prstGeom prst="rect">
-            <a:avLst/>
-          </a:prstGeom>
-          <a:noFill/>
-          <a:ln/>
-        </p:spPr>
-        <p:txBody>
-          <a:bodyPr wrap="square" lIns="0" tIns="0" rIns="0" bIns="0" rtlCol="0" anchor="ctr"/>
-          <a:lstStyle/>
-          <a:p>
-            <a:pPr indent="0" marL="0">
-              <a:lnSpc>
-                <a:spcPct val="115000"/>
-              </a:lnSpc>
-              <a:buNone/>
-            </a:pPr>
-            <a:r>
-              <a:rPr lang="en-US" sz="1250" dirty="0">
-                <a:solidFill>
-                  <a:srgbClr val="5B6B77"/>
-                </a:solidFill>
-                <a:latin typeface="Calibri" pitchFamily="34" charset="0"/>
-                <a:ea typeface="Calibri" pitchFamily="34" charset="-122"/>
-                <a:cs typeface="Calibri" pitchFamily="34" charset="-120"/>
-              </a:rPr>
-              <a:t>Standard bacterial transformation and plasmid cloning, B. subtilis is a workhorse organism, a far more common skill than planarian-specific culture.</a:t>
-            </a:r>
-            <a:endParaRPr lang="en-US" sz="1250" dirty="0"/>
-          </a:p>
-        </p:txBody>
-      </p:sp>
-      <p:sp>
-        <p:nvSpPr>
-          <p:cNvPr id="17" name="Shape 15"/>
-          <p:cNvSpPr/>
-          <p:nvPr/>
-        </p:nvSpPr>
-        <p:spPr>
-          <a:xfrm>
-            <a:off x="640080" y="5532120"/>
-            <a:ext cx="10972800" cy="868680"/>
-          </a:xfrm>
-          <a:prstGeom prst="roundRect">
-            <a:avLst>
-              <a:gd name="adj" fmla="val 8421"/>
-            </a:avLst>
-          </a:prstGeom>
-          <a:solidFill>
-            <a:srgbClr val="EAF6F4"/>
-          </a:solidFill>
-          <a:ln w="15875">
-            <a:solidFill>
-              <a:srgbClr val="1C8F84"/>
-            </a:solidFill>
-            <a:prstDash val="solid"/>
-          </a:ln>
-        </p:spPr>
-      </p:sp>
-      <p:sp>
-        <p:nvSpPr>
-          <p:cNvPr id="18" name="Text 16"/>
-          <p:cNvSpPr txBox="1"/>
-          <p:nvPr/>
-        </p:nvSpPr>
-        <p:spPr>
-          <a:xfrm>
-            <a:off x="868680" y="5532120"/>
-            <a:ext cx="10515600" cy="868680"/>
-          </a:xfrm>
-          <a:prstGeom prst="rect">
-            <a:avLst/>
-          </a:prstGeom>
-          <a:noFill/>
-          <a:ln/>
-        </p:spPr>
-        <p:txBody>
-          <a:bodyPr wrap="square" lIns="0" tIns="0" rIns="0" bIns="0" rtlCol="0" anchor="ctr"/>
-          <a:lstStyle/>
-          <a:p>
-            <a:pPr indent="0" marL="0">
-              <a:lnSpc>
-                <a:spcPct val="110000"/>
-              </a:lnSpc>
-              <a:buNone/>
-            </a:pPr>
-            <a:r>
-              <a:rPr lang="en-US" sz="1250" b="1" dirty="0">
-                <a:solidFill>
-                  <a:srgbClr val="1C8F84"/>
-                </a:solidFill>
-                <a:latin typeface="Calibri" pitchFamily="34" charset="0"/>
-                <a:ea typeface="Calibri" pitchFamily="34" charset="-122"/>
-                <a:cs typeface="Calibri" pitchFamily="34" charset="-120"/>
-              </a:rPr>
-              <a:t>IP status:  </a:t>
-            </a:r>
-            <a:pPr indent="0" marL="0">
-              <a:lnSpc>
-                <a:spcPct val="110000"/>
-              </a:lnSpc>
-              <a:buNone/>
-            </a:pPr>
-            <a:r>
-              <a:rPr lang="en-US" sz="1250" dirty="0">
-                <a:solidFill>
-                  <a:srgbClr val="16232F"/>
-                </a:solidFill>
-                <a:latin typeface="Calibri" pitchFamily="34" charset="0"/>
-                <a:ea typeface="Calibri" pitchFamily="34" charset="-122"/>
-                <a:cs typeface="Calibri" pitchFamily="34" charset="-120"/>
-              </a:rPr>
-              <a:t>patent applications filed with the USPTO covering the Bio-RAID fault-tolerance architecture, self-healing recovery protocol, and environment-adaptive longevity system.</a:t>
-            </a:r>
-            <a:endParaRPr lang="en-US" sz="1250" dirty="0"/>
-          </a:p>
-        </p:txBody>
-      </p:sp>
-      <p:sp>
-        <p:nvSpPr>
-          <p:cNvPr id="19" name="Text 17"/>
-          <p:cNvSpPr txBox="1"/>
-          <p:nvPr/>
-        </p:nvSpPr>
-        <p:spPr>
-          <a:xfrm>
-            <a:off x="11365992" y="6400800"/>
-            <a:ext cx="548640" cy="274320"/>
-          </a:xfrm>
-          <a:prstGeom prst="rect">
-            <a:avLst/>
-          </a:prstGeom>
-          <a:noFill/>
-          <a:ln/>
-        </p:spPr>
-        <p:txBody>
-          <a:bodyPr wrap="square" lIns="0" tIns="0" rIns="0" bIns="0" rtlCol="0" anchor="ctr"/>
-          <a:lstStyle/>
-          <a:p>
-            <a:pPr algn="r" indent="0" marL="0">
-              <a:buNone/>
-            </a:pPr>
-            <a:r>
-              <a:rPr lang="en-US" sz="1000" dirty="0">
-                <a:solidFill>
-                  <a:srgbClr val="9AA7AF"/>
                 </a:solidFill>
                 <a:latin typeface="Calibri" pitchFamily="34" charset="0"/>
                 <a:ea typeface="Calibri" pitchFamily="34" charset="-122"/>
@@ -8014,6 +8561,1808 @@
       </p:grpSpPr>
       <p:sp>
         <p:nvSpPr>
+          <p:cNvPr id="2" name="Text 0"/>
+          <p:cNvSpPr txBox="1"/>
+          <p:nvPr/>
+        </p:nvSpPr>
+        <p:spPr>
+          <a:xfrm>
+            <a:off x="640080" y="457200"/>
+            <a:ext cx="5486400" cy="320040"/>
+          </a:xfrm>
+          <a:prstGeom prst="rect">
+            <a:avLst/>
+          </a:prstGeom>
+          <a:noFill/>
+          <a:ln/>
+        </p:spPr>
+        <p:txBody>
+          <a:bodyPr wrap="square" lIns="0" tIns="0" rIns="0" bIns="0" rtlCol="0" anchor="ctr"/>
+          <a:lstStyle/>
+          <a:p>
+            <a:pPr indent="0" marL="0">
+              <a:buNone/>
+            </a:pPr>
+            <a:r>
+              <a:rPr lang="en-US" sz="1200" b="1" spc="200" kern="0" dirty="0">
+                <a:solidFill>
+                  <a:srgbClr val="2EC4B6"/>
+                </a:solidFill>
+                <a:latin typeface="Calibri" pitchFamily="34" charset="0"/>
+                <a:ea typeface="Calibri" pitchFamily="34" charset="-122"/>
+                <a:cs typeface="Calibri" pitchFamily="34" charset="-120"/>
+              </a:rPr>
+              <a:t>ROADMAP</a:t>
+            </a:r>
+            <a:endParaRPr lang="en-US" sz="1200" dirty="0"/>
+          </a:p>
+        </p:txBody>
+      </p:sp>
+      <p:sp>
+        <p:nvSpPr>
+          <p:cNvPr id="3" name="Text 1"/>
+          <p:cNvSpPr txBox="1"/>
+          <p:nvPr/>
+        </p:nvSpPr>
+        <p:spPr>
+          <a:xfrm>
+            <a:off x="640080" y="822960"/>
+            <a:ext cx="10881360" cy="777240"/>
+          </a:xfrm>
+          <a:prstGeom prst="rect">
+            <a:avLst/>
+          </a:prstGeom>
+          <a:noFill/>
+          <a:ln/>
+        </p:spPr>
+        <p:txBody>
+          <a:bodyPr wrap="square" lIns="0" tIns="0" rIns="0" bIns="0" rtlCol="0" anchor="ctr"/>
+          <a:lstStyle/>
+          <a:p>
+            <a:pPr indent="0" marL="0">
+              <a:buNone/>
+            </a:pPr>
+            <a:r>
+              <a:rPr lang="en-US" sz="2800" b="1" dirty="0">
+                <a:solidFill>
+                  <a:srgbClr val="FFFFFF"/>
+                </a:solidFill>
+                <a:latin typeface="Cambria" pitchFamily="34" charset="0"/>
+                <a:ea typeface="Cambria" pitchFamily="34" charset="-122"/>
+                <a:cs typeface="Cambria" pitchFamily="34" charset="-120"/>
+              </a:rPr>
+              <a:t>The one experiment that changes everything</a:t>
+            </a:r>
+            <a:endParaRPr lang="en-US" sz="2800" dirty="0"/>
+          </a:p>
+        </p:txBody>
+      </p:sp>
+      <p:sp>
+        <p:nvSpPr>
+          <p:cNvPr id="4" name="Text 2"/>
+          <p:cNvSpPr txBox="1"/>
+          <p:nvPr/>
+        </p:nvSpPr>
+        <p:spPr>
+          <a:xfrm>
+            <a:off x="640080" y="1554480"/>
+            <a:ext cx="10515600" cy="548640"/>
+          </a:xfrm>
+          <a:prstGeom prst="rect">
+            <a:avLst/>
+          </a:prstGeom>
+          <a:noFill/>
+          <a:ln/>
+        </p:spPr>
+        <p:txBody>
+          <a:bodyPr wrap="square" lIns="0" tIns="0" rIns="0" bIns="0" rtlCol="0" anchor="ctr"/>
+          <a:lstStyle/>
+          <a:p>
+            <a:pPr indent="0" marL="0">
+              <a:buNone/>
+            </a:pPr>
+            <a:r>
+              <a:rPr lang="en-US" sz="1400" dirty="0">
+                <a:solidFill>
+                  <a:srgbClr val="AEC2C8"/>
+                </a:solidFill>
+                <a:latin typeface="Calibri" pitchFamily="34" charset="0"/>
+                <a:ea typeface="Calibri" pitchFamily="34" charset="-122"/>
+                <a:cs typeface="Calibri" pitchFamily="34" charset="-120"/>
+              </a:rPr>
+              <a:t>Build the matched-promoter toggle circuit in B. subtilis, write a bit, damage the colony, let it regrow, read the bit back non-destructively via EIS.</a:t>
+            </a:r>
+            <a:endParaRPr lang="en-US" sz="1400" dirty="0"/>
+          </a:p>
+        </p:txBody>
+      </p:sp>
+      <p:sp>
+        <p:nvSpPr>
+          <p:cNvPr id="5" name="Shape 3"/>
+          <p:cNvSpPr/>
+          <p:nvPr/>
+        </p:nvSpPr>
+        <p:spPr>
+          <a:xfrm>
+            <a:off x="640080" y="2377440"/>
+            <a:ext cx="3566160" cy="2286000"/>
+          </a:xfrm>
+          <a:prstGeom prst="roundRect">
+            <a:avLst>
+              <a:gd name="adj" fmla="val 3200"/>
+            </a:avLst>
+          </a:prstGeom>
+          <a:solidFill>
+            <a:srgbClr val="132A4D"/>
+          </a:solidFill>
+          <a:ln/>
+        </p:spPr>
+      </p:sp>
+      <p:sp>
+        <p:nvSpPr>
+          <p:cNvPr id="6" name="Text 4"/>
+          <p:cNvSpPr txBox="1"/>
+          <p:nvPr/>
+        </p:nvSpPr>
+        <p:spPr>
+          <a:xfrm>
+            <a:off x="914400" y="2606040"/>
+            <a:ext cx="3017520" cy="914400"/>
+          </a:xfrm>
+          <a:prstGeom prst="rect">
+            <a:avLst/>
+          </a:prstGeom>
+          <a:noFill/>
+          <a:ln/>
+        </p:spPr>
+        <p:txBody>
+          <a:bodyPr wrap="square" lIns="0" tIns="0" rIns="0" bIns="0" rtlCol="0" anchor="ctr"/>
+          <a:lstStyle/>
+          <a:p>
+            <a:pPr indent="0" marL="0">
+              <a:buNone/>
+            </a:pPr>
+            <a:r>
+              <a:rPr lang="en-US" sz="3400" b="1" dirty="0">
+                <a:solidFill>
+                  <a:srgbClr val="2EC4B6"/>
+                </a:solidFill>
+                <a:latin typeface="Cambria" pitchFamily="34" charset="0"/>
+                <a:ea typeface="Cambria" pitchFamily="34" charset="-122"/>
+                <a:cs typeface="Cambria" pitchFamily="34" charset="-120"/>
+              </a:rPr>
+              <a:t>$10K-$30K</a:t>
+            </a:r>
+            <a:endParaRPr lang="en-US" sz="3400" dirty="0"/>
+          </a:p>
+        </p:txBody>
+      </p:sp>
+      <p:sp>
+        <p:nvSpPr>
+          <p:cNvPr id="7" name="Text 5"/>
+          <p:cNvSpPr txBox="1"/>
+          <p:nvPr/>
+        </p:nvSpPr>
+        <p:spPr>
+          <a:xfrm>
+            <a:off x="914400" y="3429000"/>
+            <a:ext cx="3017520" cy="1097280"/>
+          </a:xfrm>
+          <a:prstGeom prst="rect">
+            <a:avLst/>
+          </a:prstGeom>
+          <a:noFill/>
+          <a:ln/>
+        </p:spPr>
+        <p:txBody>
+          <a:bodyPr wrap="square" lIns="0" tIns="0" rIns="0" bIns="0" rtlCol="0" anchor="ctr"/>
+          <a:lstStyle/>
+          <a:p>
+            <a:pPr indent="0" marL="0">
+              <a:lnSpc>
+                <a:spcPct val="115000"/>
+              </a:lnSpc>
+              <a:buNone/>
+            </a:pPr>
+            <a:r>
+              <a:rPr lang="en-US" sz="1250" dirty="0">
+                <a:solidFill>
+                  <a:srgbClr val="CFE0DD"/>
+                </a:solidFill>
+                <a:latin typeface="Calibri" pitchFamily="34" charset="0"/>
+                <a:ea typeface="Calibri" pitchFamily="34" charset="-122"/>
+                <a:cs typeface="Calibri" pitchFamily="34" charset="-120"/>
+              </a:rPr>
+              <a:t>Cost, reagents, cloning, lab bench access</a:t>
+            </a:r>
+            <a:endParaRPr lang="en-US" sz="1250" dirty="0"/>
+          </a:p>
+        </p:txBody>
+      </p:sp>
+      <p:sp>
+        <p:nvSpPr>
+          <p:cNvPr id="8" name="Shape 6"/>
+          <p:cNvSpPr/>
+          <p:nvPr/>
+        </p:nvSpPr>
+        <p:spPr>
+          <a:xfrm>
+            <a:off x="4389120" y="2377440"/>
+            <a:ext cx="3566160" cy="2286000"/>
+          </a:xfrm>
+          <a:prstGeom prst="roundRect">
+            <a:avLst>
+              <a:gd name="adj" fmla="val 3200"/>
+            </a:avLst>
+          </a:prstGeom>
+          <a:solidFill>
+            <a:srgbClr val="132A4D"/>
+          </a:solidFill>
+          <a:ln/>
+        </p:spPr>
+      </p:sp>
+      <p:sp>
+        <p:nvSpPr>
+          <p:cNvPr id="9" name="Text 7"/>
+          <p:cNvSpPr txBox="1"/>
+          <p:nvPr/>
+        </p:nvSpPr>
+        <p:spPr>
+          <a:xfrm>
+            <a:off x="4663440" y="2606040"/>
+            <a:ext cx="3017520" cy="914400"/>
+          </a:xfrm>
+          <a:prstGeom prst="rect">
+            <a:avLst/>
+          </a:prstGeom>
+          <a:noFill/>
+          <a:ln/>
+        </p:spPr>
+        <p:txBody>
+          <a:bodyPr wrap="square" lIns="0" tIns="0" rIns="0" bIns="0" rtlCol="0" anchor="ctr"/>
+          <a:lstStyle/>
+          <a:p>
+            <a:pPr indent="0" marL="0">
+              <a:buNone/>
+            </a:pPr>
+            <a:r>
+              <a:rPr lang="en-US" sz="3400" b="1" dirty="0">
+                <a:solidFill>
+                  <a:srgbClr val="2EC4B6"/>
+                </a:solidFill>
+                <a:latin typeface="Cambria" pitchFamily="34" charset="0"/>
+                <a:ea typeface="Cambria" pitchFamily="34" charset="-122"/>
+                <a:cs typeface="Cambria" pitchFamily="34" charset="-120"/>
+              </a:rPr>
+              <a:t>6-12 mo</a:t>
+            </a:r>
+            <a:endParaRPr lang="en-US" sz="3400" dirty="0"/>
+          </a:p>
+        </p:txBody>
+      </p:sp>
+      <p:sp>
+        <p:nvSpPr>
+          <p:cNvPr id="10" name="Text 8"/>
+          <p:cNvSpPr txBox="1"/>
+          <p:nvPr/>
+        </p:nvSpPr>
+        <p:spPr>
+          <a:xfrm>
+            <a:off x="4663440" y="3429000"/>
+            <a:ext cx="3017520" cy="1097280"/>
+          </a:xfrm>
+          <a:prstGeom prst="rect">
+            <a:avLst/>
+          </a:prstGeom>
+          <a:noFill/>
+          <a:ln/>
+        </p:spPr>
+        <p:txBody>
+          <a:bodyPr wrap="square" lIns="0" tIns="0" rIns="0" bIns="0" rtlCol="0" anchor="ctr"/>
+          <a:lstStyle/>
+          <a:p>
+            <a:pPr indent="0" marL="0">
+              <a:lnSpc>
+                <a:spcPct val="115000"/>
+              </a:lnSpc>
+              <a:buNone/>
+            </a:pPr>
+            <a:r>
+              <a:rPr lang="en-US" sz="1250" dirty="0">
+                <a:solidFill>
+                  <a:srgbClr val="CFE0DD"/>
+                </a:solidFill>
+                <a:latin typeface="Calibri" pitchFamily="34" charset="0"/>
+                <a:ea typeface="Calibri" pitchFamily="34" charset="-122"/>
+                <a:cs typeface="Calibri" pitchFamily="34" charset="-120"/>
+              </a:rPr>
+              <a:t>Timeline to a clear yes/no answer</a:t>
+            </a:r>
+            <a:endParaRPr lang="en-US" sz="1250" dirty="0"/>
+          </a:p>
+        </p:txBody>
+      </p:sp>
+      <p:sp>
+        <p:nvSpPr>
+          <p:cNvPr id="11" name="Shape 9"/>
+          <p:cNvSpPr/>
+          <p:nvPr/>
+        </p:nvSpPr>
+        <p:spPr>
+          <a:xfrm>
+            <a:off x="8138160" y="2377440"/>
+            <a:ext cx="3566160" cy="2286000"/>
+          </a:xfrm>
+          <a:prstGeom prst="roundRect">
+            <a:avLst>
+              <a:gd name="adj" fmla="val 3200"/>
+            </a:avLst>
+          </a:prstGeom>
+          <a:solidFill>
+            <a:srgbClr val="132A4D"/>
+          </a:solidFill>
+          <a:ln/>
+        </p:spPr>
+      </p:sp>
+      <p:sp>
+        <p:nvSpPr>
+          <p:cNvPr id="12" name="Text 10"/>
+          <p:cNvSpPr txBox="1"/>
+          <p:nvPr/>
+        </p:nvSpPr>
+        <p:spPr>
+          <a:xfrm>
+            <a:off x="8412480" y="2606040"/>
+            <a:ext cx="3017520" cy="914400"/>
+          </a:xfrm>
+          <a:prstGeom prst="rect">
+            <a:avLst/>
+          </a:prstGeom>
+          <a:noFill/>
+          <a:ln/>
+        </p:spPr>
+        <p:txBody>
+          <a:bodyPr wrap="square" lIns="0" tIns="0" rIns="0" bIns="0" rtlCol="0" anchor="ctr"/>
+          <a:lstStyle/>
+          <a:p>
+            <a:pPr indent="0" marL="0">
+              <a:buNone/>
+            </a:pPr>
+            <a:r>
+              <a:rPr lang="en-US" sz="3400" b="1" dirty="0">
+                <a:solidFill>
+                  <a:srgbClr val="2EC4B6"/>
+                </a:solidFill>
+                <a:latin typeface="Cambria" pitchFamily="34" charset="0"/>
+                <a:ea typeface="Cambria" pitchFamily="34" charset="-122"/>
+                <a:cs typeface="Cambria" pitchFamily="34" charset="-120"/>
+              </a:rPr>
+              <a:t>2</a:t>
+            </a:r>
+            <a:endParaRPr lang="en-US" sz="3400" dirty="0"/>
+          </a:p>
+        </p:txBody>
+      </p:sp>
+      <p:sp>
+        <p:nvSpPr>
+          <p:cNvPr id="13" name="Text 11"/>
+          <p:cNvSpPr txBox="1"/>
+          <p:nvPr/>
+        </p:nvSpPr>
+        <p:spPr>
+          <a:xfrm>
+            <a:off x="8412480" y="3429000"/>
+            <a:ext cx="3017520" cy="1097280"/>
+          </a:xfrm>
+          <a:prstGeom prst="rect">
+            <a:avLst/>
+          </a:prstGeom>
+          <a:noFill/>
+          <a:ln/>
+        </p:spPr>
+        <p:txBody>
+          <a:bodyPr wrap="square" lIns="0" tIns="0" rIns="0" bIns="0" rtlCol="0" anchor="ctr"/>
+          <a:lstStyle/>
+          <a:p>
+            <a:pPr indent="0" marL="0">
+              <a:lnSpc>
+                <a:spcPct val="115000"/>
+              </a:lnSpc>
+              <a:buNone/>
+            </a:pPr>
+            <a:r>
+              <a:rPr lang="en-US" sz="1250" dirty="0">
+                <a:solidFill>
+                  <a:srgbClr val="CFE0DD"/>
+                </a:solidFill>
+                <a:latin typeface="Calibri" pitchFamily="34" charset="0"/>
+                <a:ea typeface="Calibri" pitchFamily="34" charset="-122"/>
+                <a:cs typeface="Calibri" pitchFamily="34" charset="-120"/>
+              </a:rPr>
+              <a:t>Outcomes only, validate the mechanism, or cleanly redirect to methylation, next by our own ranking</a:t>
+            </a:r>
+            <a:endParaRPr lang="en-US" sz="1250" dirty="0"/>
+          </a:p>
+        </p:txBody>
+      </p:sp>
+      <p:sp>
+        <p:nvSpPr>
+          <p:cNvPr id="14" name="Text 12"/>
+          <p:cNvSpPr txBox="1"/>
+          <p:nvPr/>
+        </p:nvSpPr>
+        <p:spPr>
+          <a:xfrm>
+            <a:off x="640080" y="4937760"/>
+            <a:ext cx="10515600" cy="457200"/>
+          </a:xfrm>
+          <a:prstGeom prst="rect">
+            <a:avLst/>
+          </a:prstGeom>
+          <a:noFill/>
+          <a:ln/>
+        </p:spPr>
+        <p:txBody>
+          <a:bodyPr wrap="square" lIns="0" tIns="0" rIns="0" bIns="0" rtlCol="0" anchor="ctr"/>
+          <a:lstStyle/>
+          <a:p>
+            <a:pPr indent="0" marL="0">
+              <a:buNone/>
+            </a:pPr>
+            <a:r>
+              <a:rPr lang="en-US" sz="1400" i="1" dirty="0">
+                <a:solidFill>
+                  <a:srgbClr val="8FA6AE"/>
+                </a:solidFill>
+                <a:latin typeface="Calibri" pitchFamily="34" charset="0"/>
+                <a:ea typeface="Calibri" pitchFamily="34" charset="-122"/>
+                <a:cs typeface="Calibri" pitchFamily="34" charset="-120"/>
+              </a:rPr>
+              <a:t>Deliberately the cheapest, fastest experiment that produces a real answer, not a moonshot ask.</a:t>
+            </a:r>
+            <a:endParaRPr lang="en-US" sz="1400" dirty="0"/>
+          </a:p>
+        </p:txBody>
+      </p:sp>
+      <p:sp>
+        <p:nvSpPr>
+          <p:cNvPr id="15" name="Text 13"/>
+          <p:cNvSpPr txBox="1"/>
+          <p:nvPr/>
+        </p:nvSpPr>
+        <p:spPr>
+          <a:xfrm>
+            <a:off x="11365992" y="6400800"/>
+            <a:ext cx="548640" cy="274320"/>
+          </a:xfrm>
+          <a:prstGeom prst="rect">
+            <a:avLst/>
+          </a:prstGeom>
+          <a:noFill/>
+          <a:ln/>
+        </p:spPr>
+        <p:txBody>
+          <a:bodyPr wrap="square" lIns="0" tIns="0" rIns="0" bIns="0" rtlCol="0" anchor="ctr"/>
+          <a:lstStyle/>
+          <a:p>
+            <a:pPr algn="r" indent="0" marL="0">
+              <a:buNone/>
+            </a:pPr>
+            <a:r>
+              <a:rPr lang="en-US" sz="1000" dirty="0">
+                <a:solidFill>
+                  <a:srgbClr val="6E7F91"/>
+                </a:solidFill>
+                <a:latin typeface="Calibri" pitchFamily="34" charset="0"/>
+                <a:ea typeface="Calibri" pitchFamily="34" charset="-122"/>
+                <a:cs typeface="Calibri" pitchFamily="34" charset="-120"/>
+              </a:rPr>
+              <a:t>16</a:t>
+            </a:r>
+            <a:endParaRPr lang="en-US" sz="1000" dirty="0"/>
+          </a:p>
+        </p:txBody>
+      </p:sp>
+    </p:spTree>
+  </p:cSld>
+  <p:clrMapOvr>
+    <a:masterClrMapping/>
+  </p:clrMapOvr>
+</p:sld>
+</file>
+
+<file path=ppt/slides/slide17.xml><?xml version="1.0" encoding="utf-8"?>
+<p:sld xmlns:a="http://schemas.openxmlformats.org/drawingml/2006/main" xmlns:r="http://schemas.openxmlformats.org/officeDocument/2006/relationships" xmlns:p="http://schemas.openxmlformats.org/presentationml/2006/main">
+  <p:cSld name="Slide 17">
+    <p:bg>
+      <p:bgPr>
+        <a:solidFill>
+          <a:srgbClr val="F4F6F7"/>
+        </a:solidFill>
+      </p:bgPr>
+    </p:bg>
+    <p:spTree>
+      <p:nvGrpSpPr>
+        <p:cNvPr id="1" name=""/>
+        <p:cNvGrpSpPr/>
+        <p:nvPr/>
+      </p:nvGrpSpPr>
+      <p:grpSpPr>
+        <a:xfrm>
+          <a:off x="0" y="0"/>
+          <a:ext cx="0" cy="0"/>
+          <a:chOff x="0" y="0"/>
+          <a:chExt cx="0" cy="0"/>
+        </a:xfrm>
+      </p:grpSpPr>
+      <p:sp>
+        <p:nvSpPr>
+          <p:cNvPr id="2" name="Text 0"/>
+          <p:cNvSpPr txBox="1"/>
+          <p:nvPr/>
+        </p:nvSpPr>
+        <p:spPr>
+          <a:xfrm>
+            <a:off x="640080" y="457200"/>
+            <a:ext cx="5486400" cy="320040"/>
+          </a:xfrm>
+          <a:prstGeom prst="rect">
+            <a:avLst/>
+          </a:prstGeom>
+          <a:noFill/>
+          <a:ln/>
+        </p:spPr>
+        <p:txBody>
+          <a:bodyPr wrap="square" lIns="0" tIns="0" rIns="0" bIns="0" rtlCol="0" anchor="ctr"/>
+          <a:lstStyle/>
+          <a:p>
+            <a:pPr indent="0" marL="0">
+              <a:buNone/>
+            </a:pPr>
+            <a:r>
+              <a:rPr lang="en-US" sz="1200" b="1" spc="200" kern="0" dirty="0">
+                <a:solidFill>
+                  <a:srgbClr val="1C8F84"/>
+                </a:solidFill>
+                <a:latin typeface="Calibri" pitchFamily="34" charset="0"/>
+                <a:ea typeface="Calibri" pitchFamily="34" charset="-122"/>
+                <a:cs typeface="Calibri" pitchFamily="34" charset="-120"/>
+              </a:rPr>
+              <a:t>BIOSAFETY &amp; CONTAINMENT</a:t>
+            </a:r>
+            <a:endParaRPr lang="en-US" sz="1200" dirty="0"/>
+          </a:p>
+        </p:txBody>
+      </p:sp>
+      <p:sp>
+        <p:nvSpPr>
+          <p:cNvPr id="3" name="Text 1"/>
+          <p:cNvSpPr txBox="1"/>
+          <p:nvPr/>
+        </p:nvSpPr>
+        <p:spPr>
+          <a:xfrm>
+            <a:off x="640080" y="777240"/>
+            <a:ext cx="10881360" cy="868680"/>
+          </a:xfrm>
+          <a:prstGeom prst="rect">
+            <a:avLst/>
+          </a:prstGeom>
+          <a:noFill/>
+          <a:ln/>
+        </p:spPr>
+        <p:txBody>
+          <a:bodyPr wrap="square" lIns="0" tIns="0" rIns="0" bIns="0" rtlCol="0" anchor="ctr"/>
+          <a:lstStyle/>
+          <a:p>
+            <a:pPr indent="0" marL="0">
+              <a:buNone/>
+            </a:pPr>
+            <a:r>
+              <a:rPr lang="en-US" sz="2100" b="1" dirty="0">
+                <a:solidFill>
+                  <a:srgbClr val="16232F"/>
+                </a:solidFill>
+                <a:latin typeface="Cambria" pitchFamily="34" charset="0"/>
+                <a:ea typeface="Cambria" pitchFamily="34" charset="-122"/>
+                <a:cs typeface="Cambria" pitchFamily="34" charset="-120"/>
+              </a:rPr>
+              <a:t>Engineering bacteria to hold data raises real containment questions. We're addressing them before any wet-lab work starts</a:t>
+            </a:r>
+            <a:endParaRPr lang="en-US" sz="2100" dirty="0"/>
+          </a:p>
+        </p:txBody>
+      </p:sp>
+      <p:sp>
+        <p:nvSpPr>
+          <p:cNvPr id="4" name="Shape 2"/>
+          <p:cNvSpPr/>
+          <p:nvPr/>
+        </p:nvSpPr>
+        <p:spPr>
+          <a:xfrm>
+            <a:off x="640080" y="1874520"/>
+            <a:ext cx="3566160" cy="3931920"/>
+          </a:xfrm>
+          <a:prstGeom prst="roundRect">
+            <a:avLst>
+              <a:gd name="adj" fmla="val 2051"/>
+            </a:avLst>
+          </a:prstGeom>
+          <a:solidFill>
+            <a:srgbClr val="FFFFFF"/>
+          </a:solidFill>
+          <a:ln w="12700">
+            <a:solidFill>
+              <a:srgbClr val="DCE3E6"/>
+            </a:solidFill>
+            <a:prstDash val="solid"/>
+          </a:ln>
+        </p:spPr>
+      </p:sp>
+      <p:sp>
+        <p:nvSpPr>
+          <p:cNvPr id="5" name="Shape 3"/>
+          <p:cNvSpPr/>
+          <p:nvPr/>
+        </p:nvSpPr>
+        <p:spPr>
+          <a:xfrm>
+            <a:off x="640080" y="1874520"/>
+            <a:ext cx="3566160" cy="82296"/>
+          </a:xfrm>
+          <a:prstGeom prst="rect">
+            <a:avLst/>
+          </a:prstGeom>
+          <a:solidFill>
+            <a:srgbClr val="1C8F84"/>
+          </a:solidFill>
+          <a:ln/>
+        </p:spPr>
+      </p:sp>
+      <p:sp>
+        <p:nvSpPr>
+          <p:cNvPr id="6" name="Text 4"/>
+          <p:cNvSpPr txBox="1"/>
+          <p:nvPr/>
+        </p:nvSpPr>
+        <p:spPr>
+          <a:xfrm>
+            <a:off x="896112" y="2148840"/>
+            <a:ext cx="3054096" cy="548640"/>
+          </a:xfrm>
+          <a:prstGeom prst="rect">
+            <a:avLst/>
+          </a:prstGeom>
+          <a:noFill/>
+          <a:ln/>
+        </p:spPr>
+        <p:txBody>
+          <a:bodyPr wrap="square" lIns="0" tIns="0" rIns="0" bIns="0" rtlCol="0" anchor="ctr"/>
+          <a:lstStyle/>
+          <a:p>
+            <a:pPr indent="0" marL="0">
+              <a:buNone/>
+            </a:pPr>
+            <a:r>
+              <a:rPr lang="en-US" sz="1500" b="1" dirty="0">
+                <a:solidFill>
+                  <a:srgbClr val="16232F"/>
+                </a:solidFill>
+                <a:latin typeface="Cambria" pitchFamily="34" charset="0"/>
+                <a:ea typeface="Cambria" pitchFamily="34" charset="-122"/>
+                <a:cs typeface="Cambria" pitchFamily="34" charset="-120"/>
+              </a:rPr>
+              <a:t>Organism &amp; containment level</a:t>
+            </a:r>
+            <a:endParaRPr lang="en-US" sz="1500" dirty="0"/>
+          </a:p>
+        </p:txBody>
+      </p:sp>
+      <p:sp>
+        <p:nvSpPr>
+          <p:cNvPr id="7" name="Text 5"/>
+          <p:cNvSpPr txBox="1"/>
+          <p:nvPr/>
+        </p:nvSpPr>
+        <p:spPr>
+          <a:xfrm>
+            <a:off x="896112" y="2743200"/>
+            <a:ext cx="3054096" cy="2834640"/>
+          </a:xfrm>
+          <a:prstGeom prst="rect">
+            <a:avLst/>
+          </a:prstGeom>
+          <a:noFill/>
+          <a:ln/>
+        </p:spPr>
+        <p:txBody>
+          <a:bodyPr wrap="square" lIns="0" tIns="0" rIns="0" bIns="0" rtlCol="0" anchor="ctr"/>
+          <a:lstStyle/>
+          <a:p>
+            <a:pPr indent="0" marL="0">
+              <a:lnSpc>
+                <a:spcPct val="120000"/>
+              </a:lnSpc>
+              <a:buNone/>
+            </a:pPr>
+            <a:r>
+              <a:rPr lang="en-US" sz="1200" dirty="0">
+                <a:solidFill>
+                  <a:srgbClr val="5B6B77"/>
+                </a:solidFill>
+                <a:latin typeface="Calibri" pitchFamily="34" charset="0"/>
+                <a:ea typeface="Calibri" pitchFamily="34" charset="-122"/>
+                <a:cs typeface="Calibri" pitchFamily="34" charset="-120"/>
+              </a:rPr>
+              <a:t>B. subtilis lab strains, including the strain 168 background used with the Bacillus BioBrick Box parts, are non-pathogenic and handled at Biosafety Level 1 (BSL-1), the lowest containment tier, standard in academic synthetic-biology teaching labs.</a:t>
+            </a:r>
+            <a:endParaRPr lang="en-US" sz="1200" dirty="0"/>
+          </a:p>
+        </p:txBody>
+      </p:sp>
+      <p:sp>
+        <p:nvSpPr>
+          <p:cNvPr id="8" name="Shape 6"/>
+          <p:cNvSpPr/>
+          <p:nvPr/>
+        </p:nvSpPr>
+        <p:spPr>
+          <a:xfrm>
+            <a:off x="4425696" y="1874520"/>
+            <a:ext cx="3566160" cy="3931920"/>
+          </a:xfrm>
+          <a:prstGeom prst="roundRect">
+            <a:avLst>
+              <a:gd name="adj" fmla="val 2051"/>
+            </a:avLst>
+          </a:prstGeom>
+          <a:solidFill>
+            <a:srgbClr val="FFFFFF"/>
+          </a:solidFill>
+          <a:ln w="12700">
+            <a:solidFill>
+              <a:srgbClr val="DCE3E6"/>
+            </a:solidFill>
+            <a:prstDash val="solid"/>
+          </a:ln>
+        </p:spPr>
+      </p:sp>
+      <p:sp>
+        <p:nvSpPr>
+          <p:cNvPr id="9" name="Shape 7"/>
+          <p:cNvSpPr/>
+          <p:nvPr/>
+        </p:nvSpPr>
+        <p:spPr>
+          <a:xfrm>
+            <a:off x="4425696" y="1874520"/>
+            <a:ext cx="3566160" cy="82296"/>
+          </a:xfrm>
+          <a:prstGeom prst="rect">
+            <a:avLst/>
+          </a:prstGeom>
+          <a:solidFill>
+            <a:srgbClr val="1C8F84"/>
+          </a:solidFill>
+          <a:ln/>
+        </p:spPr>
+      </p:sp>
+      <p:sp>
+        <p:nvSpPr>
+          <p:cNvPr id="10" name="Text 8"/>
+          <p:cNvSpPr txBox="1"/>
+          <p:nvPr/>
+        </p:nvSpPr>
+        <p:spPr>
+          <a:xfrm>
+            <a:off x="4681728" y="2148840"/>
+            <a:ext cx="3054096" cy="548640"/>
+          </a:xfrm>
+          <a:prstGeom prst="rect">
+            <a:avLst/>
+          </a:prstGeom>
+          <a:noFill/>
+          <a:ln/>
+        </p:spPr>
+        <p:txBody>
+          <a:bodyPr wrap="square" lIns="0" tIns="0" rIns="0" bIns="0" rtlCol="0" anchor="ctr"/>
+          <a:lstStyle/>
+          <a:p>
+            <a:pPr indent="0" marL="0">
+              <a:buNone/>
+            </a:pPr>
+            <a:r>
+              <a:rPr lang="en-US" sz="1500" b="1" dirty="0">
+                <a:solidFill>
+                  <a:srgbClr val="16232F"/>
+                </a:solidFill>
+                <a:latin typeface="Cambria" pitchFamily="34" charset="0"/>
+                <a:ea typeface="Cambria" pitchFamily="34" charset="-122"/>
+                <a:cs typeface="Cambria" pitchFamily="34" charset="-120"/>
+              </a:rPr>
+              <a:t>Kill-switch, planned, not yet built</a:t>
+            </a:r>
+            <a:endParaRPr lang="en-US" sz="1500" dirty="0"/>
+          </a:p>
+        </p:txBody>
+      </p:sp>
+      <p:sp>
+        <p:nvSpPr>
+          <p:cNvPr id="11" name="Text 9"/>
+          <p:cNvSpPr txBox="1"/>
+          <p:nvPr/>
+        </p:nvSpPr>
+        <p:spPr>
+          <a:xfrm>
+            <a:off x="4681728" y="2743200"/>
+            <a:ext cx="3054096" cy="2834640"/>
+          </a:xfrm>
+          <a:prstGeom prst="rect">
+            <a:avLst/>
+          </a:prstGeom>
+          <a:noFill/>
+          <a:ln/>
+        </p:spPr>
+        <p:txBody>
+          <a:bodyPr wrap="square" lIns="0" tIns="0" rIns="0" bIns="0" rtlCol="0" anchor="ctr"/>
+          <a:lstStyle/>
+          <a:p>
+            <a:pPr indent="0" marL="0">
+              <a:lnSpc>
+                <a:spcPct val="120000"/>
+              </a:lnSpc>
+              <a:buNone/>
+            </a:pPr>
+            <a:r>
+              <a:rPr lang="en-US" sz="1200" dirty="0">
+                <a:solidFill>
+                  <a:srgbClr val="5B6B77"/>
+                </a:solidFill>
+                <a:latin typeface="Calibri" pitchFamily="34" charset="0"/>
+                <a:ea typeface="Calibri" pitchFamily="34" charset="-122"/>
+                <a:cs typeface="Calibri" pitchFamily="34" charset="-120"/>
+              </a:rPr>
+              <a:t>A release-prevention mechanism (e.g. an auxotrophic dependency or inducible kill-switch) is a design requirement we're scoping into the toggle-circuit build for the roadmap experiment, not an afterthought added later.</a:t>
+            </a:r>
+            <a:endParaRPr lang="en-US" sz="1200" dirty="0"/>
+          </a:p>
+        </p:txBody>
+      </p:sp>
+      <p:sp>
+        <p:nvSpPr>
+          <p:cNvPr id="12" name="Shape 10"/>
+          <p:cNvSpPr/>
+          <p:nvPr/>
+        </p:nvSpPr>
+        <p:spPr>
+          <a:xfrm>
+            <a:off x="8211312" y="1874520"/>
+            <a:ext cx="3566160" cy="3931920"/>
+          </a:xfrm>
+          <a:prstGeom prst="roundRect">
+            <a:avLst>
+              <a:gd name="adj" fmla="val 2051"/>
+            </a:avLst>
+          </a:prstGeom>
+          <a:solidFill>
+            <a:srgbClr val="FFFFFF"/>
+          </a:solidFill>
+          <a:ln w="12700">
+            <a:solidFill>
+              <a:srgbClr val="DCE3E6"/>
+            </a:solidFill>
+            <a:prstDash val="solid"/>
+          </a:ln>
+        </p:spPr>
+      </p:sp>
+      <p:sp>
+        <p:nvSpPr>
+          <p:cNvPr id="13" name="Shape 11"/>
+          <p:cNvSpPr/>
+          <p:nvPr/>
+        </p:nvSpPr>
+        <p:spPr>
+          <a:xfrm>
+            <a:off x="8211312" y="1874520"/>
+            <a:ext cx="3566160" cy="82296"/>
+          </a:xfrm>
+          <a:prstGeom prst="rect">
+            <a:avLst/>
+          </a:prstGeom>
+          <a:solidFill>
+            <a:srgbClr val="1C8F84"/>
+          </a:solidFill>
+          <a:ln/>
+        </p:spPr>
+      </p:sp>
+      <p:sp>
+        <p:nvSpPr>
+          <p:cNvPr id="14" name="Text 12"/>
+          <p:cNvSpPr txBox="1"/>
+          <p:nvPr/>
+        </p:nvSpPr>
+        <p:spPr>
+          <a:xfrm>
+            <a:off x="8467344" y="2148840"/>
+            <a:ext cx="3054096" cy="548640"/>
+          </a:xfrm>
+          <a:prstGeom prst="rect">
+            <a:avLst/>
+          </a:prstGeom>
+          <a:noFill/>
+          <a:ln/>
+        </p:spPr>
+        <p:txBody>
+          <a:bodyPr wrap="square" lIns="0" tIns="0" rIns="0" bIns="0" rtlCol="0" anchor="ctr"/>
+          <a:lstStyle/>
+          <a:p>
+            <a:pPr indent="0" marL="0">
+              <a:buNone/>
+            </a:pPr>
+            <a:r>
+              <a:rPr lang="en-US" sz="1500" b="1" dirty="0">
+                <a:solidFill>
+                  <a:srgbClr val="16232F"/>
+                </a:solidFill>
+                <a:latin typeface="Cambria" pitchFamily="34" charset="0"/>
+                <a:ea typeface="Cambria" pitchFamily="34" charset="-122"/>
+                <a:cs typeface="Cambria" pitchFamily="34" charset="-120"/>
+              </a:rPr>
+              <a:t>Regulatory path</a:t>
+            </a:r>
+            <a:endParaRPr lang="en-US" sz="1500" dirty="0"/>
+          </a:p>
+        </p:txBody>
+      </p:sp>
+      <p:sp>
+        <p:nvSpPr>
+          <p:cNvPr id="15" name="Text 13"/>
+          <p:cNvSpPr txBox="1"/>
+          <p:nvPr/>
+        </p:nvSpPr>
+        <p:spPr>
+          <a:xfrm>
+            <a:off x="8467344" y="2743200"/>
+            <a:ext cx="3054096" cy="2834640"/>
+          </a:xfrm>
+          <a:prstGeom prst="rect">
+            <a:avLst/>
+          </a:prstGeom>
+          <a:noFill/>
+          <a:ln/>
+        </p:spPr>
+        <p:txBody>
+          <a:bodyPr wrap="square" lIns="0" tIns="0" rIns="0" bIns="0" rtlCol="0" anchor="ctr"/>
+          <a:lstStyle/>
+          <a:p>
+            <a:pPr indent="0" marL="0">
+              <a:lnSpc>
+                <a:spcPct val="120000"/>
+              </a:lnSpc>
+              <a:buNone/>
+            </a:pPr>
+            <a:r>
+              <a:rPr lang="en-US" sz="1200" dirty="0">
+                <a:solidFill>
+                  <a:srgbClr val="5B6B77"/>
+                </a:solidFill>
+                <a:latin typeface="Calibri" pitchFamily="34" charset="0"/>
+                <a:ea typeface="Calibri" pitchFamily="34" charset="-122"/>
+                <a:cs typeface="Calibri" pitchFamily="34" charset="-120"/>
+              </a:rPr>
+              <a:t>Wet-lab work proceeds under the partner lab's Institutional Biosafety Committee (IBC) review and the NIH Guidelines for recombinant/synthetic nucleic acid research, the standard oversight path for this kind of academic or contract lab work. Storing data confers no pathogenicity, virulence, or toxin production, there is no dual-use mechanism here.</a:t>
+            </a:r>
+            <a:endParaRPr lang="en-US" sz="1200" dirty="0"/>
+          </a:p>
+        </p:txBody>
+      </p:sp>
+      <p:sp>
+        <p:nvSpPr>
+          <p:cNvPr id="16" name="Text 14"/>
+          <p:cNvSpPr txBox="1"/>
+          <p:nvPr/>
+        </p:nvSpPr>
+        <p:spPr>
+          <a:xfrm>
+            <a:off x="640080" y="5989320"/>
+            <a:ext cx="10972800" cy="457200"/>
+          </a:xfrm>
+          <a:prstGeom prst="rect">
+            <a:avLst/>
+          </a:prstGeom>
+          <a:noFill/>
+          <a:ln/>
+        </p:spPr>
+        <p:txBody>
+          <a:bodyPr wrap="square" lIns="0" tIns="0" rIns="0" bIns="0" rtlCol="0" anchor="ctr"/>
+          <a:lstStyle/>
+          <a:p>
+            <a:pPr indent="0" marL="0">
+              <a:buNone/>
+            </a:pPr>
+            <a:r>
+              <a:rPr lang="en-US" sz="1300" i="1" dirty="0">
+                <a:solidFill>
+                  <a:srgbClr val="5B6B77"/>
+                </a:solidFill>
+                <a:latin typeface="Calibri" pitchFamily="34" charset="0"/>
+                <a:ea typeface="Calibri" pitchFamily="34" charset="-122"/>
+                <a:cs typeface="Calibri" pitchFamily="34" charset="-120"/>
+              </a:rPr>
+              <a:t>None of this is unusual for synthetic biology. We're naming it now so it's never a surprise later.</a:t>
+            </a:r>
+            <a:endParaRPr lang="en-US" sz="1300" dirty="0"/>
+          </a:p>
+        </p:txBody>
+      </p:sp>
+      <p:sp>
+        <p:nvSpPr>
+          <p:cNvPr id="17" name="Text 15"/>
+          <p:cNvSpPr txBox="1"/>
+          <p:nvPr/>
+        </p:nvSpPr>
+        <p:spPr>
+          <a:xfrm>
+            <a:off x="11365992" y="6400800"/>
+            <a:ext cx="548640" cy="274320"/>
+          </a:xfrm>
+          <a:prstGeom prst="rect">
+            <a:avLst/>
+          </a:prstGeom>
+          <a:noFill/>
+          <a:ln/>
+        </p:spPr>
+        <p:txBody>
+          <a:bodyPr wrap="square" lIns="0" tIns="0" rIns="0" bIns="0" rtlCol="0" anchor="ctr"/>
+          <a:lstStyle/>
+          <a:p>
+            <a:pPr algn="r" indent="0" marL="0">
+              <a:buNone/>
+            </a:pPr>
+            <a:r>
+              <a:rPr lang="en-US" sz="1000" dirty="0">
+                <a:solidFill>
+                  <a:srgbClr val="9AA7AF"/>
+                </a:solidFill>
+                <a:latin typeface="Calibri" pitchFamily="34" charset="0"/>
+                <a:ea typeface="Calibri" pitchFamily="34" charset="-122"/>
+                <a:cs typeface="Calibri" pitchFamily="34" charset="-120"/>
+              </a:rPr>
+              <a:t>17</a:t>
+            </a:r>
+            <a:endParaRPr lang="en-US" sz="1000" dirty="0"/>
+          </a:p>
+        </p:txBody>
+      </p:sp>
+    </p:spTree>
+  </p:cSld>
+  <p:clrMapOvr>
+    <a:masterClrMapping/>
+  </p:clrMapOvr>
+</p:sld>
+</file>
+
+<file path=ppt/slides/slide18.xml><?xml version="1.0" encoding="utf-8"?>
+<p:sld xmlns:a="http://schemas.openxmlformats.org/drawingml/2006/main" xmlns:r="http://schemas.openxmlformats.org/officeDocument/2006/relationships" xmlns:p="http://schemas.openxmlformats.org/presentationml/2006/main">
+  <p:cSld name="Slide 18">
+    <p:bg>
+      <p:bgPr>
+        <a:solidFill>
+          <a:srgbClr val="F4F6F7"/>
+        </a:solidFill>
+      </p:bgPr>
+    </p:bg>
+    <p:spTree>
+      <p:nvGrpSpPr>
+        <p:cNvPr id="1" name=""/>
+        <p:cNvGrpSpPr/>
+        <p:nvPr/>
+      </p:nvGrpSpPr>
+      <p:grpSpPr>
+        <a:xfrm>
+          <a:off x="0" y="0"/>
+          <a:ext cx="0" cy="0"/>
+          <a:chOff x="0" y="0"/>
+          <a:chExt cx="0" cy="0"/>
+        </a:xfrm>
+      </p:grpSpPr>
+      <p:sp>
+        <p:nvSpPr>
+          <p:cNvPr id="2" name="Text 0"/>
+          <p:cNvSpPr txBox="1"/>
+          <p:nvPr/>
+        </p:nvSpPr>
+        <p:spPr>
+          <a:xfrm>
+            <a:off x="640080" y="457200"/>
+            <a:ext cx="5486400" cy="320040"/>
+          </a:xfrm>
+          <a:prstGeom prst="rect">
+            <a:avLst/>
+          </a:prstGeom>
+          <a:noFill/>
+          <a:ln/>
+        </p:spPr>
+        <p:txBody>
+          <a:bodyPr wrap="square" lIns="0" tIns="0" rIns="0" bIns="0" rtlCol="0" anchor="ctr"/>
+          <a:lstStyle/>
+          <a:p>
+            <a:pPr indent="0" marL="0">
+              <a:buNone/>
+            </a:pPr>
+            <a:r>
+              <a:rPr lang="en-US" sz="1200" b="1" spc="200" kern="0" dirty="0">
+                <a:solidFill>
+                  <a:srgbClr val="1C8F84"/>
+                </a:solidFill>
+                <a:latin typeface="Calibri" pitchFamily="34" charset="0"/>
+                <a:ea typeface="Calibri" pitchFamily="34" charset="-122"/>
+                <a:cs typeface="Calibri" pitchFamily="34" charset="-120"/>
+              </a:rPr>
+              <a:t>WHAT WE'RE ASKING FOR</a:t>
+            </a:r>
+            <a:endParaRPr lang="en-US" sz="1200" dirty="0"/>
+          </a:p>
+        </p:txBody>
+      </p:sp>
+      <p:sp>
+        <p:nvSpPr>
+          <p:cNvPr id="3" name="Text 1"/>
+          <p:cNvSpPr txBox="1"/>
+          <p:nvPr/>
+        </p:nvSpPr>
+        <p:spPr>
+          <a:xfrm>
+            <a:off x="640080" y="777240"/>
+            <a:ext cx="10881360" cy="731520"/>
+          </a:xfrm>
+          <a:prstGeom prst="rect">
+            <a:avLst/>
+          </a:prstGeom>
+          <a:noFill/>
+          <a:ln/>
+        </p:spPr>
+        <p:txBody>
+          <a:bodyPr wrap="square" lIns="0" tIns="0" rIns="0" bIns="0" rtlCol="0" anchor="ctr"/>
+          <a:lstStyle/>
+          <a:p>
+            <a:pPr indent="0" marL="0">
+              <a:buNone/>
+            </a:pPr>
+            <a:r>
+              <a:rPr lang="en-US" sz="2700" b="1" dirty="0">
+                <a:solidFill>
+                  <a:srgbClr val="16232F"/>
+                </a:solidFill>
+                <a:latin typeface="Cambria" pitchFamily="34" charset="0"/>
+                <a:ea typeface="Cambria" pitchFamily="34" charset="-122"/>
+                <a:cs typeface="Cambria" pitchFamily="34" charset="-120"/>
+              </a:rPr>
+              <a:t>Deliberately small, not a seed round</a:t>
+            </a:r>
+            <a:endParaRPr lang="en-US" sz="2700" dirty="0"/>
+          </a:p>
+        </p:txBody>
+      </p:sp>
+      <p:sp>
+        <p:nvSpPr>
+          <p:cNvPr id="4" name="Text 2"/>
+          <p:cNvSpPr txBox="1"/>
+          <p:nvPr/>
+        </p:nvSpPr>
+        <p:spPr>
+          <a:xfrm>
+            <a:off x="640080" y="1508760"/>
+            <a:ext cx="10515600" cy="457200"/>
+          </a:xfrm>
+          <a:prstGeom prst="rect">
+            <a:avLst/>
+          </a:prstGeom>
+          <a:noFill/>
+          <a:ln/>
+        </p:spPr>
+        <p:txBody>
+          <a:bodyPr wrap="square" lIns="0" tIns="0" rIns="0" bIns="0" rtlCol="0" anchor="ctr"/>
+          <a:lstStyle/>
+          <a:p>
+            <a:pPr indent="0" marL="0">
+              <a:buNone/>
+            </a:pPr>
+            <a:r>
+              <a:rPr lang="en-US" sz="1350" dirty="0">
+                <a:solidFill>
+                  <a:srgbClr val="5B6B77"/>
+                </a:solidFill>
+                <a:latin typeface="Calibri" pitchFamily="34" charset="0"/>
+                <a:ea typeface="Calibri" pitchFamily="34" charset="-122"/>
+                <a:cs typeface="Calibri" pitchFamily="34" charset="-120"/>
+              </a:rPr>
+              <a:t>We are not raising a general-purpose seed round right now. This stage needs something narrower and cheaper:</a:t>
+            </a:r>
+            <a:endParaRPr lang="en-US" sz="1350" dirty="0"/>
+          </a:p>
+        </p:txBody>
+      </p:sp>
+      <p:sp>
+        <p:nvSpPr>
+          <p:cNvPr id="5" name="Shape 3"/>
+          <p:cNvSpPr/>
+          <p:nvPr/>
+        </p:nvSpPr>
+        <p:spPr>
+          <a:xfrm>
+            <a:off x="640080" y="2103120"/>
+            <a:ext cx="457200" cy="457200"/>
+          </a:xfrm>
+          <a:prstGeom prst="ellipse">
+            <a:avLst/>
+          </a:prstGeom>
+          <a:solidFill>
+            <a:srgbClr val="2EC4B6"/>
+          </a:solidFill>
+          <a:ln/>
+        </p:spPr>
+      </p:sp>
+      <p:sp>
+        <p:nvSpPr>
+          <p:cNvPr id="6" name="Text 4"/>
+          <p:cNvSpPr txBox="1"/>
+          <p:nvPr/>
+        </p:nvSpPr>
+        <p:spPr>
+          <a:xfrm>
+            <a:off x="640080" y="2103120"/>
+            <a:ext cx="457200" cy="457200"/>
+          </a:xfrm>
+          <a:prstGeom prst="rect">
+            <a:avLst/>
+          </a:prstGeom>
+          <a:noFill/>
+          <a:ln/>
+        </p:spPr>
+        <p:txBody>
+          <a:bodyPr wrap="square" lIns="0" tIns="0" rIns="0" bIns="0" rtlCol="0" anchor="ctr"/>
+          <a:lstStyle/>
+          <a:p>
+            <a:pPr algn="ctr" indent="0" marL="0">
+              <a:buNone/>
+            </a:pPr>
+            <a:r>
+              <a:rPr lang="en-US" sz="1800" b="1" dirty="0">
+                <a:solidFill>
+                  <a:srgbClr val="FFFFFF"/>
+                </a:solidFill>
+                <a:latin typeface="Cambria" pitchFamily="34" charset="0"/>
+                <a:ea typeface="Cambria" pitchFamily="34" charset="-122"/>
+                <a:cs typeface="Cambria" pitchFamily="34" charset="-120"/>
+              </a:rPr>
+              <a:t>1</a:t>
+            </a:r>
+            <a:endParaRPr lang="en-US" sz="1800" dirty="0"/>
+          </a:p>
+        </p:txBody>
+      </p:sp>
+      <p:sp>
+        <p:nvSpPr>
+          <p:cNvPr id="7" name="Text 5"/>
+          <p:cNvSpPr txBox="1"/>
+          <p:nvPr/>
+        </p:nvSpPr>
+        <p:spPr>
+          <a:xfrm>
+            <a:off x="1325880" y="2057400"/>
+            <a:ext cx="9875520" cy="365760"/>
+          </a:xfrm>
+          <a:prstGeom prst="rect">
+            <a:avLst/>
+          </a:prstGeom>
+          <a:noFill/>
+          <a:ln/>
+        </p:spPr>
+        <p:txBody>
+          <a:bodyPr wrap="square" lIns="0" tIns="0" rIns="0" bIns="0" rtlCol="0" anchor="ctr"/>
+          <a:lstStyle/>
+          <a:p>
+            <a:pPr indent="0" marL="0">
+              <a:buNone/>
+            </a:pPr>
+            <a:r>
+              <a:rPr lang="en-US" sz="1600" b="1" dirty="0">
+                <a:solidFill>
+                  <a:srgbClr val="16232F"/>
+                </a:solidFill>
+                <a:latin typeface="Cambria" pitchFamily="34" charset="0"/>
+                <a:ea typeface="Cambria" pitchFamily="34" charset="-122"/>
+                <a:cs typeface="Cambria" pitchFamily="34" charset="-120"/>
+              </a:rPr>
+              <a:t>Funding for the wet-lab validation experiment</a:t>
+            </a:r>
+            <a:endParaRPr lang="en-US" sz="1600" dirty="0"/>
+          </a:p>
+        </p:txBody>
+      </p:sp>
+      <p:sp>
+        <p:nvSpPr>
+          <p:cNvPr id="8" name="Text 6"/>
+          <p:cNvSpPr txBox="1"/>
+          <p:nvPr/>
+        </p:nvSpPr>
+        <p:spPr>
+          <a:xfrm>
+            <a:off x="1325880" y="2468880"/>
+            <a:ext cx="9875520" cy="594360"/>
+          </a:xfrm>
+          <a:prstGeom prst="rect">
+            <a:avLst/>
+          </a:prstGeom>
+          <a:noFill/>
+          <a:ln/>
+        </p:spPr>
+        <p:txBody>
+          <a:bodyPr wrap="square" lIns="0" tIns="0" rIns="0" bIns="0" rtlCol="0" anchor="ctr"/>
+          <a:lstStyle/>
+          <a:p>
+            <a:pPr indent="0" marL="0">
+              <a:lnSpc>
+                <a:spcPct val="115000"/>
+              </a:lnSpc>
+              <a:buNone/>
+            </a:pPr>
+            <a:r>
+              <a:rPr lang="en-US" sz="1250" dirty="0">
+                <a:solidFill>
+                  <a:srgbClr val="5B6B77"/>
+                </a:solidFill>
+                <a:latin typeface="Calibri" pitchFamily="34" charset="0"/>
+                <a:ea typeface="Calibri" pitchFamily="34" charset="-122"/>
+                <a:cs typeface="Calibri" pitchFamily="34" charset="-120"/>
+              </a:rPr>
+              <a:t>The ~$10K-$30K described on the roadmap slide: reagents, plasmid synthesis/cloning, lab bench access.</a:t>
+            </a:r>
+            <a:endParaRPr lang="en-US" sz="1250" dirty="0"/>
+          </a:p>
+        </p:txBody>
+      </p:sp>
+      <p:sp>
+        <p:nvSpPr>
+          <p:cNvPr id="9" name="Shape 7"/>
+          <p:cNvSpPr/>
+          <p:nvPr/>
+        </p:nvSpPr>
+        <p:spPr>
+          <a:xfrm>
+            <a:off x="640080" y="3200400"/>
+            <a:ext cx="457200" cy="457200"/>
+          </a:xfrm>
+          <a:prstGeom prst="ellipse">
+            <a:avLst/>
+          </a:prstGeom>
+          <a:solidFill>
+            <a:srgbClr val="2EC4B6"/>
+          </a:solidFill>
+          <a:ln/>
+        </p:spPr>
+      </p:sp>
+      <p:sp>
+        <p:nvSpPr>
+          <p:cNvPr id="10" name="Text 8"/>
+          <p:cNvSpPr txBox="1"/>
+          <p:nvPr/>
+        </p:nvSpPr>
+        <p:spPr>
+          <a:xfrm>
+            <a:off x="640080" y="3200400"/>
+            <a:ext cx="457200" cy="457200"/>
+          </a:xfrm>
+          <a:prstGeom prst="rect">
+            <a:avLst/>
+          </a:prstGeom>
+          <a:noFill/>
+          <a:ln/>
+        </p:spPr>
+        <p:txBody>
+          <a:bodyPr wrap="square" lIns="0" tIns="0" rIns="0" bIns="0" rtlCol="0" anchor="ctr"/>
+          <a:lstStyle/>
+          <a:p>
+            <a:pPr algn="ctr" indent="0" marL="0">
+              <a:buNone/>
+            </a:pPr>
+            <a:r>
+              <a:rPr lang="en-US" sz="1800" b="1" dirty="0">
+                <a:solidFill>
+                  <a:srgbClr val="FFFFFF"/>
+                </a:solidFill>
+                <a:latin typeface="Cambria" pitchFamily="34" charset="0"/>
+                <a:ea typeface="Cambria" pitchFamily="34" charset="-122"/>
+                <a:cs typeface="Cambria" pitchFamily="34" charset="-120"/>
+              </a:rPr>
+              <a:t>2</a:t>
+            </a:r>
+            <a:endParaRPr lang="en-US" sz="1800" dirty="0"/>
+          </a:p>
+        </p:txBody>
+      </p:sp>
+      <p:sp>
+        <p:nvSpPr>
+          <p:cNvPr id="11" name="Text 9"/>
+          <p:cNvSpPr txBox="1"/>
+          <p:nvPr/>
+        </p:nvSpPr>
+        <p:spPr>
+          <a:xfrm>
+            <a:off x="1325880" y="3154680"/>
+            <a:ext cx="9875520" cy="365760"/>
+          </a:xfrm>
+          <a:prstGeom prst="rect">
+            <a:avLst/>
+          </a:prstGeom>
+          <a:noFill/>
+          <a:ln/>
+        </p:spPr>
+        <p:txBody>
+          <a:bodyPr wrap="square" lIns="0" tIns="0" rIns="0" bIns="0" rtlCol="0" anchor="ctr"/>
+          <a:lstStyle/>
+          <a:p>
+            <a:pPr indent="0" marL="0">
+              <a:buNone/>
+            </a:pPr>
+            <a:r>
+              <a:rPr lang="en-US" sz="1600" b="1" dirty="0">
+                <a:solidFill>
+                  <a:srgbClr val="16232F"/>
+                </a:solidFill>
+                <a:latin typeface="Cambria" pitchFamily="34" charset="0"/>
+                <a:ea typeface="Cambria" pitchFamily="34" charset="-122"/>
+                <a:cs typeface="Cambria" pitchFamily="34" charset="-120"/>
+              </a:rPr>
+              <a:t>Budget to hire a paid synthetic-biology consultant</a:t>
+            </a:r>
+            <a:endParaRPr lang="en-US" sz="1600" dirty="0"/>
+          </a:p>
+        </p:txBody>
+      </p:sp>
+      <p:sp>
+        <p:nvSpPr>
+          <p:cNvPr id="12" name="Text 10"/>
+          <p:cNvSpPr txBox="1"/>
+          <p:nvPr/>
+        </p:nvSpPr>
+        <p:spPr>
+          <a:xfrm>
+            <a:off x="1325880" y="3566160"/>
+            <a:ext cx="9875520" cy="594360"/>
+          </a:xfrm>
+          <a:prstGeom prst="rect">
+            <a:avLst/>
+          </a:prstGeom>
+          <a:noFill/>
+          <a:ln/>
+        </p:spPr>
+        <p:txBody>
+          <a:bodyPr wrap="square" lIns="0" tIns="0" rIns="0" bIns="0" rtlCol="0" anchor="ctr"/>
+          <a:lstStyle/>
+          <a:p>
+            <a:pPr indent="0" marL="0">
+              <a:lnSpc>
+                <a:spcPct val="115000"/>
+              </a:lnSpc>
+              <a:buNone/>
+            </a:pPr>
+            <a:r>
+              <a:rPr lang="en-US" sz="1250" dirty="0">
+                <a:solidFill>
+                  <a:srgbClr val="5B6B77"/>
+                </a:solidFill>
+                <a:latin typeface="Calibri" pitchFamily="34" charset="0"/>
+                <a:ea typeface="Calibri" pitchFamily="34" charset="-122"/>
+                <a:cs typeface="Calibri" pitchFamily="34" charset="-120"/>
+              </a:rPr>
+              <a:t>A real expert's time to review and help execute the toggle-circuit build, not just informal mentoring hours. We'd rather pay for a few weeks of real expertise than move forward on a design nobody with domain experience has pressure-tested.</a:t>
+            </a:r>
+            <a:endParaRPr lang="en-US" sz="1250" dirty="0"/>
+          </a:p>
+        </p:txBody>
+      </p:sp>
+      <p:sp>
+        <p:nvSpPr>
+          <p:cNvPr id="13" name="Shape 11"/>
+          <p:cNvSpPr/>
+          <p:nvPr/>
+        </p:nvSpPr>
+        <p:spPr>
+          <a:xfrm>
+            <a:off x="640080" y="4297680"/>
+            <a:ext cx="457200" cy="457200"/>
+          </a:xfrm>
+          <a:prstGeom prst="ellipse">
+            <a:avLst/>
+          </a:prstGeom>
+          <a:solidFill>
+            <a:srgbClr val="2EC4B6"/>
+          </a:solidFill>
+          <a:ln/>
+        </p:spPr>
+      </p:sp>
+      <p:sp>
+        <p:nvSpPr>
+          <p:cNvPr id="14" name="Text 12"/>
+          <p:cNvSpPr txBox="1"/>
+          <p:nvPr/>
+        </p:nvSpPr>
+        <p:spPr>
+          <a:xfrm>
+            <a:off x="640080" y="4297680"/>
+            <a:ext cx="457200" cy="457200"/>
+          </a:xfrm>
+          <a:prstGeom prst="rect">
+            <a:avLst/>
+          </a:prstGeom>
+          <a:noFill/>
+          <a:ln/>
+        </p:spPr>
+        <p:txBody>
+          <a:bodyPr wrap="square" lIns="0" tIns="0" rIns="0" bIns="0" rtlCol="0" anchor="ctr"/>
+          <a:lstStyle/>
+          <a:p>
+            <a:pPr algn="ctr" indent="0" marL="0">
+              <a:buNone/>
+            </a:pPr>
+            <a:r>
+              <a:rPr lang="en-US" sz="1800" b="1" dirty="0">
+                <a:solidFill>
+                  <a:srgbClr val="FFFFFF"/>
+                </a:solidFill>
+                <a:latin typeface="Cambria" pitchFamily="34" charset="0"/>
+                <a:ea typeface="Cambria" pitchFamily="34" charset="-122"/>
+                <a:cs typeface="Cambria" pitchFamily="34" charset="-120"/>
+              </a:rPr>
+              <a:t>3</a:t>
+            </a:r>
+            <a:endParaRPr lang="en-US" sz="1800" dirty="0"/>
+          </a:p>
+        </p:txBody>
+      </p:sp>
+      <p:sp>
+        <p:nvSpPr>
+          <p:cNvPr id="15" name="Text 13"/>
+          <p:cNvSpPr txBox="1"/>
+          <p:nvPr/>
+        </p:nvSpPr>
+        <p:spPr>
+          <a:xfrm>
+            <a:off x="1325880" y="4251960"/>
+            <a:ext cx="9875520" cy="365760"/>
+          </a:xfrm>
+          <a:prstGeom prst="rect">
+            <a:avLst/>
+          </a:prstGeom>
+          <a:noFill/>
+          <a:ln/>
+        </p:spPr>
+        <p:txBody>
+          <a:bodyPr wrap="square" lIns="0" tIns="0" rIns="0" bIns="0" rtlCol="0" anchor="ctr"/>
+          <a:lstStyle/>
+          <a:p>
+            <a:pPr indent="0" marL="0">
+              <a:buNone/>
+            </a:pPr>
+            <a:r>
+              <a:rPr lang="en-US" sz="1600" b="1" dirty="0">
+                <a:solidFill>
+                  <a:srgbClr val="16232F"/>
+                </a:solidFill>
+                <a:latin typeface="Cambria" pitchFamily="34" charset="0"/>
+                <a:ea typeface="Cambria" pitchFamily="34" charset="-122"/>
+                <a:cs typeface="Cambria" pitchFamily="34" charset="-120"/>
+              </a:rPr>
+              <a:t>Lab access &amp; partnership introductions</a:t>
+            </a:r>
+            <a:endParaRPr lang="en-US" sz="1600" dirty="0"/>
+          </a:p>
+        </p:txBody>
+      </p:sp>
+      <p:sp>
+        <p:nvSpPr>
+          <p:cNvPr id="16" name="Text 14"/>
+          <p:cNvSpPr txBox="1"/>
+          <p:nvPr/>
+        </p:nvSpPr>
+        <p:spPr>
+          <a:xfrm>
+            <a:off x="1325880" y="4663440"/>
+            <a:ext cx="9875520" cy="594360"/>
+          </a:xfrm>
+          <a:prstGeom prst="rect">
+            <a:avLst/>
+          </a:prstGeom>
+          <a:noFill/>
+          <a:ln/>
+        </p:spPr>
+        <p:txBody>
+          <a:bodyPr wrap="square" lIns="0" tIns="0" rIns="0" bIns="0" rtlCol="0" anchor="ctr"/>
+          <a:lstStyle/>
+          <a:p>
+            <a:pPr indent="0" marL="0">
+              <a:lnSpc>
+                <a:spcPct val="115000"/>
+              </a:lnSpc>
+              <a:buNone/>
+            </a:pPr>
+            <a:r>
+              <a:rPr lang="en-US" sz="1250" dirty="0">
+                <a:solidFill>
+                  <a:srgbClr val="5B6B77"/>
+                </a:solidFill>
+                <a:latin typeface="Calibri" pitchFamily="34" charset="0"/>
+                <a:ea typeface="Calibri" pitchFamily="34" charset="-122"/>
+                <a:cs typeface="Calibri" pitchFamily="34" charset="-120"/>
+              </a:rPr>
+              <a:t>Standard bacterial transformation and plasmid cloning, B. subtilis is a workhorse organism, a far more common skill than planarian-specific culture.</a:t>
+            </a:r>
+            <a:endParaRPr lang="en-US" sz="1250" dirty="0"/>
+          </a:p>
+        </p:txBody>
+      </p:sp>
+      <p:sp>
+        <p:nvSpPr>
+          <p:cNvPr id="17" name="Shape 15"/>
+          <p:cNvSpPr/>
+          <p:nvPr/>
+        </p:nvSpPr>
+        <p:spPr>
+          <a:xfrm>
+            <a:off x="640080" y="5532120"/>
+            <a:ext cx="10972800" cy="868680"/>
+          </a:xfrm>
+          <a:prstGeom prst="roundRect">
+            <a:avLst>
+              <a:gd name="adj" fmla="val 8421"/>
+            </a:avLst>
+          </a:prstGeom>
+          <a:solidFill>
+            <a:srgbClr val="EAF6F4"/>
+          </a:solidFill>
+          <a:ln w="15875">
+            <a:solidFill>
+              <a:srgbClr val="1C8F84"/>
+            </a:solidFill>
+            <a:prstDash val="solid"/>
+          </a:ln>
+        </p:spPr>
+      </p:sp>
+      <p:sp>
+        <p:nvSpPr>
+          <p:cNvPr id="18" name="Text 16"/>
+          <p:cNvSpPr txBox="1"/>
+          <p:nvPr/>
+        </p:nvSpPr>
+        <p:spPr>
+          <a:xfrm>
+            <a:off x="868680" y="5532120"/>
+            <a:ext cx="10515600" cy="868680"/>
+          </a:xfrm>
+          <a:prstGeom prst="rect">
+            <a:avLst/>
+          </a:prstGeom>
+          <a:noFill/>
+          <a:ln/>
+        </p:spPr>
+        <p:txBody>
+          <a:bodyPr wrap="square" lIns="0" tIns="0" rIns="0" bIns="0" rtlCol="0" anchor="ctr"/>
+          <a:lstStyle/>
+          <a:p>
+            <a:pPr indent="0" marL="0">
+              <a:lnSpc>
+                <a:spcPct val="110000"/>
+              </a:lnSpc>
+              <a:buNone/>
+            </a:pPr>
+            <a:r>
+              <a:rPr lang="en-US" sz="1250" b="1" dirty="0">
+                <a:solidFill>
+                  <a:srgbClr val="1C8F84"/>
+                </a:solidFill>
+                <a:latin typeface="Calibri" pitchFamily="34" charset="0"/>
+                <a:ea typeface="Calibri" pitchFamily="34" charset="-122"/>
+                <a:cs typeface="Calibri" pitchFamily="34" charset="-120"/>
+              </a:rPr>
+              <a:t>IP status:  </a:t>
+            </a:r>
+            <a:pPr indent="0" marL="0">
+              <a:lnSpc>
+                <a:spcPct val="110000"/>
+              </a:lnSpc>
+              <a:buNone/>
+            </a:pPr>
+            <a:r>
+              <a:rPr lang="en-US" sz="1250" dirty="0">
+                <a:solidFill>
+                  <a:srgbClr val="16232F"/>
+                </a:solidFill>
+                <a:latin typeface="Calibri" pitchFamily="34" charset="0"/>
+                <a:ea typeface="Calibri" pitchFamily="34" charset="-122"/>
+                <a:cs typeface="Calibri" pitchFamily="34" charset="-120"/>
+              </a:rPr>
+              <a:t>patent applications filed with the USPTO covering the Bio-RAID fault-tolerance architecture, self-healing recovery protocol, and environment-adaptive longevity system.</a:t>
+            </a:r>
+            <a:endParaRPr lang="en-US" sz="1250" dirty="0"/>
+          </a:p>
+        </p:txBody>
+      </p:sp>
+      <p:sp>
+        <p:nvSpPr>
+          <p:cNvPr id="19" name="Text 17"/>
+          <p:cNvSpPr txBox="1"/>
+          <p:nvPr/>
+        </p:nvSpPr>
+        <p:spPr>
+          <a:xfrm>
+            <a:off x="11365992" y="6400800"/>
+            <a:ext cx="548640" cy="274320"/>
+          </a:xfrm>
+          <a:prstGeom prst="rect">
+            <a:avLst/>
+          </a:prstGeom>
+          <a:noFill/>
+          <a:ln/>
+        </p:spPr>
+        <p:txBody>
+          <a:bodyPr wrap="square" lIns="0" tIns="0" rIns="0" bIns="0" rtlCol="0" anchor="ctr"/>
+          <a:lstStyle/>
+          <a:p>
+            <a:pPr algn="r" indent="0" marL="0">
+              <a:buNone/>
+            </a:pPr>
+            <a:r>
+              <a:rPr lang="en-US" sz="1000" dirty="0">
+                <a:solidFill>
+                  <a:srgbClr val="9AA7AF"/>
+                </a:solidFill>
+                <a:latin typeface="Calibri" pitchFamily="34" charset="0"/>
+                <a:ea typeface="Calibri" pitchFamily="34" charset="-122"/>
+                <a:cs typeface="Calibri" pitchFamily="34" charset="-120"/>
+              </a:rPr>
+              <a:t>18</a:t>
+            </a:r>
+            <a:endParaRPr lang="en-US" sz="1000" dirty="0"/>
+          </a:p>
+        </p:txBody>
+      </p:sp>
+    </p:spTree>
+  </p:cSld>
+  <p:clrMapOvr>
+    <a:masterClrMapping/>
+  </p:clrMapOvr>
+</p:sld>
+</file>
+
+<file path=ppt/slides/slide19.xml><?xml version="1.0" encoding="utf-8"?>
+<p:sld xmlns:a="http://schemas.openxmlformats.org/drawingml/2006/main" xmlns:r="http://schemas.openxmlformats.org/officeDocument/2006/relationships" xmlns:p="http://schemas.openxmlformats.org/presentationml/2006/main">
+  <p:cSld name="Slide 19">
+    <p:bg>
+      <p:bgPr>
+        <a:solidFill>
+          <a:srgbClr val="0B1F3A"/>
+        </a:solidFill>
+      </p:bgPr>
+    </p:bg>
+    <p:spTree>
+      <p:nvGrpSpPr>
+        <p:cNvPr id="1" name=""/>
+        <p:cNvGrpSpPr/>
+        <p:nvPr/>
+      </p:nvGrpSpPr>
+      <p:grpSpPr>
+        <a:xfrm>
+          <a:off x="0" y="0"/>
+          <a:ext cx="0" cy="0"/>
+          <a:chOff x="0" y="0"/>
+          <a:chExt cx="0" cy="0"/>
+        </a:xfrm>
+      </p:grpSpPr>
+      <p:sp>
+        <p:nvSpPr>
           <p:cNvPr id="2" name="Shape 0"/>
           <p:cNvSpPr/>
           <p:nvPr/>
@@ -8549,7 +10898,7 @@
                 <a:ea typeface="Calibri" pitchFamily="34" charset="-122"/>
                 <a:cs typeface="Calibri" pitchFamily="34" charset="-120"/>
               </a:rPr>
-              <a:t>16</a:t>
+              <a:t>19</a:t>
             </a:r>
             <a:endParaRPr lang="en-US" sz="1000" dirty="0"/>
           </a:p>
@@ -11465,6 +13814,543 @@
     <p:bg>
       <p:bgPr>
         <a:solidFill>
+          <a:srgbClr val="0B1F3A"/>
+        </a:solidFill>
+      </p:bgPr>
+    </p:bg>
+    <p:spTree>
+      <p:nvGrpSpPr>
+        <p:cNvPr id="1" name=""/>
+        <p:cNvGrpSpPr/>
+        <p:nvPr/>
+      </p:nvGrpSpPr>
+      <p:grpSpPr>
+        <a:xfrm>
+          <a:off x="0" y="0"/>
+          <a:ext cx="0" cy="0"/>
+          <a:chOff x="0" y="0"/>
+          <a:chExt cx="0" cy="0"/>
+        </a:xfrm>
+      </p:grpSpPr>
+      <p:sp>
+        <p:nvSpPr>
+          <p:cNvPr id="2" name="Text 0"/>
+          <p:cNvSpPr txBox="1"/>
+          <p:nvPr/>
+        </p:nvSpPr>
+        <p:spPr>
+          <a:xfrm>
+            <a:off x="640080" y="457200"/>
+            <a:ext cx="5486400" cy="320040"/>
+          </a:xfrm>
+          <a:prstGeom prst="rect">
+            <a:avLst/>
+          </a:prstGeom>
+          <a:noFill/>
+          <a:ln/>
+        </p:spPr>
+        <p:txBody>
+          <a:bodyPr wrap="square" lIns="0" tIns="0" rIns="0" bIns="0" rtlCol="0" anchor="ctr"/>
+          <a:lstStyle/>
+          <a:p>
+            <a:pPr indent="0" marL="0">
+              <a:buNone/>
+            </a:pPr>
+            <a:r>
+              <a:rPr lang="en-US" sz="1200" b="1" spc="200" kern="0" dirty="0">
+                <a:solidFill>
+                  <a:srgbClr val="E8A33D"/>
+                </a:solidFill>
+                <a:latin typeface="Calibri" pitchFamily="34" charset="0"/>
+                <a:ea typeface="Calibri" pitchFamily="34" charset="-122"/>
+                <a:cs typeface="Calibri" pitchFamily="34" charset="-120"/>
+              </a:rPr>
+              <a:t>READ THIS BEFORE ANY NUMBER AHEAD</a:t>
+            </a:r>
+            <a:endParaRPr lang="en-US" sz="1200" dirty="0"/>
+          </a:p>
+        </p:txBody>
+      </p:sp>
+      <p:sp>
+        <p:nvSpPr>
+          <p:cNvPr id="3" name="Text 1"/>
+          <p:cNvSpPr txBox="1"/>
+          <p:nvPr/>
+        </p:nvSpPr>
+        <p:spPr>
+          <a:xfrm>
+            <a:off x="640080" y="822960"/>
+            <a:ext cx="10881360" cy="868680"/>
+          </a:xfrm>
+          <a:prstGeom prst="rect">
+            <a:avLst/>
+          </a:prstGeom>
+          <a:noFill/>
+          <a:ln/>
+        </p:spPr>
+        <p:txBody>
+          <a:bodyPr wrap="square" lIns="0" tIns="0" rIns="0" bIns="0" rtlCol="0" anchor="ctr"/>
+          <a:lstStyle/>
+          <a:p>
+            <a:pPr indent="0" marL="0">
+              <a:buNone/>
+            </a:pPr>
+            <a:r>
+              <a:rPr lang="en-US" sz="2200" b="1" dirty="0">
+                <a:solidFill>
+                  <a:srgbClr val="FFFFFF"/>
+                </a:solidFill>
+                <a:latin typeface="Cambria" pitchFamily="34" charset="0"/>
+                <a:ea typeface="Cambria" pitchFamily="34" charset="-122"/>
+                <a:cs typeface="Cambria" pitchFamily="34" charset="-120"/>
+              </a:rPr>
+              <a:t>Every number in this deck, so far, comes from a computational model. None of it has been measured in a wet lab yet</a:t>
+            </a:r>
+            <a:endParaRPr lang="en-US" sz="2200" dirty="0"/>
+          </a:p>
+        </p:txBody>
+      </p:sp>
+      <p:sp>
+        <p:nvSpPr>
+          <p:cNvPr id="4" name="Shape 2"/>
+          <p:cNvSpPr/>
+          <p:nvPr/>
+        </p:nvSpPr>
+        <p:spPr>
+          <a:xfrm>
+            <a:off x="640080" y="1965960"/>
+            <a:ext cx="5349240" cy="3703320"/>
+          </a:xfrm>
+          <a:prstGeom prst="roundRect">
+            <a:avLst>
+              <a:gd name="adj" fmla="val 1975"/>
+            </a:avLst>
+          </a:prstGeom>
+          <a:solidFill>
+            <a:srgbClr val="132A4D"/>
+          </a:solidFill>
+          <a:ln/>
+        </p:spPr>
+      </p:sp>
+      <p:sp>
+        <p:nvSpPr>
+          <p:cNvPr id="5" name="Text 3"/>
+          <p:cNvSpPr txBox="1"/>
+          <p:nvPr/>
+        </p:nvSpPr>
+        <p:spPr>
+          <a:xfrm>
+            <a:off x="914400" y="2194560"/>
+            <a:ext cx="4846320" cy="457200"/>
+          </a:xfrm>
+          <a:prstGeom prst="rect">
+            <a:avLst/>
+          </a:prstGeom>
+          <a:noFill/>
+          <a:ln/>
+        </p:spPr>
+        <p:txBody>
+          <a:bodyPr wrap="square" lIns="0" tIns="0" rIns="0" bIns="0" rtlCol="0" anchor="ctr"/>
+          <a:lstStyle/>
+          <a:p>
+            <a:pPr indent="0" marL="0">
+              <a:buNone/>
+            </a:pPr>
+            <a:r>
+              <a:rPr lang="en-US" sz="1550" b="1" dirty="0">
+                <a:solidFill>
+                  <a:srgbClr val="2EC4B6"/>
+                </a:solidFill>
+                <a:latin typeface="Cambria" pitchFamily="34" charset="0"/>
+                <a:ea typeface="Cambria" pitchFamily="34" charset="-122"/>
+                <a:cs typeface="Cambria" pitchFamily="34" charset="-120"/>
+              </a:rPr>
+              <a:t>Simulated (100% of results below)</a:t>
+            </a:r>
+            <a:endParaRPr lang="en-US" sz="1550" dirty="0"/>
+          </a:p>
+        </p:txBody>
+      </p:sp>
+      <p:sp>
+        <p:nvSpPr>
+          <p:cNvPr id="6" name="Text 4"/>
+          <p:cNvSpPr txBox="1"/>
+          <p:nvPr/>
+        </p:nvSpPr>
+        <p:spPr>
+          <a:xfrm>
+            <a:off x="914400" y="2697480"/>
+            <a:ext cx="4846320" cy="2834640"/>
+          </a:xfrm>
+          <a:prstGeom prst="rect">
+            <a:avLst/>
+          </a:prstGeom>
+          <a:noFill/>
+          <a:ln/>
+        </p:spPr>
+        <p:txBody>
+          <a:bodyPr wrap="square" lIns="0" tIns="0" rIns="0" bIns="0" rtlCol="0" anchor="ctr"/>
+          <a:lstStyle/>
+          <a:p>
+            <a:pPr marL="342900" indent="-342900">
+              <a:lnSpc>
+                <a:spcPct val="115000"/>
+              </a:lnSpc>
+              <a:spcAft>
+                <a:spcPts val="900"/>
+              </a:spcAft>
+              <a:buSzPct val="100000"/>
+              <a:buChar char="•"/>
+            </a:pPr>
+            <a:r>
+              <a:rPr lang="en-US" sz="1200" dirty="0">
+                <a:solidFill>
+                  <a:srgbClr val="CFE0DD"/>
+                </a:solidFill>
+                <a:latin typeface="Calibri" pitchFamily="34" charset="0"/>
+                <a:ea typeface="Calibri" pitchFamily="34" charset="-122"/>
+                <a:cs typeface="Calibri" pitchFamily="34" charset="-120"/>
+              </a:rPr>
+              <a:t>Bit integrity under noise: 100% (zero-noise) vs. ~50% (realistic noise)</a:t>
+            </a:r>
+            <a:endParaRPr lang="en-US" sz="1200" dirty="0"/>
+          </a:p>
+          <a:p>
+            <a:pPr marL="342900" indent="-342900">
+              <a:lnSpc>
+                <a:spcPct val="115000"/>
+              </a:lnSpc>
+              <a:spcAft>
+                <a:spcPts val="900"/>
+              </a:spcAft>
+              <a:buSzPct val="100000"/>
+              <a:buChar char="•"/>
+            </a:pPr>
+            <a:r>
+              <a:rPr lang="en-US" sz="1200" dirty="0">
+                <a:solidFill>
+                  <a:srgbClr val="CFE0DD"/>
+                </a:solidFill>
+                <a:latin typeface="Calibri" pitchFamily="34" charset="0"/>
+                <a:ea typeface="Calibri" pitchFamily="34" charset="-122"/>
+                <a:cs typeface="Calibri" pitchFamily="34" charset="-120"/>
+              </a:rPr>
+              <a:t>Toggle-circuit fidelity: 100% (matched/mismatched-within-range) vs. 50% (severe mismatch)</a:t>
+            </a:r>
+            <a:endParaRPr lang="en-US" sz="1200" dirty="0"/>
+          </a:p>
+          <a:p>
+            <a:pPr marL="342900" indent="-342900">
+              <a:lnSpc>
+                <a:spcPct val="115000"/>
+              </a:lnSpc>
+              <a:spcAft>
+                <a:spcPts val="900"/>
+              </a:spcAft>
+              <a:buSzPct val="100000"/>
+              <a:buChar char="•"/>
+            </a:pPr>
+            <a:r>
+              <a:rPr lang="en-US" sz="1200" dirty="0">
+                <a:solidFill>
+                  <a:srgbClr val="CFE0DD"/>
+                </a:solidFill>
+                <a:latin typeface="Calibri" pitchFamily="34" charset="0"/>
+                <a:ea typeface="Calibri" pitchFamily="34" charset="-122"/>
+                <a:cs typeface="Calibri" pitchFamily="34" charset="-120"/>
+              </a:rPr>
+              <a:t>Cross-organism recovery threshold: ~2% surviving cells, for all three mechanisms</a:t>
+            </a:r>
+            <a:endParaRPr lang="en-US" sz="1200" dirty="0"/>
+          </a:p>
+          <a:p>
+            <a:pPr marL="342900" indent="-342900">
+              <a:lnSpc>
+                <a:spcPct val="115000"/>
+              </a:lnSpc>
+              <a:spcAft>
+                <a:spcPts val="900"/>
+              </a:spcAft>
+              <a:buSzPct val="100000"/>
+              <a:buChar char="•"/>
+            </a:pPr>
+            <a:r>
+              <a:rPr lang="en-US" sz="1200" dirty="0">
+                <a:solidFill>
+                  <a:srgbClr val="CFE0DD"/>
+                </a:solidFill>
+                <a:latin typeface="Calibri" pitchFamily="34" charset="0"/>
+                <a:ea typeface="Calibri" pitchFamily="34" charset="-122"/>
+                <a:cs typeface="Calibri" pitchFamily="34" charset="-120"/>
+              </a:rPr>
+              <a:t>EIS voltage-read collapse: 50-59% under native biofilm oscillation</a:t>
+            </a:r>
+            <a:endParaRPr lang="en-US" sz="1200" dirty="0"/>
+          </a:p>
+        </p:txBody>
+      </p:sp>
+      <p:sp>
+        <p:nvSpPr>
+          <p:cNvPr id="7" name="Shape 5"/>
+          <p:cNvSpPr/>
+          <p:nvPr/>
+        </p:nvSpPr>
+        <p:spPr>
+          <a:xfrm>
+            <a:off x="6172200" y="1965960"/>
+            <a:ext cx="5394960" cy="3703320"/>
+          </a:xfrm>
+          <a:prstGeom prst="roundRect">
+            <a:avLst>
+              <a:gd name="adj" fmla="val 1975"/>
+            </a:avLst>
+          </a:prstGeom>
+          <a:solidFill>
+            <a:srgbClr val="132A4D"/>
+          </a:solidFill>
+          <a:ln w="12700">
+            <a:solidFill>
+              <a:srgbClr val="E8A33D"/>
+            </a:solidFill>
+            <a:prstDash val="solid"/>
+          </a:ln>
+        </p:spPr>
+      </p:sp>
+      <p:sp>
+        <p:nvSpPr>
+          <p:cNvPr id="8" name="Text 6"/>
+          <p:cNvSpPr txBox="1"/>
+          <p:nvPr/>
+        </p:nvSpPr>
+        <p:spPr>
+          <a:xfrm>
+            <a:off x="6446520" y="2194560"/>
+            <a:ext cx="4846320" cy="457200"/>
+          </a:xfrm>
+          <a:prstGeom prst="rect">
+            <a:avLst/>
+          </a:prstGeom>
+          <a:noFill/>
+          <a:ln/>
+        </p:spPr>
+        <p:txBody>
+          <a:bodyPr wrap="square" lIns="0" tIns="0" rIns="0" bIns="0" rtlCol="0" anchor="ctr"/>
+          <a:lstStyle/>
+          <a:p>
+            <a:pPr indent="0" marL="0">
+              <a:buNone/>
+            </a:pPr>
+            <a:r>
+              <a:rPr lang="en-US" sz="1550" b="1" dirty="0">
+                <a:solidFill>
+                  <a:srgbClr val="E8A33D"/>
+                </a:solidFill>
+                <a:latin typeface="Cambria" pitchFamily="34" charset="0"/>
+                <a:ea typeface="Cambria" pitchFamily="34" charset="-122"/>
+                <a:cs typeface="Cambria" pitchFamily="34" charset="-120"/>
+              </a:rPr>
+              <a:t>Measured (0% of results below)</a:t>
+            </a:r>
+            <a:endParaRPr lang="en-US" sz="1550" dirty="0"/>
+          </a:p>
+        </p:txBody>
+      </p:sp>
+      <p:sp>
+        <p:nvSpPr>
+          <p:cNvPr id="9" name="Text 7"/>
+          <p:cNvSpPr txBox="1"/>
+          <p:nvPr/>
+        </p:nvSpPr>
+        <p:spPr>
+          <a:xfrm>
+            <a:off x="6446520" y="2697480"/>
+            <a:ext cx="4846320" cy="2834640"/>
+          </a:xfrm>
+          <a:prstGeom prst="rect">
+            <a:avLst/>
+          </a:prstGeom>
+          <a:noFill/>
+          <a:ln/>
+        </p:spPr>
+        <p:txBody>
+          <a:bodyPr wrap="square" lIns="0" tIns="0" rIns="0" bIns="0" rtlCol="0" anchor="ctr"/>
+          <a:lstStyle/>
+          <a:p>
+            <a:pPr indent="0" marL="0">
+              <a:lnSpc>
+                <a:spcPct val="120000"/>
+              </a:lnSpc>
+              <a:buNone/>
+            </a:pPr>
+            <a:r>
+              <a:rPr lang="en-US" sz="1300" b="1" dirty="0">
+                <a:solidFill>
+                  <a:srgbClr val="FFFFFF"/>
+                </a:solidFill>
+                <a:latin typeface="Calibri" pitchFamily="34" charset="0"/>
+                <a:ea typeface="Calibri" pitchFamily="34" charset="-122"/>
+                <a:cs typeface="Calibri" pitchFamily="34" charset="-120"/>
+              </a:rPr>
+              <a:t>Nothing yet.
+</a:t>
+            </a:r>
+            <a:endParaRPr lang="en-US" sz="1300" dirty="0"/>
+          </a:p>
+          <a:p>
+            <a:pPr indent="0" marL="0">
+              <a:lnSpc>
+                <a:spcPct val="120000"/>
+              </a:lnSpc>
+              <a:buNone/>
+            </a:pPr>
+            <a:r>
+              <a:rPr lang="en-US" sz="1300" dirty="0">
+                <a:solidFill>
+                  <a:srgbClr val="CFE0DD"/>
+                </a:solidFill>
+                <a:latin typeface="Calibri" pitchFamily="34" charset="0"/>
+                <a:ea typeface="Calibri" pitchFamily="34" charset="-122"/>
+                <a:cs typeface="Calibri" pitchFamily="34" charset="-120"/>
+              </a:rPr>
+              <a:t>The $10K-$30K wet-lab experiment on the roadmap slide is the first physical test of any of this, in any organism. Until it runs, every figure on the surrounding slides is a model's prediction, not a result.</a:t>
+            </a:r>
+            <a:endParaRPr lang="en-US" sz="1300" dirty="0"/>
+          </a:p>
+        </p:txBody>
+      </p:sp>
+      <p:sp>
+        <p:nvSpPr>
+          <p:cNvPr id="10" name="Shape 8"/>
+          <p:cNvSpPr/>
+          <p:nvPr/>
+        </p:nvSpPr>
+        <p:spPr>
+          <a:xfrm>
+            <a:off x="640080" y="5852160"/>
+            <a:ext cx="10927080" cy="685800"/>
+          </a:xfrm>
+          <a:prstGeom prst="roundRect">
+            <a:avLst>
+              <a:gd name="adj" fmla="val 10667"/>
+            </a:avLst>
+          </a:prstGeom>
+          <a:solidFill>
+            <a:srgbClr val="18314F"/>
+          </a:solidFill>
+          <a:ln w="12700">
+            <a:solidFill>
+              <a:srgbClr val="E8A33D"/>
+            </a:solidFill>
+            <a:prstDash val="solid"/>
+          </a:ln>
+        </p:spPr>
+      </p:sp>
+      <p:sp>
+        <p:nvSpPr>
+          <p:cNvPr id="11" name="Text 9"/>
+          <p:cNvSpPr txBox="1"/>
+          <p:nvPr/>
+        </p:nvSpPr>
+        <p:spPr>
+          <a:xfrm>
+            <a:off x="868680" y="5852160"/>
+            <a:ext cx="10515600" cy="685800"/>
+          </a:xfrm>
+          <a:prstGeom prst="rect">
+            <a:avLst/>
+          </a:prstGeom>
+          <a:noFill/>
+          <a:ln/>
+        </p:spPr>
+        <p:txBody>
+          <a:bodyPr wrap="square" lIns="0" tIns="0" rIns="0" bIns="0" rtlCol="0" anchor="ctr"/>
+          <a:lstStyle/>
+          <a:p>
+            <a:pPr indent="0" marL="0">
+              <a:buNone/>
+            </a:pPr>
+            <a:r>
+              <a:rPr lang="en-US" sz="1300" b="1" dirty="0">
+                <a:solidFill>
+                  <a:srgbClr val="E8A33D"/>
+                </a:solidFill>
+                <a:latin typeface="Calibri" pitchFamily="34" charset="0"/>
+                <a:ea typeface="Calibri" pitchFamily="34" charset="-122"/>
+                <a:cs typeface="Calibri" pitchFamily="34" charset="-120"/>
+              </a:rPr>
+              <a:t>Why we're leading with this:  </a:t>
+            </a:r>
+            <a:pPr indent="0" marL="0">
+              <a:buNone/>
+            </a:pPr>
+            <a:r>
+              <a:rPr lang="en-US" sz="1300" dirty="0">
+                <a:solidFill>
+                  <a:srgbClr val="E7ECEF"/>
+                </a:solidFill>
+                <a:latin typeface="Calibri" pitchFamily="34" charset="0"/>
+                <a:ea typeface="Calibri" pitchFamily="34" charset="-122"/>
+                <a:cs typeface="Calibri" pitchFamily="34" charset="-120"/>
+              </a:rPr>
+              <a:t>simulation tells us where to spend wet-lab money wisely, it is not evidence the mechanism works in a real cell.</a:t>
+            </a:r>
+            <a:endParaRPr lang="en-US" sz="1300" dirty="0"/>
+          </a:p>
+        </p:txBody>
+      </p:sp>
+      <p:sp>
+        <p:nvSpPr>
+          <p:cNvPr id="12" name="Text 10"/>
+          <p:cNvSpPr txBox="1"/>
+          <p:nvPr/>
+        </p:nvSpPr>
+        <p:spPr>
+          <a:xfrm>
+            <a:off x="11365992" y="6400800"/>
+            <a:ext cx="548640" cy="274320"/>
+          </a:xfrm>
+          <a:prstGeom prst="rect">
+            <a:avLst/>
+          </a:prstGeom>
+          <a:noFill/>
+          <a:ln/>
+        </p:spPr>
+        <p:txBody>
+          <a:bodyPr wrap="square" lIns="0" tIns="0" rIns="0" bIns="0" rtlCol="0" anchor="ctr"/>
+          <a:lstStyle/>
+          <a:p>
+            <a:pPr algn="r" indent="0" marL="0">
+              <a:buNone/>
+            </a:pPr>
+            <a:r>
+              <a:rPr lang="en-US" sz="1000" dirty="0">
+                <a:solidFill>
+                  <a:srgbClr val="6E7F91"/>
+                </a:solidFill>
+                <a:latin typeface="Calibri" pitchFamily="34" charset="0"/>
+                <a:ea typeface="Calibri" pitchFamily="34" charset="-122"/>
+                <a:cs typeface="Calibri" pitchFamily="34" charset="-120"/>
+              </a:rPr>
+              <a:t>05</a:t>
+            </a:r>
+            <a:endParaRPr lang="en-US" sz="1000" dirty="0"/>
+          </a:p>
+        </p:txBody>
+      </p:sp>
+    </p:spTree>
+  </p:cSld>
+  <p:clrMapOvr>
+    <a:masterClrMapping/>
+  </p:clrMapOvr>
+</p:sld>
+</file>
+
+<file path=ppt/slides/slide6.xml><?xml version="1.0" encoding="utf-8"?>
+<p:sld xmlns:a="http://schemas.openxmlformats.org/drawingml/2006/main" xmlns:r="http://schemas.openxmlformats.org/officeDocument/2006/relationships" xmlns:p="http://schemas.openxmlformats.org/presentationml/2006/main">
+  <p:cSld name="Slide 6">
+    <p:bg>
+      <p:bgPr>
+        <a:solidFill>
           <a:srgbClr val="F4F6F7"/>
         </a:solidFill>
       </p:bgPr>
@@ -12073,7 +14959,7 @@
                 <a:ea typeface="Calibri" pitchFamily="34" charset="-122"/>
                 <a:cs typeface="Calibri" pitchFamily="34" charset="-120"/>
               </a:rPr>
-              <a:t>05</a:t>
+              <a:t>06</a:t>
             </a:r>
             <a:endParaRPr lang="en-US" sz="1000" dirty="0"/>
           </a:p>
@@ -12087,9 +14973,9 @@
 </p:sld>
 </file>
 
-<file path=ppt/slides/slide6.xml><?xml version="1.0" encoding="utf-8"?>
+<file path=ppt/slides/slide7.xml><?xml version="1.0" encoding="utf-8"?>
 <p:sld xmlns:a="http://schemas.openxmlformats.org/drawingml/2006/main" xmlns:r="http://schemas.openxmlformats.org/officeDocument/2006/relationships" xmlns:p="http://schemas.openxmlformats.org/presentationml/2006/main">
-  <p:cSld name="Slide 6">
+  <p:cSld name="Slide 7">
     <p:bg>
       <p:bgPr>
         <a:solidFill>
@@ -12584,663 +15470,6 @@
               <a:rPr lang="en-US" sz="1000" dirty="0">
                 <a:solidFill>
                   <a:srgbClr val="6E7F91"/>
-                </a:solidFill>
-                <a:latin typeface="Calibri" pitchFamily="34" charset="0"/>
-                <a:ea typeface="Calibri" pitchFamily="34" charset="-122"/>
-                <a:cs typeface="Calibri" pitchFamily="34" charset="-120"/>
-              </a:rPr>
-              <a:t>06</a:t>
-            </a:r>
-            <a:endParaRPr lang="en-US" sz="1000" dirty="0"/>
-          </a:p>
-        </p:txBody>
-      </p:sp>
-    </p:spTree>
-  </p:cSld>
-  <p:clrMapOvr>
-    <a:masterClrMapping/>
-  </p:clrMapOvr>
-</p:sld>
-</file>
-
-<file path=ppt/slides/slide7.xml><?xml version="1.0" encoding="utf-8"?>
-<p:sld xmlns:a="http://schemas.openxmlformats.org/drawingml/2006/main" xmlns:r="http://schemas.openxmlformats.org/officeDocument/2006/relationships" xmlns:p="http://schemas.openxmlformats.org/presentationml/2006/main">
-  <p:cSld name="Slide 7">
-    <p:bg>
-      <p:bgPr>
-        <a:solidFill>
-          <a:srgbClr val="F4F6F7"/>
-        </a:solidFill>
-      </p:bgPr>
-    </p:bg>
-    <p:spTree>
-      <p:nvGrpSpPr>
-        <p:cNvPr id="1" name=""/>
-        <p:cNvGrpSpPr/>
-        <p:nvPr/>
-      </p:nvGrpSpPr>
-      <p:grpSpPr>
-        <a:xfrm>
-          <a:off x="0" y="0"/>
-          <a:ext cx="0" cy="0"/>
-          <a:chOff x="0" y="0"/>
-          <a:chExt cx="0" cy="0"/>
-        </a:xfrm>
-      </p:grpSpPr>
-      <p:sp>
-        <p:nvSpPr>
-          <p:cNvPr id="2" name="Text 0"/>
-          <p:cNvSpPr txBox="1"/>
-          <p:nvPr/>
-        </p:nvSpPr>
-        <p:spPr>
-          <a:xfrm>
-            <a:off x="640080" y="457200"/>
-            <a:ext cx="5486400" cy="320040"/>
-          </a:xfrm>
-          <a:prstGeom prst="rect">
-            <a:avLst/>
-          </a:prstGeom>
-          <a:noFill/>
-          <a:ln/>
-        </p:spPr>
-        <p:txBody>
-          <a:bodyPr wrap="square" lIns="0" tIns="0" rIns="0" bIns="0" rtlCol="0" anchor="ctr"/>
-          <a:lstStyle/>
-          <a:p>
-            <a:pPr indent="0" marL="0">
-              <a:buNone/>
-            </a:pPr>
-            <a:r>
-              <a:rPr lang="en-US" sz="1200" b="1" spc="200" kern="0" dirty="0">
-                <a:solidFill>
-                  <a:srgbClr val="1C8F84"/>
-                </a:solidFill>
-                <a:latin typeface="Calibri" pitchFamily="34" charset="0"/>
-                <a:ea typeface="Calibri" pitchFamily="34" charset="-122"/>
-                <a:cs typeface="Calibri" pitchFamily="34" charset="-120"/>
-              </a:rPr>
-              <a:t>THE FIX</a:t>
-            </a:r>
-            <a:endParaRPr lang="en-US" sz="1200" dirty="0"/>
-          </a:p>
-        </p:txBody>
-      </p:sp>
-      <p:sp>
-        <p:nvSpPr>
-          <p:cNvPr id="3" name="Text 1"/>
-          <p:cNvSpPr txBox="1"/>
-          <p:nvPr/>
-        </p:nvSpPr>
-        <p:spPr>
-          <a:xfrm>
-            <a:off x="640080" y="777240"/>
-            <a:ext cx="10881360" cy="731520"/>
-          </a:xfrm>
-          <a:prstGeom prst="rect">
-            <a:avLst/>
-          </a:prstGeom>
-          <a:noFill/>
-          <a:ln/>
-        </p:spPr>
-        <p:txBody>
-          <a:bodyPr wrap="square" lIns="0" tIns="0" rIns="0" bIns="0" rtlCol="0" anchor="ctr"/>
-          <a:lstStyle/>
-          <a:p>
-            <a:pPr indent="0" marL="0">
-              <a:buNone/>
-            </a:pPr>
-            <a:r>
-              <a:rPr lang="en-US" sz="2500" b="1" dirty="0">
-                <a:solidFill>
-                  <a:srgbClr val="16232F"/>
-                </a:solidFill>
-                <a:latin typeface="Cambria" pitchFamily="34" charset="0"/>
-                <a:ea typeface="Cambria" pitchFamily="34" charset="-122"/>
-                <a:cs typeface="Cambria" pitchFamily="34" charset="-120"/>
-              </a:rPr>
-              <a:t>An engineered bistable circuit, built from parts that already exist</a:t>
-            </a:r>
-            <a:endParaRPr lang="en-US" sz="2500" dirty="0"/>
-          </a:p>
-        </p:txBody>
-      </p:sp>
-      <p:sp>
-        <p:nvSpPr>
-          <p:cNvPr id="4" name="Shape 2"/>
-          <p:cNvSpPr/>
-          <p:nvPr/>
-        </p:nvSpPr>
-        <p:spPr>
-          <a:xfrm>
-            <a:off x="640080" y="1737360"/>
-            <a:ext cx="6675120" cy="4297680"/>
-          </a:xfrm>
-          <a:prstGeom prst="roundRect">
-            <a:avLst>
-              <a:gd name="adj" fmla="val 1702"/>
-            </a:avLst>
-          </a:prstGeom>
-          <a:solidFill>
-            <a:srgbClr val="FFFFFF"/>
-          </a:solidFill>
-          <a:ln w="12700">
-            <a:solidFill>
-              <a:srgbClr val="DCE3E6"/>
-            </a:solidFill>
-            <a:prstDash val="solid"/>
-          </a:ln>
-        </p:spPr>
-      </p:sp>
-      <p:sp>
-        <p:nvSpPr>
-          <p:cNvPr id="5" name="Text 3"/>
-          <p:cNvSpPr txBox="1"/>
-          <p:nvPr/>
-        </p:nvSpPr>
-        <p:spPr>
-          <a:xfrm>
-            <a:off x="914400" y="1920240"/>
-            <a:ext cx="6217920" cy="365760"/>
-          </a:xfrm>
-          <a:prstGeom prst="rect">
-            <a:avLst/>
-          </a:prstGeom>
-          <a:noFill/>
-          <a:ln/>
-        </p:spPr>
-        <p:txBody>
-          <a:bodyPr wrap="square" lIns="0" tIns="0" rIns="0" bIns="0" rtlCol="0" anchor="ctr"/>
-          <a:lstStyle/>
-          <a:p>
-            <a:pPr indent="0" marL="0">
-              <a:buNone/>
-            </a:pPr>
-            <a:r>
-              <a:rPr lang="en-US" sz="1500" b="1" dirty="0">
-                <a:solidFill>
-                  <a:srgbClr val="16232F"/>
-                </a:solidFill>
-                <a:latin typeface="Cambria" pitchFamily="34" charset="0"/>
-                <a:ea typeface="Cambria" pitchFamily="34" charset="-122"/>
-                <a:cs typeface="Cambria" pitchFamily="34" charset="-120"/>
-              </a:rPr>
-              <a:t>Two parts, already characterized separately</a:t>
-            </a:r>
-            <a:endParaRPr lang="en-US" sz="1500" dirty="0"/>
-          </a:p>
-        </p:txBody>
-      </p:sp>
-      <p:sp>
-        <p:nvSpPr>
-          <p:cNvPr id="6" name="Text 4"/>
-          <p:cNvSpPr txBox="1"/>
-          <p:nvPr/>
-        </p:nvSpPr>
-        <p:spPr>
-          <a:xfrm>
-            <a:off x="914400" y="2423160"/>
-            <a:ext cx="6217920" cy="868680"/>
-          </a:xfrm>
-          <a:prstGeom prst="rect">
-            <a:avLst/>
-          </a:prstGeom>
-          <a:noFill/>
-          <a:ln/>
-        </p:spPr>
-        <p:txBody>
-          <a:bodyPr wrap="square" lIns="0" tIns="0" rIns="0" bIns="0" rtlCol="0" anchor="ctr"/>
-          <a:lstStyle/>
-          <a:p>
-            <a:pPr indent="0" marL="0">
-              <a:lnSpc>
-                <a:spcPct val="115000"/>
-              </a:lnSpc>
-              <a:buNone/>
-            </a:pPr>
-            <a:r>
-              <a:rPr lang="en-US" sz="1250" b="1" dirty="0">
-                <a:solidFill>
-                  <a:srgbClr val="1C8F84"/>
-                </a:solidFill>
-                <a:latin typeface="Calibri" pitchFamily="34" charset="0"/>
-                <a:ea typeface="Calibri" pitchFamily="34" charset="-122"/>
-                <a:cs typeface="Calibri" pitchFamily="34" charset="-120"/>
-              </a:rPr>
-              <a:t>Topology, </a:t>
-            </a:r>
-            <a:pPr indent="0" marL="0">
-              <a:lnSpc>
-                <a:spcPct val="115000"/>
-              </a:lnSpc>
-              <a:buNone/>
-            </a:pPr>
-            <a:r>
-              <a:rPr lang="en-US" sz="1250" dirty="0">
-                <a:solidFill>
-                  <a:srgbClr val="5B6B77"/>
-                </a:solidFill>
-                <a:latin typeface="Calibri" pitchFamily="34" charset="0"/>
-                <a:ea typeface="Calibri" pitchFamily="34" charset="-122"/>
-                <a:cs typeface="Calibri" pitchFamily="34" charset="-120"/>
-              </a:rPr>
-              <a:t>Gardner, Cantor &amp; Collins (2000), two mutually-repressing promoters, demonstrated bistable regime, equations public.</a:t>
-            </a:r>
-            <a:endParaRPr lang="en-US" sz="1250" dirty="0"/>
-          </a:p>
-        </p:txBody>
-      </p:sp>
-      <p:sp>
-        <p:nvSpPr>
-          <p:cNvPr id="7" name="Text 5"/>
-          <p:cNvSpPr txBox="1"/>
-          <p:nvPr/>
-        </p:nvSpPr>
-        <p:spPr>
-          <a:xfrm>
-            <a:off x="914400" y="3383280"/>
-            <a:ext cx="6217920" cy="868680"/>
-          </a:xfrm>
-          <a:prstGeom prst="rect">
-            <a:avLst/>
-          </a:prstGeom>
-          <a:noFill/>
-          <a:ln/>
-        </p:spPr>
-        <p:txBody>
-          <a:bodyPr wrap="square" lIns="0" tIns="0" rIns="0" bIns="0" rtlCol="0" anchor="ctr"/>
-          <a:lstStyle/>
-          <a:p>
-            <a:pPr indent="0" marL="0">
-              <a:lnSpc>
-                <a:spcPct val="115000"/>
-              </a:lnSpc>
-              <a:buNone/>
-            </a:pPr>
-            <a:r>
-              <a:rPr lang="en-US" sz="1250" b="1" dirty="0">
-                <a:solidFill>
-                  <a:srgbClr val="1C8F84"/>
-                </a:solidFill>
-                <a:latin typeface="Calibri" pitchFamily="34" charset="0"/>
-                <a:ea typeface="Calibri" pitchFamily="34" charset="-122"/>
-                <a:cs typeface="Calibri" pitchFamily="34" charset="-120"/>
-              </a:rPr>
-              <a:t>Chassis parts, </a:t>
-            </a:r>
-            <a:pPr indent="0" marL="0">
-              <a:lnSpc>
-                <a:spcPct val="115000"/>
-              </a:lnSpc>
-              <a:buNone/>
-            </a:pPr>
-            <a:r>
-              <a:rPr lang="en-US" sz="1250" dirty="0">
-                <a:solidFill>
-                  <a:srgbClr val="5B6B77"/>
-                </a:solidFill>
-                <a:latin typeface="Calibri" pitchFamily="34" charset="0"/>
-                <a:ea typeface="Calibri" pitchFamily="34" charset="-122"/>
-                <a:cs typeface="Calibri" pitchFamily="34" charset="-120"/>
-              </a:rPr>
-              <a:t>Bacillus BioBrick Box (Radeck et al. 2013, 2017), free, chromosomally-integrating promoters, characterized in B. subtilis specifically (this project's target organism, not E. coli).</a:t>
-            </a:r>
-            <a:endParaRPr lang="en-US" sz="1250" dirty="0"/>
-          </a:p>
-        </p:txBody>
-      </p:sp>
-      <p:sp>
-        <p:nvSpPr>
-          <p:cNvPr id="8" name="Shape 6"/>
-          <p:cNvSpPr/>
-          <p:nvPr/>
-        </p:nvSpPr>
-        <p:spPr>
-          <a:xfrm>
-            <a:off x="914400" y="4389120"/>
-            <a:ext cx="6217920" cy="0"/>
-          </a:xfrm>
-          <a:prstGeom prst="line">
-            <a:avLst/>
-          </a:prstGeom>
-          <a:noFill/>
-          <a:ln w="12700">
-            <a:solidFill>
-              <a:srgbClr val="E4E9EA"/>
-            </a:solidFill>
-            <a:prstDash val="solid"/>
-          </a:ln>
-        </p:spPr>
-      </p:sp>
-      <p:sp>
-        <p:nvSpPr>
-          <p:cNvPr id="9" name="Text 7"/>
-          <p:cNvSpPr txBox="1"/>
-          <p:nvPr/>
-        </p:nvSpPr>
-        <p:spPr>
-          <a:xfrm>
-            <a:off x="914400" y="4526280"/>
-            <a:ext cx="6217920" cy="365760"/>
-          </a:xfrm>
-          <a:prstGeom prst="rect">
-            <a:avLst/>
-          </a:prstGeom>
-          <a:noFill/>
-          <a:ln/>
-        </p:spPr>
-        <p:txBody>
-          <a:bodyPr wrap="square" lIns="0" tIns="0" rIns="0" bIns="0" rtlCol="0" anchor="ctr"/>
-          <a:lstStyle/>
-          <a:p>
-            <a:pPr indent="0" marL="0">
-              <a:buNone/>
-            </a:pPr>
-            <a:r>
-              <a:rPr lang="en-US" sz="1500" b="1" dirty="0">
-                <a:solidFill>
-                  <a:srgbClr val="16232F"/>
-                </a:solidFill>
-                <a:latin typeface="Cambria" pitchFamily="34" charset="0"/>
-                <a:ea typeface="Cambria" pitchFamily="34" charset="-122"/>
-                <a:cs typeface="Cambria" pitchFamily="34" charset="-120"/>
-              </a:rPr>
-              <a:t>What running the combined model found</a:t>
-            </a:r>
-            <a:endParaRPr lang="en-US" sz="1500" dirty="0"/>
-          </a:p>
-        </p:txBody>
-      </p:sp>
-      <p:sp>
-        <p:nvSpPr>
-          <p:cNvPr id="10" name="Text 8"/>
-          <p:cNvSpPr txBox="1"/>
-          <p:nvPr/>
-        </p:nvSpPr>
-        <p:spPr>
-          <a:xfrm>
-            <a:off x="914400" y="4937760"/>
-            <a:ext cx="6217920" cy="1188720"/>
-          </a:xfrm>
-          <a:prstGeom prst="rect">
-            <a:avLst/>
-          </a:prstGeom>
-          <a:noFill/>
-          <a:ln/>
-        </p:spPr>
-        <p:txBody>
-          <a:bodyPr wrap="square" lIns="0" tIns="0" rIns="0" bIns="0" rtlCol="0" anchor="ctr"/>
-          <a:lstStyle/>
-          <a:p>
-            <a:pPr indent="0" marL="0">
-              <a:lnSpc>
-                <a:spcPct val="120000"/>
-              </a:lnSpc>
-              <a:buNone/>
-            </a:pPr>
-            <a:r>
-              <a:rPr lang="en-US" sz="1250" dirty="0">
-                <a:solidFill>
-                  <a:srgbClr val="5B6B77"/>
-                </a:solidFill>
-                <a:latin typeface="Calibri" pitchFamily="34" charset="0"/>
-                <a:ea typeface="Calibri" pitchFamily="34" charset="-122"/>
-                <a:cs typeface="Calibri" pitchFamily="34" charset="-120"/>
-              </a:rPr>
-              <a:t>The real finding isn't that a matched circuit works (it does, 100% fidelity at 24 hours), it's what happens at severe promoter mismatch: </a:t>
-            </a:r>
-            <a:endParaRPr lang="en-US" sz="1250" dirty="0"/>
-          </a:p>
-          <a:p>
-            <a:pPr indent="0" marL="0">
-              <a:lnSpc>
-                <a:spcPct val="120000"/>
-              </a:lnSpc>
-              <a:buNone/>
-            </a:pPr>
-            <a:r>
-              <a:rPr lang="en-US" sz="1250" b="1" dirty="0">
-                <a:solidFill>
-                  <a:srgbClr val="16232F"/>
-                </a:solidFill>
-                <a:latin typeface="Calibri" pitchFamily="34" charset="0"/>
-                <a:ea typeface="Calibri" pitchFamily="34" charset="-122"/>
-                <a:cs typeface="Calibri" pitchFamily="34" charset="-120"/>
-              </a:rPr>
-              <a:t>the circuit doesn't degrade gracefully, it loses bistability entirely and always relaxes to the same state.</a:t>
-            </a:r>
-            <a:endParaRPr lang="en-US" sz="1250" dirty="0"/>
-          </a:p>
-        </p:txBody>
-      </p:sp>
-      <p:sp>
-        <p:nvSpPr>
-          <p:cNvPr id="11" name="Shape 9"/>
-          <p:cNvSpPr/>
-          <p:nvPr/>
-        </p:nvSpPr>
-        <p:spPr>
-          <a:xfrm>
-            <a:off x="7543800" y="1737360"/>
-            <a:ext cx="4023360" cy="2011680"/>
-          </a:xfrm>
-          <a:prstGeom prst="roundRect">
-            <a:avLst>
-              <a:gd name="adj" fmla="val 3636"/>
-            </a:avLst>
-          </a:prstGeom>
-          <a:solidFill>
-            <a:srgbClr val="0B1F3A"/>
-          </a:solidFill>
-          <a:ln/>
-        </p:spPr>
-      </p:sp>
-      <p:sp>
-        <p:nvSpPr>
-          <p:cNvPr id="12" name="Text 10"/>
-          <p:cNvSpPr txBox="1"/>
-          <p:nvPr/>
-        </p:nvSpPr>
-        <p:spPr>
-          <a:xfrm>
-            <a:off x="7772400" y="1874520"/>
-            <a:ext cx="3566160" cy="777240"/>
-          </a:xfrm>
-          <a:prstGeom prst="rect">
-            <a:avLst/>
-          </a:prstGeom>
-          <a:noFill/>
-          <a:ln/>
-        </p:spPr>
-        <p:txBody>
-          <a:bodyPr wrap="square" lIns="0" tIns="0" rIns="0" bIns="0" rtlCol="0" anchor="ctr"/>
-          <a:lstStyle/>
-          <a:p>
-            <a:pPr indent="0" marL="0">
-              <a:buNone/>
-            </a:pPr>
-            <a:r>
-              <a:rPr lang="en-US" sz="3600" b="1" dirty="0">
-                <a:solidFill>
-                  <a:srgbClr val="2EC4B6"/>
-                </a:solidFill>
-                <a:latin typeface="Cambria" pitchFamily="34" charset="0"/>
-                <a:ea typeface="Cambria" pitchFamily="34" charset="-122"/>
-                <a:cs typeface="Cambria" pitchFamily="34" charset="-120"/>
-              </a:rPr>
-              <a:t>100%</a:t>
-            </a:r>
-            <a:endParaRPr lang="en-US" sz="3600" dirty="0"/>
-          </a:p>
-        </p:txBody>
-      </p:sp>
-      <p:sp>
-        <p:nvSpPr>
-          <p:cNvPr id="13" name="Text 11"/>
-          <p:cNvSpPr txBox="1"/>
-          <p:nvPr/>
-        </p:nvSpPr>
-        <p:spPr>
-          <a:xfrm>
-            <a:off x="7772400" y="2606040"/>
-            <a:ext cx="3566160" cy="1005840"/>
-          </a:xfrm>
-          <a:prstGeom prst="rect">
-            <a:avLst/>
-          </a:prstGeom>
-          <a:noFill/>
-          <a:ln/>
-        </p:spPr>
-        <p:txBody>
-          <a:bodyPr wrap="square" lIns="0" tIns="0" rIns="0" bIns="0" rtlCol="0" anchor="ctr"/>
-          <a:lstStyle/>
-          <a:p>
-            <a:pPr indent="0" marL="0">
-              <a:buNone/>
-            </a:pPr>
-            <a:r>
-              <a:rPr lang="en-US" sz="1200" dirty="0">
-                <a:solidFill>
-                  <a:srgbClr val="CFE0DD"/>
-                </a:solidFill>
-                <a:latin typeface="Calibri" pitchFamily="34" charset="0"/>
-                <a:ea typeface="Calibri" pitchFamily="34" charset="-122"/>
-                <a:cs typeface="Calibri" pitchFamily="34" charset="-120"/>
-              </a:rPr>
-              <a:t>Fidelity at 24 hours, matched promoters (BBB range 1.0x-10x)</a:t>
-            </a:r>
-            <a:endParaRPr lang="en-US" sz="1200" dirty="0"/>
-          </a:p>
-        </p:txBody>
-      </p:sp>
-      <p:sp>
-        <p:nvSpPr>
-          <p:cNvPr id="14" name="Shape 12"/>
-          <p:cNvSpPr/>
-          <p:nvPr/>
-        </p:nvSpPr>
-        <p:spPr>
-          <a:xfrm>
-            <a:off x="7543800" y="3931920"/>
-            <a:ext cx="4023360" cy="2103120"/>
-          </a:xfrm>
-          <a:prstGeom prst="roundRect">
-            <a:avLst>
-              <a:gd name="adj" fmla="val 3478"/>
-            </a:avLst>
-          </a:prstGeom>
-          <a:solidFill>
-            <a:srgbClr val="0B1F3A"/>
-          </a:solidFill>
-          <a:ln/>
-        </p:spPr>
-      </p:sp>
-      <p:sp>
-        <p:nvSpPr>
-          <p:cNvPr id="15" name="Text 13"/>
-          <p:cNvSpPr txBox="1"/>
-          <p:nvPr/>
-        </p:nvSpPr>
-        <p:spPr>
-          <a:xfrm>
-            <a:off x="7772400" y="4069080"/>
-            <a:ext cx="3566160" cy="777240"/>
-          </a:xfrm>
-          <a:prstGeom prst="rect">
-            <a:avLst/>
-          </a:prstGeom>
-          <a:noFill/>
-          <a:ln/>
-        </p:spPr>
-        <p:txBody>
-          <a:bodyPr wrap="square" lIns="0" tIns="0" rIns="0" bIns="0" rtlCol="0" anchor="ctr"/>
-          <a:lstStyle/>
-          <a:p>
-            <a:pPr indent="0" marL="0">
-              <a:buNone/>
-            </a:pPr>
-            <a:r>
-              <a:rPr lang="en-US" sz="3600" b="1" dirty="0">
-                <a:solidFill>
-                  <a:srgbClr val="E8604C"/>
-                </a:solidFill>
-                <a:latin typeface="Cambria" pitchFamily="34" charset="0"/>
-                <a:ea typeface="Cambria" pitchFamily="34" charset="-122"/>
-                <a:cs typeface="Cambria" pitchFamily="34" charset="-120"/>
-              </a:rPr>
-              <a:t>50%</a:t>
-            </a:r>
-            <a:endParaRPr lang="en-US" sz="3600" dirty="0"/>
-          </a:p>
-        </p:txBody>
-      </p:sp>
-      <p:sp>
-        <p:nvSpPr>
-          <p:cNvPr id="16" name="Text 14"/>
-          <p:cNvSpPr txBox="1"/>
-          <p:nvPr/>
-        </p:nvSpPr>
-        <p:spPr>
-          <a:xfrm>
-            <a:off x="7772400" y="4800600"/>
-            <a:ext cx="3566160" cy="1097280"/>
-          </a:xfrm>
-          <a:prstGeom prst="rect">
-            <a:avLst/>
-          </a:prstGeom>
-          <a:noFill/>
-          <a:ln/>
-        </p:spPr>
-        <p:txBody>
-          <a:bodyPr wrap="square" lIns="0" tIns="0" rIns="0" bIns="0" rtlCol="0" anchor="ctr"/>
-          <a:lstStyle/>
-          <a:p>
-            <a:pPr indent="0" marL="0">
-              <a:buNone/>
-            </a:pPr>
-            <a:r>
-              <a:rPr lang="en-US" sz="1150" dirty="0">
-                <a:solidFill>
-                  <a:srgbClr val="CFE0DD"/>
-                </a:solidFill>
-                <a:latin typeface="Calibri" pitchFamily="34" charset="0"/>
-                <a:ea typeface="Calibri" pitchFamily="34" charset="-122"/>
-                <a:cs typeface="Calibri" pitchFamily="34" charset="-120"/>
-              </a:rPr>
-              <a:t>Fidelity at severe promoter mismatch (0.1x), a design constraint found before any wet-lab spend</a:t>
-            </a:r>
-            <a:endParaRPr lang="en-US" sz="1150" dirty="0"/>
-          </a:p>
-        </p:txBody>
-      </p:sp>
-      <p:sp>
-        <p:nvSpPr>
-          <p:cNvPr id="17" name="Text 15"/>
-          <p:cNvSpPr txBox="1"/>
-          <p:nvPr/>
-        </p:nvSpPr>
-        <p:spPr>
-          <a:xfrm>
-            <a:off x="11365992" y="6400800"/>
-            <a:ext cx="548640" cy="274320"/>
-          </a:xfrm>
-          <a:prstGeom prst="rect">
-            <a:avLst/>
-          </a:prstGeom>
-          <a:noFill/>
-          <a:ln/>
-        </p:spPr>
-        <p:txBody>
-          <a:bodyPr wrap="square" lIns="0" tIns="0" rIns="0" bIns="0" rtlCol="0" anchor="ctr"/>
-          <a:lstStyle/>
-          <a:p>
-            <a:pPr algn="r" indent="0" marL="0">
-              <a:buNone/>
-            </a:pPr>
-            <a:r>
-              <a:rPr lang="en-US" sz="1000" dirty="0">
-                <a:solidFill>
-                  <a:srgbClr val="9AA7AF"/>
                 </a:solidFill>
                 <a:latin typeface="Calibri" pitchFamily="34" charset="0"/>
                 <a:ea typeface="Calibri" pitchFamily="34" charset="-122"/>
@@ -13317,7 +15546,7 @@
                 <a:ea typeface="Calibri" pitchFamily="34" charset="-122"/>
                 <a:cs typeface="Calibri" pitchFamily="34" charset="-120"/>
               </a:rPr>
-              <a:t>HONEST RISK RANKING</a:t>
+              <a:t>THE FIX</a:t>
             </a:r>
             <a:endParaRPr lang="en-US" sz="1200" dirty="0"/>
           </a:p>
@@ -13332,23 +15561,23 @@
         <p:spPr>
           <a:xfrm>
             <a:off x="640080" y="777240"/>
-            <a:ext cx="10881360" cy="777240"/>
-          </a:xfrm>
-          <a:prstGeom prst="rect">
-            <a:avLst/>
-          </a:prstGeom>
-          <a:noFill/>
-          <a:ln/>
-        </p:spPr>
-        <p:txBody>
-          <a:bodyPr wrap="square" lIns="0" tIns="0" rIns="0" bIns="0" rtlCol="0" anchor="ctr"/>
-          <a:lstStyle/>
-          <a:p>
-            <a:pPr indent="0" marL="0">
-              <a:buNone/>
-            </a:pPr>
-            <a:r>
-              <a:rPr lang="en-US" sz="2300" b="1" dirty="0">
+            <a:ext cx="10881360" cy="731520"/>
+          </a:xfrm>
+          <a:prstGeom prst="rect">
+            <a:avLst/>
+          </a:prstGeom>
+          <a:noFill/>
+          <a:ln/>
+        </p:spPr>
+        <p:txBody>
+          <a:bodyPr wrap="square" lIns="0" tIns="0" rIns="0" bIns="0" rtlCol="0" anchor="ctr"/>
+          <a:lstStyle/>
+          <a:p>
+            <a:pPr indent="0" marL="0">
+              <a:buNone/>
+            </a:pPr>
+            <a:r>
+              <a:rPr lang="en-US" sz="2500" b="1" dirty="0">
                 <a:solidFill>
                   <a:srgbClr val="16232F"/>
                 </a:solidFill>
@@ -13356,634 +15585,523 @@
                 <a:ea typeface="Cambria" pitchFamily="34" charset="-122"/>
                 <a:cs typeface="Cambria" pitchFamily="34" charset="-120"/>
               </a:rPr>
-              <a:t>We ranked our own three candidate mechanisms by how much wet-lab risk each still hides</a:t>
-            </a:r>
-            <a:endParaRPr lang="en-US" sz="2300" dirty="0"/>
-          </a:p>
-        </p:txBody>
-      </p:sp>
-      <p:graphicFrame>
-        <p:nvGraphicFramePr>
-          <p:cNvPr id="4" name="Chart 0" descr=""/>
-          <p:cNvGraphicFramePr/>
-          <p:nvPr/>
-        </p:nvGraphicFramePr>
-        <p:xfrm>
-          <a:off x="640080" y="1783080"/>
-          <a:ext cx="6126480" cy="4114800"/>
-        </p:xfrm>
-        <a:graphic xmlns:a="http://schemas.openxmlformats.org/drawingml/2006/main">
-          <a:graphicData uri="http://schemas.openxmlformats.org/drawingml/2006/chart">
-            <c:chart xmlns:c="http://schemas.openxmlformats.org/drawingml/2006/chart" r:id="rId1"/>
-          </a:graphicData>
-        </a:graphic>
-      </p:graphicFrame>
-      <p:graphicFrame>
-        <p:nvGraphicFramePr>
-          <p:cNvPr id="9" name="Table 0"/>
-          <p:cNvGraphicFramePr>
-            <a:graphicFrameLocks noGrp="1"/>
-          </p:cNvGraphicFramePr>
-          <p:nvPr>
-            <p:extLst>
-              <p:ext uri="{D42A27DB-BD31-4B8C-83A1-F6EECF244321}">
-                <p14:modId xmlns:p14="http://schemas.microsoft.com/office/powerpoint/2010/main" val="1579011935"/>
-              </p:ext>
-            </p:extLst>
-          </p:nvPr>
-        </p:nvGraphicFramePr>
-        <p:xfrm>
-          <a:off x="6995160" y="1783080"/>
-          <a:ext cx="4572000" cy="4114800"/>
-        </p:xfrm>
-        <a:graphic>
-          <a:graphicData uri="http://schemas.openxmlformats.org/drawingml/2006/table">
-            <a:tbl>
-              <a:tblPr/>
-              <a:tblGrid>
-                <a:gridCol w="2286000"/>
-                <a:gridCol w="2286000"/>
-              </a:tblGrid>
-              <a:tr h="548640">
-                <a:tc>
-                  <a:txBody>
-                    <a:bodyPr/>
-                    <a:lstStyle/>
-                    <a:p>
-                      <a:pPr indent="0" marL="0">
-                        <a:buNone/>
-                      </a:pPr>
-                      <a:r>
-                        <a:rPr lang="en-US" sz="1150" b="1" dirty="0">
-                          <a:solidFill>
-                            <a:srgbClr val="FFFFFF"/>
-                          </a:solidFill>
-                          <a:latin typeface="Calibri" pitchFamily="34" charset="0"/>
-                          <a:ea typeface="Calibri" pitchFamily="34" charset="-122"/>
-                          <a:cs typeface="Calibri" pitchFamily="34" charset="-120"/>
-                        </a:rPr>
-                        <a:t>Mechanism</a:t>
-                      </a:r>
-                      <a:endParaRPr lang="en-US" sz="1150" dirty="0">
-                        <a:latin typeface="Calibri" charset="0"/>
-                        <a:ea typeface="Calibri" charset="0"/>
-                        <a:cs typeface="Calibri" charset="0"/>
-                      </a:endParaRPr>
-                    </a:p>
-                  </a:txBody>
-                  <a:tcPr marL="91440" marR="91440" marT="45720" marB="45720" anchor="ctr">
-                    <a:lnL w="12700" cap="flat" cmpd="sng" algn="ctr">
-                      <a:solidFill>
-                        <a:srgbClr val="D8DEE1"/>
-                      </a:solidFill>
-                      <a:prstDash val="solid"/>
-                      <a:round/>
-                      <a:headEnd type="none" w="med" len="med"/>
-                      <a:tailEnd type="none" w="med" len="med"/>
-                    </a:lnL>
-                    <a:lnR w="12700" cap="flat" cmpd="sng" algn="ctr">
-                      <a:solidFill>
-                        <a:srgbClr val="D8DEE1"/>
-                      </a:solidFill>
-                      <a:prstDash val="solid"/>
-                      <a:round/>
-                      <a:headEnd type="none" w="med" len="med"/>
-                      <a:tailEnd type="none" w="med" len="med"/>
-                    </a:lnR>
-                    <a:lnT w="12700" cap="flat" cmpd="sng" algn="ctr">
-                      <a:solidFill>
-                        <a:srgbClr val="D8DEE1"/>
-                      </a:solidFill>
-                      <a:prstDash val="solid"/>
-                      <a:round/>
-                      <a:headEnd type="none" w="med" len="med"/>
-                      <a:tailEnd type="none" w="med" len="med"/>
-                    </a:lnT>
-                    <a:lnB w="12700" cap="flat" cmpd="sng" algn="ctr">
-                      <a:solidFill>
-                        <a:srgbClr val="D8DEE1"/>
-                      </a:solidFill>
-                      <a:prstDash val="solid"/>
-                      <a:round/>
-                      <a:headEnd type="none" w="med" len="med"/>
-                      <a:tailEnd type="none" w="med" len="med"/>
-                    </a:lnB>
-                    <a:solidFill>
-                      <a:srgbClr val="0B1F3A"/>
-                    </a:solidFill>
-                  </a:tcPr>
-                </a:tc>
-                <a:tc>
-                  <a:txBody>
-                    <a:bodyPr/>
-                    <a:lstStyle/>
-                    <a:p>
-                      <a:pPr indent="0" marL="0">
-                        <a:buNone/>
-                      </a:pPr>
-                      <a:r>
-                        <a:rPr lang="en-US" sz="1150" b="1" dirty="0">
-                          <a:solidFill>
-                            <a:srgbClr val="FFFFFF"/>
-                          </a:solidFill>
-                          <a:latin typeface="Calibri" pitchFamily="34" charset="0"/>
-                          <a:ea typeface="Calibri" pitchFamily="34" charset="-122"/>
-                          <a:cs typeface="Calibri" pitchFamily="34" charset="-120"/>
-                        </a:rPr>
-                        <a:t>Grounding confidence</a:t>
-                      </a:r>
-                      <a:endParaRPr lang="en-US" sz="1150" dirty="0">
-                        <a:latin typeface="Calibri" charset="0"/>
-                        <a:ea typeface="Calibri" charset="0"/>
-                        <a:cs typeface="Calibri" charset="0"/>
-                      </a:endParaRPr>
-                    </a:p>
-                  </a:txBody>
-                  <a:tcPr marL="91440" marR="91440" marT="45720" marB="45720" anchor="ctr">
-                    <a:lnL w="12700" cap="flat" cmpd="sng" algn="ctr">
-                      <a:solidFill>
-                        <a:srgbClr val="D8DEE1"/>
-                      </a:solidFill>
-                      <a:prstDash val="solid"/>
-                      <a:round/>
-                      <a:headEnd type="none" w="med" len="med"/>
-                      <a:tailEnd type="none" w="med" len="med"/>
-                    </a:lnL>
-                    <a:lnR w="12700" cap="flat" cmpd="sng" algn="ctr">
-                      <a:solidFill>
-                        <a:srgbClr val="D8DEE1"/>
-                      </a:solidFill>
-                      <a:prstDash val="solid"/>
-                      <a:round/>
-                      <a:headEnd type="none" w="med" len="med"/>
-                      <a:tailEnd type="none" w="med" len="med"/>
-                    </a:lnR>
-                    <a:lnT w="12700" cap="flat" cmpd="sng" algn="ctr">
-                      <a:solidFill>
-                        <a:srgbClr val="D8DEE1"/>
-                      </a:solidFill>
-                      <a:prstDash val="solid"/>
-                      <a:round/>
-                      <a:headEnd type="none" w="med" len="med"/>
-                      <a:tailEnd type="none" w="med" len="med"/>
-                    </a:lnT>
-                    <a:lnB w="12700" cap="flat" cmpd="sng" algn="ctr">
-                      <a:solidFill>
-                        <a:srgbClr val="D8DEE1"/>
-                      </a:solidFill>
-                      <a:prstDash val="solid"/>
-                      <a:round/>
-                      <a:headEnd type="none" w="med" len="med"/>
-                      <a:tailEnd type="none" w="med" len="med"/>
-                    </a:lnB>
-                    <a:solidFill>
-                      <a:srgbClr val="0B1F3A"/>
-                    </a:solidFill>
-                  </a:tcPr>
-                </a:tc>
-              </a:tr>
-              <a:tr h="1188720">
-                <a:tc>
-                  <a:txBody>
-                    <a:bodyPr/>
-                    <a:lstStyle/>
-                    <a:p>
-                      <a:pPr indent="0" marL="0">
-                        <a:buNone/>
-                      </a:pPr>
-                      <a:r>
-                        <a:rPr lang="en-US" sz="1150" dirty="0">
-                          <a:solidFill>
-                            <a:srgbClr val="16232F"/>
-                          </a:solidFill>
-                          <a:latin typeface="Calibri" pitchFamily="34" charset="0"/>
-                          <a:ea typeface="Calibri" pitchFamily="34" charset="-122"/>
-                          <a:cs typeface="Calibri" pitchFamily="34" charset="-120"/>
-                        </a:rPr>
-                        <a:t>B. subtilis, engineered circuit</a:t>
-                      </a:r>
-                      <a:endParaRPr lang="en-US" sz="1150" dirty="0">
-                        <a:latin typeface="Calibri" charset="0"/>
-                        <a:ea typeface="Calibri" charset="0"/>
-                        <a:cs typeface="Calibri" charset="0"/>
-                      </a:endParaRPr>
-                    </a:p>
-                  </a:txBody>
-                  <a:tcPr marL="91440" marR="91440" marT="45720" marB="45720" anchor="ctr">
-                    <a:lnL w="12700" cap="flat" cmpd="sng" algn="ctr">
-                      <a:solidFill>
-                        <a:srgbClr val="D8DEE1"/>
-                      </a:solidFill>
-                      <a:prstDash val="solid"/>
-                      <a:round/>
-                      <a:headEnd type="none" w="med" len="med"/>
-                      <a:tailEnd type="none" w="med" len="med"/>
-                    </a:lnL>
-                    <a:lnR w="12700" cap="flat" cmpd="sng" algn="ctr">
-                      <a:solidFill>
-                        <a:srgbClr val="D8DEE1"/>
-                      </a:solidFill>
-                      <a:prstDash val="solid"/>
-                      <a:round/>
-                      <a:headEnd type="none" w="med" len="med"/>
-                      <a:tailEnd type="none" w="med" len="med"/>
-                    </a:lnR>
-                    <a:lnT w="12700" cap="flat" cmpd="sng" algn="ctr">
-                      <a:solidFill>
-                        <a:srgbClr val="D8DEE1"/>
-                      </a:solidFill>
-                      <a:prstDash val="solid"/>
-                      <a:round/>
-                      <a:headEnd type="none" w="med" len="med"/>
-                      <a:tailEnd type="none" w="med" len="med"/>
-                    </a:lnT>
-                    <a:lnB w="12700" cap="flat" cmpd="sng" algn="ctr">
-                      <a:solidFill>
-                        <a:srgbClr val="D8DEE1"/>
-                      </a:solidFill>
-                      <a:prstDash val="solid"/>
-                      <a:round/>
-                      <a:headEnd type="none" w="med" len="med"/>
-                      <a:tailEnd type="none" w="med" len="med"/>
-                    </a:lnB>
-                  </a:tcPr>
-                </a:tc>
-                <a:tc>
-                  <a:txBody>
-                    <a:bodyPr/>
-                    <a:lstStyle/>
-                    <a:p>
-                      <a:pPr indent="0" marL="0">
-                        <a:buNone/>
-                      </a:pPr>
-                      <a:r>
-                        <a:rPr lang="en-US" sz="1150" dirty="0">
-                          <a:solidFill>
-                            <a:srgbClr val="16232F"/>
-                          </a:solidFill>
-                          <a:latin typeface="Calibri" pitchFamily="34" charset="0"/>
-                          <a:ea typeface="Calibri" pitchFamily="34" charset="-122"/>
-                          <a:cs typeface="Calibri" pitchFamily="34" charset="-120"/>
-                        </a:rPr>
-                        <a:t>Highest, inheritance is mechanistically forced (division copies existing protein)</a:t>
-                      </a:r>
-                      <a:endParaRPr lang="en-US" sz="1150" dirty="0">
-                        <a:latin typeface="Calibri" charset="0"/>
-                        <a:ea typeface="Calibri" charset="0"/>
-                        <a:cs typeface="Calibri" charset="0"/>
-                      </a:endParaRPr>
-                    </a:p>
-                  </a:txBody>
-                  <a:tcPr marL="91440" marR="91440" marT="45720" marB="45720" anchor="ctr">
-                    <a:lnL w="12700" cap="flat" cmpd="sng" algn="ctr">
-                      <a:solidFill>
-                        <a:srgbClr val="D8DEE1"/>
-                      </a:solidFill>
-                      <a:prstDash val="solid"/>
-                      <a:round/>
-                      <a:headEnd type="none" w="med" len="med"/>
-                      <a:tailEnd type="none" w="med" len="med"/>
-                    </a:lnL>
-                    <a:lnR w="12700" cap="flat" cmpd="sng" algn="ctr">
-                      <a:solidFill>
-                        <a:srgbClr val="D8DEE1"/>
-                      </a:solidFill>
-                      <a:prstDash val="solid"/>
-                      <a:round/>
-                      <a:headEnd type="none" w="med" len="med"/>
-                      <a:tailEnd type="none" w="med" len="med"/>
-                    </a:lnR>
-                    <a:lnT w="12700" cap="flat" cmpd="sng" algn="ctr">
-                      <a:solidFill>
-                        <a:srgbClr val="D8DEE1"/>
-                      </a:solidFill>
-                      <a:prstDash val="solid"/>
-                      <a:round/>
-                      <a:headEnd type="none" w="med" len="med"/>
-                      <a:tailEnd type="none" w="med" len="med"/>
-                    </a:lnT>
-                    <a:lnB w="12700" cap="flat" cmpd="sng" algn="ctr">
-                      <a:solidFill>
-                        <a:srgbClr val="D8DEE1"/>
-                      </a:solidFill>
-                      <a:prstDash val="solid"/>
-                      <a:round/>
-                      <a:headEnd type="none" w="med" len="med"/>
-                      <a:tailEnd type="none" w="med" len="med"/>
-                    </a:lnB>
-                  </a:tcPr>
-                </a:tc>
-              </a:tr>
-              <a:tr h="1188720">
-                <a:tc>
-                  <a:txBody>
-                    <a:bodyPr/>
-                    <a:lstStyle/>
-                    <a:p>
-                      <a:pPr indent="0" marL="0">
-                        <a:buNone/>
-                      </a:pPr>
-                      <a:r>
-                        <a:rPr lang="en-US" sz="1150" dirty="0">
-                          <a:solidFill>
-                            <a:srgbClr val="16232F"/>
-                          </a:solidFill>
-                          <a:latin typeface="Calibri" pitchFamily="34" charset="0"/>
-                          <a:ea typeface="Calibri" pitchFamily="34" charset="-122"/>
-                          <a:cs typeface="Calibri" pitchFamily="34" charset="-120"/>
-                        </a:rPr>
-                        <a:t>B. subtilis, methylation</a:t>
-                      </a:r>
-                      <a:endParaRPr lang="en-US" sz="1150" dirty="0">
-                        <a:latin typeface="Calibri" charset="0"/>
-                        <a:ea typeface="Calibri" charset="0"/>
-                        <a:cs typeface="Calibri" charset="0"/>
-                      </a:endParaRPr>
-                    </a:p>
-                  </a:txBody>
-                  <a:tcPr marL="91440" marR="91440" marT="45720" marB="45720" anchor="ctr">
-                    <a:lnL w="12700" cap="flat" cmpd="sng" algn="ctr">
-                      <a:solidFill>
-                        <a:srgbClr val="D8DEE1"/>
-                      </a:solidFill>
-                      <a:prstDash val="solid"/>
-                      <a:round/>
-                      <a:headEnd type="none" w="med" len="med"/>
-                      <a:tailEnd type="none" w="med" len="med"/>
-                    </a:lnL>
-                    <a:lnR w="12700" cap="flat" cmpd="sng" algn="ctr">
-                      <a:solidFill>
-                        <a:srgbClr val="D8DEE1"/>
-                      </a:solidFill>
-                      <a:prstDash val="solid"/>
-                      <a:round/>
-                      <a:headEnd type="none" w="med" len="med"/>
-                      <a:tailEnd type="none" w="med" len="med"/>
-                    </a:lnR>
-                    <a:lnT w="12700" cap="flat" cmpd="sng" algn="ctr">
-                      <a:solidFill>
-                        <a:srgbClr val="D8DEE1"/>
-                      </a:solidFill>
-                      <a:prstDash val="solid"/>
-                      <a:round/>
-                      <a:headEnd type="none" w="med" len="med"/>
-                      <a:tailEnd type="none" w="med" len="med"/>
-                    </a:lnT>
-                    <a:lnB w="12700" cap="flat" cmpd="sng" algn="ctr">
-                      <a:solidFill>
-                        <a:srgbClr val="D8DEE1"/>
-                      </a:solidFill>
-                      <a:prstDash val="solid"/>
-                      <a:round/>
-                      <a:headEnd type="none" w="med" len="med"/>
-                      <a:tailEnd type="none" w="med" len="med"/>
-                    </a:lnB>
-                  </a:tcPr>
-                </a:tc>
-                <a:tc>
-                  <a:txBody>
-                    <a:bodyPr/>
-                    <a:lstStyle/>
-                    <a:p>
-                      <a:pPr indent="0" marL="0">
-                        <a:buNone/>
-                      </a:pPr>
-                      <a:r>
-                        <a:rPr lang="en-US" sz="1150" dirty="0">
-                          <a:solidFill>
-                            <a:srgbClr val="16232F"/>
-                          </a:solidFill>
-                          <a:latin typeface="Calibri" pitchFamily="34" charset="0"/>
-                          <a:ea typeface="Calibri" pitchFamily="34" charset="-122"/>
-                          <a:cs typeface="Calibri" pitchFamily="34" charset="-120"/>
-                        </a:rPr>
-                        <a:t>Medium, real fidelity numbers exist, but from a different species</a:t>
-                      </a:r>
-                      <a:endParaRPr lang="en-US" sz="1150" dirty="0">
-                        <a:latin typeface="Calibri" charset="0"/>
-                        <a:ea typeface="Calibri" charset="0"/>
-                        <a:cs typeface="Calibri" charset="0"/>
-                      </a:endParaRPr>
-                    </a:p>
-                  </a:txBody>
-                  <a:tcPr marL="91440" marR="91440" marT="45720" marB="45720" anchor="ctr">
-                    <a:lnL w="12700" cap="flat" cmpd="sng" algn="ctr">
-                      <a:solidFill>
-                        <a:srgbClr val="D8DEE1"/>
-                      </a:solidFill>
-                      <a:prstDash val="solid"/>
-                      <a:round/>
-                      <a:headEnd type="none" w="med" len="med"/>
-                      <a:tailEnd type="none" w="med" len="med"/>
-                    </a:lnL>
-                    <a:lnR w="12700" cap="flat" cmpd="sng" algn="ctr">
-                      <a:solidFill>
-                        <a:srgbClr val="D8DEE1"/>
-                      </a:solidFill>
-                      <a:prstDash val="solid"/>
-                      <a:round/>
-                      <a:headEnd type="none" w="med" len="med"/>
-                      <a:tailEnd type="none" w="med" len="med"/>
-                    </a:lnR>
-                    <a:lnT w="12700" cap="flat" cmpd="sng" algn="ctr">
-                      <a:solidFill>
-                        <a:srgbClr val="D8DEE1"/>
-                      </a:solidFill>
-                      <a:prstDash val="solid"/>
-                      <a:round/>
-                      <a:headEnd type="none" w="med" len="med"/>
-                      <a:tailEnd type="none" w="med" len="med"/>
-                    </a:lnT>
-                    <a:lnB w="12700" cap="flat" cmpd="sng" algn="ctr">
-                      <a:solidFill>
-                        <a:srgbClr val="D8DEE1"/>
-                      </a:solidFill>
-                      <a:prstDash val="solid"/>
-                      <a:round/>
-                      <a:headEnd type="none" w="med" len="med"/>
-                      <a:tailEnd type="none" w="med" len="med"/>
-                    </a:lnB>
-                  </a:tcPr>
-                </a:tc>
-              </a:tr>
-              <a:tr h="1188720">
-                <a:tc>
-                  <a:txBody>
-                    <a:bodyPr/>
-                    <a:lstStyle/>
-                    <a:p>
-                      <a:pPr indent="0" marL="0">
-                        <a:buNone/>
-                      </a:pPr>
-                      <a:r>
-                        <a:rPr lang="en-US" sz="1150" dirty="0">
-                          <a:solidFill>
-                            <a:srgbClr val="16232F"/>
-                          </a:solidFill>
-                          <a:latin typeface="Calibri" pitchFamily="34" charset="0"/>
-                          <a:ea typeface="Calibri" pitchFamily="34" charset="-122"/>
-                          <a:cs typeface="Calibri" pitchFamily="34" charset="-120"/>
-                        </a:rPr>
-                        <a:t>Planarian, bioelectric circuit</a:t>
-                      </a:r>
-                      <a:endParaRPr lang="en-US" sz="1150" dirty="0">
-                        <a:latin typeface="Calibri" charset="0"/>
-                        <a:ea typeface="Calibri" charset="0"/>
-                        <a:cs typeface="Calibri" charset="0"/>
-                      </a:endParaRPr>
-                    </a:p>
-                  </a:txBody>
-                  <a:tcPr marL="91440" marR="91440" marT="45720" marB="45720" anchor="ctr">
-                    <a:lnL w="12700" cap="flat" cmpd="sng" algn="ctr">
-                      <a:solidFill>
-                        <a:srgbClr val="D8DEE1"/>
-                      </a:solidFill>
-                      <a:prstDash val="solid"/>
-                      <a:round/>
-                      <a:headEnd type="none" w="med" len="med"/>
-                      <a:tailEnd type="none" w="med" len="med"/>
-                    </a:lnL>
-                    <a:lnR w="12700" cap="flat" cmpd="sng" algn="ctr">
-                      <a:solidFill>
-                        <a:srgbClr val="D8DEE1"/>
-                      </a:solidFill>
-                      <a:prstDash val="solid"/>
-                      <a:round/>
-                      <a:headEnd type="none" w="med" len="med"/>
-                      <a:tailEnd type="none" w="med" len="med"/>
-                    </a:lnR>
-                    <a:lnT w="12700" cap="flat" cmpd="sng" algn="ctr">
-                      <a:solidFill>
-                        <a:srgbClr val="D8DEE1"/>
-                      </a:solidFill>
-                      <a:prstDash val="solid"/>
-                      <a:round/>
-                      <a:headEnd type="none" w="med" len="med"/>
-                      <a:tailEnd type="none" w="med" len="med"/>
-                    </a:lnT>
-                    <a:lnB w="12700" cap="flat" cmpd="sng" algn="ctr">
-                      <a:solidFill>
-                        <a:srgbClr val="D8DEE1"/>
-                      </a:solidFill>
-                      <a:prstDash val="solid"/>
-                      <a:round/>
-                      <a:headEnd type="none" w="med" len="med"/>
-                      <a:tailEnd type="none" w="med" len="med"/>
-                    </a:lnB>
-                  </a:tcPr>
-                </a:tc>
-                <a:tc>
-                  <a:txBody>
-                    <a:bodyPr/>
-                    <a:lstStyle/>
-                    <a:p>
-                      <a:pPr indent="0" marL="0">
-                        <a:buNone/>
-                      </a:pPr>
-                      <a:r>
-                        <a:rPr lang="en-US" sz="1150" dirty="0">
-                          <a:solidFill>
-                            <a:srgbClr val="16232F"/>
-                          </a:solidFill>
-                          <a:latin typeface="Calibri" pitchFamily="34" charset="0"/>
-                          <a:ea typeface="Calibri" pitchFamily="34" charset="-122"/>
-                          <a:cs typeface="Calibri" pitchFamily="34" charset="-120"/>
-                        </a:rPr>
-                        <a:t>Lowest, cell-coupling strength is a borrowed assumption, never measured</a:t>
-                      </a:r>
-                      <a:endParaRPr lang="en-US" sz="1150" dirty="0">
-                        <a:latin typeface="Calibri" charset="0"/>
-                        <a:ea typeface="Calibri" charset="0"/>
-                        <a:cs typeface="Calibri" charset="0"/>
-                      </a:endParaRPr>
-                    </a:p>
-                  </a:txBody>
-                  <a:tcPr marL="91440" marR="91440" marT="45720" marB="45720" anchor="ctr">
-                    <a:lnL w="12700" cap="flat" cmpd="sng" algn="ctr">
-                      <a:solidFill>
-                        <a:srgbClr val="D8DEE1"/>
-                      </a:solidFill>
-                      <a:prstDash val="solid"/>
-                      <a:round/>
-                      <a:headEnd type="none" w="med" len="med"/>
-                      <a:tailEnd type="none" w="med" len="med"/>
-                    </a:lnL>
-                    <a:lnR w="12700" cap="flat" cmpd="sng" algn="ctr">
-                      <a:solidFill>
-                        <a:srgbClr val="D8DEE1"/>
-                      </a:solidFill>
-                      <a:prstDash val="solid"/>
-                      <a:round/>
-                      <a:headEnd type="none" w="med" len="med"/>
-                      <a:tailEnd type="none" w="med" len="med"/>
-                    </a:lnR>
-                    <a:lnT w="12700" cap="flat" cmpd="sng" algn="ctr">
-                      <a:solidFill>
-                        <a:srgbClr val="D8DEE1"/>
-                      </a:solidFill>
-                      <a:prstDash val="solid"/>
-                      <a:round/>
-                      <a:headEnd type="none" w="med" len="med"/>
-                      <a:tailEnd type="none" w="med" len="med"/>
-                    </a:lnT>
-                    <a:lnB w="12700" cap="flat" cmpd="sng" algn="ctr">
-                      <a:solidFill>
-                        <a:srgbClr val="D8DEE1"/>
-                      </a:solidFill>
-                      <a:prstDash val="solid"/>
-                      <a:round/>
-                      <a:headEnd type="none" w="med" len="med"/>
-                      <a:tailEnd type="none" w="med" len="med"/>
-                    </a:lnB>
-                  </a:tcPr>
-                </a:tc>
-              </a:tr>
-            </a:tbl>
-          </a:graphicData>
-        </a:graphic>
-      </p:graphicFrame>
-      <p:sp>
-        <p:nvSpPr>
-          <p:cNvPr id="6" name="Text 2"/>
-          <p:cNvSpPr txBox="1"/>
-          <p:nvPr/>
-        </p:nvSpPr>
-        <p:spPr>
-          <a:xfrm>
-            <a:off x="640080" y="6035040"/>
-            <a:ext cx="10972800" cy="548640"/>
-          </a:xfrm>
-          <a:prstGeom prst="rect">
-            <a:avLst/>
-          </a:prstGeom>
-          <a:noFill/>
-          <a:ln/>
-        </p:spPr>
-        <p:txBody>
-          <a:bodyPr wrap="square" lIns="0" tIns="0" rIns="0" bIns="0" rtlCol="0" anchor="ctr"/>
-          <a:lstStyle/>
-          <a:p>
-            <a:pPr indent="0" marL="0">
-              <a:buNone/>
-            </a:pPr>
-            <a:r>
-              <a:rPr lang="en-US" sz="1300" i="1" dirty="0">
-                <a:solidFill>
-                  <a:srgbClr val="5B6B77"/>
+              <a:t>An engineered bistable circuit, built from parts that already exist</a:t>
+            </a:r>
+            <a:endParaRPr lang="en-US" sz="2500" dirty="0"/>
+          </a:p>
+        </p:txBody>
+      </p:sp>
+      <p:sp>
+        <p:nvSpPr>
+          <p:cNvPr id="4" name="Shape 2"/>
+          <p:cNvSpPr/>
+          <p:nvPr/>
+        </p:nvSpPr>
+        <p:spPr>
+          <a:xfrm>
+            <a:off x="640080" y="1737360"/>
+            <a:ext cx="6675120" cy="4297680"/>
+          </a:xfrm>
+          <a:prstGeom prst="roundRect">
+            <a:avLst>
+              <a:gd name="adj" fmla="val 1702"/>
+            </a:avLst>
+          </a:prstGeom>
+          <a:solidFill>
+            <a:srgbClr val="FFFFFF"/>
+          </a:solidFill>
+          <a:ln w="12700">
+            <a:solidFill>
+              <a:srgbClr val="DCE3E6"/>
+            </a:solidFill>
+            <a:prstDash val="solid"/>
+          </a:ln>
+        </p:spPr>
+      </p:sp>
+      <p:sp>
+        <p:nvSpPr>
+          <p:cNvPr id="5" name="Text 3"/>
+          <p:cNvSpPr txBox="1"/>
+          <p:nvPr/>
+        </p:nvSpPr>
+        <p:spPr>
+          <a:xfrm>
+            <a:off x="914400" y="1920240"/>
+            <a:ext cx="6217920" cy="365760"/>
+          </a:xfrm>
+          <a:prstGeom prst="rect">
+            <a:avLst/>
+          </a:prstGeom>
+          <a:noFill/>
+          <a:ln/>
+        </p:spPr>
+        <p:txBody>
+          <a:bodyPr wrap="square" lIns="0" tIns="0" rIns="0" bIns="0" rtlCol="0" anchor="ctr"/>
+          <a:lstStyle/>
+          <a:p>
+            <a:pPr indent="0" marL="0">
+              <a:buNone/>
+            </a:pPr>
+            <a:r>
+              <a:rPr lang="en-US" sz="1500" b="1" dirty="0">
+                <a:solidFill>
+                  <a:srgbClr val="16232F"/>
+                </a:solidFill>
+                <a:latin typeface="Cambria" pitchFamily="34" charset="0"/>
+                <a:ea typeface="Cambria" pitchFamily="34" charset="-122"/>
+                <a:cs typeface="Cambria" pitchFamily="34" charset="-120"/>
+              </a:rPr>
+              <a:t>Two parts, already characterized separately</a:t>
+            </a:r>
+            <a:endParaRPr lang="en-US" sz="1500" dirty="0"/>
+          </a:p>
+        </p:txBody>
+      </p:sp>
+      <p:sp>
+        <p:nvSpPr>
+          <p:cNvPr id="6" name="Text 4"/>
+          <p:cNvSpPr txBox="1"/>
+          <p:nvPr/>
+        </p:nvSpPr>
+        <p:spPr>
+          <a:xfrm>
+            <a:off x="914400" y="2423160"/>
+            <a:ext cx="6217920" cy="868680"/>
+          </a:xfrm>
+          <a:prstGeom prst="rect">
+            <a:avLst/>
+          </a:prstGeom>
+          <a:noFill/>
+          <a:ln/>
+        </p:spPr>
+        <p:txBody>
+          <a:bodyPr wrap="square" lIns="0" tIns="0" rIns="0" bIns="0" rtlCol="0" anchor="ctr"/>
+          <a:lstStyle/>
+          <a:p>
+            <a:pPr indent="0" marL="0">
+              <a:lnSpc>
+                <a:spcPct val="115000"/>
+              </a:lnSpc>
+              <a:buNone/>
+            </a:pPr>
+            <a:r>
+              <a:rPr lang="en-US" sz="1250" b="1" dirty="0">
+                <a:solidFill>
+                  <a:srgbClr val="1C8F84"/>
                 </a:solidFill>
                 <a:latin typeface="Calibri" pitchFamily="34" charset="0"/>
                 <a:ea typeface="Calibri" pitchFamily="34" charset="-122"/>
                 <a:cs typeface="Calibri" pitchFamily="34" charset="-120"/>
               </a:rPr>
-              <a:t>Our original organism choice (planarian) is currently our weakest-evidence option. We're reporting that now, before spending wet-lab money on it.</a:t>
-            </a:r>
-            <a:endParaRPr lang="en-US" sz="1300" dirty="0"/>
-          </a:p>
-        </p:txBody>
-      </p:sp>
-      <p:sp>
-        <p:nvSpPr>
-          <p:cNvPr id="7" name="Text 3"/>
+              <a:t>Topology, </a:t>
+            </a:r>
+            <a:pPr indent="0" marL="0">
+              <a:lnSpc>
+                <a:spcPct val="115000"/>
+              </a:lnSpc>
+              <a:buNone/>
+            </a:pPr>
+            <a:r>
+              <a:rPr lang="en-US" sz="1250" dirty="0">
+                <a:solidFill>
+                  <a:srgbClr val="5B6B77"/>
+                </a:solidFill>
+                <a:latin typeface="Calibri" pitchFamily="34" charset="0"/>
+                <a:ea typeface="Calibri" pitchFamily="34" charset="-122"/>
+                <a:cs typeface="Calibri" pitchFamily="34" charset="-120"/>
+              </a:rPr>
+              <a:t>Gardner, Cantor &amp; Collins (2000), two mutually-repressing promoters, demonstrated bistable regime, equations public.</a:t>
+            </a:r>
+            <a:endParaRPr lang="en-US" sz="1250" dirty="0"/>
+          </a:p>
+        </p:txBody>
+      </p:sp>
+      <p:sp>
+        <p:nvSpPr>
+          <p:cNvPr id="7" name="Text 5"/>
+          <p:cNvSpPr txBox="1"/>
+          <p:nvPr/>
+        </p:nvSpPr>
+        <p:spPr>
+          <a:xfrm>
+            <a:off x="914400" y="3383280"/>
+            <a:ext cx="6217920" cy="868680"/>
+          </a:xfrm>
+          <a:prstGeom prst="rect">
+            <a:avLst/>
+          </a:prstGeom>
+          <a:noFill/>
+          <a:ln/>
+        </p:spPr>
+        <p:txBody>
+          <a:bodyPr wrap="square" lIns="0" tIns="0" rIns="0" bIns="0" rtlCol="0" anchor="ctr"/>
+          <a:lstStyle/>
+          <a:p>
+            <a:pPr indent="0" marL="0">
+              <a:lnSpc>
+                <a:spcPct val="115000"/>
+              </a:lnSpc>
+              <a:buNone/>
+            </a:pPr>
+            <a:r>
+              <a:rPr lang="en-US" sz="1250" b="1" dirty="0">
+                <a:solidFill>
+                  <a:srgbClr val="1C8F84"/>
+                </a:solidFill>
+                <a:latin typeface="Calibri" pitchFamily="34" charset="0"/>
+                <a:ea typeface="Calibri" pitchFamily="34" charset="-122"/>
+                <a:cs typeface="Calibri" pitchFamily="34" charset="-120"/>
+              </a:rPr>
+              <a:t>Chassis parts, </a:t>
+            </a:r>
+            <a:pPr indent="0" marL="0">
+              <a:lnSpc>
+                <a:spcPct val="115000"/>
+              </a:lnSpc>
+              <a:buNone/>
+            </a:pPr>
+            <a:r>
+              <a:rPr lang="en-US" sz="1250" dirty="0">
+                <a:solidFill>
+                  <a:srgbClr val="5B6B77"/>
+                </a:solidFill>
+                <a:latin typeface="Calibri" pitchFamily="34" charset="0"/>
+                <a:ea typeface="Calibri" pitchFamily="34" charset="-122"/>
+                <a:cs typeface="Calibri" pitchFamily="34" charset="-120"/>
+              </a:rPr>
+              <a:t>Bacillus BioBrick Box (Radeck et al. 2013, 2017), free, chromosomally-integrating promoters, characterized in B. subtilis specifically (this project's target organism, not E. coli).</a:t>
+            </a:r>
+            <a:endParaRPr lang="en-US" sz="1250" dirty="0"/>
+          </a:p>
+        </p:txBody>
+      </p:sp>
+      <p:sp>
+        <p:nvSpPr>
+          <p:cNvPr id="8" name="Shape 6"/>
+          <p:cNvSpPr/>
+          <p:nvPr/>
+        </p:nvSpPr>
+        <p:spPr>
+          <a:xfrm>
+            <a:off x="914400" y="4389120"/>
+            <a:ext cx="6217920" cy="0"/>
+          </a:xfrm>
+          <a:prstGeom prst="line">
+            <a:avLst/>
+          </a:prstGeom>
+          <a:noFill/>
+          <a:ln w="12700">
+            <a:solidFill>
+              <a:srgbClr val="E4E9EA"/>
+            </a:solidFill>
+            <a:prstDash val="solid"/>
+          </a:ln>
+        </p:spPr>
+      </p:sp>
+      <p:sp>
+        <p:nvSpPr>
+          <p:cNvPr id="9" name="Text 7"/>
+          <p:cNvSpPr txBox="1"/>
+          <p:nvPr/>
+        </p:nvSpPr>
+        <p:spPr>
+          <a:xfrm>
+            <a:off x="914400" y="4526280"/>
+            <a:ext cx="6217920" cy="365760"/>
+          </a:xfrm>
+          <a:prstGeom prst="rect">
+            <a:avLst/>
+          </a:prstGeom>
+          <a:noFill/>
+          <a:ln/>
+        </p:spPr>
+        <p:txBody>
+          <a:bodyPr wrap="square" lIns="0" tIns="0" rIns="0" bIns="0" rtlCol="0" anchor="ctr"/>
+          <a:lstStyle/>
+          <a:p>
+            <a:pPr indent="0" marL="0">
+              <a:buNone/>
+            </a:pPr>
+            <a:r>
+              <a:rPr lang="en-US" sz="1500" b="1" dirty="0">
+                <a:solidFill>
+                  <a:srgbClr val="16232F"/>
+                </a:solidFill>
+                <a:latin typeface="Cambria" pitchFamily="34" charset="0"/>
+                <a:ea typeface="Cambria" pitchFamily="34" charset="-122"/>
+                <a:cs typeface="Cambria" pitchFamily="34" charset="-120"/>
+              </a:rPr>
+              <a:t>What running the combined model found</a:t>
+            </a:r>
+            <a:endParaRPr lang="en-US" sz="1500" dirty="0"/>
+          </a:p>
+        </p:txBody>
+      </p:sp>
+      <p:sp>
+        <p:nvSpPr>
+          <p:cNvPr id="10" name="Text 8"/>
+          <p:cNvSpPr txBox="1"/>
+          <p:nvPr/>
+        </p:nvSpPr>
+        <p:spPr>
+          <a:xfrm>
+            <a:off x="914400" y="4937760"/>
+            <a:ext cx="6217920" cy="1188720"/>
+          </a:xfrm>
+          <a:prstGeom prst="rect">
+            <a:avLst/>
+          </a:prstGeom>
+          <a:noFill/>
+          <a:ln/>
+        </p:spPr>
+        <p:txBody>
+          <a:bodyPr wrap="square" lIns="0" tIns="0" rIns="0" bIns="0" rtlCol="0" anchor="ctr"/>
+          <a:lstStyle/>
+          <a:p>
+            <a:pPr indent="0" marL="0">
+              <a:lnSpc>
+                <a:spcPct val="120000"/>
+              </a:lnSpc>
+              <a:buNone/>
+            </a:pPr>
+            <a:r>
+              <a:rPr lang="en-US" sz="1250" dirty="0">
+                <a:solidFill>
+                  <a:srgbClr val="5B6B77"/>
+                </a:solidFill>
+                <a:latin typeface="Calibri" pitchFamily="34" charset="0"/>
+                <a:ea typeface="Calibri" pitchFamily="34" charset="-122"/>
+                <a:cs typeface="Calibri" pitchFamily="34" charset="-120"/>
+              </a:rPr>
+              <a:t>The real finding isn't that a matched circuit works (it does, 100% fidelity at 24 hours), it's what happens at severe promoter mismatch: </a:t>
+            </a:r>
+            <a:endParaRPr lang="en-US" sz="1250" dirty="0"/>
+          </a:p>
+          <a:p>
+            <a:pPr indent="0" marL="0">
+              <a:lnSpc>
+                <a:spcPct val="120000"/>
+              </a:lnSpc>
+              <a:buNone/>
+            </a:pPr>
+            <a:r>
+              <a:rPr lang="en-US" sz="1250" b="1" dirty="0">
+                <a:solidFill>
+                  <a:srgbClr val="16232F"/>
+                </a:solidFill>
+                <a:latin typeface="Calibri" pitchFamily="34" charset="0"/>
+                <a:ea typeface="Calibri" pitchFamily="34" charset="-122"/>
+                <a:cs typeface="Calibri" pitchFamily="34" charset="-120"/>
+              </a:rPr>
+              <a:t>the circuit doesn't degrade gracefully, it loses bistability entirely and always relaxes to the same state.</a:t>
+            </a:r>
+            <a:endParaRPr lang="en-US" sz="1250" dirty="0"/>
+          </a:p>
+        </p:txBody>
+      </p:sp>
+      <p:sp>
+        <p:nvSpPr>
+          <p:cNvPr id="11" name="Shape 9"/>
+          <p:cNvSpPr/>
+          <p:nvPr/>
+        </p:nvSpPr>
+        <p:spPr>
+          <a:xfrm>
+            <a:off x="7543800" y="1737360"/>
+            <a:ext cx="4023360" cy="2011680"/>
+          </a:xfrm>
+          <a:prstGeom prst="roundRect">
+            <a:avLst>
+              <a:gd name="adj" fmla="val 3636"/>
+            </a:avLst>
+          </a:prstGeom>
+          <a:solidFill>
+            <a:srgbClr val="0B1F3A"/>
+          </a:solidFill>
+          <a:ln/>
+        </p:spPr>
+      </p:sp>
+      <p:sp>
+        <p:nvSpPr>
+          <p:cNvPr id="12" name="Text 10"/>
+          <p:cNvSpPr txBox="1"/>
+          <p:nvPr/>
+        </p:nvSpPr>
+        <p:spPr>
+          <a:xfrm>
+            <a:off x="7772400" y="1874520"/>
+            <a:ext cx="3566160" cy="777240"/>
+          </a:xfrm>
+          <a:prstGeom prst="rect">
+            <a:avLst/>
+          </a:prstGeom>
+          <a:noFill/>
+          <a:ln/>
+        </p:spPr>
+        <p:txBody>
+          <a:bodyPr wrap="square" lIns="0" tIns="0" rIns="0" bIns="0" rtlCol="0" anchor="ctr"/>
+          <a:lstStyle/>
+          <a:p>
+            <a:pPr indent="0" marL="0">
+              <a:buNone/>
+            </a:pPr>
+            <a:r>
+              <a:rPr lang="en-US" sz="3600" b="1" dirty="0">
+                <a:solidFill>
+                  <a:srgbClr val="2EC4B6"/>
+                </a:solidFill>
+                <a:latin typeface="Cambria" pitchFamily="34" charset="0"/>
+                <a:ea typeface="Cambria" pitchFamily="34" charset="-122"/>
+                <a:cs typeface="Cambria" pitchFamily="34" charset="-120"/>
+              </a:rPr>
+              <a:t>100%</a:t>
+            </a:r>
+            <a:endParaRPr lang="en-US" sz="3600" dirty="0"/>
+          </a:p>
+        </p:txBody>
+      </p:sp>
+      <p:sp>
+        <p:nvSpPr>
+          <p:cNvPr id="13" name="Text 11"/>
+          <p:cNvSpPr txBox="1"/>
+          <p:nvPr/>
+        </p:nvSpPr>
+        <p:spPr>
+          <a:xfrm>
+            <a:off x="7772400" y="2606040"/>
+            <a:ext cx="3566160" cy="1005840"/>
+          </a:xfrm>
+          <a:prstGeom prst="rect">
+            <a:avLst/>
+          </a:prstGeom>
+          <a:noFill/>
+          <a:ln/>
+        </p:spPr>
+        <p:txBody>
+          <a:bodyPr wrap="square" lIns="0" tIns="0" rIns="0" bIns="0" rtlCol="0" anchor="ctr"/>
+          <a:lstStyle/>
+          <a:p>
+            <a:pPr indent="0" marL="0">
+              <a:buNone/>
+            </a:pPr>
+            <a:r>
+              <a:rPr lang="en-US" sz="1200" dirty="0">
+                <a:solidFill>
+                  <a:srgbClr val="CFE0DD"/>
+                </a:solidFill>
+                <a:latin typeface="Calibri" pitchFamily="34" charset="0"/>
+                <a:ea typeface="Calibri" pitchFamily="34" charset="-122"/>
+                <a:cs typeface="Calibri" pitchFamily="34" charset="-120"/>
+              </a:rPr>
+              <a:t>Fidelity at 24 hours, matched promoters (BBB range 1.0x-10x)</a:t>
+            </a:r>
+            <a:endParaRPr lang="en-US" sz="1200" dirty="0"/>
+          </a:p>
+        </p:txBody>
+      </p:sp>
+      <p:sp>
+        <p:nvSpPr>
+          <p:cNvPr id="14" name="Shape 12"/>
+          <p:cNvSpPr/>
+          <p:nvPr/>
+        </p:nvSpPr>
+        <p:spPr>
+          <a:xfrm>
+            <a:off x="7543800" y="3931920"/>
+            <a:ext cx="4023360" cy="2103120"/>
+          </a:xfrm>
+          <a:prstGeom prst="roundRect">
+            <a:avLst>
+              <a:gd name="adj" fmla="val 3478"/>
+            </a:avLst>
+          </a:prstGeom>
+          <a:solidFill>
+            <a:srgbClr val="0B1F3A"/>
+          </a:solidFill>
+          <a:ln/>
+        </p:spPr>
+      </p:sp>
+      <p:sp>
+        <p:nvSpPr>
+          <p:cNvPr id="15" name="Text 13"/>
+          <p:cNvSpPr txBox="1"/>
+          <p:nvPr/>
+        </p:nvSpPr>
+        <p:spPr>
+          <a:xfrm>
+            <a:off x="7772400" y="4069080"/>
+            <a:ext cx="3566160" cy="777240"/>
+          </a:xfrm>
+          <a:prstGeom prst="rect">
+            <a:avLst/>
+          </a:prstGeom>
+          <a:noFill/>
+          <a:ln/>
+        </p:spPr>
+        <p:txBody>
+          <a:bodyPr wrap="square" lIns="0" tIns="0" rIns="0" bIns="0" rtlCol="0" anchor="ctr"/>
+          <a:lstStyle/>
+          <a:p>
+            <a:pPr indent="0" marL="0">
+              <a:buNone/>
+            </a:pPr>
+            <a:r>
+              <a:rPr lang="en-US" sz="3600" b="1" dirty="0">
+                <a:solidFill>
+                  <a:srgbClr val="E8604C"/>
+                </a:solidFill>
+                <a:latin typeface="Cambria" pitchFamily="34" charset="0"/>
+                <a:ea typeface="Cambria" pitchFamily="34" charset="-122"/>
+                <a:cs typeface="Cambria" pitchFamily="34" charset="-120"/>
+              </a:rPr>
+              <a:t>50%</a:t>
+            </a:r>
+            <a:endParaRPr lang="en-US" sz="3600" dirty="0"/>
+          </a:p>
+        </p:txBody>
+      </p:sp>
+      <p:sp>
+        <p:nvSpPr>
+          <p:cNvPr id="16" name="Text 14"/>
+          <p:cNvSpPr txBox="1"/>
+          <p:nvPr/>
+        </p:nvSpPr>
+        <p:spPr>
+          <a:xfrm>
+            <a:off x="7772400" y="4800600"/>
+            <a:ext cx="3566160" cy="1097280"/>
+          </a:xfrm>
+          <a:prstGeom prst="rect">
+            <a:avLst/>
+          </a:prstGeom>
+          <a:noFill/>
+          <a:ln/>
+        </p:spPr>
+        <p:txBody>
+          <a:bodyPr wrap="square" lIns="0" tIns="0" rIns="0" bIns="0" rtlCol="0" anchor="ctr"/>
+          <a:lstStyle/>
+          <a:p>
+            <a:pPr indent="0" marL="0">
+              <a:buNone/>
+            </a:pPr>
+            <a:r>
+              <a:rPr lang="en-US" sz="1150" dirty="0">
+                <a:solidFill>
+                  <a:srgbClr val="CFE0DD"/>
+                </a:solidFill>
+                <a:latin typeface="Calibri" pitchFamily="34" charset="0"/>
+                <a:ea typeface="Calibri" pitchFamily="34" charset="-122"/>
+                <a:cs typeface="Calibri" pitchFamily="34" charset="-120"/>
+              </a:rPr>
+              <a:t>Fidelity at severe promoter mismatch (0.1x), a design constraint found before any wet-lab spend</a:t>
+            </a:r>
+            <a:endParaRPr lang="en-US" sz="1150" dirty="0"/>
+          </a:p>
+        </p:txBody>
+      </p:sp>
+      <p:sp>
+        <p:nvSpPr>
+          <p:cNvPr id="17" name="Text 15"/>
           <p:cNvSpPr txBox="1"/>
           <p:nvPr/>
         </p:nvSpPr>
@@ -14085,7 +16203,7 @@
                 <a:ea typeface="Calibri" pitchFamily="34" charset="-122"/>
                 <a:cs typeface="Calibri" pitchFamily="34" charset="-120"/>
               </a:rPr>
-              <a:t>STRESS-TESTING OUR OWN DESIGN</a:t>
+              <a:t>CHASSIS CHOICE</a:t>
             </a:r>
             <a:endParaRPr lang="en-US" sz="1200" dirty="0"/>
           </a:p>
@@ -14100,23 +16218,23 @@
         <p:spPr>
           <a:xfrm>
             <a:off x="640080" y="777240"/>
-            <a:ext cx="10881360" cy="868680"/>
-          </a:xfrm>
-          <a:prstGeom prst="rect">
-            <a:avLst/>
-          </a:prstGeom>
-          <a:noFill/>
-          <a:ln/>
-        </p:spPr>
-        <p:txBody>
-          <a:bodyPr wrap="square" lIns="0" tIns="0" rIns="0" bIns="0" rtlCol="0" anchor="ctr"/>
-          <a:lstStyle/>
-          <a:p>
-            <a:pPr indent="0" marL="0">
-              <a:buNone/>
-            </a:pPr>
-            <a:r>
-              <a:rPr lang="en-US" sz="2200" b="1" dirty="0">
+            <a:ext cx="10881360" cy="822960"/>
+          </a:xfrm>
+          <a:prstGeom prst="rect">
+            <a:avLst/>
+          </a:prstGeom>
+          <a:noFill/>
+          <a:ln/>
+        </p:spPr>
+        <p:txBody>
+          <a:bodyPr wrap="square" lIns="0" tIns="0" rIns="0" bIns="0" rtlCol="0" anchor="ctr"/>
+          <a:lstStyle/>
+          <a:p>
+            <a:pPr indent="0" marL="0">
+              <a:buNone/>
+            </a:pPr>
+            <a:r>
+              <a:rPr lang="en-US" sz="2300" b="1" dirty="0">
                 <a:solidFill>
                   <a:srgbClr val="16232F"/>
                 </a:solidFill>
@@ -14124,9 +16242,9 @@
                 <a:ea typeface="Cambria" pitchFamily="34" charset="-122"/>
                 <a:cs typeface="Cambria" pitchFamily="34" charset="-120"/>
               </a:rPr>
-              <a:t>A risk nobody asked about: the colony's own biology can scramble the read, even when the data is fine</a:t>
-            </a:r>
-            <a:endParaRPr lang="en-US" sz="2200" dirty="0"/>
+              <a:t>Why B. subtilis, not E. coli, the organism the original toggle switch was built in</a:t>
+            </a:r>
+            <a:endParaRPr lang="en-US" sz="2300" dirty="0"/>
           </a:p>
         </p:txBody>
       </p:sp>
@@ -14210,7 +16328,7 @@
                 <a:ea typeface="Cambria" pitchFamily="34" charset="-122"/>
                 <a:cs typeface="Cambria" pitchFamily="34" charset="-120"/>
               </a:rPr>
-              <a:t>The natural signal</a:t>
+              <a:t>Chassis-matched parts</a:t>
             </a:r>
             <a:endParaRPr lang="en-US" sz="1550" dirty="0"/>
           </a:p>
@@ -14244,7 +16362,7 @@
               <a:buNone/>
             </a:pPr>
             <a:r>
-              <a:rPr lang="en-US" sz="1250" dirty="0">
+              <a:rPr lang="en-US" sz="1200" dirty="0">
                 <a:solidFill>
                   <a:srgbClr val="5B6B77"/>
                 </a:solidFill>
@@ -14252,9 +16370,9 @@
                 <a:ea typeface="Calibri" pitchFamily="34" charset="-122"/>
                 <a:cs typeface="Calibri" pitchFamily="34" charset="-120"/>
               </a:rPr>
-              <a:t>B. subtilis biofilms run a continuous potassium-wave electrical signal of their own (Prindle lab, 2015), independent of anything Acheron builds.</a:t>
-            </a:r>
-            <a:endParaRPr lang="en-US" sz="1250" dirty="0"/>
+              <a:t>Gardner's original 2000 toggle switch was built and characterized in E. coli. But the free, chromosomally-integrating promoter library this project actually uses, the Bacillus BioBrick Box (Radeck et al. 2013, 2017), was characterized in B. subtilis specifically. Porting to E. coli would mean re-characterizing every promoter from scratch, work nobody has funded.</a:t>
+            </a:r>
+            <a:endParaRPr lang="en-US" sz="1200" dirty="0"/>
           </a:p>
         </p:txBody>
       </p:sp>
@@ -14300,7 +16418,7 @@
             <a:avLst/>
           </a:prstGeom>
           <a:solidFill>
-            <a:srgbClr val="E8604C"/>
+            <a:srgbClr val="1C8F84"/>
           </a:solidFill>
           <a:ln/>
         </p:spPr>
@@ -14338,7 +16456,7 @@
                 <a:ea typeface="Cambria" pitchFamily="34" charset="-122"/>
                 <a:cs typeface="Cambria" pitchFamily="34" charset="-120"/>
               </a:rPr>
-              <a:t>What we found</a:t>
+              <a:t>Built to survive extremes</a:t>
             </a:r>
             <a:endParaRPr lang="en-US" sz="1550" dirty="0"/>
           </a:p>
@@ -14372,7 +16490,7 @@
               <a:buNone/>
             </a:pPr>
             <a:r>
-              <a:rPr lang="en-US" sz="1250" dirty="0">
+              <a:rPr lang="en-US" sz="1200" dirty="0">
                 <a:solidFill>
                   <a:srgbClr val="5B6B77"/>
                 </a:solidFill>
@@ -14380,9 +16498,9 @@
                 <a:ea typeface="Calibri" pitchFamily="34" charset="-122"/>
                 <a:cs typeface="Calibri" pitchFamily="34" charset="-120"/>
               </a:rPr>
-              <a:t>In simulation, this natural oscillation can corrupt an instantaneous voltage reading even when the underlying engineered circuit's data is 100% intact.</a:t>
-            </a:r>
-            <a:endParaRPr lang="en-US" sz="1250" dirty="0"/>
+              <a:t>B. subtilis sporulates under starvation, desiccation, heat, and radiation stress, a real, well-documented survival mechanism E. coli lacks. That's a direct match to this project's extreme-environment storage thesis (spacecraft, seafloor, remote infrastructure), not a cosmetic preference.</a:t>
+            </a:r>
+            <a:endParaRPr lang="en-US" sz="1200" dirty="0"/>
           </a:p>
         </p:txBody>
       </p:sp>
@@ -14428,7 +16546,7 @@
             <a:avLst/>
           </a:prstGeom>
           <a:solidFill>
-            <a:srgbClr val="1C8F84"/>
+            <a:srgbClr val="E8604C"/>
           </a:solidFill>
           <a:ln/>
         </p:spPr>
@@ -14466,7 +16584,7 @@
                 <a:ea typeface="Cambria" pitchFamily="34" charset="-122"/>
                 <a:cs typeface="Cambria" pitchFamily="34" charset="-120"/>
               </a:rPr>
-              <a:t>The fix, and its limit</a:t>
+              <a:t>The trade-off we're not hiding</a:t>
             </a:r>
             <a:endParaRPr lang="en-US" sz="1550" dirty="0"/>
           </a:p>
@@ -14500,7 +16618,7 @@
               <a:buNone/>
             </a:pPr>
             <a:r>
-              <a:rPr lang="en-US" sz="1250" dirty="0">
+              <a:rPr lang="en-US" sz="1200" dirty="0">
                 <a:solidFill>
                   <a:srgbClr val="5B6B77"/>
                 </a:solidFill>
@@ -14508,9 +16626,9 @@
                 <a:ea typeface="Calibri" pitchFamily="34" charset="-122"/>
                 <a:cs typeface="Calibri" pitchFamily="34" charset="-120"/>
               </a:rPr>
-              <a:t>Reading via impedance (EIS) instead of raw voltage helps, but a single fast EIS sweep isn't immune either, it needs to integrate across a full oscillation cycle (~3h) to recover accuracy.</a:t>
-            </a:r>
-            <a:endParaRPr lang="en-US" sz="1250" dirty="0"/>
+              <a:t>B. subtilis's biofilm-forming behavior helps physical resilience and self-healing, but it's also the source of the native potassium-wave oscillation this deck already flags as a readout risk two slides from now. We chose the organism with the better extreme-survival and parts story, and disclosed the cost that comes with it.</a:t>
+            </a:r>
+            <a:endParaRPr lang="en-US" sz="1200" dirty="0"/>
           </a:p>
         </p:txBody>
       </p:sp>
@@ -14547,7 +16665,7 @@
                 <a:ea typeface="Calibri" pitchFamily="34" charset="-122"/>
                 <a:cs typeface="Calibri" pitchFamily="34" charset="-120"/>
               </a:rPr>
-              <a:t>Fidelity at 10-20mV of ambient oscillation (well below the circuit's own 70mV signal range) collapsed to 50-59% for single-snapshot voltage reads, this is a solvable engineering problem, not a fatal one, but a real, previously-unflagged design requirement.</a:t>
+              <a:t>Net effect: B. subtilis costs us a known, already-quantified readout complication in exchange for chassis-matched genetic parts and a real extreme-survival mechanism. We think that's the better trade, and we're showing our work either way.</a:t>
             </a:r>
             <a:endParaRPr lang="en-US" sz="1250" dirty="0"/>
           </a:p>
